--- a/docs/pptx/whole/jx-linsubhr-ratio-hosp-immune-other.pptx
+++ b/docs/pptx/whole/jx-linsubhr-ratio-hosp-immune-other.pptx
@@ -2271,7 +2271,7 @@
           </p:nvSpPr>
           <p:spPr>
             <a:xfrm>
-              <a:off x="817517" y="5114368"/>
+              <a:off x="817517" y="5142518"/>
               <a:ext cx="7799693" cy="0"/>
             </a:xfrm>
             <a:custGeom>
@@ -2314,7 +2314,7 @@
           </p:nvSpPr>
           <p:spPr>
             <a:xfrm>
-              <a:off x="817517" y="4244691"/>
+              <a:off x="817517" y="4313054"/>
               <a:ext cx="7799693" cy="0"/>
             </a:xfrm>
             <a:custGeom>
@@ -2357,7 +2357,7 @@
           </p:nvSpPr>
           <p:spPr>
             <a:xfrm>
-              <a:off x="817517" y="3375014"/>
+              <a:off x="817517" y="3483591"/>
               <a:ext cx="7799693" cy="0"/>
             </a:xfrm>
             <a:custGeom>
@@ -2400,7 +2400,7 @@
           </p:nvSpPr>
           <p:spPr>
             <a:xfrm>
-              <a:off x="817517" y="2505337"/>
+              <a:off x="817517" y="2654127"/>
               <a:ext cx="7799693" cy="0"/>
             </a:xfrm>
             <a:custGeom>
@@ -2443,15 +2443,15 @@
           </p:nvSpPr>
           <p:spPr>
             <a:xfrm>
-              <a:off x="1615213" y="1896563"/>
-              <a:ext cx="0" cy="3826579"/>
+              <a:off x="1615213" y="2073503"/>
+              <a:ext cx="0" cy="3649639"/>
             </a:xfrm>
             <a:custGeom>
               <a:avLst/>
               <a:pathLst>
-                <a:path w="0" h="3826579">
+                <a:path w="0" h="3649639">
                   <a:moveTo>
-                    <a:pt x="0" y="3826579"/>
+                    <a:pt x="0" y="3649639"/>
                   </a:moveTo>
                   <a:lnTo>
                     <a:pt x="0" y="0"/>
@@ -2486,15 +2486,15 @@
           </p:nvSpPr>
           <p:spPr>
             <a:xfrm>
-              <a:off x="3387871" y="1896563"/>
-              <a:ext cx="0" cy="3826579"/>
+              <a:off x="3387871" y="2073503"/>
+              <a:ext cx="0" cy="3649639"/>
             </a:xfrm>
             <a:custGeom>
               <a:avLst/>
               <a:pathLst>
-                <a:path w="0" h="3826579">
+                <a:path w="0" h="3649639">
                   <a:moveTo>
-                    <a:pt x="0" y="3826579"/>
+                    <a:pt x="0" y="3649639"/>
                   </a:moveTo>
                   <a:lnTo>
                     <a:pt x="0" y="0"/>
@@ -2529,15 +2529,15 @@
           </p:nvSpPr>
           <p:spPr>
             <a:xfrm>
-              <a:off x="5160528" y="1896563"/>
-              <a:ext cx="0" cy="3826579"/>
+              <a:off x="5160528" y="2073503"/>
+              <a:ext cx="0" cy="3649639"/>
             </a:xfrm>
             <a:custGeom>
               <a:avLst/>
               <a:pathLst>
-                <a:path w="0" h="3826579">
+                <a:path w="0" h="3649639">
                   <a:moveTo>
-                    <a:pt x="0" y="3826579"/>
+                    <a:pt x="0" y="3649639"/>
                   </a:moveTo>
                   <a:lnTo>
                     <a:pt x="0" y="0"/>
@@ -2572,15 +2572,15 @@
           </p:nvSpPr>
           <p:spPr>
             <a:xfrm>
-              <a:off x="6933186" y="1896563"/>
-              <a:ext cx="0" cy="3826579"/>
+              <a:off x="6933186" y="2073503"/>
+              <a:ext cx="0" cy="3649639"/>
             </a:xfrm>
             <a:custGeom>
               <a:avLst/>
               <a:pathLst>
-                <a:path w="0" h="3826579">
+                <a:path w="0" h="3649639">
                   <a:moveTo>
-                    <a:pt x="0" y="3826579"/>
+                    <a:pt x="0" y="3649639"/>
                   </a:moveTo>
                   <a:lnTo>
                     <a:pt x="0" y="0"/>
@@ -2615,7 +2615,7 @@
           </p:nvSpPr>
           <p:spPr>
             <a:xfrm>
-              <a:off x="817517" y="5549207"/>
+              <a:off x="817517" y="5557249"/>
               <a:ext cx="7799693" cy="0"/>
             </a:xfrm>
             <a:custGeom>
@@ -2658,7 +2658,7 @@
           </p:nvSpPr>
           <p:spPr>
             <a:xfrm>
-              <a:off x="817517" y="4679530"/>
+              <a:off x="817517" y="4727786"/>
               <a:ext cx="7799693" cy="0"/>
             </a:xfrm>
             <a:custGeom>
@@ -2701,7 +2701,7 @@
           </p:nvSpPr>
           <p:spPr>
             <a:xfrm>
-              <a:off x="817517" y="3809853"/>
+              <a:off x="817517" y="3898322"/>
               <a:ext cx="7799693" cy="0"/>
             </a:xfrm>
             <a:custGeom>
@@ -2744,7 +2744,7 @@
           </p:nvSpPr>
           <p:spPr>
             <a:xfrm>
-              <a:off x="817517" y="2940175"/>
+              <a:off x="817517" y="3068859"/>
               <a:ext cx="7799693" cy="0"/>
             </a:xfrm>
             <a:custGeom>
@@ -2787,7 +2787,7 @@
           </p:nvSpPr>
           <p:spPr>
             <a:xfrm>
-              <a:off x="817517" y="2070498"/>
+              <a:off x="817517" y="2239395"/>
               <a:ext cx="7799693" cy="0"/>
             </a:xfrm>
             <a:custGeom>
@@ -2830,15 +2830,15 @@
           </p:nvSpPr>
           <p:spPr>
             <a:xfrm>
-              <a:off x="2501542" y="1896563"/>
-              <a:ext cx="0" cy="3826579"/>
+              <a:off x="2501542" y="2073503"/>
+              <a:ext cx="0" cy="3649639"/>
             </a:xfrm>
             <a:custGeom>
               <a:avLst/>
               <a:pathLst>
-                <a:path w="0" h="3826579">
+                <a:path w="0" h="3649639">
                   <a:moveTo>
-                    <a:pt x="0" y="3826579"/>
+                    <a:pt x="0" y="3649639"/>
                   </a:moveTo>
                   <a:lnTo>
                     <a:pt x="0" y="0"/>
@@ -2873,15 +2873,15 @@
           </p:nvSpPr>
           <p:spPr>
             <a:xfrm>
-              <a:off x="4274200" y="1896563"/>
-              <a:ext cx="0" cy="3826579"/>
+              <a:off x="4274200" y="2073503"/>
+              <a:ext cx="0" cy="3649639"/>
             </a:xfrm>
             <a:custGeom>
               <a:avLst/>
               <a:pathLst>
-                <a:path w="0" h="3826579">
+                <a:path w="0" h="3649639">
                   <a:moveTo>
-                    <a:pt x="0" y="3826579"/>
+                    <a:pt x="0" y="3649639"/>
                   </a:moveTo>
                   <a:lnTo>
                     <a:pt x="0" y="0"/>
@@ -2916,15 +2916,15 @@
           </p:nvSpPr>
           <p:spPr>
             <a:xfrm>
-              <a:off x="6046857" y="1896563"/>
-              <a:ext cx="0" cy="3826579"/>
+              <a:off x="6046857" y="2073503"/>
+              <a:ext cx="0" cy="3649639"/>
             </a:xfrm>
             <a:custGeom>
               <a:avLst/>
               <a:pathLst>
-                <a:path w="0" h="3826579">
+                <a:path w="0" h="3649639">
                   <a:moveTo>
-                    <a:pt x="0" y="3826579"/>
+                    <a:pt x="0" y="3649639"/>
                   </a:moveTo>
                   <a:lnTo>
                     <a:pt x="0" y="0"/>
@@ -2959,15 +2959,15 @@
           </p:nvSpPr>
           <p:spPr>
             <a:xfrm>
-              <a:off x="7819515" y="1896563"/>
-              <a:ext cx="0" cy="3826579"/>
+              <a:off x="7819515" y="2073503"/>
+              <a:ext cx="0" cy="3649639"/>
             </a:xfrm>
             <a:custGeom>
               <a:avLst/>
               <a:pathLst>
-                <a:path w="0" h="3826579">
+                <a:path w="0" h="3649639">
                   <a:moveTo>
-                    <a:pt x="0" y="3826579"/>
+                    <a:pt x="0" y="3649639"/>
                   </a:moveTo>
                   <a:lnTo>
                     <a:pt x="0" y="0"/>
@@ -3002,582 +3002,582 @@
           </p:nvSpPr>
           <p:spPr>
             <a:xfrm>
-              <a:off x="817517" y="1896563"/>
-              <a:ext cx="7235830" cy="3533914"/>
+              <a:off x="817517" y="2073503"/>
+              <a:ext cx="7235830" cy="3370507"/>
             </a:xfrm>
             <a:custGeom>
               <a:avLst/>
               <a:pathLst>
-                <a:path w="7235830" h="3533914">
+                <a:path w="7235830" h="3370507">
                   <a:moveTo>
                     <a:pt x="724708" y="0"/>
                   </a:moveTo>
                   <a:lnTo>
-                    <a:pt x="744947" y="39239"/>
-                  </a:lnTo>
-                  <a:lnTo>
-                    <a:pt x="818707" y="176800"/>
-                  </a:lnTo>
-                  <a:lnTo>
-                    <a:pt x="892467" y="309124"/>
-                  </a:lnTo>
-                  <a:lnTo>
-                    <a:pt x="966227" y="436410"/>
-                  </a:lnTo>
-                  <a:lnTo>
-                    <a:pt x="1039987" y="558850"/>
-                  </a:lnTo>
-                  <a:lnTo>
-                    <a:pt x="1113747" y="676630"/>
-                  </a:lnTo>
-                  <a:lnTo>
-                    <a:pt x="1187508" y="789925"/>
-                  </a:lnTo>
-                  <a:lnTo>
-                    <a:pt x="1261268" y="898908"/>
-                  </a:lnTo>
-                  <a:lnTo>
-                    <a:pt x="1335028" y="1003741"/>
-                  </a:lnTo>
-                  <a:lnTo>
-                    <a:pt x="1408788" y="1104584"/>
-                  </a:lnTo>
-                  <a:lnTo>
-                    <a:pt x="1482548" y="1201587"/>
-                  </a:lnTo>
-                  <a:lnTo>
-                    <a:pt x="1556308" y="1294898"/>
-                  </a:lnTo>
-                  <a:lnTo>
-                    <a:pt x="1630068" y="1384656"/>
-                  </a:lnTo>
-                  <a:lnTo>
-                    <a:pt x="1703828" y="1470997"/>
-                  </a:lnTo>
-                  <a:lnTo>
-                    <a:pt x="1777588" y="1554052"/>
-                  </a:lnTo>
-                  <a:lnTo>
-                    <a:pt x="1851348" y="1633944"/>
-                  </a:lnTo>
-                  <a:lnTo>
-                    <a:pt x="1925108" y="1710795"/>
-                  </a:lnTo>
-                  <a:lnTo>
-                    <a:pt x="1998868" y="1784720"/>
-                  </a:lnTo>
-                  <a:lnTo>
-                    <a:pt x="2072628" y="1855831"/>
-                  </a:lnTo>
-                  <a:lnTo>
-                    <a:pt x="2146388" y="1924235"/>
-                  </a:lnTo>
-                  <a:lnTo>
-                    <a:pt x="2220148" y="1990035"/>
-                  </a:lnTo>
-                  <a:lnTo>
-                    <a:pt x="2293908" y="2053330"/>
-                  </a:lnTo>
-                  <a:lnTo>
-                    <a:pt x="2367668" y="2114215"/>
-                  </a:lnTo>
-                  <a:lnTo>
-                    <a:pt x="2441428" y="2172782"/>
-                  </a:lnTo>
-                  <a:lnTo>
-                    <a:pt x="2515188" y="2229120"/>
-                  </a:lnTo>
-                  <a:lnTo>
-                    <a:pt x="2588948" y="2283313"/>
-                  </a:lnTo>
-                  <a:lnTo>
-                    <a:pt x="2662708" y="2335443"/>
-                  </a:lnTo>
-                  <a:lnTo>
-                    <a:pt x="2736468" y="2385588"/>
-                  </a:lnTo>
-                  <a:lnTo>
-                    <a:pt x="2810228" y="2433824"/>
-                  </a:lnTo>
-                  <a:lnTo>
-                    <a:pt x="2883988" y="2480224"/>
-                  </a:lnTo>
-                  <a:lnTo>
-                    <a:pt x="2957748" y="2524857"/>
-                  </a:lnTo>
-                  <a:lnTo>
-                    <a:pt x="3031508" y="2567792"/>
-                  </a:lnTo>
-                  <a:lnTo>
-                    <a:pt x="3105268" y="2609092"/>
-                  </a:lnTo>
-                  <a:lnTo>
-                    <a:pt x="3179028" y="2648819"/>
-                  </a:lnTo>
-                  <a:lnTo>
-                    <a:pt x="3252788" y="2687034"/>
-                  </a:lnTo>
-                  <a:lnTo>
-                    <a:pt x="3326548" y="2723795"/>
-                  </a:lnTo>
-                  <a:lnTo>
-                    <a:pt x="3400308" y="2759155"/>
-                  </a:lnTo>
-                  <a:lnTo>
-                    <a:pt x="3474068" y="2785285"/>
-                  </a:lnTo>
-                  <a:lnTo>
-                    <a:pt x="3547828" y="2792868"/>
-                  </a:lnTo>
-                  <a:lnTo>
-                    <a:pt x="3621588" y="2800384"/>
-                  </a:lnTo>
-                  <a:lnTo>
-                    <a:pt x="3695348" y="2807835"/>
-                  </a:lnTo>
-                  <a:lnTo>
-                    <a:pt x="3769108" y="2815221"/>
-                  </a:lnTo>
-                  <a:lnTo>
-                    <a:pt x="3842868" y="2822542"/>
-                  </a:lnTo>
-                  <a:lnTo>
-                    <a:pt x="3916628" y="2829799"/>
-                  </a:lnTo>
-                  <a:lnTo>
-                    <a:pt x="3990388" y="2836993"/>
-                  </a:lnTo>
-                  <a:lnTo>
-                    <a:pt x="4064149" y="2844123"/>
-                  </a:lnTo>
-                  <a:lnTo>
-                    <a:pt x="4137909" y="2851192"/>
-                  </a:lnTo>
-                  <a:lnTo>
-                    <a:pt x="4211669" y="2858198"/>
-                  </a:lnTo>
-                  <a:lnTo>
-                    <a:pt x="4285429" y="2865144"/>
-                  </a:lnTo>
-                  <a:lnTo>
-                    <a:pt x="4359189" y="2872028"/>
-                  </a:lnTo>
-                  <a:lnTo>
-                    <a:pt x="4432949" y="2878853"/>
-                  </a:lnTo>
-                  <a:lnTo>
-                    <a:pt x="4506709" y="2885618"/>
-                  </a:lnTo>
-                  <a:lnTo>
-                    <a:pt x="4580469" y="2892323"/>
-                  </a:lnTo>
-                  <a:lnTo>
-                    <a:pt x="4654229" y="2898970"/>
-                  </a:lnTo>
-                  <a:lnTo>
-                    <a:pt x="4727989" y="2905559"/>
-                  </a:lnTo>
-                  <a:lnTo>
-                    <a:pt x="4801749" y="2912090"/>
-                  </a:lnTo>
-                  <a:lnTo>
-                    <a:pt x="4875509" y="2918565"/>
-                  </a:lnTo>
-                  <a:lnTo>
-                    <a:pt x="4949269" y="2924982"/>
-                  </a:lnTo>
-                  <a:lnTo>
-                    <a:pt x="5023029" y="2931344"/>
-                  </a:lnTo>
-                  <a:lnTo>
-                    <a:pt x="5096789" y="2937650"/>
-                  </a:lnTo>
-                  <a:lnTo>
-                    <a:pt x="5170549" y="2943900"/>
-                  </a:lnTo>
-                  <a:lnTo>
-                    <a:pt x="5244309" y="2950096"/>
-                  </a:lnTo>
-                  <a:lnTo>
-                    <a:pt x="5318069" y="2956238"/>
-                  </a:lnTo>
-                  <a:lnTo>
-                    <a:pt x="5391829" y="2962327"/>
-                  </a:lnTo>
-                  <a:lnTo>
-                    <a:pt x="5465589" y="2968362"/>
-                  </a:lnTo>
-                  <a:lnTo>
-                    <a:pt x="5539349" y="2974344"/>
-                  </a:lnTo>
-                  <a:lnTo>
-                    <a:pt x="5613109" y="2980274"/>
-                  </a:lnTo>
-                  <a:lnTo>
-                    <a:pt x="5686869" y="2986152"/>
-                  </a:lnTo>
-                  <a:lnTo>
-                    <a:pt x="5760629" y="2991979"/>
-                  </a:lnTo>
-                  <a:lnTo>
-                    <a:pt x="5834389" y="2997754"/>
-                  </a:lnTo>
-                  <a:lnTo>
-                    <a:pt x="5908149" y="3003480"/>
-                  </a:lnTo>
-                  <a:lnTo>
-                    <a:pt x="5981909" y="3009155"/>
-                  </a:lnTo>
-                  <a:lnTo>
-                    <a:pt x="6055669" y="3014781"/>
-                  </a:lnTo>
-                  <a:lnTo>
-                    <a:pt x="6129429" y="3020357"/>
-                  </a:lnTo>
-                  <a:lnTo>
-                    <a:pt x="6203189" y="3025885"/>
-                  </a:lnTo>
-                  <a:lnTo>
-                    <a:pt x="6276949" y="3031364"/>
-                  </a:lnTo>
-                  <a:lnTo>
-                    <a:pt x="6350709" y="3036795"/>
-                  </a:lnTo>
-                  <a:lnTo>
-                    <a:pt x="6424469" y="3042179"/>
-                  </a:lnTo>
-                  <a:lnTo>
-                    <a:pt x="6498229" y="3047516"/>
-                  </a:lnTo>
-                  <a:lnTo>
-                    <a:pt x="6571989" y="3052807"/>
-                  </a:lnTo>
-                  <a:lnTo>
-                    <a:pt x="6645749" y="3058051"/>
-                  </a:lnTo>
-                  <a:lnTo>
-                    <a:pt x="6719509" y="3063249"/>
-                  </a:lnTo>
-                  <a:lnTo>
-                    <a:pt x="6793269" y="3068401"/>
-                  </a:lnTo>
-                  <a:lnTo>
-                    <a:pt x="6867029" y="3073509"/>
-                  </a:lnTo>
-                  <a:lnTo>
-                    <a:pt x="6940789" y="3078572"/>
-                  </a:lnTo>
-                  <a:lnTo>
-                    <a:pt x="7014550" y="3083591"/>
-                  </a:lnTo>
-                  <a:lnTo>
-                    <a:pt x="7088310" y="3088566"/>
-                  </a:lnTo>
-                  <a:lnTo>
-                    <a:pt x="7162070" y="3093497"/>
-                  </a:lnTo>
-                  <a:lnTo>
-                    <a:pt x="7235830" y="3098385"/>
-                  </a:lnTo>
-                  <a:lnTo>
-                    <a:pt x="7235830" y="3533914"/>
-                  </a:lnTo>
-                  <a:lnTo>
-                    <a:pt x="7162070" y="3529215"/>
-                  </a:lnTo>
-                  <a:lnTo>
-                    <a:pt x="7088310" y="3524330"/>
-                  </a:lnTo>
-                  <a:lnTo>
-                    <a:pt x="7014550" y="3519252"/>
-                  </a:lnTo>
-                  <a:lnTo>
-                    <a:pt x="6940789" y="3513973"/>
-                  </a:lnTo>
-                  <a:lnTo>
-                    <a:pt x="6867029" y="3508484"/>
-                  </a:lnTo>
-                  <a:lnTo>
-                    <a:pt x="6793269" y="3502779"/>
-                  </a:lnTo>
-                  <a:lnTo>
-                    <a:pt x="6719509" y="3496848"/>
-                  </a:lnTo>
-                  <a:lnTo>
-                    <a:pt x="6645749" y="3490682"/>
-                  </a:lnTo>
-                  <a:lnTo>
-                    <a:pt x="6571989" y="3484273"/>
-                  </a:lnTo>
-                  <a:lnTo>
-                    <a:pt x="6498229" y="3477609"/>
-                  </a:lnTo>
-                  <a:lnTo>
-                    <a:pt x="6424469" y="3470682"/>
-                  </a:lnTo>
-                  <a:lnTo>
-                    <a:pt x="6350709" y="3463481"/>
-                  </a:lnTo>
-                  <a:lnTo>
-                    <a:pt x="6276949" y="3455994"/>
-                  </a:lnTo>
-                  <a:lnTo>
-                    <a:pt x="6203189" y="3448212"/>
-                  </a:lnTo>
-                  <a:lnTo>
-                    <a:pt x="6129429" y="3440121"/>
-                  </a:lnTo>
-                  <a:lnTo>
-                    <a:pt x="6055669" y="3431710"/>
-                  </a:lnTo>
-                  <a:lnTo>
-                    <a:pt x="5981909" y="3422966"/>
-                  </a:lnTo>
-                  <a:lnTo>
-                    <a:pt x="5908149" y="3413877"/>
-                  </a:lnTo>
-                  <a:lnTo>
-                    <a:pt x="5834389" y="3404427"/>
-                  </a:lnTo>
-                  <a:lnTo>
-                    <a:pt x="5760629" y="3394604"/>
-                  </a:lnTo>
-                  <a:lnTo>
-                    <a:pt x="5686869" y="3384392"/>
-                  </a:lnTo>
-                  <a:lnTo>
-                    <a:pt x="5613109" y="3373775"/>
-                  </a:lnTo>
-                  <a:lnTo>
-                    <a:pt x="5539349" y="3362739"/>
-                  </a:lnTo>
-                  <a:lnTo>
-                    <a:pt x="5465589" y="3351265"/>
-                  </a:lnTo>
-                  <a:lnTo>
-                    <a:pt x="5391829" y="3339338"/>
-                  </a:lnTo>
-                  <a:lnTo>
-                    <a:pt x="5318069" y="3326939"/>
-                  </a:lnTo>
-                  <a:lnTo>
-                    <a:pt x="5244309" y="3314048"/>
-                  </a:lnTo>
-                  <a:lnTo>
-                    <a:pt x="5170549" y="3300648"/>
-                  </a:lnTo>
-                  <a:lnTo>
-                    <a:pt x="5096789" y="3286717"/>
-                  </a:lnTo>
-                  <a:lnTo>
-                    <a:pt x="5023029" y="3272235"/>
-                  </a:lnTo>
-                  <a:lnTo>
-                    <a:pt x="4949269" y="3257180"/>
-                  </a:lnTo>
-                  <a:lnTo>
-                    <a:pt x="4875509" y="3241529"/>
-                  </a:lnTo>
-                  <a:lnTo>
-                    <a:pt x="4801749" y="3225259"/>
-                  </a:lnTo>
-                  <a:lnTo>
-                    <a:pt x="4727989" y="3208345"/>
-                  </a:lnTo>
-                  <a:lnTo>
-                    <a:pt x="4654229" y="3190761"/>
-                  </a:lnTo>
-                  <a:lnTo>
-                    <a:pt x="4580469" y="3172482"/>
-                  </a:lnTo>
-                  <a:lnTo>
-                    <a:pt x="4506709" y="3153479"/>
-                  </a:lnTo>
-                  <a:lnTo>
-                    <a:pt x="4432949" y="3133724"/>
-                  </a:lnTo>
-                  <a:lnTo>
-                    <a:pt x="4359189" y="3113187"/>
-                  </a:lnTo>
-                  <a:lnTo>
-                    <a:pt x="4285429" y="3091837"/>
-                  </a:lnTo>
-                  <a:lnTo>
-                    <a:pt x="4211669" y="3069643"/>
-                  </a:lnTo>
-                  <a:lnTo>
-                    <a:pt x="4137909" y="3046570"/>
-                  </a:lnTo>
-                  <a:lnTo>
-                    <a:pt x="4064149" y="3022584"/>
-                  </a:lnTo>
-                  <a:lnTo>
-                    <a:pt x="3990388" y="2997648"/>
-                  </a:lnTo>
-                  <a:lnTo>
-                    <a:pt x="3916628" y="2971726"/>
-                  </a:lnTo>
-                  <a:lnTo>
-                    <a:pt x="3842868" y="2944778"/>
-                  </a:lnTo>
-                  <a:lnTo>
-                    <a:pt x="3769108" y="2916763"/>
-                  </a:lnTo>
-                  <a:lnTo>
-                    <a:pt x="3695348" y="2887640"/>
-                  </a:lnTo>
-                  <a:lnTo>
-                    <a:pt x="3621588" y="2857364"/>
-                  </a:lnTo>
-                  <a:lnTo>
-                    <a:pt x="3547828" y="2825890"/>
-                  </a:lnTo>
-                  <a:lnTo>
-                    <a:pt x="3474068" y="2793170"/>
-                  </a:lnTo>
-                  <a:lnTo>
-                    <a:pt x="3400308" y="2777636"/>
-                  </a:lnTo>
-                  <a:lnTo>
-                    <a:pt x="3326548" y="2769918"/>
-                  </a:lnTo>
-                  <a:lnTo>
-                    <a:pt x="3252788" y="2762133"/>
-                  </a:lnTo>
-                  <a:lnTo>
-                    <a:pt x="3179028" y="2754279"/>
-                  </a:lnTo>
-                  <a:lnTo>
-                    <a:pt x="3105268" y="2746356"/>
-                  </a:lnTo>
-                  <a:lnTo>
-                    <a:pt x="3031508" y="2738363"/>
-                  </a:lnTo>
-                  <a:lnTo>
-                    <a:pt x="2957748" y="2730300"/>
-                  </a:lnTo>
-                  <a:lnTo>
-                    <a:pt x="2883988" y="2722165"/>
-                  </a:lnTo>
-                  <a:lnTo>
-                    <a:pt x="2810228" y="2713959"/>
-                  </a:lnTo>
-                  <a:lnTo>
-                    <a:pt x="2736468" y="2705680"/>
-                  </a:lnTo>
-                  <a:lnTo>
-                    <a:pt x="2662708" y="2697328"/>
-                  </a:lnTo>
-                  <a:lnTo>
-                    <a:pt x="2588948" y="2688903"/>
-                  </a:lnTo>
-                  <a:lnTo>
-                    <a:pt x="2515188" y="2680403"/>
-                  </a:lnTo>
-                  <a:lnTo>
-                    <a:pt x="2441428" y="2671829"/>
-                  </a:lnTo>
-                  <a:lnTo>
-                    <a:pt x="2367668" y="2663178"/>
-                  </a:lnTo>
-                  <a:lnTo>
-                    <a:pt x="2293908" y="2654452"/>
-                  </a:lnTo>
-                  <a:lnTo>
-                    <a:pt x="2220148" y="2645648"/>
-                  </a:lnTo>
-                  <a:lnTo>
-                    <a:pt x="2146388" y="2636767"/>
-                  </a:lnTo>
-                  <a:lnTo>
-                    <a:pt x="2072628" y="2627808"/>
-                  </a:lnTo>
-                  <a:lnTo>
-                    <a:pt x="1998868" y="2618769"/>
-                  </a:lnTo>
-                  <a:lnTo>
-                    <a:pt x="1925108" y="2609651"/>
-                  </a:lnTo>
-                  <a:lnTo>
-                    <a:pt x="1851348" y="2600452"/>
-                  </a:lnTo>
-                  <a:lnTo>
-                    <a:pt x="1777588" y="2591172"/>
-                  </a:lnTo>
-                  <a:lnTo>
-                    <a:pt x="1703828" y="2581811"/>
-                  </a:lnTo>
-                  <a:lnTo>
-                    <a:pt x="1630068" y="2572367"/>
-                  </a:lnTo>
-                  <a:lnTo>
-                    <a:pt x="1556308" y="2562839"/>
-                  </a:lnTo>
-                  <a:lnTo>
-                    <a:pt x="1482548" y="2553228"/>
-                  </a:lnTo>
-                  <a:lnTo>
-                    <a:pt x="1408788" y="2543531"/>
-                  </a:lnTo>
-                  <a:lnTo>
-                    <a:pt x="1335028" y="2533750"/>
-                  </a:lnTo>
-                  <a:lnTo>
-                    <a:pt x="1261268" y="2523882"/>
-                  </a:lnTo>
-                  <a:lnTo>
-                    <a:pt x="1187508" y="2513926"/>
-                  </a:lnTo>
-                  <a:lnTo>
-                    <a:pt x="1113747" y="2503884"/>
-                  </a:lnTo>
-                  <a:lnTo>
-                    <a:pt x="1039987" y="2493752"/>
-                  </a:lnTo>
-                  <a:lnTo>
-                    <a:pt x="966227" y="2483531"/>
-                  </a:lnTo>
-                  <a:lnTo>
-                    <a:pt x="892467" y="2473220"/>
-                  </a:lnTo>
-                  <a:lnTo>
-                    <a:pt x="818707" y="2462818"/>
-                  </a:lnTo>
-                  <a:lnTo>
-                    <a:pt x="744947" y="2452325"/>
-                  </a:lnTo>
-                  <a:lnTo>
-                    <a:pt x="671187" y="2441739"/>
-                  </a:lnTo>
-                  <a:lnTo>
-                    <a:pt x="597427" y="2431059"/>
-                  </a:lnTo>
-                  <a:lnTo>
-                    <a:pt x="523667" y="2420285"/>
-                  </a:lnTo>
-                  <a:lnTo>
-                    <a:pt x="449907" y="2409416"/>
-                  </a:lnTo>
-                  <a:lnTo>
-                    <a:pt x="376147" y="2398452"/>
-                  </a:lnTo>
-                  <a:lnTo>
-                    <a:pt x="302387" y="2387391"/>
-                  </a:lnTo>
-                  <a:lnTo>
-                    <a:pt x="228627" y="2376232"/>
-                  </a:lnTo>
-                  <a:lnTo>
-                    <a:pt x="154867" y="2364974"/>
-                  </a:lnTo>
-                  <a:lnTo>
-                    <a:pt x="81107" y="2353618"/>
-                  </a:lnTo>
-                  <a:lnTo>
-                    <a:pt x="7347" y="2342161"/>
-                  </a:lnTo>
-                  <a:lnTo>
-                    <a:pt x="0" y="2341010"/>
+                    <a:pt x="744947" y="37425"/>
+                  </a:lnTo>
+                  <a:lnTo>
+                    <a:pt x="818707" y="168625"/>
+                  </a:lnTo>
+                  <a:lnTo>
+                    <a:pt x="892467" y="294830"/>
+                  </a:lnTo>
+                  <a:lnTo>
+                    <a:pt x="966227" y="416230"/>
+                  </a:lnTo>
+                  <a:lnTo>
+                    <a:pt x="1039987" y="533009"/>
+                  </a:lnTo>
+                  <a:lnTo>
+                    <a:pt x="1113747" y="645343"/>
+                  </a:lnTo>
+                  <a:lnTo>
+                    <a:pt x="1187508" y="753399"/>
+                  </a:lnTo>
+                  <a:lnTo>
+                    <a:pt x="1261268" y="857342"/>
+                  </a:lnTo>
+                  <a:lnTo>
+                    <a:pt x="1335028" y="957329"/>
+                  </a:lnTo>
+                  <a:lnTo>
+                    <a:pt x="1408788" y="1053508"/>
+                  </a:lnTo>
+                  <a:lnTo>
+                    <a:pt x="1482548" y="1146026"/>
+                  </a:lnTo>
+                  <a:lnTo>
+                    <a:pt x="1556308" y="1235022"/>
+                  </a:lnTo>
+                  <a:lnTo>
+                    <a:pt x="1630068" y="1320630"/>
+                  </a:lnTo>
+                  <a:lnTo>
+                    <a:pt x="1703828" y="1402979"/>
+                  </a:lnTo>
+                  <a:lnTo>
+                    <a:pt x="1777588" y="1482193"/>
+                  </a:lnTo>
+                  <a:lnTo>
+                    <a:pt x="1851348" y="1558391"/>
+                  </a:lnTo>
+                  <a:lnTo>
+                    <a:pt x="1925108" y="1631689"/>
+                  </a:lnTo>
+                  <a:lnTo>
+                    <a:pt x="1998868" y="1702196"/>
+                  </a:lnTo>
+                  <a:lnTo>
+                    <a:pt x="2072628" y="1770018"/>
+                  </a:lnTo>
+                  <a:lnTo>
+                    <a:pt x="2146388" y="1835259"/>
+                  </a:lnTo>
+                  <a:lnTo>
+                    <a:pt x="2220148" y="1898016"/>
+                  </a:lnTo>
+                  <a:lnTo>
+                    <a:pt x="2293908" y="1958384"/>
+                  </a:lnTo>
+                  <a:lnTo>
+                    <a:pt x="2367668" y="2016454"/>
+                  </a:lnTo>
+                  <a:lnTo>
+                    <a:pt x="2441428" y="2072313"/>
+                  </a:lnTo>
+                  <a:lnTo>
+                    <a:pt x="2515188" y="2126046"/>
+                  </a:lnTo>
+                  <a:lnTo>
+                    <a:pt x="2588948" y="2177733"/>
+                  </a:lnTo>
+                  <a:lnTo>
+                    <a:pt x="2662708" y="2227452"/>
+                  </a:lnTo>
+                  <a:lnTo>
+                    <a:pt x="2736468" y="2275279"/>
+                  </a:lnTo>
+                  <a:lnTo>
+                    <a:pt x="2810228" y="2321285"/>
+                  </a:lnTo>
+                  <a:lnTo>
+                    <a:pt x="2883988" y="2365539"/>
+                  </a:lnTo>
+                  <a:lnTo>
+                    <a:pt x="2957748" y="2408109"/>
+                  </a:lnTo>
+                  <a:lnTo>
+                    <a:pt x="3031508" y="2449058"/>
+                  </a:lnTo>
+                  <a:lnTo>
+                    <a:pt x="3105268" y="2488448"/>
+                  </a:lnTo>
+                  <a:lnTo>
+                    <a:pt x="3179028" y="2526339"/>
+                  </a:lnTo>
+                  <a:lnTo>
+                    <a:pt x="3252788" y="2562787"/>
+                  </a:lnTo>
+                  <a:lnTo>
+                    <a:pt x="3326548" y="2597847"/>
+                  </a:lnTo>
+                  <a:lnTo>
+                    <a:pt x="3400308" y="2631573"/>
+                  </a:lnTo>
+                  <a:lnTo>
+                    <a:pt x="3474068" y="2656495"/>
+                  </a:lnTo>
+                  <a:lnTo>
+                    <a:pt x="3547828" y="2663727"/>
+                  </a:lnTo>
+                  <a:lnTo>
+                    <a:pt x="3621588" y="2670896"/>
+                  </a:lnTo>
+                  <a:lnTo>
+                    <a:pt x="3695348" y="2678002"/>
+                  </a:lnTo>
+                  <a:lnTo>
+                    <a:pt x="3769108" y="2685046"/>
+                  </a:lnTo>
+                  <a:lnTo>
+                    <a:pt x="3842868" y="2692029"/>
+                  </a:lnTo>
+                  <a:lnTo>
+                    <a:pt x="3916628" y="2698950"/>
+                  </a:lnTo>
+                  <a:lnTo>
+                    <a:pt x="3990388" y="2705811"/>
+                  </a:lnTo>
+                  <a:lnTo>
+                    <a:pt x="4064149" y="2712612"/>
+                  </a:lnTo>
+                  <a:lnTo>
+                    <a:pt x="4137909" y="2719354"/>
+                  </a:lnTo>
+                  <a:lnTo>
+                    <a:pt x="4211669" y="2726036"/>
+                  </a:lnTo>
+                  <a:lnTo>
+                    <a:pt x="4285429" y="2732660"/>
+                  </a:lnTo>
+                  <a:lnTo>
+                    <a:pt x="4359189" y="2739227"/>
+                  </a:lnTo>
+                  <a:lnTo>
+                    <a:pt x="4432949" y="2745736"/>
+                  </a:lnTo>
+                  <a:lnTo>
+                    <a:pt x="4506709" y="2752188"/>
+                  </a:lnTo>
+                  <a:lnTo>
+                    <a:pt x="4580469" y="2758583"/>
+                  </a:lnTo>
+                  <a:lnTo>
+                    <a:pt x="4654229" y="2764923"/>
+                  </a:lnTo>
+                  <a:lnTo>
+                    <a:pt x="4727989" y="2771207"/>
+                  </a:lnTo>
+                  <a:lnTo>
+                    <a:pt x="4801749" y="2777436"/>
+                  </a:lnTo>
+                  <a:lnTo>
+                    <a:pt x="4875509" y="2783611"/>
+                  </a:lnTo>
+                  <a:lnTo>
+                    <a:pt x="4949269" y="2789732"/>
+                  </a:lnTo>
+                  <a:lnTo>
+                    <a:pt x="5023029" y="2795799"/>
+                  </a:lnTo>
+                  <a:lnTo>
+                    <a:pt x="5096789" y="2801814"/>
+                  </a:lnTo>
+                  <a:lnTo>
+                    <a:pt x="5170549" y="2807775"/>
+                  </a:lnTo>
+                  <a:lnTo>
+                    <a:pt x="5244309" y="2813685"/>
+                  </a:lnTo>
+                  <a:lnTo>
+                    <a:pt x="5318069" y="2819543"/>
+                  </a:lnTo>
+                  <a:lnTo>
+                    <a:pt x="5391829" y="2825350"/>
+                  </a:lnTo>
+                  <a:lnTo>
+                    <a:pt x="5465589" y="2831106"/>
+                  </a:lnTo>
+                  <a:lnTo>
+                    <a:pt x="5539349" y="2836811"/>
+                  </a:lnTo>
+                  <a:lnTo>
+                    <a:pt x="5613109" y="2842467"/>
+                  </a:lnTo>
+                  <a:lnTo>
+                    <a:pt x="5686869" y="2848073"/>
+                  </a:lnTo>
+                  <a:lnTo>
+                    <a:pt x="5760629" y="2853631"/>
+                  </a:lnTo>
+                  <a:lnTo>
+                    <a:pt x="5834389" y="2859139"/>
+                  </a:lnTo>
+                  <a:lnTo>
+                    <a:pt x="5908149" y="2864600"/>
+                  </a:lnTo>
+                  <a:lnTo>
+                    <a:pt x="5981909" y="2870013"/>
+                  </a:lnTo>
+                  <a:lnTo>
+                    <a:pt x="6055669" y="2875378"/>
+                  </a:lnTo>
+                  <a:lnTo>
+                    <a:pt x="6129429" y="2880697"/>
+                  </a:lnTo>
+                  <a:lnTo>
+                    <a:pt x="6203189" y="2885969"/>
+                  </a:lnTo>
+                  <a:lnTo>
+                    <a:pt x="6276949" y="2891195"/>
+                  </a:lnTo>
+                  <a:lnTo>
+                    <a:pt x="6350709" y="2896375"/>
+                  </a:lnTo>
+                  <a:lnTo>
+                    <a:pt x="6424469" y="2901510"/>
+                  </a:lnTo>
+                  <a:lnTo>
+                    <a:pt x="6498229" y="2906600"/>
+                  </a:lnTo>
+                  <a:lnTo>
+                    <a:pt x="6571989" y="2911646"/>
+                  </a:lnTo>
+                  <a:lnTo>
+                    <a:pt x="6645749" y="2916647"/>
+                  </a:lnTo>
+                  <a:lnTo>
+                    <a:pt x="6719509" y="2921605"/>
+                  </a:lnTo>
+                  <a:lnTo>
+                    <a:pt x="6793269" y="2926520"/>
+                  </a:lnTo>
+                  <a:lnTo>
+                    <a:pt x="6867029" y="2931391"/>
+                  </a:lnTo>
+                  <a:lnTo>
+                    <a:pt x="6940789" y="2936220"/>
+                  </a:lnTo>
+                  <a:lnTo>
+                    <a:pt x="7014550" y="2941007"/>
+                  </a:lnTo>
+                  <a:lnTo>
+                    <a:pt x="7088310" y="2945752"/>
+                  </a:lnTo>
+                  <a:lnTo>
+                    <a:pt x="7162070" y="2950455"/>
+                  </a:lnTo>
+                  <a:lnTo>
+                    <a:pt x="7235830" y="2955117"/>
+                  </a:lnTo>
+                  <a:lnTo>
+                    <a:pt x="7235830" y="3370507"/>
+                  </a:lnTo>
+                  <a:lnTo>
+                    <a:pt x="7162070" y="3366025"/>
+                  </a:lnTo>
+                  <a:lnTo>
+                    <a:pt x="7088310" y="3361366"/>
+                  </a:lnTo>
+                  <a:lnTo>
+                    <a:pt x="7014550" y="3356523"/>
+                  </a:lnTo>
+                  <a:lnTo>
+                    <a:pt x="6940789" y="3351488"/>
+                  </a:lnTo>
+                  <a:lnTo>
+                    <a:pt x="6867029" y="3346253"/>
+                  </a:lnTo>
+                  <a:lnTo>
+                    <a:pt x="6793269" y="3340812"/>
+                  </a:lnTo>
+                  <a:lnTo>
+                    <a:pt x="6719509" y="3335155"/>
+                  </a:lnTo>
+                  <a:lnTo>
+                    <a:pt x="6645749" y="3329275"/>
+                  </a:lnTo>
+                  <a:lnTo>
+                    <a:pt x="6571989" y="3323161"/>
+                  </a:lnTo>
+                  <a:lnTo>
+                    <a:pt x="6498229" y="3316806"/>
+                  </a:lnTo>
+                  <a:lnTo>
+                    <a:pt x="6424469" y="3310199"/>
+                  </a:lnTo>
+                  <a:lnTo>
+                    <a:pt x="6350709" y="3303331"/>
+                  </a:lnTo>
+                  <a:lnTo>
+                    <a:pt x="6276949" y="3296190"/>
+                  </a:lnTo>
+                  <a:lnTo>
+                    <a:pt x="6203189" y="3288768"/>
+                  </a:lnTo>
+                  <a:lnTo>
+                    <a:pt x="6129429" y="3281051"/>
+                  </a:lnTo>
+                  <a:lnTo>
+                    <a:pt x="6055669" y="3273029"/>
+                  </a:lnTo>
+                  <a:lnTo>
+                    <a:pt x="5981909" y="3264690"/>
+                  </a:lnTo>
+                  <a:lnTo>
+                    <a:pt x="5908149" y="3256020"/>
+                  </a:lnTo>
+                  <a:lnTo>
+                    <a:pt x="5834389" y="3247008"/>
+                  </a:lnTo>
+                  <a:lnTo>
+                    <a:pt x="5760629" y="3237639"/>
+                  </a:lnTo>
+                  <a:lnTo>
+                    <a:pt x="5686869" y="3227899"/>
+                  </a:lnTo>
+                  <a:lnTo>
+                    <a:pt x="5613109" y="3217773"/>
+                  </a:lnTo>
+                  <a:lnTo>
+                    <a:pt x="5539349" y="3207247"/>
+                  </a:lnTo>
+                  <a:lnTo>
+                    <a:pt x="5465589" y="3196304"/>
+                  </a:lnTo>
+                  <a:lnTo>
+                    <a:pt x="5391829" y="3184928"/>
+                  </a:lnTo>
+                  <a:lnTo>
+                    <a:pt x="5318069" y="3173102"/>
+                  </a:lnTo>
+                  <a:lnTo>
+                    <a:pt x="5244309" y="3160808"/>
+                  </a:lnTo>
+                  <a:lnTo>
+                    <a:pt x="5170549" y="3148027"/>
+                  </a:lnTo>
+                  <a:lnTo>
+                    <a:pt x="5096789" y="3134741"/>
+                  </a:lnTo>
+                  <a:lnTo>
+                    <a:pt x="5023029" y="3120929"/>
+                  </a:lnTo>
+                  <a:lnTo>
+                    <a:pt x="4949269" y="3106570"/>
+                  </a:lnTo>
+                  <a:lnTo>
+                    <a:pt x="4875509" y="3091642"/>
+                  </a:lnTo>
+                  <a:lnTo>
+                    <a:pt x="4801749" y="3076124"/>
+                  </a:lnTo>
+                  <a:lnTo>
+                    <a:pt x="4727989" y="3059992"/>
+                  </a:lnTo>
+                  <a:lnTo>
+                    <a:pt x="4654229" y="3043222"/>
+                  </a:lnTo>
+                  <a:lnTo>
+                    <a:pt x="4580469" y="3025787"/>
+                  </a:lnTo>
+                  <a:lnTo>
+                    <a:pt x="4506709" y="3007663"/>
+                  </a:lnTo>
+                  <a:lnTo>
+                    <a:pt x="4432949" y="2988821"/>
+                  </a:lnTo>
+                  <a:lnTo>
+                    <a:pt x="4359189" y="2969234"/>
+                  </a:lnTo>
+                  <a:lnTo>
+                    <a:pt x="4285429" y="2948872"/>
+                  </a:lnTo>
+                  <a:lnTo>
+                    <a:pt x="4211669" y="2927703"/>
+                  </a:lnTo>
+                  <a:lnTo>
+                    <a:pt x="4137909" y="2905697"/>
+                  </a:lnTo>
+                  <a:lnTo>
+                    <a:pt x="4064149" y="2882820"/>
+                  </a:lnTo>
+                  <a:lnTo>
+                    <a:pt x="3990388" y="2859038"/>
+                  </a:lnTo>
+                  <a:lnTo>
+                    <a:pt x="3916628" y="2834314"/>
+                  </a:lnTo>
+                  <a:lnTo>
+                    <a:pt x="3842868" y="2808612"/>
+                  </a:lnTo>
+                  <a:lnTo>
+                    <a:pt x="3769108" y="2781893"/>
+                  </a:lnTo>
+                  <a:lnTo>
+                    <a:pt x="3695348" y="2754116"/>
+                  </a:lnTo>
+                  <a:lnTo>
+                    <a:pt x="3621588" y="2725240"/>
+                  </a:lnTo>
+                  <a:lnTo>
+                    <a:pt x="3547828" y="2695222"/>
+                  </a:lnTo>
+                  <a:lnTo>
+                    <a:pt x="3474068" y="2664015"/>
+                  </a:lnTo>
+                  <a:lnTo>
+                    <a:pt x="3400308" y="2649199"/>
+                  </a:lnTo>
+                  <a:lnTo>
+                    <a:pt x="3326548" y="2641838"/>
+                  </a:lnTo>
+                  <a:lnTo>
+                    <a:pt x="3252788" y="2634413"/>
+                  </a:lnTo>
+                  <a:lnTo>
+                    <a:pt x="3179028" y="2626923"/>
+                  </a:lnTo>
+                  <a:lnTo>
+                    <a:pt x="3105268" y="2619366"/>
+                  </a:lnTo>
+                  <a:lnTo>
+                    <a:pt x="3031508" y="2611742"/>
+                  </a:lnTo>
+                  <a:lnTo>
+                    <a:pt x="2957748" y="2604052"/>
+                  </a:lnTo>
+                  <a:lnTo>
+                    <a:pt x="2883988" y="2596293"/>
+                  </a:lnTo>
+                  <a:lnTo>
+                    <a:pt x="2810228" y="2588466"/>
+                  </a:lnTo>
+                  <a:lnTo>
+                    <a:pt x="2736468" y="2580571"/>
+                  </a:lnTo>
+                  <a:lnTo>
+                    <a:pt x="2662708" y="2572605"/>
+                  </a:lnTo>
+                  <a:lnTo>
+                    <a:pt x="2588948" y="2564569"/>
+                  </a:lnTo>
+                  <a:lnTo>
+                    <a:pt x="2515188" y="2556463"/>
+                  </a:lnTo>
+                  <a:lnTo>
+                    <a:pt x="2441428" y="2548284"/>
+                  </a:lnTo>
+                  <a:lnTo>
+                    <a:pt x="2367668" y="2540034"/>
+                  </a:lnTo>
+                  <a:lnTo>
+                    <a:pt x="2293908" y="2531711"/>
+                  </a:lnTo>
+                  <a:lnTo>
+                    <a:pt x="2220148" y="2523315"/>
+                  </a:lnTo>
+                  <a:lnTo>
+                    <a:pt x="2146388" y="2514844"/>
+                  </a:lnTo>
+                  <a:lnTo>
+                    <a:pt x="2072628" y="2506299"/>
+                  </a:lnTo>
+                  <a:lnTo>
+                    <a:pt x="1998868" y="2497678"/>
+                  </a:lnTo>
+                  <a:lnTo>
+                    <a:pt x="1925108" y="2488982"/>
+                  </a:lnTo>
+                  <a:lnTo>
+                    <a:pt x="1851348" y="2480208"/>
+                  </a:lnTo>
+                  <a:lnTo>
+                    <a:pt x="1777588" y="2471358"/>
+                  </a:lnTo>
+                  <a:lnTo>
+                    <a:pt x="1703828" y="2462429"/>
+                  </a:lnTo>
+                  <a:lnTo>
+                    <a:pt x="1630068" y="2453421"/>
+                  </a:lnTo>
+                  <a:lnTo>
+                    <a:pt x="1556308" y="2444334"/>
+                  </a:lnTo>
+                  <a:lnTo>
+                    <a:pt x="1482548" y="2435167"/>
+                  </a:lnTo>
+                  <a:lnTo>
+                    <a:pt x="1408788" y="2425919"/>
+                  </a:lnTo>
+                  <a:lnTo>
+                    <a:pt x="1335028" y="2416590"/>
+                  </a:lnTo>
+                  <a:lnTo>
+                    <a:pt x="1261268" y="2407178"/>
+                  </a:lnTo>
+                  <a:lnTo>
+                    <a:pt x="1187508" y="2397683"/>
+                  </a:lnTo>
+                  <a:lnTo>
+                    <a:pt x="1113747" y="2388105"/>
+                  </a:lnTo>
+                  <a:lnTo>
+                    <a:pt x="1039987" y="2378442"/>
+                  </a:lnTo>
+                  <a:lnTo>
+                    <a:pt x="966227" y="2368694"/>
+                  </a:lnTo>
+                  <a:lnTo>
+                    <a:pt x="892467" y="2358859"/>
+                  </a:lnTo>
+                  <a:lnTo>
+                    <a:pt x="818707" y="2348939"/>
+                  </a:lnTo>
+                  <a:lnTo>
+                    <a:pt x="744947" y="2338930"/>
+                  </a:lnTo>
+                  <a:lnTo>
+                    <a:pt x="671187" y="2328833"/>
+                  </a:lnTo>
+                  <a:lnTo>
+                    <a:pt x="597427" y="2318648"/>
+                  </a:lnTo>
+                  <a:lnTo>
+                    <a:pt x="523667" y="2308372"/>
+                  </a:lnTo>
+                  <a:lnTo>
+                    <a:pt x="449907" y="2298006"/>
+                  </a:lnTo>
+                  <a:lnTo>
+                    <a:pt x="376147" y="2287548"/>
+                  </a:lnTo>
+                  <a:lnTo>
+                    <a:pt x="302387" y="2276998"/>
+                  </a:lnTo>
+                  <a:lnTo>
+                    <a:pt x="228627" y="2266356"/>
+                  </a:lnTo>
+                  <a:lnTo>
+                    <a:pt x="154867" y="2255619"/>
+                  </a:lnTo>
+                  <a:lnTo>
+                    <a:pt x="81107" y="2244787"/>
+                  </a:lnTo>
+                  <a:lnTo>
+                    <a:pt x="7347" y="2233860"/>
+                  </a:lnTo>
+                  <a:lnTo>
+                    <a:pt x="0" y="2232762"/>
                   </a:lnTo>
                   <a:close/>
                 </a:path>
@@ -3603,282 +3603,282 @@
           </p:nvSpPr>
           <p:spPr>
             <a:xfrm>
-              <a:off x="1542226" y="1896563"/>
-              <a:ext cx="6511121" cy="3098385"/>
+              <a:off x="1542226" y="2073503"/>
+              <a:ext cx="6511121" cy="2955117"/>
             </a:xfrm>
             <a:custGeom>
               <a:avLst/>
               <a:pathLst>
-                <a:path w="6511121" h="3098385">
+                <a:path w="6511121" h="2955117">
                   <a:moveTo>
                     <a:pt x="0" y="0"/>
                   </a:moveTo>
                   <a:lnTo>
-                    <a:pt x="20239" y="39239"/>
-                  </a:lnTo>
-                  <a:lnTo>
-                    <a:pt x="93999" y="176800"/>
-                  </a:lnTo>
-                  <a:lnTo>
-                    <a:pt x="167759" y="309124"/>
-                  </a:lnTo>
-                  <a:lnTo>
-                    <a:pt x="241519" y="436410"/>
-                  </a:lnTo>
-                  <a:lnTo>
-                    <a:pt x="315279" y="558850"/>
-                  </a:lnTo>
-                  <a:lnTo>
-                    <a:pt x="389039" y="676630"/>
-                  </a:lnTo>
-                  <a:lnTo>
-                    <a:pt x="462799" y="789925"/>
-                  </a:lnTo>
-                  <a:lnTo>
-                    <a:pt x="536559" y="898908"/>
-                  </a:lnTo>
-                  <a:lnTo>
-                    <a:pt x="610319" y="1003741"/>
-                  </a:lnTo>
-                  <a:lnTo>
-                    <a:pt x="684079" y="1104584"/>
-                  </a:lnTo>
-                  <a:lnTo>
-                    <a:pt x="757839" y="1201587"/>
-                  </a:lnTo>
-                  <a:lnTo>
-                    <a:pt x="831599" y="1294898"/>
-                  </a:lnTo>
-                  <a:lnTo>
-                    <a:pt x="905359" y="1384656"/>
-                  </a:lnTo>
-                  <a:lnTo>
-                    <a:pt x="979119" y="1470997"/>
-                  </a:lnTo>
-                  <a:lnTo>
-                    <a:pt x="1052879" y="1554052"/>
-                  </a:lnTo>
-                  <a:lnTo>
-                    <a:pt x="1126639" y="1633944"/>
-                  </a:lnTo>
-                  <a:lnTo>
-                    <a:pt x="1200399" y="1710795"/>
-                  </a:lnTo>
-                  <a:lnTo>
-                    <a:pt x="1274159" y="1784720"/>
-                  </a:lnTo>
-                  <a:lnTo>
-                    <a:pt x="1347919" y="1855831"/>
-                  </a:lnTo>
-                  <a:lnTo>
-                    <a:pt x="1421679" y="1924235"/>
-                  </a:lnTo>
-                  <a:lnTo>
-                    <a:pt x="1495439" y="1990035"/>
-                  </a:lnTo>
-                  <a:lnTo>
-                    <a:pt x="1569199" y="2053330"/>
-                  </a:lnTo>
-                  <a:lnTo>
-                    <a:pt x="1642959" y="2114215"/>
-                  </a:lnTo>
-                  <a:lnTo>
-                    <a:pt x="1716719" y="2172782"/>
-                  </a:lnTo>
-                  <a:lnTo>
-                    <a:pt x="1790479" y="2229120"/>
-                  </a:lnTo>
-                  <a:lnTo>
-                    <a:pt x="1864239" y="2283313"/>
-                  </a:lnTo>
-                  <a:lnTo>
-                    <a:pt x="1937999" y="2335443"/>
-                  </a:lnTo>
-                  <a:lnTo>
-                    <a:pt x="2011759" y="2385588"/>
-                  </a:lnTo>
-                  <a:lnTo>
-                    <a:pt x="2085519" y="2433824"/>
-                  </a:lnTo>
-                  <a:lnTo>
-                    <a:pt x="2159279" y="2480224"/>
-                  </a:lnTo>
-                  <a:lnTo>
-                    <a:pt x="2233039" y="2524857"/>
-                  </a:lnTo>
-                  <a:lnTo>
-                    <a:pt x="2306800" y="2567792"/>
-                  </a:lnTo>
-                  <a:lnTo>
-                    <a:pt x="2380560" y="2609092"/>
-                  </a:lnTo>
-                  <a:lnTo>
-                    <a:pt x="2454320" y="2648819"/>
-                  </a:lnTo>
-                  <a:lnTo>
-                    <a:pt x="2528080" y="2687034"/>
-                  </a:lnTo>
-                  <a:lnTo>
-                    <a:pt x="2601840" y="2723795"/>
-                  </a:lnTo>
-                  <a:lnTo>
-                    <a:pt x="2675600" y="2759155"/>
-                  </a:lnTo>
-                  <a:lnTo>
-                    <a:pt x="2749360" y="2785285"/>
-                  </a:lnTo>
-                  <a:lnTo>
-                    <a:pt x="2823120" y="2792868"/>
-                  </a:lnTo>
-                  <a:lnTo>
-                    <a:pt x="2896880" y="2800384"/>
-                  </a:lnTo>
-                  <a:lnTo>
-                    <a:pt x="2970640" y="2807835"/>
-                  </a:lnTo>
-                  <a:lnTo>
-                    <a:pt x="3044400" y="2815221"/>
-                  </a:lnTo>
-                  <a:lnTo>
-                    <a:pt x="3118160" y="2822542"/>
-                  </a:lnTo>
-                  <a:lnTo>
-                    <a:pt x="3191920" y="2829799"/>
-                  </a:lnTo>
-                  <a:lnTo>
-                    <a:pt x="3265680" y="2836993"/>
-                  </a:lnTo>
-                  <a:lnTo>
-                    <a:pt x="3339440" y="2844123"/>
-                  </a:lnTo>
-                  <a:lnTo>
-                    <a:pt x="3413200" y="2851192"/>
-                  </a:lnTo>
-                  <a:lnTo>
-                    <a:pt x="3486960" y="2858198"/>
-                  </a:lnTo>
-                  <a:lnTo>
-                    <a:pt x="3560720" y="2865144"/>
-                  </a:lnTo>
-                  <a:lnTo>
-                    <a:pt x="3634480" y="2872028"/>
-                  </a:lnTo>
-                  <a:lnTo>
-                    <a:pt x="3708240" y="2878853"/>
-                  </a:lnTo>
-                  <a:lnTo>
-                    <a:pt x="3782000" y="2885618"/>
-                  </a:lnTo>
-                  <a:lnTo>
-                    <a:pt x="3855760" y="2892323"/>
-                  </a:lnTo>
-                  <a:lnTo>
-                    <a:pt x="3929520" y="2898970"/>
-                  </a:lnTo>
-                  <a:lnTo>
-                    <a:pt x="4003280" y="2905559"/>
-                  </a:lnTo>
-                  <a:lnTo>
-                    <a:pt x="4077040" y="2912090"/>
-                  </a:lnTo>
-                  <a:lnTo>
-                    <a:pt x="4150800" y="2918565"/>
-                  </a:lnTo>
-                  <a:lnTo>
-                    <a:pt x="4224560" y="2924982"/>
-                  </a:lnTo>
-                  <a:lnTo>
-                    <a:pt x="4298320" y="2931344"/>
-                  </a:lnTo>
-                  <a:lnTo>
-                    <a:pt x="4372080" y="2937650"/>
-                  </a:lnTo>
-                  <a:lnTo>
-                    <a:pt x="4445840" y="2943900"/>
-                  </a:lnTo>
-                  <a:lnTo>
-                    <a:pt x="4519600" y="2950096"/>
-                  </a:lnTo>
-                  <a:lnTo>
-                    <a:pt x="4593360" y="2956238"/>
-                  </a:lnTo>
-                  <a:lnTo>
-                    <a:pt x="4667120" y="2962327"/>
-                  </a:lnTo>
-                  <a:lnTo>
-                    <a:pt x="4740880" y="2968362"/>
-                  </a:lnTo>
-                  <a:lnTo>
-                    <a:pt x="4814640" y="2974344"/>
-                  </a:lnTo>
-                  <a:lnTo>
-                    <a:pt x="4888400" y="2980274"/>
-                  </a:lnTo>
-                  <a:lnTo>
-                    <a:pt x="4962160" y="2986152"/>
-                  </a:lnTo>
-                  <a:lnTo>
-                    <a:pt x="5035920" y="2991979"/>
-                  </a:lnTo>
-                  <a:lnTo>
-                    <a:pt x="5109680" y="2997754"/>
-                  </a:lnTo>
-                  <a:lnTo>
-                    <a:pt x="5183441" y="3003480"/>
-                  </a:lnTo>
-                  <a:lnTo>
-                    <a:pt x="5257201" y="3009155"/>
-                  </a:lnTo>
-                  <a:lnTo>
-                    <a:pt x="5330961" y="3014781"/>
-                  </a:lnTo>
-                  <a:lnTo>
-                    <a:pt x="5404721" y="3020357"/>
-                  </a:lnTo>
-                  <a:lnTo>
-                    <a:pt x="5478481" y="3025885"/>
-                  </a:lnTo>
-                  <a:lnTo>
-                    <a:pt x="5552241" y="3031364"/>
-                  </a:lnTo>
-                  <a:lnTo>
-                    <a:pt x="5626001" y="3036795"/>
-                  </a:lnTo>
-                  <a:lnTo>
-                    <a:pt x="5699761" y="3042179"/>
-                  </a:lnTo>
-                  <a:lnTo>
-                    <a:pt x="5773521" y="3047516"/>
-                  </a:lnTo>
-                  <a:lnTo>
-                    <a:pt x="5847281" y="3052807"/>
-                  </a:lnTo>
-                  <a:lnTo>
-                    <a:pt x="5921041" y="3058051"/>
-                  </a:lnTo>
-                  <a:lnTo>
-                    <a:pt x="5994801" y="3063249"/>
-                  </a:lnTo>
-                  <a:lnTo>
-                    <a:pt x="6068561" y="3068401"/>
-                  </a:lnTo>
-                  <a:lnTo>
-                    <a:pt x="6142321" y="3073509"/>
-                  </a:lnTo>
-                  <a:lnTo>
-                    <a:pt x="6216081" y="3078572"/>
-                  </a:lnTo>
-                  <a:lnTo>
-                    <a:pt x="6289841" y="3083591"/>
-                  </a:lnTo>
-                  <a:lnTo>
-                    <a:pt x="6363601" y="3088566"/>
-                  </a:lnTo>
-                  <a:lnTo>
-                    <a:pt x="6437361" y="3093497"/>
-                  </a:lnTo>
-                  <a:lnTo>
-                    <a:pt x="6511121" y="3098385"/>
+                    <a:pt x="20239" y="37425"/>
+                  </a:lnTo>
+                  <a:lnTo>
+                    <a:pt x="93999" y="168625"/>
+                  </a:lnTo>
+                  <a:lnTo>
+                    <a:pt x="167759" y="294830"/>
+                  </a:lnTo>
+                  <a:lnTo>
+                    <a:pt x="241519" y="416230"/>
+                  </a:lnTo>
+                  <a:lnTo>
+                    <a:pt x="315279" y="533009"/>
+                  </a:lnTo>
+                  <a:lnTo>
+                    <a:pt x="389039" y="645343"/>
+                  </a:lnTo>
+                  <a:lnTo>
+                    <a:pt x="462799" y="753399"/>
+                  </a:lnTo>
+                  <a:lnTo>
+                    <a:pt x="536559" y="857342"/>
+                  </a:lnTo>
+                  <a:lnTo>
+                    <a:pt x="610319" y="957329"/>
+                  </a:lnTo>
+                  <a:lnTo>
+                    <a:pt x="684079" y="1053508"/>
+                  </a:lnTo>
+                  <a:lnTo>
+                    <a:pt x="757839" y="1146026"/>
+                  </a:lnTo>
+                  <a:lnTo>
+                    <a:pt x="831599" y="1235022"/>
+                  </a:lnTo>
+                  <a:lnTo>
+                    <a:pt x="905359" y="1320630"/>
+                  </a:lnTo>
+                  <a:lnTo>
+                    <a:pt x="979119" y="1402979"/>
+                  </a:lnTo>
+                  <a:lnTo>
+                    <a:pt x="1052879" y="1482193"/>
+                  </a:lnTo>
+                  <a:lnTo>
+                    <a:pt x="1126639" y="1558391"/>
+                  </a:lnTo>
+                  <a:lnTo>
+                    <a:pt x="1200399" y="1631689"/>
+                  </a:lnTo>
+                  <a:lnTo>
+                    <a:pt x="1274159" y="1702196"/>
+                  </a:lnTo>
+                  <a:lnTo>
+                    <a:pt x="1347919" y="1770018"/>
+                  </a:lnTo>
+                  <a:lnTo>
+                    <a:pt x="1421679" y="1835259"/>
+                  </a:lnTo>
+                  <a:lnTo>
+                    <a:pt x="1495439" y="1898016"/>
+                  </a:lnTo>
+                  <a:lnTo>
+                    <a:pt x="1569199" y="1958384"/>
+                  </a:lnTo>
+                  <a:lnTo>
+                    <a:pt x="1642959" y="2016454"/>
+                  </a:lnTo>
+                  <a:lnTo>
+                    <a:pt x="1716719" y="2072313"/>
+                  </a:lnTo>
+                  <a:lnTo>
+                    <a:pt x="1790479" y="2126046"/>
+                  </a:lnTo>
+                  <a:lnTo>
+                    <a:pt x="1864239" y="2177733"/>
+                  </a:lnTo>
+                  <a:lnTo>
+                    <a:pt x="1937999" y="2227452"/>
+                  </a:lnTo>
+                  <a:lnTo>
+                    <a:pt x="2011759" y="2275279"/>
+                  </a:lnTo>
+                  <a:lnTo>
+                    <a:pt x="2085519" y="2321285"/>
+                  </a:lnTo>
+                  <a:lnTo>
+                    <a:pt x="2159279" y="2365539"/>
+                  </a:lnTo>
+                  <a:lnTo>
+                    <a:pt x="2233039" y="2408109"/>
+                  </a:lnTo>
+                  <a:lnTo>
+                    <a:pt x="2306800" y="2449058"/>
+                  </a:lnTo>
+                  <a:lnTo>
+                    <a:pt x="2380560" y="2488448"/>
+                  </a:lnTo>
+                  <a:lnTo>
+                    <a:pt x="2454320" y="2526339"/>
+                  </a:lnTo>
+                  <a:lnTo>
+                    <a:pt x="2528080" y="2562787"/>
+                  </a:lnTo>
+                  <a:lnTo>
+                    <a:pt x="2601840" y="2597847"/>
+                  </a:lnTo>
+                  <a:lnTo>
+                    <a:pt x="2675600" y="2631573"/>
+                  </a:lnTo>
+                  <a:lnTo>
+                    <a:pt x="2749360" y="2656495"/>
+                  </a:lnTo>
+                  <a:lnTo>
+                    <a:pt x="2823120" y="2663727"/>
+                  </a:lnTo>
+                  <a:lnTo>
+                    <a:pt x="2896880" y="2670896"/>
+                  </a:lnTo>
+                  <a:lnTo>
+                    <a:pt x="2970640" y="2678002"/>
+                  </a:lnTo>
+                  <a:lnTo>
+                    <a:pt x="3044400" y="2685046"/>
+                  </a:lnTo>
+                  <a:lnTo>
+                    <a:pt x="3118160" y="2692029"/>
+                  </a:lnTo>
+                  <a:lnTo>
+                    <a:pt x="3191920" y="2698950"/>
+                  </a:lnTo>
+                  <a:lnTo>
+                    <a:pt x="3265680" y="2705811"/>
+                  </a:lnTo>
+                  <a:lnTo>
+                    <a:pt x="3339440" y="2712612"/>
+                  </a:lnTo>
+                  <a:lnTo>
+                    <a:pt x="3413200" y="2719354"/>
+                  </a:lnTo>
+                  <a:lnTo>
+                    <a:pt x="3486960" y="2726036"/>
+                  </a:lnTo>
+                  <a:lnTo>
+                    <a:pt x="3560720" y="2732660"/>
+                  </a:lnTo>
+                  <a:lnTo>
+                    <a:pt x="3634480" y="2739227"/>
+                  </a:lnTo>
+                  <a:lnTo>
+                    <a:pt x="3708240" y="2745736"/>
+                  </a:lnTo>
+                  <a:lnTo>
+                    <a:pt x="3782000" y="2752188"/>
+                  </a:lnTo>
+                  <a:lnTo>
+                    <a:pt x="3855760" y="2758583"/>
+                  </a:lnTo>
+                  <a:lnTo>
+                    <a:pt x="3929520" y="2764923"/>
+                  </a:lnTo>
+                  <a:lnTo>
+                    <a:pt x="4003280" y="2771207"/>
+                  </a:lnTo>
+                  <a:lnTo>
+                    <a:pt x="4077040" y="2777436"/>
+                  </a:lnTo>
+                  <a:lnTo>
+                    <a:pt x="4150800" y="2783611"/>
+                  </a:lnTo>
+                  <a:lnTo>
+                    <a:pt x="4224560" y="2789732"/>
+                  </a:lnTo>
+                  <a:lnTo>
+                    <a:pt x="4298320" y="2795799"/>
+                  </a:lnTo>
+                  <a:lnTo>
+                    <a:pt x="4372080" y="2801814"/>
+                  </a:lnTo>
+                  <a:lnTo>
+                    <a:pt x="4445840" y="2807775"/>
+                  </a:lnTo>
+                  <a:lnTo>
+                    <a:pt x="4519600" y="2813685"/>
+                  </a:lnTo>
+                  <a:lnTo>
+                    <a:pt x="4593360" y="2819543"/>
+                  </a:lnTo>
+                  <a:lnTo>
+                    <a:pt x="4667120" y="2825350"/>
+                  </a:lnTo>
+                  <a:lnTo>
+                    <a:pt x="4740880" y="2831106"/>
+                  </a:lnTo>
+                  <a:lnTo>
+                    <a:pt x="4814640" y="2836811"/>
+                  </a:lnTo>
+                  <a:lnTo>
+                    <a:pt x="4888400" y="2842467"/>
+                  </a:lnTo>
+                  <a:lnTo>
+                    <a:pt x="4962160" y="2848073"/>
+                  </a:lnTo>
+                  <a:lnTo>
+                    <a:pt x="5035920" y="2853631"/>
+                  </a:lnTo>
+                  <a:lnTo>
+                    <a:pt x="5109680" y="2859139"/>
+                  </a:lnTo>
+                  <a:lnTo>
+                    <a:pt x="5183441" y="2864600"/>
+                  </a:lnTo>
+                  <a:lnTo>
+                    <a:pt x="5257201" y="2870013"/>
+                  </a:lnTo>
+                  <a:lnTo>
+                    <a:pt x="5330961" y="2875378"/>
+                  </a:lnTo>
+                  <a:lnTo>
+                    <a:pt x="5404721" y="2880697"/>
+                  </a:lnTo>
+                  <a:lnTo>
+                    <a:pt x="5478481" y="2885969"/>
+                  </a:lnTo>
+                  <a:lnTo>
+                    <a:pt x="5552241" y="2891195"/>
+                  </a:lnTo>
+                  <a:lnTo>
+                    <a:pt x="5626001" y="2896375"/>
+                  </a:lnTo>
+                  <a:lnTo>
+                    <a:pt x="5699761" y="2901510"/>
+                  </a:lnTo>
+                  <a:lnTo>
+                    <a:pt x="5773521" y="2906600"/>
+                  </a:lnTo>
+                  <a:lnTo>
+                    <a:pt x="5847281" y="2911646"/>
+                  </a:lnTo>
+                  <a:lnTo>
+                    <a:pt x="5921041" y="2916647"/>
+                  </a:lnTo>
+                  <a:lnTo>
+                    <a:pt x="5994801" y="2921605"/>
+                  </a:lnTo>
+                  <a:lnTo>
+                    <a:pt x="6068561" y="2926520"/>
+                  </a:lnTo>
+                  <a:lnTo>
+                    <a:pt x="6142321" y="2931391"/>
+                  </a:lnTo>
+                  <a:lnTo>
+                    <a:pt x="6216081" y="2936220"/>
+                  </a:lnTo>
+                  <a:lnTo>
+                    <a:pt x="6289841" y="2941007"/>
+                  </a:lnTo>
+                  <a:lnTo>
+                    <a:pt x="6363601" y="2945752"/>
+                  </a:lnTo>
+                  <a:lnTo>
+                    <a:pt x="6437361" y="2950455"/>
+                  </a:lnTo>
+                  <a:lnTo>
+                    <a:pt x="6511121" y="2955117"/>
                   </a:lnTo>
                 </a:path>
               </a:pathLst>
@@ -3898,309 +3898,309 @@
           </p:nvSpPr>
           <p:spPr>
             <a:xfrm>
-              <a:off x="817517" y="4237573"/>
-              <a:ext cx="7235830" cy="1192903"/>
+              <a:off x="817517" y="4306265"/>
+              <a:ext cx="7235830" cy="1137744"/>
             </a:xfrm>
             <a:custGeom>
               <a:avLst/>
               <a:pathLst>
-                <a:path w="7235830" h="1192903">
+                <a:path w="7235830" h="1137744">
                   <a:moveTo>
-                    <a:pt x="7235830" y="1192903"/>
+                    <a:pt x="7235830" y="1137744"/>
                   </a:moveTo>
                   <a:lnTo>
-                    <a:pt x="7162070" y="1188204"/>
-                  </a:lnTo>
-                  <a:lnTo>
-                    <a:pt x="7088310" y="1183320"/>
-                  </a:lnTo>
-                  <a:lnTo>
-                    <a:pt x="7014550" y="1178241"/>
-                  </a:lnTo>
-                  <a:lnTo>
-                    <a:pt x="6940789" y="1172962"/>
-                  </a:lnTo>
-                  <a:lnTo>
-                    <a:pt x="6867029" y="1167474"/>
-                  </a:lnTo>
-                  <a:lnTo>
-                    <a:pt x="6793269" y="1161769"/>
-                  </a:lnTo>
-                  <a:lnTo>
-                    <a:pt x="6719509" y="1155838"/>
-                  </a:lnTo>
-                  <a:lnTo>
-                    <a:pt x="6645749" y="1149672"/>
-                  </a:lnTo>
-                  <a:lnTo>
-                    <a:pt x="6571989" y="1143262"/>
-                  </a:lnTo>
-                  <a:lnTo>
-                    <a:pt x="6498229" y="1136599"/>
-                  </a:lnTo>
-                  <a:lnTo>
-                    <a:pt x="6424469" y="1129672"/>
-                  </a:lnTo>
-                  <a:lnTo>
-                    <a:pt x="6350709" y="1122470"/>
-                  </a:lnTo>
-                  <a:lnTo>
-                    <a:pt x="6276949" y="1114984"/>
-                  </a:lnTo>
-                  <a:lnTo>
-                    <a:pt x="6203189" y="1107201"/>
-                  </a:lnTo>
-                  <a:lnTo>
-                    <a:pt x="6129429" y="1099111"/>
-                  </a:lnTo>
-                  <a:lnTo>
-                    <a:pt x="6055669" y="1090700"/>
-                  </a:lnTo>
-                  <a:lnTo>
-                    <a:pt x="5981909" y="1081956"/>
-                  </a:lnTo>
-                  <a:lnTo>
-                    <a:pt x="5908149" y="1072867"/>
-                  </a:lnTo>
-                  <a:lnTo>
-                    <a:pt x="5834389" y="1063417"/>
-                  </a:lnTo>
-                  <a:lnTo>
-                    <a:pt x="5760629" y="1053594"/>
-                  </a:lnTo>
-                  <a:lnTo>
-                    <a:pt x="5686869" y="1043381"/>
-                  </a:lnTo>
-                  <a:lnTo>
-                    <a:pt x="5613109" y="1032765"/>
-                  </a:lnTo>
-                  <a:lnTo>
-                    <a:pt x="5539349" y="1021728"/>
-                  </a:lnTo>
-                  <a:lnTo>
-                    <a:pt x="5465589" y="1010255"/>
-                  </a:lnTo>
-                  <a:lnTo>
-                    <a:pt x="5391829" y="998328"/>
-                  </a:lnTo>
-                  <a:lnTo>
-                    <a:pt x="5318069" y="985928"/>
-                  </a:lnTo>
-                  <a:lnTo>
-                    <a:pt x="5244309" y="973038"/>
-                  </a:lnTo>
-                  <a:lnTo>
-                    <a:pt x="5170549" y="959638"/>
-                  </a:lnTo>
-                  <a:lnTo>
-                    <a:pt x="5096789" y="945707"/>
-                  </a:lnTo>
-                  <a:lnTo>
-                    <a:pt x="5023029" y="931225"/>
-                  </a:lnTo>
-                  <a:lnTo>
-                    <a:pt x="4949269" y="916170"/>
-                  </a:lnTo>
-                  <a:lnTo>
-                    <a:pt x="4875509" y="900519"/>
-                  </a:lnTo>
-                  <a:lnTo>
-                    <a:pt x="4801749" y="884249"/>
-                  </a:lnTo>
-                  <a:lnTo>
-                    <a:pt x="4727989" y="867335"/>
-                  </a:lnTo>
-                  <a:lnTo>
-                    <a:pt x="4654229" y="849751"/>
-                  </a:lnTo>
-                  <a:lnTo>
-                    <a:pt x="4580469" y="831472"/>
-                  </a:lnTo>
-                  <a:lnTo>
-                    <a:pt x="4506709" y="812469"/>
-                  </a:lnTo>
-                  <a:lnTo>
-                    <a:pt x="4432949" y="792714"/>
-                  </a:lnTo>
-                  <a:lnTo>
-                    <a:pt x="4359189" y="772177"/>
-                  </a:lnTo>
-                  <a:lnTo>
-                    <a:pt x="4285429" y="750827"/>
-                  </a:lnTo>
-                  <a:lnTo>
-                    <a:pt x="4211669" y="728632"/>
-                  </a:lnTo>
-                  <a:lnTo>
-                    <a:pt x="4137909" y="705559"/>
-                  </a:lnTo>
-                  <a:lnTo>
-                    <a:pt x="4064149" y="681573"/>
-                  </a:lnTo>
-                  <a:lnTo>
-                    <a:pt x="3990388" y="656638"/>
-                  </a:lnTo>
-                  <a:lnTo>
-                    <a:pt x="3916628" y="630716"/>
-                  </a:lnTo>
-                  <a:lnTo>
-                    <a:pt x="3842868" y="603768"/>
-                  </a:lnTo>
-                  <a:lnTo>
-                    <a:pt x="3769108" y="575753"/>
-                  </a:lnTo>
-                  <a:lnTo>
-                    <a:pt x="3695348" y="546630"/>
-                  </a:lnTo>
-                  <a:lnTo>
-                    <a:pt x="3621588" y="516354"/>
-                  </a:lnTo>
-                  <a:lnTo>
-                    <a:pt x="3547828" y="484880"/>
-                  </a:lnTo>
-                  <a:lnTo>
-                    <a:pt x="3474068" y="452160"/>
-                  </a:lnTo>
-                  <a:lnTo>
-                    <a:pt x="3400308" y="436625"/>
-                  </a:lnTo>
-                  <a:lnTo>
-                    <a:pt x="3326548" y="428908"/>
-                  </a:lnTo>
-                  <a:lnTo>
-                    <a:pt x="3252788" y="421123"/>
-                  </a:lnTo>
-                  <a:lnTo>
-                    <a:pt x="3179028" y="413269"/>
-                  </a:lnTo>
-                  <a:lnTo>
-                    <a:pt x="3105268" y="405346"/>
-                  </a:lnTo>
-                  <a:lnTo>
-                    <a:pt x="3031508" y="397353"/>
-                  </a:lnTo>
-                  <a:lnTo>
-                    <a:pt x="2957748" y="389290"/>
-                  </a:lnTo>
-                  <a:lnTo>
-                    <a:pt x="2883988" y="381155"/>
-                  </a:lnTo>
-                  <a:lnTo>
-                    <a:pt x="2810228" y="372949"/>
-                  </a:lnTo>
-                  <a:lnTo>
-                    <a:pt x="2736468" y="364670"/>
-                  </a:lnTo>
-                  <a:lnTo>
-                    <a:pt x="2662708" y="356318"/>
-                  </a:lnTo>
-                  <a:lnTo>
-                    <a:pt x="2588948" y="347893"/>
-                  </a:lnTo>
-                  <a:lnTo>
-                    <a:pt x="2515188" y="339393"/>
-                  </a:lnTo>
-                  <a:lnTo>
-                    <a:pt x="2441428" y="330819"/>
-                  </a:lnTo>
-                  <a:lnTo>
-                    <a:pt x="2367668" y="322168"/>
-                  </a:lnTo>
-                  <a:lnTo>
-                    <a:pt x="2293908" y="313442"/>
-                  </a:lnTo>
-                  <a:lnTo>
-                    <a:pt x="2220148" y="304638"/>
-                  </a:lnTo>
-                  <a:lnTo>
-                    <a:pt x="2146388" y="295757"/>
-                  </a:lnTo>
-                  <a:lnTo>
-                    <a:pt x="2072628" y="286797"/>
-                  </a:lnTo>
-                  <a:lnTo>
-                    <a:pt x="1998868" y="277759"/>
-                  </a:lnTo>
-                  <a:lnTo>
-                    <a:pt x="1925108" y="268641"/>
-                  </a:lnTo>
-                  <a:lnTo>
-                    <a:pt x="1851348" y="259442"/>
-                  </a:lnTo>
-                  <a:lnTo>
-                    <a:pt x="1777588" y="250162"/>
-                  </a:lnTo>
-                  <a:lnTo>
-                    <a:pt x="1703828" y="240801"/>
-                  </a:lnTo>
-                  <a:lnTo>
-                    <a:pt x="1630068" y="231356"/>
-                  </a:lnTo>
-                  <a:lnTo>
-                    <a:pt x="1556308" y="221829"/>
-                  </a:lnTo>
-                  <a:lnTo>
-                    <a:pt x="1482548" y="212217"/>
-                  </a:lnTo>
-                  <a:lnTo>
-                    <a:pt x="1408788" y="202521"/>
-                  </a:lnTo>
-                  <a:lnTo>
-                    <a:pt x="1335028" y="192739"/>
-                  </a:lnTo>
-                  <a:lnTo>
-                    <a:pt x="1261268" y="182871"/>
-                  </a:lnTo>
-                  <a:lnTo>
-                    <a:pt x="1187508" y="172916"/>
-                  </a:lnTo>
-                  <a:lnTo>
-                    <a:pt x="1113747" y="162873"/>
-                  </a:lnTo>
-                  <a:lnTo>
-                    <a:pt x="1039987" y="152742"/>
-                  </a:lnTo>
-                  <a:lnTo>
-                    <a:pt x="966227" y="142521"/>
-                  </a:lnTo>
-                  <a:lnTo>
-                    <a:pt x="892467" y="132210"/>
-                  </a:lnTo>
-                  <a:lnTo>
-                    <a:pt x="818707" y="121808"/>
-                  </a:lnTo>
-                  <a:lnTo>
-                    <a:pt x="744947" y="111315"/>
-                  </a:lnTo>
-                  <a:lnTo>
-                    <a:pt x="671187" y="100728"/>
-                  </a:lnTo>
-                  <a:lnTo>
-                    <a:pt x="597427" y="90049"/>
-                  </a:lnTo>
-                  <a:lnTo>
-                    <a:pt x="523667" y="79275"/>
-                  </a:lnTo>
-                  <a:lnTo>
-                    <a:pt x="449907" y="68406"/>
-                  </a:lnTo>
-                  <a:lnTo>
-                    <a:pt x="376147" y="57442"/>
-                  </a:lnTo>
-                  <a:lnTo>
-                    <a:pt x="302387" y="46380"/>
-                  </a:lnTo>
-                  <a:lnTo>
-                    <a:pt x="228627" y="35221"/>
-                  </a:lnTo>
-                  <a:lnTo>
-                    <a:pt x="154867" y="23964"/>
-                  </a:lnTo>
-                  <a:lnTo>
-                    <a:pt x="81107" y="12608"/>
-                  </a:lnTo>
-                  <a:lnTo>
-                    <a:pt x="7347" y="1151"/>
+                    <a:pt x="7162070" y="1133262"/>
+                  </a:lnTo>
+                  <a:lnTo>
+                    <a:pt x="7088310" y="1128603"/>
+                  </a:lnTo>
+                  <a:lnTo>
+                    <a:pt x="7014550" y="1123760"/>
+                  </a:lnTo>
+                  <a:lnTo>
+                    <a:pt x="6940789" y="1118725"/>
+                  </a:lnTo>
+                  <a:lnTo>
+                    <a:pt x="6867029" y="1113491"/>
+                  </a:lnTo>
+                  <a:lnTo>
+                    <a:pt x="6793269" y="1108049"/>
+                  </a:lnTo>
+                  <a:lnTo>
+                    <a:pt x="6719509" y="1102392"/>
+                  </a:lnTo>
+                  <a:lnTo>
+                    <a:pt x="6645749" y="1096512"/>
+                  </a:lnTo>
+                  <a:lnTo>
+                    <a:pt x="6571989" y="1090398"/>
+                  </a:lnTo>
+                  <a:lnTo>
+                    <a:pt x="6498229" y="1084043"/>
+                  </a:lnTo>
+                  <a:lnTo>
+                    <a:pt x="6424469" y="1077436"/>
+                  </a:lnTo>
+                  <a:lnTo>
+                    <a:pt x="6350709" y="1070568"/>
+                  </a:lnTo>
+                  <a:lnTo>
+                    <a:pt x="6276949" y="1063428"/>
+                  </a:lnTo>
+                  <a:lnTo>
+                    <a:pt x="6203189" y="1056005"/>
+                  </a:lnTo>
+                  <a:lnTo>
+                    <a:pt x="6129429" y="1048288"/>
+                  </a:lnTo>
+                  <a:lnTo>
+                    <a:pt x="6055669" y="1040266"/>
+                  </a:lnTo>
+                  <a:lnTo>
+                    <a:pt x="5981909" y="1031927"/>
+                  </a:lnTo>
+                  <a:lnTo>
+                    <a:pt x="5908149" y="1023258"/>
+                  </a:lnTo>
+                  <a:lnTo>
+                    <a:pt x="5834389" y="1014245"/>
+                  </a:lnTo>
+                  <a:lnTo>
+                    <a:pt x="5760629" y="1004876"/>
+                  </a:lnTo>
+                  <a:lnTo>
+                    <a:pt x="5686869" y="995136"/>
+                  </a:lnTo>
+                  <a:lnTo>
+                    <a:pt x="5613109" y="985010"/>
+                  </a:lnTo>
+                  <a:lnTo>
+                    <a:pt x="5539349" y="974484"/>
+                  </a:lnTo>
+                  <a:lnTo>
+                    <a:pt x="5465589" y="963541"/>
+                  </a:lnTo>
+                  <a:lnTo>
+                    <a:pt x="5391829" y="952165"/>
+                  </a:lnTo>
+                  <a:lnTo>
+                    <a:pt x="5318069" y="940339"/>
+                  </a:lnTo>
+                  <a:lnTo>
+                    <a:pt x="5244309" y="928045"/>
+                  </a:lnTo>
+                  <a:lnTo>
+                    <a:pt x="5170549" y="915265"/>
+                  </a:lnTo>
+                  <a:lnTo>
+                    <a:pt x="5096789" y="901978"/>
+                  </a:lnTo>
+                  <a:lnTo>
+                    <a:pt x="5023029" y="888166"/>
+                  </a:lnTo>
+                  <a:lnTo>
+                    <a:pt x="4949269" y="873807"/>
+                  </a:lnTo>
+                  <a:lnTo>
+                    <a:pt x="4875509" y="858880"/>
+                  </a:lnTo>
+                  <a:lnTo>
+                    <a:pt x="4801749" y="843362"/>
+                  </a:lnTo>
+                  <a:lnTo>
+                    <a:pt x="4727989" y="827229"/>
+                  </a:lnTo>
+                  <a:lnTo>
+                    <a:pt x="4654229" y="810459"/>
+                  </a:lnTo>
+                  <a:lnTo>
+                    <a:pt x="4580469" y="793025"/>
+                  </a:lnTo>
+                  <a:lnTo>
+                    <a:pt x="4506709" y="774900"/>
+                  </a:lnTo>
+                  <a:lnTo>
+                    <a:pt x="4432949" y="756059"/>
+                  </a:lnTo>
+                  <a:lnTo>
+                    <a:pt x="4359189" y="736471"/>
+                  </a:lnTo>
+                  <a:lnTo>
+                    <a:pt x="4285429" y="716109"/>
+                  </a:lnTo>
+                  <a:lnTo>
+                    <a:pt x="4211669" y="694941"/>
+                  </a:lnTo>
+                  <a:lnTo>
+                    <a:pt x="4137909" y="672935"/>
+                  </a:lnTo>
+                  <a:lnTo>
+                    <a:pt x="4064149" y="650058"/>
+                  </a:lnTo>
+                  <a:lnTo>
+                    <a:pt x="3990388" y="626275"/>
+                  </a:lnTo>
+                  <a:lnTo>
+                    <a:pt x="3916628" y="601552"/>
+                  </a:lnTo>
+                  <a:lnTo>
+                    <a:pt x="3842868" y="575850"/>
+                  </a:lnTo>
+                  <a:lnTo>
+                    <a:pt x="3769108" y="549130"/>
+                  </a:lnTo>
+                  <a:lnTo>
+                    <a:pt x="3695348" y="521354"/>
+                  </a:lnTo>
+                  <a:lnTo>
+                    <a:pt x="3621588" y="492478"/>
+                  </a:lnTo>
+                  <a:lnTo>
+                    <a:pt x="3547828" y="462459"/>
+                  </a:lnTo>
+                  <a:lnTo>
+                    <a:pt x="3474068" y="431252"/>
+                  </a:lnTo>
+                  <a:lnTo>
+                    <a:pt x="3400308" y="416436"/>
+                  </a:lnTo>
+                  <a:lnTo>
+                    <a:pt x="3326548" y="409076"/>
+                  </a:lnTo>
+                  <a:lnTo>
+                    <a:pt x="3252788" y="401650"/>
+                  </a:lnTo>
+                  <a:lnTo>
+                    <a:pt x="3179028" y="394160"/>
+                  </a:lnTo>
+                  <a:lnTo>
+                    <a:pt x="3105268" y="386603"/>
+                  </a:lnTo>
+                  <a:lnTo>
+                    <a:pt x="3031508" y="378980"/>
+                  </a:lnTo>
+                  <a:lnTo>
+                    <a:pt x="2957748" y="371289"/>
+                  </a:lnTo>
+                  <a:lnTo>
+                    <a:pt x="2883988" y="363531"/>
+                  </a:lnTo>
+                  <a:lnTo>
+                    <a:pt x="2810228" y="355704"/>
+                  </a:lnTo>
+                  <a:lnTo>
+                    <a:pt x="2736468" y="347808"/>
+                  </a:lnTo>
+                  <a:lnTo>
+                    <a:pt x="2662708" y="339842"/>
+                  </a:lnTo>
+                  <a:lnTo>
+                    <a:pt x="2588948" y="331806"/>
+                  </a:lnTo>
+                  <a:lnTo>
+                    <a:pt x="2515188" y="323700"/>
+                  </a:lnTo>
+                  <a:lnTo>
+                    <a:pt x="2441428" y="315522"/>
+                  </a:lnTo>
+                  <a:lnTo>
+                    <a:pt x="2367668" y="307271"/>
+                  </a:lnTo>
+                  <a:lnTo>
+                    <a:pt x="2293908" y="298948"/>
+                  </a:lnTo>
+                  <a:lnTo>
+                    <a:pt x="2220148" y="290552"/>
+                  </a:lnTo>
+                  <a:lnTo>
+                    <a:pt x="2146388" y="282081"/>
+                  </a:lnTo>
+                  <a:lnTo>
+                    <a:pt x="2072628" y="273536"/>
+                  </a:lnTo>
+                  <a:lnTo>
+                    <a:pt x="1998868" y="264915"/>
+                  </a:lnTo>
+                  <a:lnTo>
+                    <a:pt x="1925108" y="256219"/>
+                  </a:lnTo>
+                  <a:lnTo>
+                    <a:pt x="1851348" y="247446"/>
+                  </a:lnTo>
+                  <a:lnTo>
+                    <a:pt x="1777588" y="238595"/>
+                  </a:lnTo>
+                  <a:lnTo>
+                    <a:pt x="1703828" y="229666"/>
+                  </a:lnTo>
+                  <a:lnTo>
+                    <a:pt x="1630068" y="220659"/>
+                  </a:lnTo>
+                  <a:lnTo>
+                    <a:pt x="1556308" y="211572"/>
+                  </a:lnTo>
+                  <a:lnTo>
+                    <a:pt x="1482548" y="202405"/>
+                  </a:lnTo>
+                  <a:lnTo>
+                    <a:pt x="1408788" y="193157"/>
+                  </a:lnTo>
+                  <a:lnTo>
+                    <a:pt x="1335028" y="183827"/>
+                  </a:lnTo>
+                  <a:lnTo>
+                    <a:pt x="1261268" y="174415"/>
+                  </a:lnTo>
+                  <a:lnTo>
+                    <a:pt x="1187508" y="164921"/>
+                  </a:lnTo>
+                  <a:lnTo>
+                    <a:pt x="1113747" y="155342"/>
+                  </a:lnTo>
+                  <a:lnTo>
+                    <a:pt x="1039987" y="145679"/>
+                  </a:lnTo>
+                  <a:lnTo>
+                    <a:pt x="966227" y="135931"/>
+                  </a:lnTo>
+                  <a:lnTo>
+                    <a:pt x="892467" y="126097"/>
+                  </a:lnTo>
+                  <a:lnTo>
+                    <a:pt x="818707" y="116176"/>
+                  </a:lnTo>
+                  <a:lnTo>
+                    <a:pt x="744947" y="106167"/>
+                  </a:lnTo>
+                  <a:lnTo>
+                    <a:pt x="671187" y="96071"/>
+                  </a:lnTo>
+                  <a:lnTo>
+                    <a:pt x="597427" y="85885"/>
+                  </a:lnTo>
+                  <a:lnTo>
+                    <a:pt x="523667" y="75609"/>
+                  </a:lnTo>
+                  <a:lnTo>
+                    <a:pt x="449907" y="65243"/>
+                  </a:lnTo>
+                  <a:lnTo>
+                    <a:pt x="376147" y="54786"/>
+                  </a:lnTo>
+                  <a:lnTo>
+                    <a:pt x="302387" y="44236"/>
+                  </a:lnTo>
+                  <a:lnTo>
+                    <a:pt x="228627" y="33593"/>
+                  </a:lnTo>
+                  <a:lnTo>
+                    <a:pt x="154867" y="22856"/>
+                  </a:lnTo>
+                  <a:lnTo>
+                    <a:pt x="81107" y="12025"/>
+                  </a:lnTo>
+                  <a:lnTo>
+                    <a:pt x="7347" y="1098"/>
                   </a:lnTo>
                   <a:lnTo>
                     <a:pt x="0" y="0"/>
@@ -4223,312 +4223,312 @@
           </p:nvSpPr>
           <p:spPr>
             <a:xfrm>
-              <a:off x="817517" y="2900730"/>
-              <a:ext cx="7235830" cy="2391947"/>
+              <a:off x="817517" y="3031238"/>
+              <a:ext cx="7235830" cy="2281345"/>
             </a:xfrm>
             <a:custGeom>
               <a:avLst/>
               <a:pathLst>
-                <a:path w="7235830" h="2391947">
+                <a:path w="7235830" h="2281345">
                   <a:moveTo>
                     <a:pt x="0" y="0"/>
                   </a:moveTo>
                   <a:lnTo>
-                    <a:pt x="7347" y="6338"/>
-                  </a:lnTo>
-                  <a:lnTo>
-                    <a:pt x="81107" y="68471"/>
-                  </a:lnTo>
-                  <a:lnTo>
-                    <a:pt x="154867" y="129142"/>
-                  </a:lnTo>
-                  <a:lnTo>
-                    <a:pt x="228627" y="188387"/>
-                  </a:lnTo>
-                  <a:lnTo>
-                    <a:pt x="302387" y="246239"/>
-                  </a:lnTo>
-                  <a:lnTo>
-                    <a:pt x="376147" y="302730"/>
-                  </a:lnTo>
-                  <a:lnTo>
-                    <a:pt x="449907" y="357892"/>
-                  </a:lnTo>
-                  <a:lnTo>
-                    <a:pt x="523667" y="411758"/>
-                  </a:lnTo>
-                  <a:lnTo>
-                    <a:pt x="597427" y="464357"/>
-                  </a:lnTo>
-                  <a:lnTo>
-                    <a:pt x="671187" y="515719"/>
-                  </a:lnTo>
-                  <a:lnTo>
-                    <a:pt x="744947" y="565873"/>
-                  </a:lnTo>
-                  <a:lnTo>
-                    <a:pt x="818707" y="614847"/>
-                  </a:lnTo>
-                  <a:lnTo>
-                    <a:pt x="892467" y="662670"/>
-                  </a:lnTo>
-                  <a:lnTo>
-                    <a:pt x="966227" y="709369"/>
-                  </a:lnTo>
-                  <a:lnTo>
-                    <a:pt x="1039987" y="754969"/>
-                  </a:lnTo>
-                  <a:lnTo>
-                    <a:pt x="1113747" y="799497"/>
-                  </a:lnTo>
-                  <a:lnTo>
-                    <a:pt x="1187508" y="842977"/>
-                  </a:lnTo>
-                  <a:lnTo>
-                    <a:pt x="1261268" y="885436"/>
-                  </a:lnTo>
-                  <a:lnTo>
-                    <a:pt x="1335028" y="926895"/>
-                  </a:lnTo>
-                  <a:lnTo>
-                    <a:pt x="1408788" y="967380"/>
-                  </a:lnTo>
-                  <a:lnTo>
-                    <a:pt x="1482548" y="1006913"/>
-                  </a:lnTo>
-                  <a:lnTo>
-                    <a:pt x="1556308" y="1045516"/>
-                  </a:lnTo>
-                  <a:lnTo>
-                    <a:pt x="1630068" y="1083211"/>
-                  </a:lnTo>
-                  <a:lnTo>
-                    <a:pt x="1703828" y="1120020"/>
-                  </a:lnTo>
-                  <a:lnTo>
-                    <a:pt x="1777588" y="1155963"/>
-                  </a:lnTo>
-                  <a:lnTo>
-                    <a:pt x="1851348" y="1191061"/>
-                  </a:lnTo>
-                  <a:lnTo>
-                    <a:pt x="1925108" y="1225334"/>
-                  </a:lnTo>
-                  <a:lnTo>
-                    <a:pt x="1998868" y="1258801"/>
-                  </a:lnTo>
-                  <a:lnTo>
-                    <a:pt x="2072628" y="1291480"/>
-                  </a:lnTo>
-                  <a:lnTo>
-                    <a:pt x="2146388" y="1323392"/>
-                  </a:lnTo>
-                  <a:lnTo>
-                    <a:pt x="2220148" y="1354552"/>
-                  </a:lnTo>
-                  <a:lnTo>
-                    <a:pt x="2293908" y="1384980"/>
-                  </a:lnTo>
-                  <a:lnTo>
-                    <a:pt x="2367668" y="1414693"/>
-                  </a:lnTo>
-                  <a:lnTo>
-                    <a:pt x="2441428" y="1443707"/>
-                  </a:lnTo>
-                  <a:lnTo>
-                    <a:pt x="2515188" y="1472038"/>
-                  </a:lnTo>
-                  <a:lnTo>
-                    <a:pt x="2588948" y="1499703"/>
-                  </a:lnTo>
-                  <a:lnTo>
-                    <a:pt x="2662708" y="1526718"/>
-                  </a:lnTo>
-                  <a:lnTo>
-                    <a:pt x="2736468" y="1553097"/>
-                  </a:lnTo>
-                  <a:lnTo>
-                    <a:pt x="2810228" y="1578856"/>
-                  </a:lnTo>
-                  <a:lnTo>
-                    <a:pt x="2883988" y="1604009"/>
-                  </a:lnTo>
-                  <a:lnTo>
-                    <a:pt x="2957748" y="1628571"/>
-                  </a:lnTo>
-                  <a:lnTo>
-                    <a:pt x="3031508" y="1652555"/>
-                  </a:lnTo>
-                  <a:lnTo>
-                    <a:pt x="3105268" y="1675975"/>
-                  </a:lnTo>
-                  <a:lnTo>
-                    <a:pt x="3179028" y="1698845"/>
-                  </a:lnTo>
-                  <a:lnTo>
-                    <a:pt x="3252788" y="1721176"/>
-                  </a:lnTo>
-                  <a:lnTo>
-                    <a:pt x="3326548" y="1742983"/>
-                  </a:lnTo>
-                  <a:lnTo>
-                    <a:pt x="3400308" y="1764276"/>
-                  </a:lnTo>
-                  <a:lnTo>
-                    <a:pt x="3474068" y="1785069"/>
-                  </a:lnTo>
-                  <a:lnTo>
-                    <a:pt x="3547828" y="1805373"/>
-                  </a:lnTo>
-                  <a:lnTo>
-                    <a:pt x="3621588" y="1825200"/>
-                  </a:lnTo>
-                  <a:lnTo>
-                    <a:pt x="3695348" y="1844560"/>
-                  </a:lnTo>
-                  <a:lnTo>
-                    <a:pt x="3769108" y="1863465"/>
-                  </a:lnTo>
-                  <a:lnTo>
-                    <a:pt x="3842868" y="1881925"/>
-                  </a:lnTo>
-                  <a:lnTo>
-                    <a:pt x="3916628" y="1899951"/>
-                  </a:lnTo>
-                  <a:lnTo>
-                    <a:pt x="3990388" y="1917554"/>
-                  </a:lnTo>
-                  <a:lnTo>
-                    <a:pt x="4064149" y="1934742"/>
-                  </a:lnTo>
-                  <a:lnTo>
-                    <a:pt x="4137909" y="1951526"/>
-                  </a:lnTo>
-                  <a:lnTo>
-                    <a:pt x="4211669" y="1967916"/>
-                  </a:lnTo>
-                  <a:lnTo>
-                    <a:pt x="4285429" y="1983920"/>
-                  </a:lnTo>
-                  <a:lnTo>
-                    <a:pt x="4359189" y="1999548"/>
-                  </a:lnTo>
-                  <a:lnTo>
-                    <a:pt x="4432949" y="2014808"/>
-                  </a:lnTo>
-                  <a:lnTo>
-                    <a:pt x="4506709" y="2029709"/>
-                  </a:lnTo>
-                  <a:lnTo>
-                    <a:pt x="4580469" y="2044260"/>
-                  </a:lnTo>
-                  <a:lnTo>
-                    <a:pt x="4654229" y="2058469"/>
-                  </a:lnTo>
-                  <a:lnTo>
-                    <a:pt x="4727989" y="2072344"/>
-                  </a:lnTo>
-                  <a:lnTo>
-                    <a:pt x="4801749" y="2085892"/>
-                  </a:lnTo>
-                  <a:lnTo>
-                    <a:pt x="4875509" y="2099122"/>
-                  </a:lnTo>
-                  <a:lnTo>
-                    <a:pt x="4949269" y="2112040"/>
-                  </a:lnTo>
-                  <a:lnTo>
-                    <a:pt x="5023029" y="2124655"/>
-                  </a:lnTo>
-                  <a:lnTo>
-                    <a:pt x="5096789" y="2136974"/>
-                  </a:lnTo>
-                  <a:lnTo>
-                    <a:pt x="5170549" y="2149002"/>
-                  </a:lnTo>
-                  <a:lnTo>
-                    <a:pt x="5244309" y="2160748"/>
-                  </a:lnTo>
-                  <a:lnTo>
-                    <a:pt x="5318069" y="2172217"/>
-                  </a:lnTo>
-                  <a:lnTo>
-                    <a:pt x="5391829" y="2183417"/>
-                  </a:lnTo>
-                  <a:lnTo>
-                    <a:pt x="5465589" y="2194353"/>
-                  </a:lnTo>
-                  <a:lnTo>
-                    <a:pt x="5539349" y="2205032"/>
-                  </a:lnTo>
-                  <a:lnTo>
-                    <a:pt x="5613109" y="2215460"/>
-                  </a:lnTo>
-                  <a:lnTo>
-                    <a:pt x="5686869" y="2225643"/>
-                  </a:lnTo>
-                  <a:lnTo>
-                    <a:pt x="5760629" y="2235587"/>
-                  </a:lnTo>
-                  <a:lnTo>
-                    <a:pt x="5834389" y="2245296"/>
-                  </a:lnTo>
-                  <a:lnTo>
-                    <a:pt x="5908149" y="2254777"/>
-                  </a:lnTo>
-                  <a:lnTo>
-                    <a:pt x="5981909" y="2264036"/>
-                  </a:lnTo>
-                  <a:lnTo>
-                    <a:pt x="6055669" y="2273076"/>
-                  </a:lnTo>
-                  <a:lnTo>
-                    <a:pt x="6129429" y="2281904"/>
-                  </a:lnTo>
-                  <a:lnTo>
-                    <a:pt x="6203189" y="2290524"/>
-                  </a:lnTo>
-                  <a:lnTo>
-                    <a:pt x="6276949" y="2298942"/>
-                  </a:lnTo>
-                  <a:lnTo>
-                    <a:pt x="6350709" y="2307162"/>
-                  </a:lnTo>
-                  <a:lnTo>
-                    <a:pt x="6424469" y="2315188"/>
-                  </a:lnTo>
-                  <a:lnTo>
-                    <a:pt x="6498229" y="2323026"/>
-                  </a:lnTo>
-                  <a:lnTo>
-                    <a:pt x="6571989" y="2330679"/>
-                  </a:lnTo>
-                  <a:lnTo>
-                    <a:pt x="6645749" y="2338152"/>
-                  </a:lnTo>
-                  <a:lnTo>
-                    <a:pt x="6719509" y="2345450"/>
-                  </a:lnTo>
-                  <a:lnTo>
-                    <a:pt x="6793269" y="2352576"/>
-                  </a:lnTo>
-                  <a:lnTo>
-                    <a:pt x="6867029" y="2359534"/>
-                  </a:lnTo>
-                  <a:lnTo>
-                    <a:pt x="6940789" y="2366329"/>
-                  </a:lnTo>
-                  <a:lnTo>
-                    <a:pt x="7014550" y="2372964"/>
-                  </a:lnTo>
-                  <a:lnTo>
-                    <a:pt x="7088310" y="2379443"/>
-                  </a:lnTo>
-                  <a:lnTo>
-                    <a:pt x="7162070" y="2385770"/>
-                  </a:lnTo>
-                  <a:lnTo>
-                    <a:pt x="7235830" y="2391947"/>
+                    <a:pt x="7347" y="6045"/>
+                  </a:lnTo>
+                  <a:lnTo>
+                    <a:pt x="81107" y="65305"/>
+                  </a:lnTo>
+                  <a:lnTo>
+                    <a:pt x="154867" y="123171"/>
+                  </a:lnTo>
+                  <a:lnTo>
+                    <a:pt x="228627" y="179676"/>
+                  </a:lnTo>
+                  <a:lnTo>
+                    <a:pt x="302387" y="234853"/>
+                  </a:lnTo>
+                  <a:lnTo>
+                    <a:pt x="376147" y="288732"/>
+                  </a:lnTo>
+                  <a:lnTo>
+                    <a:pt x="449907" y="341344"/>
+                  </a:lnTo>
+                  <a:lnTo>
+                    <a:pt x="523667" y="392718"/>
+                  </a:lnTo>
+                  <a:lnTo>
+                    <a:pt x="597427" y="442885"/>
+                  </a:lnTo>
+                  <a:lnTo>
+                    <a:pt x="671187" y="491872"/>
+                  </a:lnTo>
+                  <a:lnTo>
+                    <a:pt x="744947" y="539707"/>
+                  </a:lnTo>
+                  <a:lnTo>
+                    <a:pt x="818707" y="586417"/>
+                  </a:lnTo>
+                  <a:lnTo>
+                    <a:pt x="892467" y="632029"/>
+                  </a:lnTo>
+                  <a:lnTo>
+                    <a:pt x="966227" y="676568"/>
+                  </a:lnTo>
+                  <a:lnTo>
+                    <a:pt x="1039987" y="720059"/>
+                  </a:lnTo>
+                  <a:lnTo>
+                    <a:pt x="1113747" y="762528"/>
+                  </a:lnTo>
+                  <a:lnTo>
+                    <a:pt x="1187508" y="803998"/>
+                  </a:lnTo>
+                  <a:lnTo>
+                    <a:pt x="1261268" y="844493"/>
+                  </a:lnTo>
+                  <a:lnTo>
+                    <a:pt x="1335028" y="884036"/>
+                  </a:lnTo>
+                  <a:lnTo>
+                    <a:pt x="1408788" y="922649"/>
+                  </a:lnTo>
+                  <a:lnTo>
+                    <a:pt x="1482548" y="960354"/>
+                  </a:lnTo>
+                  <a:lnTo>
+                    <a:pt x="1556308" y="997172"/>
+                  </a:lnTo>
+                  <a:lnTo>
+                    <a:pt x="1630068" y="1033124"/>
+                  </a:lnTo>
+                  <a:lnTo>
+                    <a:pt x="1703828" y="1068231"/>
+                  </a:lnTo>
+                  <a:lnTo>
+                    <a:pt x="1777588" y="1102512"/>
+                  </a:lnTo>
+                  <a:lnTo>
+                    <a:pt x="1851348" y="1135987"/>
+                  </a:lnTo>
+                  <a:lnTo>
+                    <a:pt x="1925108" y="1168675"/>
+                  </a:lnTo>
+                  <a:lnTo>
+                    <a:pt x="1998868" y="1200594"/>
+                  </a:lnTo>
+                  <a:lnTo>
+                    <a:pt x="2072628" y="1231763"/>
+                  </a:lnTo>
+                  <a:lnTo>
+                    <a:pt x="2146388" y="1262198"/>
+                  </a:lnTo>
+                  <a:lnTo>
+                    <a:pt x="2220148" y="1291918"/>
+                  </a:lnTo>
+                  <a:lnTo>
+                    <a:pt x="2293908" y="1320939"/>
+                  </a:lnTo>
+                  <a:lnTo>
+                    <a:pt x="2367668" y="1349278"/>
+                  </a:lnTo>
+                  <a:lnTo>
+                    <a:pt x="2441428" y="1376950"/>
+                  </a:lnTo>
+                  <a:lnTo>
+                    <a:pt x="2515188" y="1403971"/>
+                  </a:lnTo>
+                  <a:lnTo>
+                    <a:pt x="2588948" y="1430357"/>
+                  </a:lnTo>
+                  <a:lnTo>
+                    <a:pt x="2662708" y="1456123"/>
+                  </a:lnTo>
+                  <a:lnTo>
+                    <a:pt x="2736468" y="1481282"/>
+                  </a:lnTo>
+                  <a:lnTo>
+                    <a:pt x="2810228" y="1505850"/>
+                  </a:lnTo>
+                  <a:lnTo>
+                    <a:pt x="2883988" y="1529841"/>
+                  </a:lnTo>
+                  <a:lnTo>
+                    <a:pt x="2957748" y="1553267"/>
+                  </a:lnTo>
+                  <a:lnTo>
+                    <a:pt x="3031508" y="1576142"/>
+                  </a:lnTo>
+                  <a:lnTo>
+                    <a:pt x="3105268" y="1598479"/>
+                  </a:lnTo>
+                  <a:lnTo>
+                    <a:pt x="3179028" y="1620291"/>
+                  </a:lnTo>
+                  <a:lnTo>
+                    <a:pt x="3252788" y="1641590"/>
+                  </a:lnTo>
+                  <a:lnTo>
+                    <a:pt x="3326548" y="1662388"/>
+                  </a:lnTo>
+                  <a:lnTo>
+                    <a:pt x="3400308" y="1682697"/>
+                  </a:lnTo>
+                  <a:lnTo>
+                    <a:pt x="3474068" y="1702528"/>
+                  </a:lnTo>
+                  <a:lnTo>
+                    <a:pt x="3547828" y="1721893"/>
+                  </a:lnTo>
+                  <a:lnTo>
+                    <a:pt x="3621588" y="1740803"/>
+                  </a:lnTo>
+                  <a:lnTo>
+                    <a:pt x="3695348" y="1759268"/>
+                  </a:lnTo>
+                  <a:lnTo>
+                    <a:pt x="3769108" y="1777299"/>
+                  </a:lnTo>
+                  <a:lnTo>
+                    <a:pt x="3842868" y="1794906"/>
+                  </a:lnTo>
+                  <a:lnTo>
+                    <a:pt x="3916628" y="1812098"/>
+                  </a:lnTo>
+                  <a:lnTo>
+                    <a:pt x="3990388" y="1828887"/>
+                  </a:lnTo>
+                  <a:lnTo>
+                    <a:pt x="4064149" y="1845280"/>
+                  </a:lnTo>
+                  <a:lnTo>
+                    <a:pt x="4137909" y="1861289"/>
+                  </a:lnTo>
+                  <a:lnTo>
+                    <a:pt x="4211669" y="1876920"/>
+                  </a:lnTo>
+                  <a:lnTo>
+                    <a:pt x="4285429" y="1892184"/>
+                  </a:lnTo>
+                  <a:lnTo>
+                    <a:pt x="4359189" y="1907089"/>
+                  </a:lnTo>
+                  <a:lnTo>
+                    <a:pt x="4432949" y="1921644"/>
+                  </a:lnTo>
+                  <a:lnTo>
+                    <a:pt x="4506709" y="1935856"/>
+                  </a:lnTo>
+                  <a:lnTo>
+                    <a:pt x="4580469" y="1949734"/>
+                  </a:lnTo>
+                  <a:lnTo>
+                    <a:pt x="4654229" y="1963286"/>
+                  </a:lnTo>
+                  <a:lnTo>
+                    <a:pt x="4727989" y="1976519"/>
+                  </a:lnTo>
+                  <a:lnTo>
+                    <a:pt x="4801749" y="1989441"/>
+                  </a:lnTo>
+                  <a:lnTo>
+                    <a:pt x="4875509" y="2002059"/>
+                  </a:lnTo>
+                  <a:lnTo>
+                    <a:pt x="4949269" y="2014380"/>
+                  </a:lnTo>
+                  <a:lnTo>
+                    <a:pt x="5023029" y="2026412"/>
+                  </a:lnTo>
+                  <a:lnTo>
+                    <a:pt x="5096789" y="2038161"/>
+                  </a:lnTo>
+                  <a:lnTo>
+                    <a:pt x="5170549" y="2049633"/>
+                  </a:lnTo>
+                  <a:lnTo>
+                    <a:pt x="5244309" y="2060836"/>
+                  </a:lnTo>
+                  <a:lnTo>
+                    <a:pt x="5318069" y="2071775"/>
+                  </a:lnTo>
+                  <a:lnTo>
+                    <a:pt x="5391829" y="2082456"/>
+                  </a:lnTo>
+                  <a:lnTo>
+                    <a:pt x="5465589" y="2092887"/>
+                  </a:lnTo>
+                  <a:lnTo>
+                    <a:pt x="5539349" y="2103073"/>
+                  </a:lnTo>
+                  <a:lnTo>
+                    <a:pt x="5613109" y="2113018"/>
+                  </a:lnTo>
+                  <a:lnTo>
+                    <a:pt x="5686869" y="2122730"/>
+                  </a:lnTo>
+                  <a:lnTo>
+                    <a:pt x="5760629" y="2132214"/>
+                  </a:lnTo>
+                  <a:lnTo>
+                    <a:pt x="5834389" y="2141474"/>
+                  </a:lnTo>
+                  <a:lnTo>
+                    <a:pt x="5908149" y="2150517"/>
+                  </a:lnTo>
+                  <a:lnTo>
+                    <a:pt x="5981909" y="2159347"/>
+                  </a:lnTo>
+                  <a:lnTo>
+                    <a:pt x="6055669" y="2167970"/>
+                  </a:lnTo>
+                  <a:lnTo>
+                    <a:pt x="6129429" y="2176390"/>
+                  </a:lnTo>
+                  <a:lnTo>
+                    <a:pt x="6203189" y="2184611"/>
+                  </a:lnTo>
+                  <a:lnTo>
+                    <a:pt x="6276949" y="2192640"/>
+                  </a:lnTo>
+                  <a:lnTo>
+                    <a:pt x="6350709" y="2200479"/>
+                  </a:lnTo>
+                  <a:lnTo>
+                    <a:pt x="6424469" y="2208135"/>
+                  </a:lnTo>
+                  <a:lnTo>
+                    <a:pt x="6498229" y="2215610"/>
+                  </a:lnTo>
+                  <a:lnTo>
+                    <a:pt x="6571989" y="2222909"/>
+                  </a:lnTo>
+                  <a:lnTo>
+                    <a:pt x="6645749" y="2230037"/>
+                  </a:lnTo>
+                  <a:lnTo>
+                    <a:pt x="6719509" y="2236997"/>
+                  </a:lnTo>
+                  <a:lnTo>
+                    <a:pt x="6793269" y="2243794"/>
+                  </a:lnTo>
+                  <a:lnTo>
+                    <a:pt x="6867029" y="2250430"/>
+                  </a:lnTo>
+                  <a:lnTo>
+                    <a:pt x="6940789" y="2256911"/>
+                  </a:lnTo>
+                  <a:lnTo>
+                    <a:pt x="7014550" y="2263239"/>
+                  </a:lnTo>
+                  <a:lnTo>
+                    <a:pt x="7088310" y="2269418"/>
+                  </a:lnTo>
+                  <a:lnTo>
+                    <a:pt x="7162070" y="2275452"/>
+                  </a:lnTo>
+                  <a:lnTo>
+                    <a:pt x="7235830" y="2281345"/>
                   </a:lnTo>
                 </a:path>
               </a:pathLst>
@@ -4557,7 +4557,7 @@
           </p:nvSpPr>
           <p:spPr>
             <a:xfrm>
-              <a:off x="817517" y="4679530"/>
+              <a:off x="817517" y="4727786"/>
               <a:ext cx="7799693" cy="0"/>
             </a:xfrm>
             <a:custGeom>
@@ -4600,15 +4600,15 @@
           </p:nvSpPr>
           <p:spPr>
             <a:xfrm>
-              <a:off x="4269157" y="1896563"/>
-              <a:ext cx="0" cy="3826579"/>
+              <a:off x="4269157" y="2073503"/>
+              <a:ext cx="0" cy="3649639"/>
             </a:xfrm>
             <a:custGeom>
               <a:avLst/>
               <a:pathLst>
-                <a:path w="0" h="3826579">
+                <a:path w="0" h="3649639">
                   <a:moveTo>
-                    <a:pt x="0" y="3826579"/>
+                    <a:pt x="0" y="3649639"/>
                   </a:moveTo>
                   <a:lnTo>
                     <a:pt x="0" y="0"/>
@@ -4643,7 +4643,7 @@
           </p:nvSpPr>
           <p:spPr>
             <a:xfrm>
-              <a:off x="692708" y="5509156"/>
+              <a:off x="692708" y="5517199"/>
               <a:ext cx="62179" cy="80101"/>
             </a:xfrm>
             <a:prstGeom prst="rect">
@@ -4689,7 +4689,7 @@
           </p:nvSpPr>
           <p:spPr>
             <a:xfrm>
-              <a:off x="692708" y="4639479"/>
+              <a:off x="692708" y="4687735"/>
               <a:ext cx="62179" cy="80101"/>
             </a:xfrm>
             <a:prstGeom prst="rect">
@@ -4735,7 +4735,7 @@
           </p:nvSpPr>
           <p:spPr>
             <a:xfrm>
-              <a:off x="692708" y="3769802"/>
+              <a:off x="692708" y="3858272"/>
               <a:ext cx="62179" cy="80101"/>
             </a:xfrm>
             <a:prstGeom prst="rect">
@@ -4781,7 +4781,7 @@
           </p:nvSpPr>
           <p:spPr>
             <a:xfrm>
-              <a:off x="692708" y="2900125"/>
+              <a:off x="692708" y="3028808"/>
               <a:ext cx="62179" cy="80101"/>
             </a:xfrm>
             <a:prstGeom prst="rect">
@@ -4827,7 +4827,7 @@
           </p:nvSpPr>
           <p:spPr>
             <a:xfrm>
-              <a:off x="692708" y="2030448"/>
+              <a:off x="692708" y="2199345"/>
               <a:ext cx="62179" cy="80101"/>
             </a:xfrm>
             <a:prstGeom prst="rect">
@@ -5103,7 +5103,7 @@
           </p:nvSpPr>
           <p:spPr>
             <a:xfrm rot="-5400000">
-              <a:off x="68446" y="3759743"/>
+              <a:off x="68446" y="3848213"/>
               <a:ext cx="1016904" cy="100218"/>
             </a:xfrm>
             <a:prstGeom prst="rect">
@@ -5144,6 +5144,52 @@
         <p:sp>
           <p:nvSpPr>
             <p:cNvPr id="38" name="tx38"/>
+            <p:cNvSpPr/>
+            <p:nvPr/>
+          </p:nvSpPr>
+          <p:spPr>
+            <a:xfrm>
+              <a:off x="817517" y="1896563"/>
+              <a:ext cx="5626211" cy="82021"/>
+            </a:xfrm>
+            <a:prstGeom prst="rect">
+              <a:avLst/>
+            </a:prstGeom>
+            <a:noFill/>
+          </p:spPr>
+          <p:txBody>
+            <a:bodyPr lIns="0" rIns="0" tIns="0" bIns="0" anchorCtr="1" anchor="ctr" wrap="none"/>
+            <a:lstStyle/>
+            <a:p>
+              <a:pPr algn="l" marL="0" marR="0" indent="0">
+                <a:lnSpc>
+                  <a:spcPts val="900"/>
+                </a:lnSpc>
+                <a:spcBef>
+                  <a:spcPts val="0"/>
+                </a:spcBef>
+                <a:spcAft>
+                  <a:spcPts val="0"/>
+                </a:spcAft>
+              </a:pPr>
+              <a:r>
+                <a:rPr sz="900">
+                  <a:solidFill>
+                    <a:srgbClr val="404040">
+                      <a:alpha val="100000"/>
+                    </a:srgbClr>
+                  </a:solidFill>
+                  <a:latin typeface="Helvetica"/>
+                  <a:cs typeface="Helvetica"/>
+                </a:rPr>
+                <a:t>subHR per 0.1 ratio decline: 1.33 (1.11-1.59)  |  per IQR decline (Δ = 0.29): 2.31 (1.36-3.92)  |  IQR: [0.85, 1.15]</a:t>
+              </a:r>
+            </a:p>
+          </p:txBody>
+        </p:sp>
+        <p:sp>
+          <p:nvSpPr>
+            <p:cNvPr id="39" name="tx39"/>
             <p:cNvSpPr/>
             <p:nvPr/>
           </p:nvSpPr>

--- a/docs/pptx/whole/jx-linsubhr-ratio-hosp-immune-other.pptx
+++ b/docs/pptx/whole/jx-linsubhr-ratio-hosp-immune-other.pptx
@@ -5150,7 +5150,7 @@
           <p:spPr>
             <a:xfrm>
               <a:off x="817517" y="1896563"/>
-              <a:ext cx="5626211" cy="82021"/>
+              <a:ext cx="6169365" cy="82021"/>
             </a:xfrm>
             <a:prstGeom prst="rect">
               <a:avLst/>
@@ -5182,7 +5182,7 @@
                   <a:latin typeface="Helvetica"/>
                   <a:cs typeface="Helvetica"/>
                 </a:rPr>
-                <a:t>subHR per 0.1 ratio decline: 1.33 (1.11-1.59)  |  per IQR decline (Δ = 0.29): 2.31 (1.36-3.92)  |  IQR: [0.85, 1.15]</a:t>
+                <a:t>subHR per 0.1 ratio decline: 1.33 (1.11-1.59), p = 0.002  |  per IQR decline (Δ = 0.29): 2.31 (1.36-3.92)  |  IQR: [0.85, 1.15]</a:t>
               </a:r>
             </a:p>
           </p:txBody>

--- a/docs/pptx/whole/jx-linsubhr-ratio-hosp-immune-other.pptx
+++ b/docs/pptx/whole/jx-linsubhr-ratio-hosp-immune-other.pptx
@@ -2443,7 +2443,7 @@
           </p:nvSpPr>
           <p:spPr>
             <a:xfrm>
-              <a:off x="1615213" y="2073503"/>
+              <a:off x="1365633" y="2073503"/>
               <a:ext cx="0" cy="3649639"/>
             </a:xfrm>
             <a:custGeom>
@@ -2486,7 +2486,7 @@
           </p:nvSpPr>
           <p:spPr>
             <a:xfrm>
-              <a:off x="3387871" y="2073503"/>
+              <a:off x="3517243" y="2073503"/>
               <a:ext cx="0" cy="3649639"/>
             </a:xfrm>
             <a:custGeom>
@@ -2529,7 +2529,7 @@
           </p:nvSpPr>
           <p:spPr>
             <a:xfrm>
-              <a:off x="5160528" y="2073503"/>
+              <a:off x="5668852" y="2073503"/>
               <a:ext cx="0" cy="3649639"/>
             </a:xfrm>
             <a:custGeom>
@@ -2572,7 +2572,7 @@
           </p:nvSpPr>
           <p:spPr>
             <a:xfrm>
-              <a:off x="6933186" y="2073503"/>
+              <a:off x="7820461" y="2073503"/>
               <a:ext cx="0" cy="3649639"/>
             </a:xfrm>
             <a:custGeom>
@@ -2830,7 +2830,7 @@
           </p:nvSpPr>
           <p:spPr>
             <a:xfrm>
-              <a:off x="2501542" y="2073503"/>
+              <a:off x="2441438" y="2073503"/>
               <a:ext cx="0" cy="3649639"/>
             </a:xfrm>
             <a:custGeom>
@@ -2873,7 +2873,7 @@
           </p:nvSpPr>
           <p:spPr>
             <a:xfrm>
-              <a:off x="4274200" y="2073503"/>
+              <a:off x="4593047" y="2073503"/>
               <a:ext cx="0" cy="3649639"/>
             </a:xfrm>
             <a:custGeom>
@@ -2916,7 +2916,7 @@
           </p:nvSpPr>
           <p:spPr>
             <a:xfrm>
-              <a:off x="6046857" y="2073503"/>
+              <a:off x="6744657" y="2073503"/>
               <a:ext cx="0" cy="3649639"/>
             </a:xfrm>
             <a:custGeom>
@@ -2953,631 +2953,588 @@
         </p:sp>
         <p:sp>
           <p:nvSpPr>
-            <p:cNvPr id="20" name="pl20"/>
+            <p:cNvPr id="20" name="pg20"/>
             <p:cNvSpPr/>
             <p:nvPr/>
           </p:nvSpPr>
           <p:spPr>
             <a:xfrm>
-              <a:off x="7819515" y="2073503"/>
-              <a:ext cx="0" cy="3649639"/>
+              <a:off x="1172049" y="2073503"/>
+              <a:ext cx="7090630" cy="3370507"/>
             </a:xfrm>
             <a:custGeom>
               <a:avLst/>
               <a:pathLst>
-                <a:path w="0" h="3649639">
+                <a:path w="7090630" h="3370507">
                   <a:moveTo>
-                    <a:pt x="0" y="3649639"/>
+                    <a:pt x="768195" y="0"/>
                   </a:moveTo>
                   <a:lnTo>
-                    <a:pt x="0" y="0"/>
-                  </a:lnTo>
-                  <a:lnTo>
-                    <a:pt x="0" y="0"/>
-                  </a:lnTo>
-                </a:path>
-              </a:pathLst>
-            </a:custGeom>
-            <a:ln w="13550" cap="flat">
-              <a:solidFill>
-                <a:srgbClr val="EBEBEB">
-                  <a:alpha val="100000"/>
-                </a:srgbClr>
-              </a:solidFill>
-              <a:prstDash val="solid"/>
-              <a:round/>
-            </a:ln>
-          </p:spPr>
-          <p:txBody>
-            <a:bodyPr/>
-            <a:lstStyle/>
-            <a:p/>
-          </p:txBody>
-        </p:sp>
-        <p:sp>
-          <p:nvSpPr>
-            <p:cNvPr id="21" name="pg21"/>
-            <p:cNvSpPr/>
-            <p:nvPr/>
-          </p:nvSpPr>
-          <p:spPr>
-            <a:xfrm>
-              <a:off x="817517" y="2073503"/>
-              <a:ext cx="7235830" cy="3370507"/>
-            </a:xfrm>
-            <a:custGeom>
-              <a:avLst/>
-              <a:pathLst>
-                <a:path w="7235830" h="3370507">
-                  <a:moveTo>
-                    <a:pt x="724708" y="0"/>
-                  </a:moveTo>
-                  <a:lnTo>
-                    <a:pt x="744947" y="37425"/>
-                  </a:lnTo>
-                  <a:lnTo>
-                    <a:pt x="818707" y="168625"/>
-                  </a:lnTo>
-                  <a:lnTo>
-                    <a:pt x="892467" y="294830"/>
-                  </a:lnTo>
-                  <a:lnTo>
-                    <a:pt x="966227" y="416230"/>
-                  </a:lnTo>
-                  <a:lnTo>
-                    <a:pt x="1039987" y="533009"/>
-                  </a:lnTo>
-                  <a:lnTo>
-                    <a:pt x="1113747" y="645343"/>
-                  </a:lnTo>
-                  <a:lnTo>
-                    <a:pt x="1187508" y="753399"/>
-                  </a:lnTo>
-                  <a:lnTo>
-                    <a:pt x="1261268" y="857342"/>
-                  </a:lnTo>
-                  <a:lnTo>
-                    <a:pt x="1335028" y="957329"/>
-                  </a:lnTo>
-                  <a:lnTo>
-                    <a:pt x="1408788" y="1053508"/>
-                  </a:lnTo>
-                  <a:lnTo>
-                    <a:pt x="1482548" y="1146026"/>
-                  </a:lnTo>
-                  <a:lnTo>
-                    <a:pt x="1556308" y="1235022"/>
-                  </a:lnTo>
-                  <a:lnTo>
-                    <a:pt x="1630068" y="1320630"/>
-                  </a:lnTo>
-                  <a:lnTo>
-                    <a:pt x="1703828" y="1402979"/>
-                  </a:lnTo>
-                  <a:lnTo>
-                    <a:pt x="1777588" y="1482193"/>
-                  </a:lnTo>
-                  <a:lnTo>
-                    <a:pt x="1851348" y="1558391"/>
-                  </a:lnTo>
-                  <a:lnTo>
-                    <a:pt x="1925108" y="1631689"/>
-                  </a:lnTo>
-                  <a:lnTo>
-                    <a:pt x="1998868" y="1702196"/>
-                  </a:lnTo>
-                  <a:lnTo>
-                    <a:pt x="2072628" y="1770018"/>
-                  </a:lnTo>
-                  <a:lnTo>
-                    <a:pt x="2146388" y="1835259"/>
-                  </a:lnTo>
-                  <a:lnTo>
-                    <a:pt x="2220148" y="1898016"/>
-                  </a:lnTo>
-                  <a:lnTo>
-                    <a:pt x="2293908" y="1958384"/>
-                  </a:lnTo>
-                  <a:lnTo>
-                    <a:pt x="2367668" y="2016454"/>
-                  </a:lnTo>
-                  <a:lnTo>
-                    <a:pt x="2441428" y="2072313"/>
-                  </a:lnTo>
-                  <a:lnTo>
-                    <a:pt x="2515188" y="2126046"/>
-                  </a:lnTo>
-                  <a:lnTo>
-                    <a:pt x="2588948" y="2177733"/>
-                  </a:lnTo>
-                  <a:lnTo>
-                    <a:pt x="2662708" y="2227452"/>
-                  </a:lnTo>
-                  <a:lnTo>
-                    <a:pt x="2736468" y="2275279"/>
-                  </a:lnTo>
-                  <a:lnTo>
-                    <a:pt x="2810228" y="2321285"/>
-                  </a:lnTo>
-                  <a:lnTo>
-                    <a:pt x="2883988" y="2365539"/>
-                  </a:lnTo>
-                  <a:lnTo>
-                    <a:pt x="2957748" y="2408109"/>
-                  </a:lnTo>
-                  <a:lnTo>
-                    <a:pt x="3031508" y="2449058"/>
-                  </a:lnTo>
-                  <a:lnTo>
-                    <a:pt x="3105268" y="2488448"/>
-                  </a:lnTo>
-                  <a:lnTo>
-                    <a:pt x="3179028" y="2526339"/>
-                  </a:lnTo>
-                  <a:lnTo>
-                    <a:pt x="3252788" y="2562787"/>
-                  </a:lnTo>
-                  <a:lnTo>
-                    <a:pt x="3326548" y="2597847"/>
-                  </a:lnTo>
-                  <a:lnTo>
-                    <a:pt x="3400308" y="2631573"/>
-                  </a:lnTo>
-                  <a:lnTo>
-                    <a:pt x="3474068" y="2656495"/>
-                  </a:lnTo>
-                  <a:lnTo>
-                    <a:pt x="3547828" y="2663727"/>
-                  </a:lnTo>
-                  <a:lnTo>
-                    <a:pt x="3621588" y="2670896"/>
-                  </a:lnTo>
-                  <a:lnTo>
-                    <a:pt x="3695348" y="2678002"/>
-                  </a:lnTo>
-                  <a:lnTo>
-                    <a:pt x="3769108" y="2685046"/>
-                  </a:lnTo>
-                  <a:lnTo>
-                    <a:pt x="3842868" y="2692029"/>
-                  </a:lnTo>
-                  <a:lnTo>
-                    <a:pt x="3916628" y="2698950"/>
-                  </a:lnTo>
-                  <a:lnTo>
-                    <a:pt x="3990388" y="2705811"/>
-                  </a:lnTo>
-                  <a:lnTo>
-                    <a:pt x="4064149" y="2712612"/>
-                  </a:lnTo>
-                  <a:lnTo>
-                    <a:pt x="4137909" y="2719354"/>
-                  </a:lnTo>
-                  <a:lnTo>
-                    <a:pt x="4211669" y="2726036"/>
-                  </a:lnTo>
-                  <a:lnTo>
-                    <a:pt x="4285429" y="2732660"/>
-                  </a:lnTo>
-                  <a:lnTo>
-                    <a:pt x="4359189" y="2739227"/>
-                  </a:lnTo>
-                  <a:lnTo>
-                    <a:pt x="4432949" y="2745736"/>
-                  </a:lnTo>
-                  <a:lnTo>
-                    <a:pt x="4506709" y="2752188"/>
-                  </a:lnTo>
-                  <a:lnTo>
-                    <a:pt x="4580469" y="2758583"/>
-                  </a:lnTo>
-                  <a:lnTo>
-                    <a:pt x="4654229" y="2764923"/>
-                  </a:lnTo>
-                  <a:lnTo>
-                    <a:pt x="4727989" y="2771207"/>
-                  </a:lnTo>
-                  <a:lnTo>
-                    <a:pt x="4801749" y="2777436"/>
-                  </a:lnTo>
-                  <a:lnTo>
-                    <a:pt x="4875509" y="2783611"/>
-                  </a:lnTo>
-                  <a:lnTo>
-                    <a:pt x="4949269" y="2789732"/>
-                  </a:lnTo>
-                  <a:lnTo>
-                    <a:pt x="5023029" y="2795799"/>
-                  </a:lnTo>
-                  <a:lnTo>
-                    <a:pt x="5096789" y="2801814"/>
-                  </a:lnTo>
-                  <a:lnTo>
-                    <a:pt x="5170549" y="2807775"/>
-                  </a:lnTo>
-                  <a:lnTo>
-                    <a:pt x="5244309" y="2813685"/>
-                  </a:lnTo>
-                  <a:lnTo>
-                    <a:pt x="5318069" y="2819543"/>
-                  </a:lnTo>
-                  <a:lnTo>
-                    <a:pt x="5391829" y="2825350"/>
-                  </a:lnTo>
-                  <a:lnTo>
-                    <a:pt x="5465589" y="2831106"/>
-                  </a:lnTo>
-                  <a:lnTo>
-                    <a:pt x="5539349" y="2836811"/>
-                  </a:lnTo>
-                  <a:lnTo>
-                    <a:pt x="5613109" y="2842467"/>
-                  </a:lnTo>
-                  <a:lnTo>
-                    <a:pt x="5686869" y="2848073"/>
-                  </a:lnTo>
-                  <a:lnTo>
-                    <a:pt x="5760629" y="2853631"/>
-                  </a:lnTo>
-                  <a:lnTo>
-                    <a:pt x="5834389" y="2859139"/>
-                  </a:lnTo>
-                  <a:lnTo>
-                    <a:pt x="5908149" y="2864600"/>
-                  </a:lnTo>
-                  <a:lnTo>
-                    <a:pt x="5981909" y="2870013"/>
-                  </a:lnTo>
-                  <a:lnTo>
-                    <a:pt x="6055669" y="2875378"/>
-                  </a:lnTo>
-                  <a:lnTo>
-                    <a:pt x="6129429" y="2880697"/>
-                  </a:lnTo>
-                  <a:lnTo>
-                    <a:pt x="6203189" y="2885969"/>
-                  </a:lnTo>
-                  <a:lnTo>
-                    <a:pt x="6276949" y="2891195"/>
-                  </a:lnTo>
-                  <a:lnTo>
-                    <a:pt x="6350709" y="2896375"/>
-                  </a:lnTo>
-                  <a:lnTo>
-                    <a:pt x="6424469" y="2901510"/>
-                  </a:lnTo>
-                  <a:lnTo>
-                    <a:pt x="6498229" y="2906600"/>
-                  </a:lnTo>
-                  <a:lnTo>
-                    <a:pt x="6571989" y="2911646"/>
-                  </a:lnTo>
-                  <a:lnTo>
-                    <a:pt x="6645749" y="2916647"/>
-                  </a:lnTo>
-                  <a:lnTo>
-                    <a:pt x="6719509" y="2921605"/>
-                  </a:lnTo>
-                  <a:lnTo>
-                    <a:pt x="6793269" y="2926520"/>
-                  </a:lnTo>
-                  <a:lnTo>
-                    <a:pt x="6867029" y="2931391"/>
-                  </a:lnTo>
-                  <a:lnTo>
-                    <a:pt x="6940789" y="2936220"/>
-                  </a:lnTo>
-                  <a:lnTo>
-                    <a:pt x="7014550" y="2941007"/>
-                  </a:lnTo>
-                  <a:lnTo>
-                    <a:pt x="7088310" y="2945752"/>
-                  </a:lnTo>
-                  <a:lnTo>
-                    <a:pt x="7162070" y="2950455"/>
-                  </a:lnTo>
-                  <a:lnTo>
-                    <a:pt x="7235830" y="2955117"/>
-                  </a:lnTo>
-                  <a:lnTo>
-                    <a:pt x="7235830" y="3370507"/>
-                  </a:lnTo>
-                  <a:lnTo>
-                    <a:pt x="7162070" y="3366025"/>
-                  </a:lnTo>
-                  <a:lnTo>
-                    <a:pt x="7088310" y="3361366"/>
-                  </a:lnTo>
-                  <a:lnTo>
-                    <a:pt x="7014550" y="3356523"/>
-                  </a:lnTo>
-                  <a:lnTo>
-                    <a:pt x="6940789" y="3351488"/>
-                  </a:lnTo>
-                  <a:lnTo>
-                    <a:pt x="6867029" y="3346253"/>
-                  </a:lnTo>
-                  <a:lnTo>
-                    <a:pt x="6793269" y="3340812"/>
-                  </a:lnTo>
-                  <a:lnTo>
-                    <a:pt x="6719509" y="3335155"/>
-                  </a:lnTo>
-                  <a:lnTo>
-                    <a:pt x="6645749" y="3329275"/>
-                  </a:lnTo>
-                  <a:lnTo>
-                    <a:pt x="6571989" y="3323161"/>
-                  </a:lnTo>
-                  <a:lnTo>
-                    <a:pt x="6498229" y="3316806"/>
-                  </a:lnTo>
-                  <a:lnTo>
-                    <a:pt x="6424469" y="3310199"/>
-                  </a:lnTo>
-                  <a:lnTo>
-                    <a:pt x="6350709" y="3303331"/>
-                  </a:lnTo>
-                  <a:lnTo>
-                    <a:pt x="6276949" y="3296190"/>
-                  </a:lnTo>
-                  <a:lnTo>
-                    <a:pt x="6203189" y="3288768"/>
-                  </a:lnTo>
-                  <a:lnTo>
-                    <a:pt x="6129429" y="3281051"/>
-                  </a:lnTo>
-                  <a:lnTo>
-                    <a:pt x="6055669" y="3273029"/>
-                  </a:lnTo>
-                  <a:lnTo>
-                    <a:pt x="5981909" y="3264690"/>
-                  </a:lnTo>
-                  <a:lnTo>
-                    <a:pt x="5908149" y="3256020"/>
-                  </a:lnTo>
-                  <a:lnTo>
-                    <a:pt x="5834389" y="3247008"/>
-                  </a:lnTo>
-                  <a:lnTo>
-                    <a:pt x="5760629" y="3237639"/>
-                  </a:lnTo>
-                  <a:lnTo>
-                    <a:pt x="5686869" y="3227899"/>
-                  </a:lnTo>
-                  <a:lnTo>
-                    <a:pt x="5613109" y="3217773"/>
-                  </a:lnTo>
-                  <a:lnTo>
-                    <a:pt x="5539349" y="3207247"/>
-                  </a:lnTo>
-                  <a:lnTo>
-                    <a:pt x="5465589" y="3196304"/>
-                  </a:lnTo>
-                  <a:lnTo>
-                    <a:pt x="5391829" y="3184928"/>
-                  </a:lnTo>
-                  <a:lnTo>
-                    <a:pt x="5318069" y="3173102"/>
-                  </a:lnTo>
-                  <a:lnTo>
-                    <a:pt x="5244309" y="3160808"/>
-                  </a:lnTo>
-                  <a:lnTo>
-                    <a:pt x="5170549" y="3148027"/>
-                  </a:lnTo>
-                  <a:lnTo>
-                    <a:pt x="5096789" y="3134741"/>
-                  </a:lnTo>
-                  <a:lnTo>
-                    <a:pt x="5023029" y="3120929"/>
-                  </a:lnTo>
-                  <a:lnTo>
-                    <a:pt x="4949269" y="3106570"/>
-                  </a:lnTo>
-                  <a:lnTo>
-                    <a:pt x="4875509" y="3091642"/>
-                  </a:lnTo>
-                  <a:lnTo>
-                    <a:pt x="4801749" y="3076124"/>
-                  </a:lnTo>
-                  <a:lnTo>
-                    <a:pt x="4727989" y="3059992"/>
-                  </a:lnTo>
-                  <a:lnTo>
-                    <a:pt x="4654229" y="3043222"/>
-                  </a:lnTo>
-                  <a:lnTo>
-                    <a:pt x="4580469" y="3025787"/>
-                  </a:lnTo>
-                  <a:lnTo>
-                    <a:pt x="4506709" y="3007663"/>
-                  </a:lnTo>
-                  <a:lnTo>
-                    <a:pt x="4432949" y="2988821"/>
-                  </a:lnTo>
-                  <a:lnTo>
-                    <a:pt x="4359189" y="2969234"/>
-                  </a:lnTo>
-                  <a:lnTo>
-                    <a:pt x="4285429" y="2948872"/>
-                  </a:lnTo>
-                  <a:lnTo>
-                    <a:pt x="4211669" y="2927703"/>
-                  </a:lnTo>
-                  <a:lnTo>
-                    <a:pt x="4137909" y="2905697"/>
-                  </a:lnTo>
-                  <a:lnTo>
-                    <a:pt x="4064149" y="2882820"/>
-                  </a:lnTo>
-                  <a:lnTo>
-                    <a:pt x="3990388" y="2859038"/>
-                  </a:lnTo>
-                  <a:lnTo>
-                    <a:pt x="3916628" y="2834314"/>
-                  </a:lnTo>
-                  <a:lnTo>
-                    <a:pt x="3842868" y="2808612"/>
-                  </a:lnTo>
-                  <a:lnTo>
-                    <a:pt x="3769108" y="2781893"/>
-                  </a:lnTo>
-                  <a:lnTo>
-                    <a:pt x="3695348" y="2754116"/>
-                  </a:lnTo>
-                  <a:lnTo>
-                    <a:pt x="3621588" y="2725240"/>
-                  </a:lnTo>
-                  <a:lnTo>
-                    <a:pt x="3547828" y="2695222"/>
-                  </a:lnTo>
-                  <a:lnTo>
-                    <a:pt x="3474068" y="2664015"/>
-                  </a:lnTo>
-                  <a:lnTo>
-                    <a:pt x="3400308" y="2649199"/>
-                  </a:lnTo>
-                  <a:lnTo>
-                    <a:pt x="3326548" y="2641838"/>
-                  </a:lnTo>
-                  <a:lnTo>
-                    <a:pt x="3252788" y="2634413"/>
-                  </a:lnTo>
-                  <a:lnTo>
-                    <a:pt x="3179028" y="2626923"/>
-                  </a:lnTo>
-                  <a:lnTo>
-                    <a:pt x="3105268" y="2619366"/>
-                  </a:lnTo>
-                  <a:lnTo>
-                    <a:pt x="3031508" y="2611742"/>
-                  </a:lnTo>
-                  <a:lnTo>
-                    <a:pt x="2957748" y="2604052"/>
-                  </a:lnTo>
-                  <a:lnTo>
-                    <a:pt x="2883988" y="2596293"/>
-                  </a:lnTo>
-                  <a:lnTo>
-                    <a:pt x="2810228" y="2588466"/>
-                  </a:lnTo>
-                  <a:lnTo>
-                    <a:pt x="2736468" y="2580571"/>
-                  </a:lnTo>
-                  <a:lnTo>
-                    <a:pt x="2662708" y="2572605"/>
-                  </a:lnTo>
-                  <a:lnTo>
-                    <a:pt x="2588948" y="2564569"/>
-                  </a:lnTo>
-                  <a:lnTo>
-                    <a:pt x="2515188" y="2556463"/>
-                  </a:lnTo>
-                  <a:lnTo>
-                    <a:pt x="2441428" y="2548284"/>
-                  </a:lnTo>
-                  <a:lnTo>
-                    <a:pt x="2367668" y="2540034"/>
-                  </a:lnTo>
-                  <a:lnTo>
-                    <a:pt x="2293908" y="2531711"/>
-                  </a:lnTo>
-                  <a:lnTo>
-                    <a:pt x="2220148" y="2523315"/>
-                  </a:lnTo>
-                  <a:lnTo>
-                    <a:pt x="2146388" y="2514844"/>
-                  </a:lnTo>
-                  <a:lnTo>
-                    <a:pt x="2072628" y="2506299"/>
-                  </a:lnTo>
-                  <a:lnTo>
-                    <a:pt x="1998868" y="2497678"/>
-                  </a:lnTo>
-                  <a:lnTo>
-                    <a:pt x="1925108" y="2488982"/>
-                  </a:lnTo>
-                  <a:lnTo>
-                    <a:pt x="1851348" y="2480208"/>
-                  </a:lnTo>
-                  <a:lnTo>
-                    <a:pt x="1777588" y="2471358"/>
-                  </a:lnTo>
-                  <a:lnTo>
-                    <a:pt x="1703828" y="2462429"/>
-                  </a:lnTo>
-                  <a:lnTo>
-                    <a:pt x="1630068" y="2453421"/>
-                  </a:lnTo>
-                  <a:lnTo>
-                    <a:pt x="1556308" y="2444334"/>
-                  </a:lnTo>
-                  <a:lnTo>
-                    <a:pt x="1482548" y="2435167"/>
-                  </a:lnTo>
-                  <a:lnTo>
-                    <a:pt x="1408788" y="2425919"/>
-                  </a:lnTo>
-                  <a:lnTo>
-                    <a:pt x="1335028" y="2416590"/>
-                  </a:lnTo>
-                  <a:lnTo>
-                    <a:pt x="1261268" y="2407178"/>
-                  </a:lnTo>
-                  <a:lnTo>
-                    <a:pt x="1187508" y="2397683"/>
-                  </a:lnTo>
-                  <a:lnTo>
-                    <a:pt x="1113747" y="2388105"/>
-                  </a:lnTo>
-                  <a:lnTo>
-                    <a:pt x="1039987" y="2378442"/>
-                  </a:lnTo>
-                  <a:lnTo>
-                    <a:pt x="966227" y="2368694"/>
-                  </a:lnTo>
-                  <a:lnTo>
-                    <a:pt x="892467" y="2358859"/>
-                  </a:lnTo>
-                  <a:lnTo>
-                    <a:pt x="818707" y="2348939"/>
-                  </a:lnTo>
-                  <a:lnTo>
-                    <a:pt x="744947" y="2338930"/>
-                  </a:lnTo>
-                  <a:lnTo>
-                    <a:pt x="671187" y="2328833"/>
-                  </a:lnTo>
-                  <a:lnTo>
-                    <a:pt x="597427" y="2318648"/>
-                  </a:lnTo>
-                  <a:lnTo>
-                    <a:pt x="523667" y="2308372"/>
-                  </a:lnTo>
-                  <a:lnTo>
-                    <a:pt x="449907" y="2298006"/>
-                  </a:lnTo>
-                  <a:lnTo>
-                    <a:pt x="376147" y="2287548"/>
-                  </a:lnTo>
-                  <a:lnTo>
-                    <a:pt x="302387" y="2276998"/>
-                  </a:lnTo>
-                  <a:lnTo>
-                    <a:pt x="228627" y="2266356"/>
-                  </a:lnTo>
-                  <a:lnTo>
-                    <a:pt x="154867" y="2255619"/>
-                  </a:lnTo>
-                  <a:lnTo>
-                    <a:pt x="81107" y="2244787"/>
-                  </a:lnTo>
-                  <a:lnTo>
-                    <a:pt x="7347" y="2233860"/>
-                  </a:lnTo>
-                  <a:lnTo>
-                    <a:pt x="0" y="2232762"/>
+                    <a:pt x="787847" y="37425"/>
+                  </a:lnTo>
+                  <a:lnTo>
+                    <a:pt x="859470" y="168625"/>
+                  </a:lnTo>
+                  <a:lnTo>
+                    <a:pt x="931092" y="294830"/>
+                  </a:lnTo>
+                  <a:lnTo>
+                    <a:pt x="1002715" y="416230"/>
+                  </a:lnTo>
+                  <a:lnTo>
+                    <a:pt x="1074337" y="533009"/>
+                  </a:lnTo>
+                  <a:lnTo>
+                    <a:pt x="1145960" y="645343"/>
+                  </a:lnTo>
+                  <a:lnTo>
+                    <a:pt x="1217582" y="753399"/>
+                  </a:lnTo>
+                  <a:lnTo>
+                    <a:pt x="1289205" y="857342"/>
+                  </a:lnTo>
+                  <a:lnTo>
+                    <a:pt x="1360827" y="957329"/>
+                  </a:lnTo>
+                  <a:lnTo>
+                    <a:pt x="1432450" y="1053508"/>
+                  </a:lnTo>
+                  <a:lnTo>
+                    <a:pt x="1504073" y="1146026"/>
+                  </a:lnTo>
+                  <a:lnTo>
+                    <a:pt x="1575695" y="1235022"/>
+                  </a:lnTo>
+                  <a:lnTo>
+                    <a:pt x="1647318" y="1320630"/>
+                  </a:lnTo>
+                  <a:lnTo>
+                    <a:pt x="1718940" y="1402979"/>
+                  </a:lnTo>
+                  <a:lnTo>
+                    <a:pt x="1790563" y="1482193"/>
+                  </a:lnTo>
+                  <a:lnTo>
+                    <a:pt x="1862185" y="1558391"/>
+                  </a:lnTo>
+                  <a:lnTo>
+                    <a:pt x="1933808" y="1631689"/>
+                  </a:lnTo>
+                  <a:lnTo>
+                    <a:pt x="2005430" y="1702196"/>
+                  </a:lnTo>
+                  <a:lnTo>
+                    <a:pt x="2077053" y="1770018"/>
+                  </a:lnTo>
+                  <a:lnTo>
+                    <a:pt x="2148675" y="1835259"/>
+                  </a:lnTo>
+                  <a:lnTo>
+                    <a:pt x="2220298" y="1898016"/>
+                  </a:lnTo>
+                  <a:lnTo>
+                    <a:pt x="2291920" y="1958384"/>
+                  </a:lnTo>
+                  <a:lnTo>
+                    <a:pt x="2363543" y="2016454"/>
+                  </a:lnTo>
+                  <a:lnTo>
+                    <a:pt x="2435165" y="2072313"/>
+                  </a:lnTo>
+                  <a:lnTo>
+                    <a:pt x="2506788" y="2126046"/>
+                  </a:lnTo>
+                  <a:lnTo>
+                    <a:pt x="2578410" y="2177733"/>
+                  </a:lnTo>
+                  <a:lnTo>
+                    <a:pt x="2650033" y="2227452"/>
+                  </a:lnTo>
+                  <a:lnTo>
+                    <a:pt x="2721655" y="2275279"/>
+                  </a:lnTo>
+                  <a:lnTo>
+                    <a:pt x="2793278" y="2321285"/>
+                  </a:lnTo>
+                  <a:lnTo>
+                    <a:pt x="2864901" y="2365539"/>
+                  </a:lnTo>
+                  <a:lnTo>
+                    <a:pt x="2936523" y="2408109"/>
+                  </a:lnTo>
+                  <a:lnTo>
+                    <a:pt x="3008146" y="2449058"/>
+                  </a:lnTo>
+                  <a:lnTo>
+                    <a:pt x="3079768" y="2488448"/>
+                  </a:lnTo>
+                  <a:lnTo>
+                    <a:pt x="3151391" y="2526339"/>
+                  </a:lnTo>
+                  <a:lnTo>
+                    <a:pt x="3223013" y="2562787"/>
+                  </a:lnTo>
+                  <a:lnTo>
+                    <a:pt x="3294636" y="2597847"/>
+                  </a:lnTo>
+                  <a:lnTo>
+                    <a:pt x="3366258" y="2631573"/>
+                  </a:lnTo>
+                  <a:lnTo>
+                    <a:pt x="3437881" y="2656495"/>
+                  </a:lnTo>
+                  <a:lnTo>
+                    <a:pt x="3509503" y="2663727"/>
+                  </a:lnTo>
+                  <a:lnTo>
+                    <a:pt x="3581126" y="2670896"/>
+                  </a:lnTo>
+                  <a:lnTo>
+                    <a:pt x="3652748" y="2678002"/>
+                  </a:lnTo>
+                  <a:lnTo>
+                    <a:pt x="3724371" y="2685046"/>
+                  </a:lnTo>
+                  <a:lnTo>
+                    <a:pt x="3795993" y="2692029"/>
+                  </a:lnTo>
+                  <a:lnTo>
+                    <a:pt x="3867616" y="2698950"/>
+                  </a:lnTo>
+                  <a:lnTo>
+                    <a:pt x="3939238" y="2705811"/>
+                  </a:lnTo>
+                  <a:lnTo>
+                    <a:pt x="4010861" y="2712612"/>
+                  </a:lnTo>
+                  <a:lnTo>
+                    <a:pt x="4082483" y="2719354"/>
+                  </a:lnTo>
+                  <a:lnTo>
+                    <a:pt x="4154106" y="2726036"/>
+                  </a:lnTo>
+                  <a:lnTo>
+                    <a:pt x="4225729" y="2732660"/>
+                  </a:lnTo>
+                  <a:lnTo>
+                    <a:pt x="4297351" y="2739227"/>
+                  </a:lnTo>
+                  <a:lnTo>
+                    <a:pt x="4368974" y="2745736"/>
+                  </a:lnTo>
+                  <a:lnTo>
+                    <a:pt x="4440596" y="2752188"/>
+                  </a:lnTo>
+                  <a:lnTo>
+                    <a:pt x="4512219" y="2758583"/>
+                  </a:lnTo>
+                  <a:lnTo>
+                    <a:pt x="4583841" y="2764923"/>
+                  </a:lnTo>
+                  <a:lnTo>
+                    <a:pt x="4655464" y="2771207"/>
+                  </a:lnTo>
+                  <a:lnTo>
+                    <a:pt x="4727086" y="2777436"/>
+                  </a:lnTo>
+                  <a:lnTo>
+                    <a:pt x="4798709" y="2783611"/>
+                  </a:lnTo>
+                  <a:lnTo>
+                    <a:pt x="4870331" y="2789732"/>
+                  </a:lnTo>
+                  <a:lnTo>
+                    <a:pt x="4941954" y="2795799"/>
+                  </a:lnTo>
+                  <a:lnTo>
+                    <a:pt x="5013576" y="2801814"/>
+                  </a:lnTo>
+                  <a:lnTo>
+                    <a:pt x="5085199" y="2807775"/>
+                  </a:lnTo>
+                  <a:lnTo>
+                    <a:pt x="5156821" y="2813685"/>
+                  </a:lnTo>
+                  <a:lnTo>
+                    <a:pt x="5228444" y="2819543"/>
+                  </a:lnTo>
+                  <a:lnTo>
+                    <a:pt x="5300066" y="2825350"/>
+                  </a:lnTo>
+                  <a:lnTo>
+                    <a:pt x="5371689" y="2831106"/>
+                  </a:lnTo>
+                  <a:lnTo>
+                    <a:pt x="5443311" y="2836811"/>
+                  </a:lnTo>
+                  <a:lnTo>
+                    <a:pt x="5514934" y="2842467"/>
+                  </a:lnTo>
+                  <a:lnTo>
+                    <a:pt x="5586557" y="2848073"/>
+                  </a:lnTo>
+                  <a:lnTo>
+                    <a:pt x="5658179" y="2853631"/>
+                  </a:lnTo>
+                  <a:lnTo>
+                    <a:pt x="5729802" y="2859139"/>
+                  </a:lnTo>
+                  <a:lnTo>
+                    <a:pt x="5801424" y="2864600"/>
+                  </a:lnTo>
+                  <a:lnTo>
+                    <a:pt x="5873047" y="2870013"/>
+                  </a:lnTo>
+                  <a:lnTo>
+                    <a:pt x="5944669" y="2875378"/>
+                  </a:lnTo>
+                  <a:lnTo>
+                    <a:pt x="6016292" y="2880697"/>
+                  </a:lnTo>
+                  <a:lnTo>
+                    <a:pt x="6087914" y="2885969"/>
+                  </a:lnTo>
+                  <a:lnTo>
+                    <a:pt x="6159537" y="2891195"/>
+                  </a:lnTo>
+                  <a:lnTo>
+                    <a:pt x="6231159" y="2896375"/>
+                  </a:lnTo>
+                  <a:lnTo>
+                    <a:pt x="6302782" y="2901510"/>
+                  </a:lnTo>
+                  <a:lnTo>
+                    <a:pt x="6374404" y="2906600"/>
+                  </a:lnTo>
+                  <a:lnTo>
+                    <a:pt x="6446027" y="2911646"/>
+                  </a:lnTo>
+                  <a:lnTo>
+                    <a:pt x="6517649" y="2916647"/>
+                  </a:lnTo>
+                  <a:lnTo>
+                    <a:pt x="6589272" y="2921605"/>
+                  </a:lnTo>
+                  <a:lnTo>
+                    <a:pt x="6660894" y="2926520"/>
+                  </a:lnTo>
+                  <a:lnTo>
+                    <a:pt x="6732517" y="2931391"/>
+                  </a:lnTo>
+                  <a:lnTo>
+                    <a:pt x="6804139" y="2936220"/>
+                  </a:lnTo>
+                  <a:lnTo>
+                    <a:pt x="6875762" y="2941007"/>
+                  </a:lnTo>
+                  <a:lnTo>
+                    <a:pt x="6947385" y="2945752"/>
+                  </a:lnTo>
+                  <a:lnTo>
+                    <a:pt x="7019007" y="2950455"/>
+                  </a:lnTo>
+                  <a:lnTo>
+                    <a:pt x="7090630" y="2955117"/>
+                  </a:lnTo>
+                  <a:lnTo>
+                    <a:pt x="7090630" y="3370507"/>
+                  </a:lnTo>
+                  <a:lnTo>
+                    <a:pt x="7019007" y="3366025"/>
+                  </a:lnTo>
+                  <a:lnTo>
+                    <a:pt x="6947385" y="3361366"/>
+                  </a:lnTo>
+                  <a:lnTo>
+                    <a:pt x="6875762" y="3356523"/>
+                  </a:lnTo>
+                  <a:lnTo>
+                    <a:pt x="6804139" y="3351488"/>
+                  </a:lnTo>
+                  <a:lnTo>
+                    <a:pt x="6732517" y="3346253"/>
+                  </a:lnTo>
+                  <a:lnTo>
+                    <a:pt x="6660894" y="3340812"/>
+                  </a:lnTo>
+                  <a:lnTo>
+                    <a:pt x="6589272" y="3335155"/>
+                  </a:lnTo>
+                  <a:lnTo>
+                    <a:pt x="6517649" y="3329275"/>
+                  </a:lnTo>
+                  <a:lnTo>
+                    <a:pt x="6446027" y="3323161"/>
+                  </a:lnTo>
+                  <a:lnTo>
+                    <a:pt x="6374404" y="3316806"/>
+                  </a:lnTo>
+                  <a:lnTo>
+                    <a:pt x="6302782" y="3310199"/>
+                  </a:lnTo>
+                  <a:lnTo>
+                    <a:pt x="6231159" y="3303331"/>
+                  </a:lnTo>
+                  <a:lnTo>
+                    <a:pt x="6159537" y="3296190"/>
+                  </a:lnTo>
+                  <a:lnTo>
+                    <a:pt x="6087914" y="3288768"/>
+                  </a:lnTo>
+                  <a:lnTo>
+                    <a:pt x="6016292" y="3281051"/>
+                  </a:lnTo>
+                  <a:lnTo>
+                    <a:pt x="5944669" y="3273029"/>
+                  </a:lnTo>
+                  <a:lnTo>
+                    <a:pt x="5873047" y="3264690"/>
+                  </a:lnTo>
+                  <a:lnTo>
+                    <a:pt x="5801424" y="3256020"/>
+                  </a:lnTo>
+                  <a:lnTo>
+                    <a:pt x="5729802" y="3247008"/>
+                  </a:lnTo>
+                  <a:lnTo>
+                    <a:pt x="5658179" y="3237639"/>
+                  </a:lnTo>
+                  <a:lnTo>
+                    <a:pt x="5586557" y="3227899"/>
+                  </a:lnTo>
+                  <a:lnTo>
+                    <a:pt x="5514934" y="3217773"/>
+                  </a:lnTo>
+                  <a:lnTo>
+                    <a:pt x="5443311" y="3207247"/>
+                  </a:lnTo>
+                  <a:lnTo>
+                    <a:pt x="5371689" y="3196304"/>
+                  </a:lnTo>
+                  <a:lnTo>
+                    <a:pt x="5300066" y="3184928"/>
+                  </a:lnTo>
+                  <a:lnTo>
+                    <a:pt x="5228444" y="3173102"/>
+                  </a:lnTo>
+                  <a:lnTo>
+                    <a:pt x="5156821" y="3160808"/>
+                  </a:lnTo>
+                  <a:lnTo>
+                    <a:pt x="5085199" y="3148027"/>
+                  </a:lnTo>
+                  <a:lnTo>
+                    <a:pt x="5013576" y="3134741"/>
+                  </a:lnTo>
+                  <a:lnTo>
+                    <a:pt x="4941954" y="3120929"/>
+                  </a:lnTo>
+                  <a:lnTo>
+                    <a:pt x="4870331" y="3106570"/>
+                  </a:lnTo>
+                  <a:lnTo>
+                    <a:pt x="4798709" y="3091642"/>
+                  </a:lnTo>
+                  <a:lnTo>
+                    <a:pt x="4727086" y="3076124"/>
+                  </a:lnTo>
+                  <a:lnTo>
+                    <a:pt x="4655464" y="3059992"/>
+                  </a:lnTo>
+                  <a:lnTo>
+                    <a:pt x="4583841" y="3043222"/>
+                  </a:lnTo>
+                  <a:lnTo>
+                    <a:pt x="4512219" y="3025787"/>
+                  </a:lnTo>
+                  <a:lnTo>
+                    <a:pt x="4440596" y="3007663"/>
+                  </a:lnTo>
+                  <a:lnTo>
+                    <a:pt x="4368974" y="2988821"/>
+                  </a:lnTo>
+                  <a:lnTo>
+                    <a:pt x="4297351" y="2969234"/>
+                  </a:lnTo>
+                  <a:lnTo>
+                    <a:pt x="4225729" y="2948872"/>
+                  </a:lnTo>
+                  <a:lnTo>
+                    <a:pt x="4154106" y="2927703"/>
+                  </a:lnTo>
+                  <a:lnTo>
+                    <a:pt x="4082483" y="2905697"/>
+                  </a:lnTo>
+                  <a:lnTo>
+                    <a:pt x="4010861" y="2882820"/>
+                  </a:lnTo>
+                  <a:lnTo>
+                    <a:pt x="3939238" y="2859038"/>
+                  </a:lnTo>
+                  <a:lnTo>
+                    <a:pt x="3867616" y="2834314"/>
+                  </a:lnTo>
+                  <a:lnTo>
+                    <a:pt x="3795993" y="2808612"/>
+                  </a:lnTo>
+                  <a:lnTo>
+                    <a:pt x="3724371" y="2781893"/>
+                  </a:lnTo>
+                  <a:lnTo>
+                    <a:pt x="3652748" y="2754116"/>
+                  </a:lnTo>
+                  <a:lnTo>
+                    <a:pt x="3581126" y="2725240"/>
+                  </a:lnTo>
+                  <a:lnTo>
+                    <a:pt x="3509503" y="2695222"/>
+                  </a:lnTo>
+                  <a:lnTo>
+                    <a:pt x="3437881" y="2664015"/>
+                  </a:lnTo>
+                  <a:lnTo>
+                    <a:pt x="3366258" y="2649199"/>
+                  </a:lnTo>
+                  <a:lnTo>
+                    <a:pt x="3294636" y="2641838"/>
+                  </a:lnTo>
+                  <a:lnTo>
+                    <a:pt x="3223013" y="2634413"/>
+                  </a:lnTo>
+                  <a:lnTo>
+                    <a:pt x="3151391" y="2626923"/>
+                  </a:lnTo>
+                  <a:lnTo>
+                    <a:pt x="3079768" y="2619366"/>
+                  </a:lnTo>
+                  <a:lnTo>
+                    <a:pt x="3008146" y="2611742"/>
+                  </a:lnTo>
+                  <a:lnTo>
+                    <a:pt x="2936523" y="2604052"/>
+                  </a:lnTo>
+                  <a:lnTo>
+                    <a:pt x="2864901" y="2596293"/>
+                  </a:lnTo>
+                  <a:lnTo>
+                    <a:pt x="2793278" y="2588466"/>
+                  </a:lnTo>
+                  <a:lnTo>
+                    <a:pt x="2721655" y="2580571"/>
+                  </a:lnTo>
+                  <a:lnTo>
+                    <a:pt x="2650033" y="2572605"/>
+                  </a:lnTo>
+                  <a:lnTo>
+                    <a:pt x="2578410" y="2564569"/>
+                  </a:lnTo>
+                  <a:lnTo>
+                    <a:pt x="2506788" y="2556463"/>
+                  </a:lnTo>
+                  <a:lnTo>
+                    <a:pt x="2435165" y="2548284"/>
+                  </a:lnTo>
+                  <a:lnTo>
+                    <a:pt x="2363543" y="2540034"/>
+                  </a:lnTo>
+                  <a:lnTo>
+                    <a:pt x="2291920" y="2531711"/>
+                  </a:lnTo>
+                  <a:lnTo>
+                    <a:pt x="2220298" y="2523315"/>
+                  </a:lnTo>
+                  <a:lnTo>
+                    <a:pt x="2148675" y="2514844"/>
+                  </a:lnTo>
+                  <a:lnTo>
+                    <a:pt x="2077053" y="2506299"/>
+                  </a:lnTo>
+                  <a:lnTo>
+                    <a:pt x="2005430" y="2497678"/>
+                  </a:lnTo>
+                  <a:lnTo>
+                    <a:pt x="1933808" y="2488982"/>
+                  </a:lnTo>
+                  <a:lnTo>
+                    <a:pt x="1862185" y="2480208"/>
+                  </a:lnTo>
+                  <a:lnTo>
+                    <a:pt x="1790563" y="2471358"/>
+                  </a:lnTo>
+                  <a:lnTo>
+                    <a:pt x="1718940" y="2462429"/>
+                  </a:lnTo>
+                  <a:lnTo>
+                    <a:pt x="1647318" y="2453421"/>
+                  </a:lnTo>
+                  <a:lnTo>
+                    <a:pt x="1575695" y="2444334"/>
+                  </a:lnTo>
+                  <a:lnTo>
+                    <a:pt x="1504073" y="2435167"/>
+                  </a:lnTo>
+                  <a:lnTo>
+                    <a:pt x="1432450" y="2425919"/>
+                  </a:lnTo>
+                  <a:lnTo>
+                    <a:pt x="1360827" y="2416590"/>
+                  </a:lnTo>
+                  <a:lnTo>
+                    <a:pt x="1289205" y="2407178"/>
+                  </a:lnTo>
+                  <a:lnTo>
+                    <a:pt x="1217582" y="2397683"/>
+                  </a:lnTo>
+                  <a:lnTo>
+                    <a:pt x="1145960" y="2388105"/>
+                  </a:lnTo>
+                  <a:lnTo>
+                    <a:pt x="1074337" y="2378442"/>
+                  </a:lnTo>
+                  <a:lnTo>
+                    <a:pt x="1002715" y="2368694"/>
+                  </a:lnTo>
+                  <a:lnTo>
+                    <a:pt x="931092" y="2358859"/>
+                  </a:lnTo>
+                  <a:lnTo>
+                    <a:pt x="859470" y="2348939"/>
+                  </a:lnTo>
+                  <a:lnTo>
+                    <a:pt x="787847" y="2338930"/>
+                  </a:lnTo>
+                  <a:lnTo>
+                    <a:pt x="716225" y="2328833"/>
+                  </a:lnTo>
+                  <a:lnTo>
+                    <a:pt x="644602" y="2318648"/>
+                  </a:lnTo>
+                  <a:lnTo>
+                    <a:pt x="572980" y="2308372"/>
+                  </a:lnTo>
+                  <a:lnTo>
+                    <a:pt x="501357" y="2298006"/>
+                  </a:lnTo>
+                  <a:lnTo>
+                    <a:pt x="429735" y="2287548"/>
+                  </a:lnTo>
+                  <a:lnTo>
+                    <a:pt x="358112" y="2276998"/>
+                  </a:lnTo>
+                  <a:lnTo>
+                    <a:pt x="286490" y="2266356"/>
+                  </a:lnTo>
+                  <a:lnTo>
+                    <a:pt x="214867" y="2255619"/>
+                  </a:lnTo>
+                  <a:lnTo>
+                    <a:pt x="143245" y="2244787"/>
+                  </a:lnTo>
+                  <a:lnTo>
+                    <a:pt x="71622" y="2233860"/>
+                  </a:lnTo>
+                  <a:lnTo>
+                    <a:pt x="0" y="2222837"/>
                   </a:lnTo>
                   <a:close/>
                 </a:path>
@@ -3597,288 +3554,613 @@
         </p:sp>
         <p:sp>
           <p:nvSpPr>
+            <p:cNvPr id="21" name="pl21"/>
+            <p:cNvSpPr/>
+            <p:nvPr/>
+          </p:nvSpPr>
+          <p:spPr>
+            <a:xfrm>
+              <a:off x="1940244" y="2073503"/>
+              <a:ext cx="6322435" cy="2955117"/>
+            </a:xfrm>
+            <a:custGeom>
+              <a:avLst/>
+              <a:pathLst>
+                <a:path w="6322435" h="2955117">
+                  <a:moveTo>
+                    <a:pt x="0" y="0"/>
+                  </a:moveTo>
+                  <a:lnTo>
+                    <a:pt x="19652" y="37425"/>
+                  </a:lnTo>
+                  <a:lnTo>
+                    <a:pt x="91275" y="168625"/>
+                  </a:lnTo>
+                  <a:lnTo>
+                    <a:pt x="162897" y="294830"/>
+                  </a:lnTo>
+                  <a:lnTo>
+                    <a:pt x="234520" y="416230"/>
+                  </a:lnTo>
+                  <a:lnTo>
+                    <a:pt x="306142" y="533009"/>
+                  </a:lnTo>
+                  <a:lnTo>
+                    <a:pt x="377765" y="645343"/>
+                  </a:lnTo>
+                  <a:lnTo>
+                    <a:pt x="449387" y="753399"/>
+                  </a:lnTo>
+                  <a:lnTo>
+                    <a:pt x="521010" y="857342"/>
+                  </a:lnTo>
+                  <a:lnTo>
+                    <a:pt x="592632" y="957329"/>
+                  </a:lnTo>
+                  <a:lnTo>
+                    <a:pt x="664255" y="1053508"/>
+                  </a:lnTo>
+                  <a:lnTo>
+                    <a:pt x="735877" y="1146026"/>
+                  </a:lnTo>
+                  <a:lnTo>
+                    <a:pt x="807500" y="1235022"/>
+                  </a:lnTo>
+                  <a:lnTo>
+                    <a:pt x="879123" y="1320630"/>
+                  </a:lnTo>
+                  <a:lnTo>
+                    <a:pt x="950745" y="1402979"/>
+                  </a:lnTo>
+                  <a:lnTo>
+                    <a:pt x="1022368" y="1482193"/>
+                  </a:lnTo>
+                  <a:lnTo>
+                    <a:pt x="1093990" y="1558391"/>
+                  </a:lnTo>
+                  <a:lnTo>
+                    <a:pt x="1165613" y="1631689"/>
+                  </a:lnTo>
+                  <a:lnTo>
+                    <a:pt x="1237235" y="1702196"/>
+                  </a:lnTo>
+                  <a:lnTo>
+                    <a:pt x="1308858" y="1770018"/>
+                  </a:lnTo>
+                  <a:lnTo>
+                    <a:pt x="1380480" y="1835259"/>
+                  </a:lnTo>
+                  <a:lnTo>
+                    <a:pt x="1452103" y="1898016"/>
+                  </a:lnTo>
+                  <a:lnTo>
+                    <a:pt x="1523725" y="1958384"/>
+                  </a:lnTo>
+                  <a:lnTo>
+                    <a:pt x="1595348" y="2016454"/>
+                  </a:lnTo>
+                  <a:lnTo>
+                    <a:pt x="1666970" y="2072313"/>
+                  </a:lnTo>
+                  <a:lnTo>
+                    <a:pt x="1738593" y="2126046"/>
+                  </a:lnTo>
+                  <a:lnTo>
+                    <a:pt x="1810215" y="2177733"/>
+                  </a:lnTo>
+                  <a:lnTo>
+                    <a:pt x="1881838" y="2227452"/>
+                  </a:lnTo>
+                  <a:lnTo>
+                    <a:pt x="1953460" y="2275279"/>
+                  </a:lnTo>
+                  <a:lnTo>
+                    <a:pt x="2025083" y="2321285"/>
+                  </a:lnTo>
+                  <a:lnTo>
+                    <a:pt x="2096705" y="2365539"/>
+                  </a:lnTo>
+                  <a:lnTo>
+                    <a:pt x="2168328" y="2408109"/>
+                  </a:lnTo>
+                  <a:lnTo>
+                    <a:pt x="2239951" y="2449058"/>
+                  </a:lnTo>
+                  <a:lnTo>
+                    <a:pt x="2311573" y="2488448"/>
+                  </a:lnTo>
+                  <a:lnTo>
+                    <a:pt x="2383196" y="2526339"/>
+                  </a:lnTo>
+                  <a:lnTo>
+                    <a:pt x="2454818" y="2562787"/>
+                  </a:lnTo>
+                  <a:lnTo>
+                    <a:pt x="2526441" y="2597847"/>
+                  </a:lnTo>
+                  <a:lnTo>
+                    <a:pt x="2598063" y="2631573"/>
+                  </a:lnTo>
+                  <a:lnTo>
+                    <a:pt x="2669686" y="2656495"/>
+                  </a:lnTo>
+                  <a:lnTo>
+                    <a:pt x="2741308" y="2663727"/>
+                  </a:lnTo>
+                  <a:lnTo>
+                    <a:pt x="2812931" y="2670896"/>
+                  </a:lnTo>
+                  <a:lnTo>
+                    <a:pt x="2884553" y="2678002"/>
+                  </a:lnTo>
+                  <a:lnTo>
+                    <a:pt x="2956176" y="2685046"/>
+                  </a:lnTo>
+                  <a:lnTo>
+                    <a:pt x="3027798" y="2692029"/>
+                  </a:lnTo>
+                  <a:lnTo>
+                    <a:pt x="3099421" y="2698950"/>
+                  </a:lnTo>
+                  <a:lnTo>
+                    <a:pt x="3171043" y="2705811"/>
+                  </a:lnTo>
+                  <a:lnTo>
+                    <a:pt x="3242666" y="2712612"/>
+                  </a:lnTo>
+                  <a:lnTo>
+                    <a:pt x="3314288" y="2719354"/>
+                  </a:lnTo>
+                  <a:lnTo>
+                    <a:pt x="3385911" y="2726036"/>
+                  </a:lnTo>
+                  <a:lnTo>
+                    <a:pt x="3457533" y="2732660"/>
+                  </a:lnTo>
+                  <a:lnTo>
+                    <a:pt x="3529156" y="2739227"/>
+                  </a:lnTo>
+                  <a:lnTo>
+                    <a:pt x="3600779" y="2745736"/>
+                  </a:lnTo>
+                  <a:lnTo>
+                    <a:pt x="3672401" y="2752188"/>
+                  </a:lnTo>
+                  <a:lnTo>
+                    <a:pt x="3744024" y="2758583"/>
+                  </a:lnTo>
+                  <a:lnTo>
+                    <a:pt x="3815646" y="2764923"/>
+                  </a:lnTo>
+                  <a:lnTo>
+                    <a:pt x="3887269" y="2771207"/>
+                  </a:lnTo>
+                  <a:lnTo>
+                    <a:pt x="3958891" y="2777436"/>
+                  </a:lnTo>
+                  <a:lnTo>
+                    <a:pt x="4030514" y="2783611"/>
+                  </a:lnTo>
+                  <a:lnTo>
+                    <a:pt x="4102136" y="2789732"/>
+                  </a:lnTo>
+                  <a:lnTo>
+                    <a:pt x="4173759" y="2795799"/>
+                  </a:lnTo>
+                  <a:lnTo>
+                    <a:pt x="4245381" y="2801814"/>
+                  </a:lnTo>
+                  <a:lnTo>
+                    <a:pt x="4317004" y="2807775"/>
+                  </a:lnTo>
+                  <a:lnTo>
+                    <a:pt x="4388626" y="2813685"/>
+                  </a:lnTo>
+                  <a:lnTo>
+                    <a:pt x="4460249" y="2819543"/>
+                  </a:lnTo>
+                  <a:lnTo>
+                    <a:pt x="4531871" y="2825350"/>
+                  </a:lnTo>
+                  <a:lnTo>
+                    <a:pt x="4603494" y="2831106"/>
+                  </a:lnTo>
+                  <a:lnTo>
+                    <a:pt x="4675116" y="2836811"/>
+                  </a:lnTo>
+                  <a:lnTo>
+                    <a:pt x="4746739" y="2842467"/>
+                  </a:lnTo>
+                  <a:lnTo>
+                    <a:pt x="4818361" y="2848073"/>
+                  </a:lnTo>
+                  <a:lnTo>
+                    <a:pt x="4889984" y="2853631"/>
+                  </a:lnTo>
+                  <a:lnTo>
+                    <a:pt x="4961607" y="2859139"/>
+                  </a:lnTo>
+                  <a:lnTo>
+                    <a:pt x="5033229" y="2864600"/>
+                  </a:lnTo>
+                  <a:lnTo>
+                    <a:pt x="5104852" y="2870013"/>
+                  </a:lnTo>
+                  <a:lnTo>
+                    <a:pt x="5176474" y="2875378"/>
+                  </a:lnTo>
+                  <a:lnTo>
+                    <a:pt x="5248097" y="2880697"/>
+                  </a:lnTo>
+                  <a:lnTo>
+                    <a:pt x="5319719" y="2885969"/>
+                  </a:lnTo>
+                  <a:lnTo>
+                    <a:pt x="5391342" y="2891195"/>
+                  </a:lnTo>
+                  <a:lnTo>
+                    <a:pt x="5462964" y="2896375"/>
+                  </a:lnTo>
+                  <a:lnTo>
+                    <a:pt x="5534587" y="2901510"/>
+                  </a:lnTo>
+                  <a:lnTo>
+                    <a:pt x="5606209" y="2906600"/>
+                  </a:lnTo>
+                  <a:lnTo>
+                    <a:pt x="5677832" y="2911646"/>
+                  </a:lnTo>
+                  <a:lnTo>
+                    <a:pt x="5749454" y="2916647"/>
+                  </a:lnTo>
+                  <a:lnTo>
+                    <a:pt x="5821077" y="2921605"/>
+                  </a:lnTo>
+                  <a:lnTo>
+                    <a:pt x="5892699" y="2926520"/>
+                  </a:lnTo>
+                  <a:lnTo>
+                    <a:pt x="5964322" y="2931391"/>
+                  </a:lnTo>
+                  <a:lnTo>
+                    <a:pt x="6035944" y="2936220"/>
+                  </a:lnTo>
+                  <a:lnTo>
+                    <a:pt x="6107567" y="2941007"/>
+                  </a:lnTo>
+                  <a:lnTo>
+                    <a:pt x="6179189" y="2945752"/>
+                  </a:lnTo>
+                  <a:lnTo>
+                    <a:pt x="6250812" y="2950455"/>
+                  </a:lnTo>
+                  <a:lnTo>
+                    <a:pt x="6322435" y="2955117"/>
+                  </a:lnTo>
+                </a:path>
+              </a:pathLst>
+            </a:custGeom>
+          </p:spPr>
+          <p:txBody>
+            <a:bodyPr/>
+            <a:lstStyle/>
+            <a:p/>
+          </p:txBody>
+        </p:sp>
+        <p:sp>
+          <p:nvSpPr>
             <p:cNvPr id="22" name="pl22"/>
             <p:cNvSpPr/>
             <p:nvPr/>
           </p:nvSpPr>
           <p:spPr>
             <a:xfrm>
-              <a:off x="1542226" y="2073503"/>
-              <a:ext cx="6511121" cy="2955117"/>
+              <a:off x="1172049" y="4296340"/>
+              <a:ext cx="7090630" cy="1147669"/>
             </a:xfrm>
             <a:custGeom>
               <a:avLst/>
               <a:pathLst>
-                <a:path w="6511121" h="2955117">
+                <a:path w="7090630" h="1147669">
                   <a:moveTo>
+                    <a:pt x="7090630" y="1147669"/>
+                  </a:moveTo>
+                  <a:lnTo>
+                    <a:pt x="7019007" y="1143188"/>
+                  </a:lnTo>
+                  <a:lnTo>
+                    <a:pt x="6947385" y="1138529"/>
+                  </a:lnTo>
+                  <a:lnTo>
+                    <a:pt x="6875762" y="1133685"/>
+                  </a:lnTo>
+                  <a:lnTo>
+                    <a:pt x="6804139" y="1128650"/>
+                  </a:lnTo>
+                  <a:lnTo>
+                    <a:pt x="6732517" y="1123416"/>
+                  </a:lnTo>
+                  <a:lnTo>
+                    <a:pt x="6660894" y="1117975"/>
+                  </a:lnTo>
+                  <a:lnTo>
+                    <a:pt x="6589272" y="1112318"/>
+                  </a:lnTo>
+                  <a:lnTo>
+                    <a:pt x="6517649" y="1106437"/>
+                  </a:lnTo>
+                  <a:lnTo>
+                    <a:pt x="6446027" y="1100324"/>
+                  </a:lnTo>
+                  <a:lnTo>
+                    <a:pt x="6374404" y="1093968"/>
+                  </a:lnTo>
+                  <a:lnTo>
+                    <a:pt x="6302782" y="1087361"/>
+                  </a:lnTo>
+                  <a:lnTo>
+                    <a:pt x="6231159" y="1080493"/>
+                  </a:lnTo>
+                  <a:lnTo>
+                    <a:pt x="6159537" y="1073353"/>
+                  </a:lnTo>
+                  <a:lnTo>
+                    <a:pt x="6087914" y="1065930"/>
+                  </a:lnTo>
+                  <a:lnTo>
+                    <a:pt x="6016292" y="1058214"/>
+                  </a:lnTo>
+                  <a:lnTo>
+                    <a:pt x="5944669" y="1050192"/>
+                  </a:lnTo>
+                  <a:lnTo>
+                    <a:pt x="5873047" y="1041852"/>
+                  </a:lnTo>
+                  <a:lnTo>
+                    <a:pt x="5801424" y="1033183"/>
+                  </a:lnTo>
+                  <a:lnTo>
+                    <a:pt x="5729802" y="1024170"/>
+                  </a:lnTo>
+                  <a:lnTo>
+                    <a:pt x="5658179" y="1014801"/>
+                  </a:lnTo>
+                  <a:lnTo>
+                    <a:pt x="5586557" y="1005061"/>
+                  </a:lnTo>
+                  <a:lnTo>
+                    <a:pt x="5514934" y="994936"/>
+                  </a:lnTo>
+                  <a:lnTo>
+                    <a:pt x="5443311" y="984409"/>
+                  </a:lnTo>
+                  <a:lnTo>
+                    <a:pt x="5371689" y="973467"/>
+                  </a:lnTo>
+                  <a:lnTo>
+                    <a:pt x="5300066" y="962091"/>
+                  </a:lnTo>
+                  <a:lnTo>
+                    <a:pt x="5228444" y="950265"/>
+                  </a:lnTo>
+                  <a:lnTo>
+                    <a:pt x="5156821" y="937970"/>
+                  </a:lnTo>
+                  <a:lnTo>
+                    <a:pt x="5085199" y="925190"/>
+                  </a:lnTo>
+                  <a:lnTo>
+                    <a:pt x="5013576" y="911903"/>
+                  </a:lnTo>
+                  <a:lnTo>
+                    <a:pt x="4941954" y="898091"/>
+                  </a:lnTo>
+                  <a:lnTo>
+                    <a:pt x="4870331" y="883732"/>
+                  </a:lnTo>
+                  <a:lnTo>
+                    <a:pt x="4798709" y="868805"/>
+                  </a:lnTo>
+                  <a:lnTo>
+                    <a:pt x="4727086" y="853287"/>
+                  </a:lnTo>
+                  <a:lnTo>
+                    <a:pt x="4655464" y="837155"/>
+                  </a:lnTo>
+                  <a:lnTo>
+                    <a:pt x="4583841" y="820384"/>
+                  </a:lnTo>
+                  <a:lnTo>
+                    <a:pt x="4512219" y="802950"/>
+                  </a:lnTo>
+                  <a:lnTo>
+                    <a:pt x="4440596" y="784826"/>
+                  </a:lnTo>
+                  <a:lnTo>
+                    <a:pt x="4368974" y="765984"/>
+                  </a:lnTo>
+                  <a:lnTo>
+                    <a:pt x="4297351" y="746397"/>
+                  </a:lnTo>
+                  <a:lnTo>
+                    <a:pt x="4225729" y="726034"/>
+                  </a:lnTo>
+                  <a:lnTo>
+                    <a:pt x="4154106" y="704866"/>
+                  </a:lnTo>
+                  <a:lnTo>
+                    <a:pt x="4082483" y="682860"/>
+                  </a:lnTo>
+                  <a:lnTo>
+                    <a:pt x="4010861" y="659983"/>
+                  </a:lnTo>
+                  <a:lnTo>
+                    <a:pt x="3939238" y="636201"/>
+                  </a:lnTo>
+                  <a:lnTo>
+                    <a:pt x="3867616" y="611477"/>
+                  </a:lnTo>
+                  <a:lnTo>
+                    <a:pt x="3795993" y="585775"/>
+                  </a:lnTo>
+                  <a:lnTo>
+                    <a:pt x="3724371" y="559056"/>
+                  </a:lnTo>
+                  <a:lnTo>
+                    <a:pt x="3652748" y="531279"/>
+                  </a:lnTo>
+                  <a:lnTo>
+                    <a:pt x="3581126" y="502403"/>
+                  </a:lnTo>
+                  <a:lnTo>
+                    <a:pt x="3509503" y="472384"/>
+                  </a:lnTo>
+                  <a:lnTo>
+                    <a:pt x="3437881" y="441177"/>
+                  </a:lnTo>
+                  <a:lnTo>
+                    <a:pt x="3366258" y="426361"/>
+                  </a:lnTo>
+                  <a:lnTo>
+                    <a:pt x="3294636" y="419001"/>
+                  </a:lnTo>
+                  <a:lnTo>
+                    <a:pt x="3223013" y="411576"/>
+                  </a:lnTo>
+                  <a:lnTo>
+                    <a:pt x="3151391" y="404085"/>
+                  </a:lnTo>
+                  <a:lnTo>
+                    <a:pt x="3079768" y="396528"/>
+                  </a:lnTo>
+                  <a:lnTo>
+                    <a:pt x="3008146" y="388905"/>
+                  </a:lnTo>
+                  <a:lnTo>
+                    <a:pt x="2936523" y="381214"/>
+                  </a:lnTo>
+                  <a:lnTo>
+                    <a:pt x="2864901" y="373456"/>
+                  </a:lnTo>
+                  <a:lnTo>
+                    <a:pt x="2793278" y="365629"/>
+                  </a:lnTo>
+                  <a:lnTo>
+                    <a:pt x="2721655" y="357733"/>
+                  </a:lnTo>
+                  <a:lnTo>
+                    <a:pt x="2650033" y="349767"/>
+                  </a:lnTo>
+                  <a:lnTo>
+                    <a:pt x="2578410" y="341732"/>
+                  </a:lnTo>
+                  <a:lnTo>
+                    <a:pt x="2506788" y="333625"/>
+                  </a:lnTo>
+                  <a:lnTo>
+                    <a:pt x="2435165" y="325447"/>
+                  </a:lnTo>
+                  <a:lnTo>
+                    <a:pt x="2363543" y="317197"/>
+                  </a:lnTo>
+                  <a:lnTo>
+                    <a:pt x="2291920" y="308874"/>
+                  </a:lnTo>
+                  <a:lnTo>
+                    <a:pt x="2220298" y="300477"/>
+                  </a:lnTo>
+                  <a:lnTo>
+                    <a:pt x="2148675" y="292007"/>
+                  </a:lnTo>
+                  <a:lnTo>
+                    <a:pt x="2077053" y="283461"/>
+                  </a:lnTo>
+                  <a:lnTo>
+                    <a:pt x="2005430" y="274841"/>
+                  </a:lnTo>
+                  <a:lnTo>
+                    <a:pt x="1933808" y="266144"/>
+                  </a:lnTo>
+                  <a:lnTo>
+                    <a:pt x="1862185" y="257371"/>
+                  </a:lnTo>
+                  <a:lnTo>
+                    <a:pt x="1790563" y="248520"/>
+                  </a:lnTo>
+                  <a:lnTo>
+                    <a:pt x="1718940" y="239591"/>
+                  </a:lnTo>
+                  <a:lnTo>
+                    <a:pt x="1647318" y="230584"/>
+                  </a:lnTo>
+                  <a:lnTo>
+                    <a:pt x="1575695" y="221497"/>
+                  </a:lnTo>
+                  <a:lnTo>
+                    <a:pt x="1504073" y="212330"/>
+                  </a:lnTo>
+                  <a:lnTo>
+                    <a:pt x="1432450" y="203082"/>
+                  </a:lnTo>
+                  <a:lnTo>
+                    <a:pt x="1360827" y="193752"/>
+                  </a:lnTo>
+                  <a:lnTo>
+                    <a:pt x="1289205" y="184341"/>
+                  </a:lnTo>
+                  <a:lnTo>
+                    <a:pt x="1217582" y="174846"/>
+                  </a:lnTo>
+                  <a:lnTo>
+                    <a:pt x="1145960" y="165267"/>
+                  </a:lnTo>
+                  <a:lnTo>
+                    <a:pt x="1074337" y="155604"/>
+                  </a:lnTo>
+                  <a:lnTo>
+                    <a:pt x="1002715" y="145856"/>
+                  </a:lnTo>
+                  <a:lnTo>
+                    <a:pt x="931092" y="136022"/>
+                  </a:lnTo>
+                  <a:lnTo>
+                    <a:pt x="859470" y="126101"/>
+                  </a:lnTo>
+                  <a:lnTo>
+                    <a:pt x="787847" y="116093"/>
+                  </a:lnTo>
+                  <a:lnTo>
+                    <a:pt x="716225" y="105996"/>
+                  </a:lnTo>
+                  <a:lnTo>
+                    <a:pt x="644602" y="95810"/>
+                  </a:lnTo>
+                  <a:lnTo>
+                    <a:pt x="572980" y="85535"/>
+                  </a:lnTo>
+                  <a:lnTo>
+                    <a:pt x="501357" y="75168"/>
+                  </a:lnTo>
+                  <a:lnTo>
+                    <a:pt x="429735" y="64711"/>
+                  </a:lnTo>
+                  <a:lnTo>
+                    <a:pt x="358112" y="54161"/>
+                  </a:lnTo>
+                  <a:lnTo>
+                    <a:pt x="286490" y="43518"/>
+                  </a:lnTo>
+                  <a:lnTo>
+                    <a:pt x="214867" y="32781"/>
+                  </a:lnTo>
+                  <a:lnTo>
+                    <a:pt x="143245" y="21950"/>
+                  </a:lnTo>
+                  <a:lnTo>
+                    <a:pt x="71622" y="11023"/>
+                  </a:lnTo>
+                  <a:lnTo>
                     <a:pt x="0" y="0"/>
-                  </a:moveTo>
-                  <a:lnTo>
-                    <a:pt x="20239" y="37425"/>
-                  </a:lnTo>
-                  <a:lnTo>
-                    <a:pt x="93999" y="168625"/>
-                  </a:lnTo>
-                  <a:lnTo>
-                    <a:pt x="167759" y="294830"/>
-                  </a:lnTo>
-                  <a:lnTo>
-                    <a:pt x="241519" y="416230"/>
-                  </a:lnTo>
-                  <a:lnTo>
-                    <a:pt x="315279" y="533009"/>
-                  </a:lnTo>
-                  <a:lnTo>
-                    <a:pt x="389039" y="645343"/>
-                  </a:lnTo>
-                  <a:lnTo>
-                    <a:pt x="462799" y="753399"/>
-                  </a:lnTo>
-                  <a:lnTo>
-                    <a:pt x="536559" y="857342"/>
-                  </a:lnTo>
-                  <a:lnTo>
-                    <a:pt x="610319" y="957329"/>
-                  </a:lnTo>
-                  <a:lnTo>
-                    <a:pt x="684079" y="1053508"/>
-                  </a:lnTo>
-                  <a:lnTo>
-                    <a:pt x="757839" y="1146026"/>
-                  </a:lnTo>
-                  <a:lnTo>
-                    <a:pt x="831599" y="1235022"/>
-                  </a:lnTo>
-                  <a:lnTo>
-                    <a:pt x="905359" y="1320630"/>
-                  </a:lnTo>
-                  <a:lnTo>
-                    <a:pt x="979119" y="1402979"/>
-                  </a:lnTo>
-                  <a:lnTo>
-                    <a:pt x="1052879" y="1482193"/>
-                  </a:lnTo>
-                  <a:lnTo>
-                    <a:pt x="1126639" y="1558391"/>
-                  </a:lnTo>
-                  <a:lnTo>
-                    <a:pt x="1200399" y="1631689"/>
-                  </a:lnTo>
-                  <a:lnTo>
-                    <a:pt x="1274159" y="1702196"/>
-                  </a:lnTo>
-                  <a:lnTo>
-                    <a:pt x="1347919" y="1770018"/>
-                  </a:lnTo>
-                  <a:lnTo>
-                    <a:pt x="1421679" y="1835259"/>
-                  </a:lnTo>
-                  <a:lnTo>
-                    <a:pt x="1495439" y="1898016"/>
-                  </a:lnTo>
-                  <a:lnTo>
-                    <a:pt x="1569199" y="1958384"/>
-                  </a:lnTo>
-                  <a:lnTo>
-                    <a:pt x="1642959" y="2016454"/>
-                  </a:lnTo>
-                  <a:lnTo>
-                    <a:pt x="1716719" y="2072313"/>
-                  </a:lnTo>
-                  <a:lnTo>
-                    <a:pt x="1790479" y="2126046"/>
-                  </a:lnTo>
-                  <a:lnTo>
-                    <a:pt x="1864239" y="2177733"/>
-                  </a:lnTo>
-                  <a:lnTo>
-                    <a:pt x="1937999" y="2227452"/>
-                  </a:lnTo>
-                  <a:lnTo>
-                    <a:pt x="2011759" y="2275279"/>
-                  </a:lnTo>
-                  <a:lnTo>
-                    <a:pt x="2085519" y="2321285"/>
-                  </a:lnTo>
-                  <a:lnTo>
-                    <a:pt x="2159279" y="2365539"/>
-                  </a:lnTo>
-                  <a:lnTo>
-                    <a:pt x="2233039" y="2408109"/>
-                  </a:lnTo>
-                  <a:lnTo>
-                    <a:pt x="2306800" y="2449058"/>
-                  </a:lnTo>
-                  <a:lnTo>
-                    <a:pt x="2380560" y="2488448"/>
-                  </a:lnTo>
-                  <a:lnTo>
-                    <a:pt x="2454320" y="2526339"/>
-                  </a:lnTo>
-                  <a:lnTo>
-                    <a:pt x="2528080" y="2562787"/>
-                  </a:lnTo>
-                  <a:lnTo>
-                    <a:pt x="2601840" y="2597847"/>
-                  </a:lnTo>
-                  <a:lnTo>
-                    <a:pt x="2675600" y="2631573"/>
-                  </a:lnTo>
-                  <a:lnTo>
-                    <a:pt x="2749360" y="2656495"/>
-                  </a:lnTo>
-                  <a:lnTo>
-                    <a:pt x="2823120" y="2663727"/>
-                  </a:lnTo>
-                  <a:lnTo>
-                    <a:pt x="2896880" y="2670896"/>
-                  </a:lnTo>
-                  <a:lnTo>
-                    <a:pt x="2970640" y="2678002"/>
-                  </a:lnTo>
-                  <a:lnTo>
-                    <a:pt x="3044400" y="2685046"/>
-                  </a:lnTo>
-                  <a:lnTo>
-                    <a:pt x="3118160" y="2692029"/>
-                  </a:lnTo>
-                  <a:lnTo>
-                    <a:pt x="3191920" y="2698950"/>
-                  </a:lnTo>
-                  <a:lnTo>
-                    <a:pt x="3265680" y="2705811"/>
-                  </a:lnTo>
-                  <a:lnTo>
-                    <a:pt x="3339440" y="2712612"/>
-                  </a:lnTo>
-                  <a:lnTo>
-                    <a:pt x="3413200" y="2719354"/>
-                  </a:lnTo>
-                  <a:lnTo>
-                    <a:pt x="3486960" y="2726036"/>
-                  </a:lnTo>
-                  <a:lnTo>
-                    <a:pt x="3560720" y="2732660"/>
-                  </a:lnTo>
-                  <a:lnTo>
-                    <a:pt x="3634480" y="2739227"/>
-                  </a:lnTo>
-                  <a:lnTo>
-                    <a:pt x="3708240" y="2745736"/>
-                  </a:lnTo>
-                  <a:lnTo>
-                    <a:pt x="3782000" y="2752188"/>
-                  </a:lnTo>
-                  <a:lnTo>
-                    <a:pt x="3855760" y="2758583"/>
-                  </a:lnTo>
-                  <a:lnTo>
-                    <a:pt x="3929520" y="2764923"/>
-                  </a:lnTo>
-                  <a:lnTo>
-                    <a:pt x="4003280" y="2771207"/>
-                  </a:lnTo>
-                  <a:lnTo>
-                    <a:pt x="4077040" y="2777436"/>
-                  </a:lnTo>
-                  <a:lnTo>
-                    <a:pt x="4150800" y="2783611"/>
-                  </a:lnTo>
-                  <a:lnTo>
-                    <a:pt x="4224560" y="2789732"/>
-                  </a:lnTo>
-                  <a:lnTo>
-                    <a:pt x="4298320" y="2795799"/>
-                  </a:lnTo>
-                  <a:lnTo>
-                    <a:pt x="4372080" y="2801814"/>
-                  </a:lnTo>
-                  <a:lnTo>
-                    <a:pt x="4445840" y="2807775"/>
-                  </a:lnTo>
-                  <a:lnTo>
-                    <a:pt x="4519600" y="2813685"/>
-                  </a:lnTo>
-                  <a:lnTo>
-                    <a:pt x="4593360" y="2819543"/>
-                  </a:lnTo>
-                  <a:lnTo>
-                    <a:pt x="4667120" y="2825350"/>
-                  </a:lnTo>
-                  <a:lnTo>
-                    <a:pt x="4740880" y="2831106"/>
-                  </a:lnTo>
-                  <a:lnTo>
-                    <a:pt x="4814640" y="2836811"/>
-                  </a:lnTo>
-                  <a:lnTo>
-                    <a:pt x="4888400" y="2842467"/>
-                  </a:lnTo>
-                  <a:lnTo>
-                    <a:pt x="4962160" y="2848073"/>
-                  </a:lnTo>
-                  <a:lnTo>
-                    <a:pt x="5035920" y="2853631"/>
-                  </a:lnTo>
-                  <a:lnTo>
-                    <a:pt x="5109680" y="2859139"/>
-                  </a:lnTo>
-                  <a:lnTo>
-                    <a:pt x="5183441" y="2864600"/>
-                  </a:lnTo>
-                  <a:lnTo>
-                    <a:pt x="5257201" y="2870013"/>
-                  </a:lnTo>
-                  <a:lnTo>
-                    <a:pt x="5330961" y="2875378"/>
-                  </a:lnTo>
-                  <a:lnTo>
-                    <a:pt x="5404721" y="2880697"/>
-                  </a:lnTo>
-                  <a:lnTo>
-                    <a:pt x="5478481" y="2885969"/>
-                  </a:lnTo>
-                  <a:lnTo>
-                    <a:pt x="5552241" y="2891195"/>
-                  </a:lnTo>
-                  <a:lnTo>
-                    <a:pt x="5626001" y="2896375"/>
-                  </a:lnTo>
-                  <a:lnTo>
-                    <a:pt x="5699761" y="2901510"/>
-                  </a:lnTo>
-                  <a:lnTo>
-                    <a:pt x="5773521" y="2906600"/>
-                  </a:lnTo>
-                  <a:lnTo>
-                    <a:pt x="5847281" y="2911646"/>
-                  </a:lnTo>
-                  <a:lnTo>
-                    <a:pt x="5921041" y="2916647"/>
-                  </a:lnTo>
-                  <a:lnTo>
-                    <a:pt x="5994801" y="2921605"/>
-                  </a:lnTo>
-                  <a:lnTo>
-                    <a:pt x="6068561" y="2926520"/>
-                  </a:lnTo>
-                  <a:lnTo>
-                    <a:pt x="6142321" y="2931391"/>
-                  </a:lnTo>
-                  <a:lnTo>
-                    <a:pt x="6216081" y="2936220"/>
-                  </a:lnTo>
-                  <a:lnTo>
-                    <a:pt x="6289841" y="2941007"/>
-                  </a:lnTo>
-                  <a:lnTo>
-                    <a:pt x="6363601" y="2945752"/>
-                  </a:lnTo>
-                  <a:lnTo>
-                    <a:pt x="6437361" y="2950455"/>
-                  </a:lnTo>
-                  <a:lnTo>
-                    <a:pt x="6511121" y="2955117"/>
                   </a:lnTo>
                 </a:path>
               </a:pathLst>
@@ -3898,637 +4180,312 @@
           </p:nvSpPr>
           <p:spPr>
             <a:xfrm>
-              <a:off x="817517" y="4306265"/>
-              <a:ext cx="7235830" cy="1137744"/>
+              <a:off x="1172049" y="2976596"/>
+              <a:ext cx="7090630" cy="2335986"/>
             </a:xfrm>
             <a:custGeom>
               <a:avLst/>
               <a:pathLst>
-                <a:path w="7235830" h="1137744">
-                  <a:moveTo>
-                    <a:pt x="7235830" y="1137744"/>
-                  </a:moveTo>
-                  <a:lnTo>
-                    <a:pt x="7162070" y="1133262"/>
-                  </a:lnTo>
-                  <a:lnTo>
-                    <a:pt x="7088310" y="1128603"/>
-                  </a:lnTo>
-                  <a:lnTo>
-                    <a:pt x="7014550" y="1123760"/>
-                  </a:lnTo>
-                  <a:lnTo>
-                    <a:pt x="6940789" y="1118725"/>
-                  </a:lnTo>
-                  <a:lnTo>
-                    <a:pt x="6867029" y="1113491"/>
-                  </a:lnTo>
-                  <a:lnTo>
-                    <a:pt x="6793269" y="1108049"/>
-                  </a:lnTo>
-                  <a:lnTo>
-                    <a:pt x="6719509" y="1102392"/>
-                  </a:lnTo>
-                  <a:lnTo>
-                    <a:pt x="6645749" y="1096512"/>
-                  </a:lnTo>
-                  <a:lnTo>
-                    <a:pt x="6571989" y="1090398"/>
-                  </a:lnTo>
-                  <a:lnTo>
-                    <a:pt x="6498229" y="1084043"/>
-                  </a:lnTo>
-                  <a:lnTo>
-                    <a:pt x="6424469" y="1077436"/>
-                  </a:lnTo>
-                  <a:lnTo>
-                    <a:pt x="6350709" y="1070568"/>
-                  </a:lnTo>
-                  <a:lnTo>
-                    <a:pt x="6276949" y="1063428"/>
-                  </a:lnTo>
-                  <a:lnTo>
-                    <a:pt x="6203189" y="1056005"/>
-                  </a:lnTo>
-                  <a:lnTo>
-                    <a:pt x="6129429" y="1048288"/>
-                  </a:lnTo>
-                  <a:lnTo>
-                    <a:pt x="6055669" y="1040266"/>
-                  </a:lnTo>
-                  <a:lnTo>
-                    <a:pt x="5981909" y="1031927"/>
-                  </a:lnTo>
-                  <a:lnTo>
-                    <a:pt x="5908149" y="1023258"/>
-                  </a:lnTo>
-                  <a:lnTo>
-                    <a:pt x="5834389" y="1014245"/>
-                  </a:lnTo>
-                  <a:lnTo>
-                    <a:pt x="5760629" y="1004876"/>
-                  </a:lnTo>
-                  <a:lnTo>
-                    <a:pt x="5686869" y="995136"/>
-                  </a:lnTo>
-                  <a:lnTo>
-                    <a:pt x="5613109" y="985010"/>
-                  </a:lnTo>
-                  <a:lnTo>
-                    <a:pt x="5539349" y="974484"/>
-                  </a:lnTo>
-                  <a:lnTo>
-                    <a:pt x="5465589" y="963541"/>
-                  </a:lnTo>
-                  <a:lnTo>
-                    <a:pt x="5391829" y="952165"/>
-                  </a:lnTo>
-                  <a:lnTo>
-                    <a:pt x="5318069" y="940339"/>
-                  </a:lnTo>
-                  <a:lnTo>
-                    <a:pt x="5244309" y="928045"/>
-                  </a:lnTo>
-                  <a:lnTo>
-                    <a:pt x="5170549" y="915265"/>
-                  </a:lnTo>
-                  <a:lnTo>
-                    <a:pt x="5096789" y="901978"/>
-                  </a:lnTo>
-                  <a:lnTo>
-                    <a:pt x="5023029" y="888166"/>
-                  </a:lnTo>
-                  <a:lnTo>
-                    <a:pt x="4949269" y="873807"/>
-                  </a:lnTo>
-                  <a:lnTo>
-                    <a:pt x="4875509" y="858880"/>
-                  </a:lnTo>
-                  <a:lnTo>
-                    <a:pt x="4801749" y="843362"/>
-                  </a:lnTo>
-                  <a:lnTo>
-                    <a:pt x="4727989" y="827229"/>
-                  </a:lnTo>
-                  <a:lnTo>
-                    <a:pt x="4654229" y="810459"/>
-                  </a:lnTo>
-                  <a:lnTo>
-                    <a:pt x="4580469" y="793025"/>
-                  </a:lnTo>
-                  <a:lnTo>
-                    <a:pt x="4506709" y="774900"/>
-                  </a:lnTo>
-                  <a:lnTo>
-                    <a:pt x="4432949" y="756059"/>
-                  </a:lnTo>
-                  <a:lnTo>
-                    <a:pt x="4359189" y="736471"/>
-                  </a:lnTo>
-                  <a:lnTo>
-                    <a:pt x="4285429" y="716109"/>
-                  </a:lnTo>
-                  <a:lnTo>
-                    <a:pt x="4211669" y="694941"/>
-                  </a:lnTo>
-                  <a:lnTo>
-                    <a:pt x="4137909" y="672935"/>
-                  </a:lnTo>
-                  <a:lnTo>
-                    <a:pt x="4064149" y="650058"/>
-                  </a:lnTo>
-                  <a:lnTo>
-                    <a:pt x="3990388" y="626275"/>
-                  </a:lnTo>
-                  <a:lnTo>
-                    <a:pt x="3916628" y="601552"/>
-                  </a:lnTo>
-                  <a:lnTo>
-                    <a:pt x="3842868" y="575850"/>
-                  </a:lnTo>
-                  <a:lnTo>
-                    <a:pt x="3769108" y="549130"/>
-                  </a:lnTo>
-                  <a:lnTo>
-                    <a:pt x="3695348" y="521354"/>
-                  </a:lnTo>
-                  <a:lnTo>
-                    <a:pt x="3621588" y="492478"/>
-                  </a:lnTo>
-                  <a:lnTo>
-                    <a:pt x="3547828" y="462459"/>
-                  </a:lnTo>
-                  <a:lnTo>
-                    <a:pt x="3474068" y="431252"/>
-                  </a:lnTo>
-                  <a:lnTo>
-                    <a:pt x="3400308" y="416436"/>
-                  </a:lnTo>
-                  <a:lnTo>
-                    <a:pt x="3326548" y="409076"/>
-                  </a:lnTo>
-                  <a:lnTo>
-                    <a:pt x="3252788" y="401650"/>
-                  </a:lnTo>
-                  <a:lnTo>
-                    <a:pt x="3179028" y="394160"/>
-                  </a:lnTo>
-                  <a:lnTo>
-                    <a:pt x="3105268" y="386603"/>
-                  </a:lnTo>
-                  <a:lnTo>
-                    <a:pt x="3031508" y="378980"/>
-                  </a:lnTo>
-                  <a:lnTo>
-                    <a:pt x="2957748" y="371289"/>
-                  </a:lnTo>
-                  <a:lnTo>
-                    <a:pt x="2883988" y="363531"/>
-                  </a:lnTo>
-                  <a:lnTo>
-                    <a:pt x="2810228" y="355704"/>
-                  </a:lnTo>
-                  <a:lnTo>
-                    <a:pt x="2736468" y="347808"/>
-                  </a:lnTo>
-                  <a:lnTo>
-                    <a:pt x="2662708" y="339842"/>
-                  </a:lnTo>
-                  <a:lnTo>
-                    <a:pt x="2588948" y="331806"/>
-                  </a:lnTo>
-                  <a:lnTo>
-                    <a:pt x="2515188" y="323700"/>
-                  </a:lnTo>
-                  <a:lnTo>
-                    <a:pt x="2441428" y="315522"/>
-                  </a:lnTo>
-                  <a:lnTo>
-                    <a:pt x="2367668" y="307271"/>
-                  </a:lnTo>
-                  <a:lnTo>
-                    <a:pt x="2293908" y="298948"/>
-                  </a:lnTo>
-                  <a:lnTo>
-                    <a:pt x="2220148" y="290552"/>
-                  </a:lnTo>
-                  <a:lnTo>
-                    <a:pt x="2146388" y="282081"/>
-                  </a:lnTo>
-                  <a:lnTo>
-                    <a:pt x="2072628" y="273536"/>
-                  </a:lnTo>
-                  <a:lnTo>
-                    <a:pt x="1998868" y="264915"/>
-                  </a:lnTo>
-                  <a:lnTo>
-                    <a:pt x="1925108" y="256219"/>
-                  </a:lnTo>
-                  <a:lnTo>
-                    <a:pt x="1851348" y="247446"/>
-                  </a:lnTo>
-                  <a:lnTo>
-                    <a:pt x="1777588" y="238595"/>
-                  </a:lnTo>
-                  <a:lnTo>
-                    <a:pt x="1703828" y="229666"/>
-                  </a:lnTo>
-                  <a:lnTo>
-                    <a:pt x="1630068" y="220659"/>
-                  </a:lnTo>
-                  <a:lnTo>
-                    <a:pt x="1556308" y="211572"/>
-                  </a:lnTo>
-                  <a:lnTo>
-                    <a:pt x="1482548" y="202405"/>
-                  </a:lnTo>
-                  <a:lnTo>
-                    <a:pt x="1408788" y="193157"/>
-                  </a:lnTo>
-                  <a:lnTo>
-                    <a:pt x="1335028" y="183827"/>
-                  </a:lnTo>
-                  <a:lnTo>
-                    <a:pt x="1261268" y="174415"/>
-                  </a:lnTo>
-                  <a:lnTo>
-                    <a:pt x="1187508" y="164921"/>
-                  </a:lnTo>
-                  <a:lnTo>
-                    <a:pt x="1113747" y="155342"/>
-                  </a:lnTo>
-                  <a:lnTo>
-                    <a:pt x="1039987" y="145679"/>
-                  </a:lnTo>
-                  <a:lnTo>
-                    <a:pt x="966227" y="135931"/>
-                  </a:lnTo>
-                  <a:lnTo>
-                    <a:pt x="892467" y="126097"/>
-                  </a:lnTo>
-                  <a:lnTo>
-                    <a:pt x="818707" y="116176"/>
-                  </a:lnTo>
-                  <a:lnTo>
-                    <a:pt x="744947" y="106167"/>
-                  </a:lnTo>
-                  <a:lnTo>
-                    <a:pt x="671187" y="96071"/>
-                  </a:lnTo>
-                  <a:lnTo>
-                    <a:pt x="597427" y="85885"/>
-                  </a:lnTo>
-                  <a:lnTo>
-                    <a:pt x="523667" y="75609"/>
-                  </a:lnTo>
-                  <a:lnTo>
-                    <a:pt x="449907" y="65243"/>
-                  </a:lnTo>
-                  <a:lnTo>
-                    <a:pt x="376147" y="54786"/>
-                  </a:lnTo>
-                  <a:lnTo>
-                    <a:pt x="302387" y="44236"/>
-                  </a:lnTo>
-                  <a:lnTo>
-                    <a:pt x="228627" y="33593"/>
-                  </a:lnTo>
-                  <a:lnTo>
-                    <a:pt x="154867" y="22856"/>
-                  </a:lnTo>
-                  <a:lnTo>
-                    <a:pt x="81107" y="12025"/>
-                  </a:lnTo>
-                  <a:lnTo>
-                    <a:pt x="7347" y="1098"/>
-                  </a:lnTo>
-                  <a:lnTo>
-                    <a:pt x="0" y="0"/>
-                  </a:lnTo>
-                </a:path>
-              </a:pathLst>
-            </a:custGeom>
-          </p:spPr>
-          <p:txBody>
-            <a:bodyPr/>
-            <a:lstStyle/>
-            <a:p/>
-          </p:txBody>
-        </p:sp>
-        <p:sp>
-          <p:nvSpPr>
-            <p:cNvPr id="24" name="pl24"/>
-            <p:cNvSpPr/>
-            <p:nvPr/>
-          </p:nvSpPr>
-          <p:spPr>
-            <a:xfrm>
-              <a:off x="817517" y="3031238"/>
-              <a:ext cx="7235830" cy="2281345"/>
-            </a:xfrm>
-            <a:custGeom>
-              <a:avLst/>
-              <a:pathLst>
-                <a:path w="7235830" h="2281345">
+                <a:path w="7090630" h="2335986">
                   <a:moveTo>
                     <a:pt x="0" y="0"/>
                   </a:moveTo>
                   <a:lnTo>
-                    <a:pt x="7347" y="6045"/>
-                  </a:lnTo>
-                  <a:lnTo>
-                    <a:pt x="81107" y="65305"/>
-                  </a:lnTo>
-                  <a:lnTo>
-                    <a:pt x="154867" y="123171"/>
-                  </a:lnTo>
-                  <a:lnTo>
-                    <a:pt x="228627" y="179676"/>
-                  </a:lnTo>
-                  <a:lnTo>
-                    <a:pt x="302387" y="234853"/>
-                  </a:lnTo>
-                  <a:lnTo>
-                    <a:pt x="376147" y="288732"/>
-                  </a:lnTo>
-                  <a:lnTo>
-                    <a:pt x="449907" y="341344"/>
-                  </a:lnTo>
-                  <a:lnTo>
-                    <a:pt x="523667" y="392718"/>
-                  </a:lnTo>
-                  <a:lnTo>
-                    <a:pt x="597427" y="442885"/>
-                  </a:lnTo>
-                  <a:lnTo>
-                    <a:pt x="671187" y="491872"/>
-                  </a:lnTo>
-                  <a:lnTo>
-                    <a:pt x="744947" y="539707"/>
-                  </a:lnTo>
-                  <a:lnTo>
-                    <a:pt x="818707" y="586417"/>
-                  </a:lnTo>
-                  <a:lnTo>
-                    <a:pt x="892467" y="632029"/>
-                  </a:lnTo>
-                  <a:lnTo>
-                    <a:pt x="966227" y="676568"/>
-                  </a:lnTo>
-                  <a:lnTo>
-                    <a:pt x="1039987" y="720059"/>
-                  </a:lnTo>
-                  <a:lnTo>
-                    <a:pt x="1113747" y="762528"/>
-                  </a:lnTo>
-                  <a:lnTo>
-                    <a:pt x="1187508" y="803998"/>
-                  </a:lnTo>
-                  <a:lnTo>
-                    <a:pt x="1261268" y="844493"/>
-                  </a:lnTo>
-                  <a:lnTo>
-                    <a:pt x="1335028" y="884036"/>
-                  </a:lnTo>
-                  <a:lnTo>
-                    <a:pt x="1408788" y="922649"/>
-                  </a:lnTo>
-                  <a:lnTo>
-                    <a:pt x="1482548" y="960354"/>
-                  </a:lnTo>
-                  <a:lnTo>
-                    <a:pt x="1556308" y="997172"/>
-                  </a:lnTo>
-                  <a:lnTo>
-                    <a:pt x="1630068" y="1033124"/>
-                  </a:lnTo>
-                  <a:lnTo>
-                    <a:pt x="1703828" y="1068231"/>
-                  </a:lnTo>
-                  <a:lnTo>
-                    <a:pt x="1777588" y="1102512"/>
-                  </a:lnTo>
-                  <a:lnTo>
-                    <a:pt x="1851348" y="1135987"/>
-                  </a:lnTo>
-                  <a:lnTo>
-                    <a:pt x="1925108" y="1168675"/>
-                  </a:lnTo>
-                  <a:lnTo>
-                    <a:pt x="1998868" y="1200594"/>
-                  </a:lnTo>
-                  <a:lnTo>
-                    <a:pt x="2072628" y="1231763"/>
-                  </a:lnTo>
-                  <a:lnTo>
-                    <a:pt x="2146388" y="1262198"/>
-                  </a:lnTo>
-                  <a:lnTo>
-                    <a:pt x="2220148" y="1291918"/>
-                  </a:lnTo>
-                  <a:lnTo>
-                    <a:pt x="2293908" y="1320939"/>
-                  </a:lnTo>
-                  <a:lnTo>
-                    <a:pt x="2367668" y="1349278"/>
-                  </a:lnTo>
-                  <a:lnTo>
-                    <a:pt x="2441428" y="1376950"/>
-                  </a:lnTo>
-                  <a:lnTo>
-                    <a:pt x="2515188" y="1403971"/>
-                  </a:lnTo>
-                  <a:lnTo>
-                    <a:pt x="2588948" y="1430357"/>
-                  </a:lnTo>
-                  <a:lnTo>
-                    <a:pt x="2662708" y="1456123"/>
-                  </a:lnTo>
-                  <a:lnTo>
-                    <a:pt x="2736468" y="1481282"/>
-                  </a:lnTo>
-                  <a:lnTo>
-                    <a:pt x="2810228" y="1505850"/>
-                  </a:lnTo>
-                  <a:lnTo>
-                    <a:pt x="2883988" y="1529841"/>
-                  </a:lnTo>
-                  <a:lnTo>
-                    <a:pt x="2957748" y="1553267"/>
-                  </a:lnTo>
-                  <a:lnTo>
-                    <a:pt x="3031508" y="1576142"/>
-                  </a:lnTo>
-                  <a:lnTo>
-                    <a:pt x="3105268" y="1598479"/>
-                  </a:lnTo>
-                  <a:lnTo>
-                    <a:pt x="3179028" y="1620291"/>
-                  </a:lnTo>
-                  <a:lnTo>
-                    <a:pt x="3252788" y="1641590"/>
-                  </a:lnTo>
-                  <a:lnTo>
-                    <a:pt x="3326548" y="1662388"/>
-                  </a:lnTo>
-                  <a:lnTo>
-                    <a:pt x="3400308" y="1682697"/>
-                  </a:lnTo>
-                  <a:lnTo>
-                    <a:pt x="3474068" y="1702528"/>
-                  </a:lnTo>
-                  <a:lnTo>
-                    <a:pt x="3547828" y="1721893"/>
-                  </a:lnTo>
-                  <a:lnTo>
-                    <a:pt x="3621588" y="1740803"/>
-                  </a:lnTo>
-                  <a:lnTo>
-                    <a:pt x="3695348" y="1759268"/>
-                  </a:lnTo>
-                  <a:lnTo>
-                    <a:pt x="3769108" y="1777299"/>
-                  </a:lnTo>
-                  <a:lnTo>
-                    <a:pt x="3842868" y="1794906"/>
-                  </a:lnTo>
-                  <a:lnTo>
-                    <a:pt x="3916628" y="1812098"/>
-                  </a:lnTo>
-                  <a:lnTo>
-                    <a:pt x="3990388" y="1828887"/>
-                  </a:lnTo>
-                  <a:lnTo>
-                    <a:pt x="4064149" y="1845280"/>
-                  </a:lnTo>
-                  <a:lnTo>
-                    <a:pt x="4137909" y="1861289"/>
-                  </a:lnTo>
-                  <a:lnTo>
-                    <a:pt x="4211669" y="1876920"/>
-                  </a:lnTo>
-                  <a:lnTo>
-                    <a:pt x="4285429" y="1892184"/>
-                  </a:lnTo>
-                  <a:lnTo>
-                    <a:pt x="4359189" y="1907089"/>
-                  </a:lnTo>
-                  <a:lnTo>
-                    <a:pt x="4432949" y="1921644"/>
-                  </a:lnTo>
-                  <a:lnTo>
-                    <a:pt x="4506709" y="1935856"/>
-                  </a:lnTo>
-                  <a:lnTo>
-                    <a:pt x="4580469" y="1949734"/>
-                  </a:lnTo>
-                  <a:lnTo>
-                    <a:pt x="4654229" y="1963286"/>
-                  </a:lnTo>
-                  <a:lnTo>
-                    <a:pt x="4727989" y="1976519"/>
-                  </a:lnTo>
-                  <a:lnTo>
-                    <a:pt x="4801749" y="1989441"/>
-                  </a:lnTo>
-                  <a:lnTo>
-                    <a:pt x="4875509" y="2002059"/>
-                  </a:lnTo>
-                  <a:lnTo>
-                    <a:pt x="4949269" y="2014380"/>
-                  </a:lnTo>
-                  <a:lnTo>
-                    <a:pt x="5023029" y="2026412"/>
-                  </a:lnTo>
-                  <a:lnTo>
-                    <a:pt x="5096789" y="2038161"/>
-                  </a:lnTo>
-                  <a:lnTo>
-                    <a:pt x="5170549" y="2049633"/>
-                  </a:lnTo>
-                  <a:lnTo>
-                    <a:pt x="5244309" y="2060836"/>
-                  </a:lnTo>
-                  <a:lnTo>
-                    <a:pt x="5318069" y="2071775"/>
-                  </a:lnTo>
-                  <a:lnTo>
-                    <a:pt x="5391829" y="2082456"/>
-                  </a:lnTo>
-                  <a:lnTo>
-                    <a:pt x="5465589" y="2092887"/>
-                  </a:lnTo>
-                  <a:lnTo>
-                    <a:pt x="5539349" y="2103073"/>
-                  </a:lnTo>
-                  <a:lnTo>
-                    <a:pt x="5613109" y="2113018"/>
-                  </a:lnTo>
-                  <a:lnTo>
-                    <a:pt x="5686869" y="2122730"/>
-                  </a:lnTo>
-                  <a:lnTo>
-                    <a:pt x="5760629" y="2132214"/>
-                  </a:lnTo>
-                  <a:lnTo>
-                    <a:pt x="5834389" y="2141474"/>
-                  </a:lnTo>
-                  <a:lnTo>
-                    <a:pt x="5908149" y="2150517"/>
-                  </a:lnTo>
-                  <a:lnTo>
-                    <a:pt x="5981909" y="2159347"/>
-                  </a:lnTo>
-                  <a:lnTo>
-                    <a:pt x="6055669" y="2167970"/>
-                  </a:lnTo>
-                  <a:lnTo>
-                    <a:pt x="6129429" y="2176390"/>
-                  </a:lnTo>
-                  <a:lnTo>
-                    <a:pt x="6203189" y="2184611"/>
-                  </a:lnTo>
-                  <a:lnTo>
-                    <a:pt x="6276949" y="2192640"/>
-                  </a:lnTo>
-                  <a:lnTo>
-                    <a:pt x="6350709" y="2200479"/>
-                  </a:lnTo>
-                  <a:lnTo>
-                    <a:pt x="6424469" y="2208135"/>
-                  </a:lnTo>
-                  <a:lnTo>
-                    <a:pt x="6498229" y="2215610"/>
-                  </a:lnTo>
-                  <a:lnTo>
-                    <a:pt x="6571989" y="2222909"/>
-                  </a:lnTo>
-                  <a:lnTo>
-                    <a:pt x="6645749" y="2230037"/>
-                  </a:lnTo>
-                  <a:lnTo>
-                    <a:pt x="6719509" y="2236997"/>
-                  </a:lnTo>
-                  <a:lnTo>
-                    <a:pt x="6793269" y="2243794"/>
-                  </a:lnTo>
-                  <a:lnTo>
-                    <a:pt x="6867029" y="2250430"/>
-                  </a:lnTo>
-                  <a:lnTo>
-                    <a:pt x="6940789" y="2256911"/>
-                  </a:lnTo>
-                  <a:lnTo>
-                    <a:pt x="7014550" y="2263239"/>
-                  </a:lnTo>
-                  <a:lnTo>
-                    <a:pt x="7088310" y="2269418"/>
-                  </a:lnTo>
-                  <a:lnTo>
-                    <a:pt x="7162070" y="2275452"/>
-                  </a:lnTo>
-                  <a:lnTo>
-                    <a:pt x="7235830" y="2281345"/>
+                    <a:pt x="71622" y="60686"/>
+                  </a:lnTo>
+                  <a:lnTo>
+                    <a:pt x="143245" y="119946"/>
+                  </a:lnTo>
+                  <a:lnTo>
+                    <a:pt x="214867" y="177812"/>
+                  </a:lnTo>
+                  <a:lnTo>
+                    <a:pt x="286490" y="234317"/>
+                  </a:lnTo>
+                  <a:lnTo>
+                    <a:pt x="358112" y="289494"/>
+                  </a:lnTo>
+                  <a:lnTo>
+                    <a:pt x="429735" y="343373"/>
+                  </a:lnTo>
+                  <a:lnTo>
+                    <a:pt x="501357" y="395985"/>
+                  </a:lnTo>
+                  <a:lnTo>
+                    <a:pt x="572980" y="447360"/>
+                  </a:lnTo>
+                  <a:lnTo>
+                    <a:pt x="644602" y="497527"/>
+                  </a:lnTo>
+                  <a:lnTo>
+                    <a:pt x="716225" y="546513"/>
+                  </a:lnTo>
+                  <a:lnTo>
+                    <a:pt x="787847" y="594348"/>
+                  </a:lnTo>
+                  <a:lnTo>
+                    <a:pt x="859470" y="641058"/>
+                  </a:lnTo>
+                  <a:lnTo>
+                    <a:pt x="931092" y="686670"/>
+                  </a:lnTo>
+                  <a:lnTo>
+                    <a:pt x="1002715" y="731209"/>
+                  </a:lnTo>
+                  <a:lnTo>
+                    <a:pt x="1074337" y="774701"/>
+                  </a:lnTo>
+                  <a:lnTo>
+                    <a:pt x="1145960" y="817170"/>
+                  </a:lnTo>
+                  <a:lnTo>
+                    <a:pt x="1217582" y="858640"/>
+                  </a:lnTo>
+                  <a:lnTo>
+                    <a:pt x="1289205" y="899135"/>
+                  </a:lnTo>
+                  <a:lnTo>
+                    <a:pt x="1360827" y="938677"/>
+                  </a:lnTo>
+                  <a:lnTo>
+                    <a:pt x="1432450" y="977290"/>
+                  </a:lnTo>
+                  <a:lnTo>
+                    <a:pt x="1504073" y="1014995"/>
+                  </a:lnTo>
+                  <a:lnTo>
+                    <a:pt x="1575695" y="1051813"/>
+                  </a:lnTo>
+                  <a:lnTo>
+                    <a:pt x="1647318" y="1087765"/>
+                  </a:lnTo>
+                  <a:lnTo>
+                    <a:pt x="1718940" y="1122872"/>
+                  </a:lnTo>
+                  <a:lnTo>
+                    <a:pt x="1790563" y="1157153"/>
+                  </a:lnTo>
+                  <a:lnTo>
+                    <a:pt x="1862185" y="1190629"/>
+                  </a:lnTo>
+                  <a:lnTo>
+                    <a:pt x="1933808" y="1223316"/>
+                  </a:lnTo>
+                  <a:lnTo>
+                    <a:pt x="2005430" y="1255236"/>
+                  </a:lnTo>
+                  <a:lnTo>
+                    <a:pt x="2077053" y="1286404"/>
+                  </a:lnTo>
+                  <a:lnTo>
+                    <a:pt x="2148675" y="1316840"/>
+                  </a:lnTo>
+                  <a:lnTo>
+                    <a:pt x="2220298" y="1346560"/>
+                  </a:lnTo>
+                  <a:lnTo>
+                    <a:pt x="2291920" y="1375581"/>
+                  </a:lnTo>
+                  <a:lnTo>
+                    <a:pt x="2363543" y="1403919"/>
+                  </a:lnTo>
+                  <a:lnTo>
+                    <a:pt x="2435165" y="1431592"/>
+                  </a:lnTo>
+                  <a:lnTo>
+                    <a:pt x="2506788" y="1458613"/>
+                  </a:lnTo>
+                  <a:lnTo>
+                    <a:pt x="2578410" y="1484999"/>
+                  </a:lnTo>
+                  <a:lnTo>
+                    <a:pt x="2650033" y="1510764"/>
+                  </a:lnTo>
+                  <a:lnTo>
+                    <a:pt x="2721655" y="1535924"/>
+                  </a:lnTo>
+                  <a:lnTo>
+                    <a:pt x="2793278" y="1560492"/>
+                  </a:lnTo>
+                  <a:lnTo>
+                    <a:pt x="2864901" y="1584482"/>
+                  </a:lnTo>
+                  <a:lnTo>
+                    <a:pt x="2936523" y="1607908"/>
+                  </a:lnTo>
+                  <a:lnTo>
+                    <a:pt x="3008146" y="1630783"/>
+                  </a:lnTo>
+                  <a:lnTo>
+                    <a:pt x="3079768" y="1653120"/>
+                  </a:lnTo>
+                  <a:lnTo>
+                    <a:pt x="3151391" y="1674932"/>
+                  </a:lnTo>
+                  <a:lnTo>
+                    <a:pt x="3223013" y="1696231"/>
+                  </a:lnTo>
+                  <a:lnTo>
+                    <a:pt x="3294636" y="1717029"/>
+                  </a:lnTo>
+                  <a:lnTo>
+                    <a:pt x="3366258" y="1737338"/>
+                  </a:lnTo>
+                  <a:lnTo>
+                    <a:pt x="3437881" y="1757170"/>
+                  </a:lnTo>
+                  <a:lnTo>
+                    <a:pt x="3509503" y="1776535"/>
+                  </a:lnTo>
+                  <a:lnTo>
+                    <a:pt x="3581126" y="1795445"/>
+                  </a:lnTo>
+                  <a:lnTo>
+                    <a:pt x="3652748" y="1813910"/>
+                  </a:lnTo>
+                  <a:lnTo>
+                    <a:pt x="3724371" y="1831940"/>
+                  </a:lnTo>
+                  <a:lnTo>
+                    <a:pt x="3795993" y="1849547"/>
+                  </a:lnTo>
+                  <a:lnTo>
+                    <a:pt x="3867616" y="1866740"/>
+                  </a:lnTo>
+                  <a:lnTo>
+                    <a:pt x="3939238" y="1883528"/>
+                  </a:lnTo>
+                  <a:lnTo>
+                    <a:pt x="4010861" y="1899922"/>
+                  </a:lnTo>
+                  <a:lnTo>
+                    <a:pt x="4082483" y="1915930"/>
+                  </a:lnTo>
+                  <a:lnTo>
+                    <a:pt x="4154106" y="1931562"/>
+                  </a:lnTo>
+                  <a:lnTo>
+                    <a:pt x="4225729" y="1946826"/>
+                  </a:lnTo>
+                  <a:lnTo>
+                    <a:pt x="4297351" y="1961731"/>
+                  </a:lnTo>
+                  <a:lnTo>
+                    <a:pt x="4368974" y="1976285"/>
+                  </a:lnTo>
+                  <a:lnTo>
+                    <a:pt x="4440596" y="1990498"/>
+                  </a:lnTo>
+                  <a:lnTo>
+                    <a:pt x="4512219" y="2004376"/>
+                  </a:lnTo>
+                  <a:lnTo>
+                    <a:pt x="4583841" y="2017928"/>
+                  </a:lnTo>
+                  <a:lnTo>
+                    <a:pt x="4655464" y="2031161"/>
+                  </a:lnTo>
+                  <a:lnTo>
+                    <a:pt x="4727086" y="2044083"/>
+                  </a:lnTo>
+                  <a:lnTo>
+                    <a:pt x="4798709" y="2056701"/>
+                  </a:lnTo>
+                  <a:lnTo>
+                    <a:pt x="4870331" y="2069022"/>
+                  </a:lnTo>
+                  <a:lnTo>
+                    <a:pt x="4941954" y="2081054"/>
+                  </a:lnTo>
+                  <a:lnTo>
+                    <a:pt x="5013576" y="2092802"/>
+                  </a:lnTo>
+                  <a:lnTo>
+                    <a:pt x="5085199" y="2104274"/>
+                  </a:lnTo>
+                  <a:lnTo>
+                    <a:pt x="5156821" y="2115477"/>
+                  </a:lnTo>
+                  <a:lnTo>
+                    <a:pt x="5228444" y="2126416"/>
+                  </a:lnTo>
+                  <a:lnTo>
+                    <a:pt x="5300066" y="2137098"/>
+                  </a:lnTo>
+                  <a:lnTo>
+                    <a:pt x="5371689" y="2147529"/>
+                  </a:lnTo>
+                  <a:lnTo>
+                    <a:pt x="5443311" y="2157714"/>
+                  </a:lnTo>
+                  <a:lnTo>
+                    <a:pt x="5514934" y="2167660"/>
+                  </a:lnTo>
+                  <a:lnTo>
+                    <a:pt x="5586557" y="2177372"/>
+                  </a:lnTo>
+                  <a:lnTo>
+                    <a:pt x="5658179" y="2186855"/>
+                  </a:lnTo>
+                  <a:lnTo>
+                    <a:pt x="5729802" y="2196116"/>
+                  </a:lnTo>
+                  <a:lnTo>
+                    <a:pt x="5801424" y="2205159"/>
+                  </a:lnTo>
+                  <a:lnTo>
+                    <a:pt x="5873047" y="2213989"/>
+                  </a:lnTo>
+                  <a:lnTo>
+                    <a:pt x="5944669" y="2222611"/>
+                  </a:lnTo>
+                  <a:lnTo>
+                    <a:pt x="6016292" y="2231031"/>
+                  </a:lnTo>
+                  <a:lnTo>
+                    <a:pt x="6087914" y="2239253"/>
+                  </a:lnTo>
+                  <a:lnTo>
+                    <a:pt x="6159537" y="2247281"/>
+                  </a:lnTo>
+                  <a:lnTo>
+                    <a:pt x="6231159" y="2255121"/>
+                  </a:lnTo>
+                  <a:lnTo>
+                    <a:pt x="6302782" y="2262776"/>
+                  </a:lnTo>
+                  <a:lnTo>
+                    <a:pt x="6374404" y="2270251"/>
+                  </a:lnTo>
+                  <a:lnTo>
+                    <a:pt x="6446027" y="2277551"/>
+                  </a:lnTo>
+                  <a:lnTo>
+                    <a:pt x="6517649" y="2284678"/>
+                  </a:lnTo>
+                  <a:lnTo>
+                    <a:pt x="6589272" y="2291639"/>
+                  </a:lnTo>
+                  <a:lnTo>
+                    <a:pt x="6660894" y="2298435"/>
+                  </a:lnTo>
+                  <a:lnTo>
+                    <a:pt x="6732517" y="2305072"/>
+                  </a:lnTo>
+                  <a:lnTo>
+                    <a:pt x="6804139" y="2311552"/>
+                  </a:lnTo>
+                  <a:lnTo>
+                    <a:pt x="6875762" y="2317880"/>
+                  </a:lnTo>
+                  <a:lnTo>
+                    <a:pt x="6947385" y="2324060"/>
+                  </a:lnTo>
+                  <a:lnTo>
+                    <a:pt x="7019007" y="2330094"/>
+                  </a:lnTo>
+                  <a:lnTo>
+                    <a:pt x="7090630" y="2335986"/>
                   </a:lnTo>
                 </a:path>
               </a:pathLst>
@@ -4551,7 +4508,7 @@
         </p:sp>
         <p:sp>
           <p:nvSpPr>
-            <p:cNvPr id="25" name="pl25"/>
+            <p:cNvPr id="24" name="pl24"/>
             <p:cNvSpPr/>
             <p:nvPr/>
           </p:nvSpPr>
@@ -4594,13 +4551,13 @@
         </p:sp>
         <p:sp>
           <p:nvSpPr>
-            <p:cNvPr id="26" name="pl26"/>
+            <p:cNvPr id="25" name="pl25"/>
             <p:cNvSpPr/>
             <p:nvPr/>
           </p:nvSpPr>
           <p:spPr>
             <a:xfrm>
-              <a:off x="4269157" y="2073503"/>
+              <a:off x="4588151" y="2073503"/>
               <a:ext cx="0" cy="3649639"/>
             </a:xfrm>
             <a:custGeom>
@@ -4637,7 +4594,7 @@
         </p:sp>
         <p:sp>
           <p:nvSpPr>
-            <p:cNvPr id="27" name="tx27"/>
+            <p:cNvPr id="26" name="tx26"/>
             <p:cNvSpPr/>
             <p:nvPr/>
           </p:nvSpPr>
@@ -4683,7 +4640,7 @@
         </p:sp>
         <p:sp>
           <p:nvSpPr>
-            <p:cNvPr id="28" name="tx28"/>
+            <p:cNvPr id="27" name="tx27"/>
             <p:cNvSpPr/>
             <p:nvPr/>
           </p:nvSpPr>
@@ -4729,7 +4686,7 @@
         </p:sp>
         <p:sp>
           <p:nvSpPr>
-            <p:cNvPr id="29" name="tx29"/>
+            <p:cNvPr id="28" name="tx28"/>
             <p:cNvSpPr/>
             <p:nvPr/>
           </p:nvSpPr>
@@ -4775,7 +4732,7 @@
         </p:sp>
         <p:sp>
           <p:nvSpPr>
-            <p:cNvPr id="30" name="tx30"/>
+            <p:cNvPr id="29" name="tx29"/>
             <p:cNvSpPr/>
             <p:nvPr/>
           </p:nvSpPr>
@@ -4821,7 +4778,7 @@
         </p:sp>
         <p:sp>
           <p:nvSpPr>
-            <p:cNvPr id="31" name="tx31"/>
+            <p:cNvPr id="30" name="tx30"/>
             <p:cNvSpPr/>
             <p:nvPr/>
           </p:nvSpPr>
@@ -4867,14 +4824,14 @@
         </p:sp>
         <p:sp>
           <p:nvSpPr>
-            <p:cNvPr id="32" name="tx32"/>
+            <p:cNvPr id="31" name="tx31"/>
             <p:cNvSpPr/>
             <p:nvPr/>
           </p:nvSpPr>
           <p:spPr>
             <a:xfrm>
-              <a:off x="2423864" y="5785772"/>
-              <a:ext cx="155356" cy="80101"/>
+              <a:off x="2360651" y="5785772"/>
+              <a:ext cx="161574" cy="80101"/>
             </a:xfrm>
             <a:prstGeom prst="rect">
               <a:avLst/>
@@ -4906,21 +4863,21 @@
                   <a:latin typeface="Helvetica"/>
                   <a:cs typeface="Helvetica"/>
                 </a:rPr>
-                <a:t>0.8</a:t>
+                <a:t>-25</a:t>
               </a:r>
             </a:p>
           </p:txBody>
         </p:sp>
         <p:sp>
           <p:nvSpPr>
-            <p:cNvPr id="33" name="tx33"/>
+            <p:cNvPr id="32" name="tx32"/>
             <p:cNvSpPr/>
             <p:nvPr/>
           </p:nvSpPr>
           <p:spPr>
             <a:xfrm>
-              <a:off x="4196521" y="5785772"/>
-              <a:ext cx="155356" cy="80101"/>
+              <a:off x="4561958" y="5785772"/>
+              <a:ext cx="62179" cy="80101"/>
             </a:xfrm>
             <a:prstGeom prst="rect">
               <a:avLst/>
@@ -4952,21 +4909,21 @@
                   <a:latin typeface="Helvetica"/>
                   <a:cs typeface="Helvetica"/>
                 </a:rPr>
-                <a:t>1.0</a:t>
+                <a:t>0</a:t>
               </a:r>
             </a:p>
           </p:txBody>
         </p:sp>
         <p:sp>
           <p:nvSpPr>
-            <p:cNvPr id="34" name="tx34"/>
+            <p:cNvPr id="33" name="tx33"/>
             <p:cNvSpPr/>
             <p:nvPr/>
           </p:nvSpPr>
           <p:spPr>
             <a:xfrm>
-              <a:off x="5969179" y="5785772"/>
-              <a:ext cx="155356" cy="80101"/>
+              <a:off x="6682478" y="5785772"/>
+              <a:ext cx="124358" cy="80101"/>
             </a:xfrm>
             <a:prstGeom prst="rect">
               <a:avLst/>
@@ -4998,67 +4955,21 @@
                   <a:latin typeface="Helvetica"/>
                   <a:cs typeface="Helvetica"/>
                 </a:rPr>
-                <a:t>1.2</a:t>
+                <a:t>25</a:t>
               </a:r>
             </a:p>
           </p:txBody>
         </p:sp>
         <p:sp>
           <p:nvSpPr>
-            <p:cNvPr id="35" name="tx35"/>
+            <p:cNvPr id="34" name="tx34"/>
             <p:cNvSpPr/>
             <p:nvPr/>
           </p:nvSpPr>
           <p:spPr>
             <a:xfrm>
-              <a:off x="7741836" y="5785772"/>
-              <a:ext cx="155356" cy="80101"/>
-            </a:xfrm>
-            <a:prstGeom prst="rect">
-              <a:avLst/>
-            </a:prstGeom>
-            <a:noFill/>
-          </p:spPr>
-          <p:txBody>
-            <a:bodyPr lIns="0" rIns="0" tIns="0" bIns="0" anchorCtr="1" anchor="ctr" wrap="none"/>
-            <a:lstStyle/>
-            <a:p>
-              <a:pPr algn="l" marL="0" marR="0" indent="0">
-                <a:lnSpc>
-                  <a:spcPts val="880"/>
-                </a:lnSpc>
-                <a:spcBef>
-                  <a:spcPts val="0"/>
-                </a:spcBef>
-                <a:spcAft>
-                  <a:spcPts val="0"/>
-                </a:spcAft>
-              </a:pPr>
-              <a:r>
-                <a:rPr sz="880">
-                  <a:solidFill>
-                    <a:srgbClr val="4D4D4D">
-                      <a:alpha val="100000"/>
-                    </a:srgbClr>
-                  </a:solidFill>
-                  <a:latin typeface="Helvetica"/>
-                  <a:cs typeface="Helvetica"/>
-                </a:rPr>
-                <a:t>1.4</a:t>
-              </a:r>
-            </a:p>
-          </p:txBody>
-        </p:sp>
-        <p:sp>
-          <p:nvSpPr>
-            <p:cNvPr id="36" name="tx36"/>
-            <p:cNvSpPr/>
-            <p:nvPr/>
-          </p:nvSpPr>
-          <p:spPr>
-            <a:xfrm>
-              <a:off x="3879271" y="5925448"/>
-              <a:ext cx="1676186" cy="100218"/>
+              <a:off x="2928340" y="5925448"/>
+              <a:ext cx="3578047" cy="100218"/>
             </a:xfrm>
             <a:prstGeom prst="rect">
               <a:avLst/>
@@ -5090,14 +5001,14 @@
                   <a:latin typeface="Helvetica"/>
                   <a:cs typeface="Helvetica"/>
                 </a:rPr>
-                <a:t>CKD-EPI Cr-Cys / CG ratio</a:t>
+                <a:t>eGFR difference (%): 100 × (CKD-EPI Cr-Cys − CG) / CG</a:t>
               </a:r>
             </a:p>
           </p:txBody>
         </p:sp>
         <p:sp>
           <p:nvSpPr>
-            <p:cNvPr id="37" name="tx37"/>
+            <p:cNvPr id="35" name="tx35"/>
             <p:cNvSpPr/>
             <p:nvPr/>
           </p:nvSpPr>
@@ -5143,14 +5054,14 @@
         </p:sp>
         <p:sp>
           <p:nvSpPr>
-            <p:cNvPr id="38" name="tx38"/>
+            <p:cNvPr id="36" name="tx36"/>
             <p:cNvSpPr/>
             <p:nvPr/>
           </p:nvSpPr>
           <p:spPr>
             <a:xfrm>
               <a:off x="817517" y="1896563"/>
-              <a:ext cx="6169365" cy="82021"/>
+              <a:ext cx="6321612" cy="82021"/>
             </a:xfrm>
             <a:prstGeom prst="rect">
               <a:avLst/>
@@ -5182,14 +5093,14 @@
                   <a:latin typeface="Helvetica"/>
                   <a:cs typeface="Helvetica"/>
                 </a:rPr>
-                <a:t>subHR per 0.1 ratio decline: 1.33 (1.11-1.59), p = 0.002  |  per IQR decline (Δ = 0.29): 2.31 (1.36-3.92)  |  IQR: [0.85, 1.15]</a:t>
+                <a:t>subHR per 10 % decline: 1.33 (1.11-1.59), p = 0.002  |  per IQR decline (Δ = 29.3 %): 2.31 (1.36-3.92)  |  IQR: [-14.6, 14.7] %</a:t>
               </a:r>
             </a:p>
           </p:txBody>
         </p:sp>
         <p:sp>
           <p:nvSpPr>
-            <p:cNvPr id="39" name="tx39"/>
+            <p:cNvPr id="37" name="tx37"/>
             <p:cNvSpPr/>
             <p:nvPr/>
           </p:nvSpPr>

--- a/docs/pptx/whole/jx-linsubhr-ratio-hosp-immune-other.pptx
+++ b/docs/pptx/whole/jx-linsubhr-ratio-hosp-immune-other.pptx
@@ -2265,34 +2265,26 @@
         </p:sp>
         <p:sp>
           <p:nvSpPr>
-            <p:cNvPr id="4" name="pl4"/>
+            <p:cNvPr id="4" name="rc4"/>
             <p:cNvSpPr/>
             <p:nvPr/>
           </p:nvSpPr>
           <p:spPr>
             <a:xfrm>
-              <a:off x="817517" y="5142518"/>
-              <a:ext cx="7799693" cy="0"/>
+              <a:off x="457200" y="1600200"/>
+              <a:ext cx="8229600" cy="4525962"/>
             </a:xfrm>
-            <a:custGeom>
+            <a:prstGeom prst="rect">
               <a:avLst/>
-              <a:pathLst>
-                <a:path w="7799693" h="0">
-                  <a:moveTo>
-                    <a:pt x="0" y="0"/>
-                  </a:moveTo>
-                  <a:lnTo>
-                    <a:pt x="7799693" y="0"/>
-                  </a:lnTo>
-                  <a:lnTo>
-                    <a:pt x="7799693" y="0"/>
-                  </a:lnTo>
-                </a:path>
-              </a:pathLst>
-            </a:custGeom>
-            <a:ln w="6775" cap="flat">
+            </a:prstGeom>
+            <a:solidFill>
+              <a:srgbClr val="FFFFFF">
+                <a:alpha val="100000"/>
+              </a:srgbClr>
+            </a:solidFill>
+            <a:ln w="13550" cap="rnd">
               <a:solidFill>
-                <a:srgbClr val="EBEBEB">
+                <a:srgbClr val="FFFFFF">
                   <a:alpha val="100000"/>
                 </a:srgbClr>
               </a:solidFill>
@@ -2314,21 +2306,21 @@
           </p:nvSpPr>
           <p:spPr>
             <a:xfrm>
-              <a:off x="817517" y="4313054"/>
-              <a:ext cx="7799693" cy="0"/>
+              <a:off x="887106" y="3250627"/>
+              <a:ext cx="7660515" cy="0"/>
             </a:xfrm>
             <a:custGeom>
               <a:avLst/>
               <a:pathLst>
-                <a:path w="7799693" h="0">
+                <a:path w="7660515" h="0">
                   <a:moveTo>
                     <a:pt x="0" y="0"/>
                   </a:moveTo>
                   <a:lnTo>
-                    <a:pt x="7799693" y="0"/>
-                  </a:lnTo>
-                  <a:lnTo>
-                    <a:pt x="7799693" y="0"/>
+                    <a:pt x="7660515" y="0"/>
+                  </a:lnTo>
+                  <a:lnTo>
+                    <a:pt x="7660515" y="0"/>
                   </a:lnTo>
                 </a:path>
               </a:pathLst>
@@ -2357,21 +2349,21 @@
           </p:nvSpPr>
           <p:spPr>
             <a:xfrm>
-              <a:off x="817517" y="3483591"/>
-              <a:ext cx="7799693" cy="0"/>
+              <a:off x="887106" y="2951293"/>
+              <a:ext cx="7660515" cy="0"/>
             </a:xfrm>
             <a:custGeom>
               <a:avLst/>
               <a:pathLst>
-                <a:path w="7799693" h="0">
+                <a:path w="7660515" h="0">
                   <a:moveTo>
                     <a:pt x="0" y="0"/>
                   </a:moveTo>
                   <a:lnTo>
-                    <a:pt x="7799693" y="0"/>
-                  </a:lnTo>
-                  <a:lnTo>
-                    <a:pt x="7799693" y="0"/>
+                    <a:pt x="7660515" y="0"/>
+                  </a:lnTo>
+                  <a:lnTo>
+                    <a:pt x="7660515" y="0"/>
                   </a:lnTo>
                 </a:path>
               </a:pathLst>
@@ -2400,21 +2392,21 @@
           </p:nvSpPr>
           <p:spPr>
             <a:xfrm>
-              <a:off x="817517" y="2654127"/>
-              <a:ext cx="7799693" cy="0"/>
+              <a:off x="887106" y="2651959"/>
+              <a:ext cx="7660515" cy="0"/>
             </a:xfrm>
             <a:custGeom>
               <a:avLst/>
               <a:pathLst>
-                <a:path w="7799693" h="0">
+                <a:path w="7660515" h="0">
                   <a:moveTo>
                     <a:pt x="0" y="0"/>
                   </a:moveTo>
                   <a:lnTo>
-                    <a:pt x="7799693" y="0"/>
-                  </a:lnTo>
-                  <a:lnTo>
-                    <a:pt x="7799693" y="0"/>
+                    <a:pt x="7660515" y="0"/>
+                  </a:lnTo>
+                  <a:lnTo>
+                    <a:pt x="7660515" y="0"/>
                   </a:lnTo>
                 </a:path>
               </a:pathLst>
@@ -2443,21 +2435,21 @@
           </p:nvSpPr>
           <p:spPr>
             <a:xfrm>
-              <a:off x="1365633" y="2073503"/>
-              <a:ext cx="0" cy="3649639"/>
+              <a:off x="887106" y="2352625"/>
+              <a:ext cx="7660515" cy="0"/>
             </a:xfrm>
             <a:custGeom>
               <a:avLst/>
               <a:pathLst>
-                <a:path w="0" h="3649639">
+                <a:path w="7660515" h="0">
                   <a:moveTo>
-                    <a:pt x="0" y="3649639"/>
+                    <a:pt x="0" y="0"/>
                   </a:moveTo>
                   <a:lnTo>
-                    <a:pt x="0" y="0"/>
-                  </a:lnTo>
-                  <a:lnTo>
-                    <a:pt x="0" y="0"/>
+                    <a:pt x="7660515" y="0"/>
+                  </a:lnTo>
+                  <a:lnTo>
+                    <a:pt x="7660515" y="0"/>
                   </a:lnTo>
                 </a:path>
               </a:pathLst>
@@ -2486,15 +2478,15 @@
           </p:nvSpPr>
           <p:spPr>
             <a:xfrm>
-              <a:off x="3517243" y="2073503"/>
-              <a:ext cx="0" cy="3649639"/>
+              <a:off x="1425442" y="2143092"/>
+              <a:ext cx="0" cy="1317069"/>
             </a:xfrm>
             <a:custGeom>
               <a:avLst/>
               <a:pathLst>
-                <a:path w="0" h="3649639">
+                <a:path w="0" h="1317069">
                   <a:moveTo>
-                    <a:pt x="0" y="3649639"/>
+                    <a:pt x="0" y="1317069"/>
                   </a:moveTo>
                   <a:lnTo>
                     <a:pt x="0" y="0"/>
@@ -2529,15 +2521,15 @@
           </p:nvSpPr>
           <p:spPr>
             <a:xfrm>
-              <a:off x="5668852" y="2073503"/>
-              <a:ext cx="0" cy="3649639"/>
+              <a:off x="3538658" y="2143092"/>
+              <a:ext cx="0" cy="1317069"/>
             </a:xfrm>
             <a:custGeom>
               <a:avLst/>
               <a:pathLst>
-                <a:path w="0" h="3649639">
+                <a:path w="0" h="1317069">
                   <a:moveTo>
-                    <a:pt x="0" y="3649639"/>
+                    <a:pt x="0" y="1317069"/>
                   </a:moveTo>
                   <a:lnTo>
                     <a:pt x="0" y="0"/>
@@ -2572,15 +2564,15 @@
           </p:nvSpPr>
           <p:spPr>
             <a:xfrm>
-              <a:off x="7820461" y="2073503"/>
-              <a:ext cx="0" cy="3649639"/>
+              <a:off x="5651874" y="2143092"/>
+              <a:ext cx="0" cy="1317069"/>
             </a:xfrm>
             <a:custGeom>
               <a:avLst/>
               <a:pathLst>
-                <a:path w="0" h="3649639">
+                <a:path w="0" h="1317069">
                   <a:moveTo>
-                    <a:pt x="0" y="3649639"/>
+                    <a:pt x="0" y="1317069"/>
                   </a:moveTo>
                   <a:lnTo>
                     <a:pt x="0" y="0"/>
@@ -2615,26 +2607,26 @@
           </p:nvSpPr>
           <p:spPr>
             <a:xfrm>
-              <a:off x="817517" y="5557249"/>
-              <a:ext cx="7799693" cy="0"/>
+              <a:off x="7765090" y="2143092"/>
+              <a:ext cx="0" cy="1317069"/>
             </a:xfrm>
             <a:custGeom>
               <a:avLst/>
               <a:pathLst>
-                <a:path w="7799693" h="0">
+                <a:path w="0" h="1317069">
                   <a:moveTo>
+                    <a:pt x="0" y="1317069"/>
+                  </a:moveTo>
+                  <a:lnTo>
                     <a:pt x="0" y="0"/>
-                  </a:moveTo>
-                  <a:lnTo>
-                    <a:pt x="7799693" y="0"/>
-                  </a:lnTo>
-                  <a:lnTo>
-                    <a:pt x="7799693" y="0"/>
+                  </a:lnTo>
+                  <a:lnTo>
+                    <a:pt x="0" y="0"/>
                   </a:lnTo>
                 </a:path>
               </a:pathLst>
             </a:custGeom>
-            <a:ln w="13550" cap="flat">
+            <a:ln w="6775" cap="flat">
               <a:solidFill>
                 <a:srgbClr val="EBEBEB">
                   <a:alpha val="100000"/>
@@ -2658,21 +2650,21 @@
           </p:nvSpPr>
           <p:spPr>
             <a:xfrm>
-              <a:off x="817517" y="4727786"/>
-              <a:ext cx="7799693" cy="0"/>
+              <a:off x="887106" y="3400294"/>
+              <a:ext cx="7660515" cy="0"/>
             </a:xfrm>
             <a:custGeom>
               <a:avLst/>
               <a:pathLst>
-                <a:path w="7799693" h="0">
+                <a:path w="7660515" h="0">
                   <a:moveTo>
                     <a:pt x="0" y="0"/>
                   </a:moveTo>
                   <a:lnTo>
-                    <a:pt x="7799693" y="0"/>
-                  </a:lnTo>
-                  <a:lnTo>
-                    <a:pt x="7799693" y="0"/>
+                    <a:pt x="7660515" y="0"/>
+                  </a:lnTo>
+                  <a:lnTo>
+                    <a:pt x="7660515" y="0"/>
                   </a:lnTo>
                 </a:path>
               </a:pathLst>
@@ -2701,21 +2693,21 @@
           </p:nvSpPr>
           <p:spPr>
             <a:xfrm>
-              <a:off x="817517" y="3898322"/>
-              <a:ext cx="7799693" cy="0"/>
+              <a:off x="887106" y="3100960"/>
+              <a:ext cx="7660515" cy="0"/>
             </a:xfrm>
             <a:custGeom>
               <a:avLst/>
               <a:pathLst>
-                <a:path w="7799693" h="0">
+                <a:path w="7660515" h="0">
                   <a:moveTo>
                     <a:pt x="0" y="0"/>
                   </a:moveTo>
                   <a:lnTo>
-                    <a:pt x="7799693" y="0"/>
-                  </a:lnTo>
-                  <a:lnTo>
-                    <a:pt x="7799693" y="0"/>
+                    <a:pt x="7660515" y="0"/>
+                  </a:lnTo>
+                  <a:lnTo>
+                    <a:pt x="7660515" y="0"/>
                   </a:lnTo>
                 </a:path>
               </a:pathLst>
@@ -2744,21 +2736,21 @@
           </p:nvSpPr>
           <p:spPr>
             <a:xfrm>
-              <a:off x="817517" y="3068859"/>
-              <a:ext cx="7799693" cy="0"/>
+              <a:off x="887106" y="2801626"/>
+              <a:ext cx="7660515" cy="0"/>
             </a:xfrm>
             <a:custGeom>
               <a:avLst/>
               <a:pathLst>
-                <a:path w="7799693" h="0">
+                <a:path w="7660515" h="0">
                   <a:moveTo>
                     <a:pt x="0" y="0"/>
                   </a:moveTo>
                   <a:lnTo>
-                    <a:pt x="7799693" y="0"/>
-                  </a:lnTo>
-                  <a:lnTo>
-                    <a:pt x="7799693" y="0"/>
+                    <a:pt x="7660515" y="0"/>
+                  </a:lnTo>
+                  <a:lnTo>
+                    <a:pt x="7660515" y="0"/>
                   </a:lnTo>
                 </a:path>
               </a:pathLst>
@@ -2787,21 +2779,21 @@
           </p:nvSpPr>
           <p:spPr>
             <a:xfrm>
-              <a:off x="817517" y="2239395"/>
-              <a:ext cx="7799693" cy="0"/>
+              <a:off x="887106" y="2502292"/>
+              <a:ext cx="7660515" cy="0"/>
             </a:xfrm>
             <a:custGeom>
               <a:avLst/>
               <a:pathLst>
-                <a:path w="7799693" h="0">
+                <a:path w="7660515" h="0">
                   <a:moveTo>
                     <a:pt x="0" y="0"/>
                   </a:moveTo>
                   <a:lnTo>
-                    <a:pt x="7799693" y="0"/>
-                  </a:lnTo>
-                  <a:lnTo>
-                    <a:pt x="7799693" y="0"/>
+                    <a:pt x="7660515" y="0"/>
+                  </a:lnTo>
+                  <a:lnTo>
+                    <a:pt x="7660515" y="0"/>
                   </a:lnTo>
                 </a:path>
               </a:pathLst>
@@ -2830,21 +2822,21 @@
           </p:nvSpPr>
           <p:spPr>
             <a:xfrm>
-              <a:off x="2441438" y="2073503"/>
-              <a:ext cx="0" cy="3649639"/>
+              <a:off x="887106" y="2202958"/>
+              <a:ext cx="7660515" cy="0"/>
             </a:xfrm>
             <a:custGeom>
               <a:avLst/>
               <a:pathLst>
-                <a:path w="0" h="3649639">
+                <a:path w="7660515" h="0">
                   <a:moveTo>
-                    <a:pt x="0" y="3649639"/>
+                    <a:pt x="0" y="0"/>
                   </a:moveTo>
                   <a:lnTo>
-                    <a:pt x="0" y="0"/>
-                  </a:lnTo>
-                  <a:lnTo>
-                    <a:pt x="0" y="0"/>
+                    <a:pt x="7660515" y="0"/>
+                  </a:lnTo>
+                  <a:lnTo>
+                    <a:pt x="7660515" y="0"/>
                   </a:lnTo>
                 </a:path>
               </a:pathLst>
@@ -2873,15 +2865,15 @@
           </p:nvSpPr>
           <p:spPr>
             <a:xfrm>
-              <a:off x="4593047" y="2073503"/>
-              <a:ext cx="0" cy="3649639"/>
+              <a:off x="2482050" y="2143092"/>
+              <a:ext cx="0" cy="1317069"/>
             </a:xfrm>
             <a:custGeom>
               <a:avLst/>
               <a:pathLst>
-                <a:path w="0" h="3649639">
+                <a:path w="0" h="1317069">
                   <a:moveTo>
-                    <a:pt x="0" y="3649639"/>
+                    <a:pt x="0" y="1317069"/>
                   </a:moveTo>
                   <a:lnTo>
                     <a:pt x="0" y="0"/>
@@ -2916,15 +2908,15 @@
           </p:nvSpPr>
           <p:spPr>
             <a:xfrm>
-              <a:off x="6744657" y="2073503"/>
-              <a:ext cx="0" cy="3649639"/>
+              <a:off x="4595266" y="2143092"/>
+              <a:ext cx="0" cy="1317069"/>
             </a:xfrm>
             <a:custGeom>
               <a:avLst/>
               <a:pathLst>
-                <a:path w="0" h="3649639">
+                <a:path w="0" h="1317069">
                   <a:moveTo>
-                    <a:pt x="0" y="3649639"/>
+                    <a:pt x="0" y="1317069"/>
                   </a:moveTo>
                   <a:lnTo>
                     <a:pt x="0" y="0"/>
@@ -2953,588 +2945,631 @@
         </p:sp>
         <p:sp>
           <p:nvSpPr>
-            <p:cNvPr id="20" name="pg20"/>
+            <p:cNvPr id="20" name="pl20"/>
             <p:cNvSpPr/>
             <p:nvPr/>
           </p:nvSpPr>
           <p:spPr>
             <a:xfrm>
-              <a:off x="1172049" y="2073503"/>
-              <a:ext cx="7090630" cy="3370507"/>
+              <a:off x="6708482" y="2143092"/>
+              <a:ext cx="0" cy="1317069"/>
             </a:xfrm>
             <a:custGeom>
               <a:avLst/>
               <a:pathLst>
-                <a:path w="7090630" h="3370507">
+                <a:path w="0" h="1317069">
                   <a:moveTo>
-                    <a:pt x="768195" y="0"/>
+                    <a:pt x="0" y="1317069"/>
                   </a:moveTo>
                   <a:lnTo>
-                    <a:pt x="787847" y="37425"/>
-                  </a:lnTo>
-                  <a:lnTo>
-                    <a:pt x="859470" y="168625"/>
-                  </a:lnTo>
-                  <a:lnTo>
-                    <a:pt x="931092" y="294830"/>
-                  </a:lnTo>
-                  <a:lnTo>
-                    <a:pt x="1002715" y="416230"/>
-                  </a:lnTo>
-                  <a:lnTo>
-                    <a:pt x="1074337" y="533009"/>
-                  </a:lnTo>
-                  <a:lnTo>
-                    <a:pt x="1145960" y="645343"/>
-                  </a:lnTo>
-                  <a:lnTo>
-                    <a:pt x="1217582" y="753399"/>
-                  </a:lnTo>
-                  <a:lnTo>
-                    <a:pt x="1289205" y="857342"/>
-                  </a:lnTo>
-                  <a:lnTo>
-                    <a:pt x="1360827" y="957329"/>
-                  </a:lnTo>
-                  <a:lnTo>
-                    <a:pt x="1432450" y="1053508"/>
-                  </a:lnTo>
-                  <a:lnTo>
-                    <a:pt x="1504073" y="1146026"/>
-                  </a:lnTo>
-                  <a:lnTo>
-                    <a:pt x="1575695" y="1235022"/>
-                  </a:lnTo>
-                  <a:lnTo>
-                    <a:pt x="1647318" y="1320630"/>
-                  </a:lnTo>
-                  <a:lnTo>
-                    <a:pt x="1718940" y="1402979"/>
-                  </a:lnTo>
-                  <a:lnTo>
-                    <a:pt x="1790563" y="1482193"/>
-                  </a:lnTo>
-                  <a:lnTo>
-                    <a:pt x="1862185" y="1558391"/>
-                  </a:lnTo>
-                  <a:lnTo>
-                    <a:pt x="1933808" y="1631689"/>
-                  </a:lnTo>
-                  <a:lnTo>
-                    <a:pt x="2005430" y="1702196"/>
-                  </a:lnTo>
-                  <a:lnTo>
-                    <a:pt x="2077053" y="1770018"/>
-                  </a:lnTo>
-                  <a:lnTo>
-                    <a:pt x="2148675" y="1835259"/>
-                  </a:lnTo>
-                  <a:lnTo>
-                    <a:pt x="2220298" y="1898016"/>
-                  </a:lnTo>
-                  <a:lnTo>
-                    <a:pt x="2291920" y="1958384"/>
-                  </a:lnTo>
-                  <a:lnTo>
-                    <a:pt x="2363543" y="2016454"/>
-                  </a:lnTo>
-                  <a:lnTo>
-                    <a:pt x="2435165" y="2072313"/>
-                  </a:lnTo>
-                  <a:lnTo>
-                    <a:pt x="2506788" y="2126046"/>
-                  </a:lnTo>
-                  <a:lnTo>
-                    <a:pt x="2578410" y="2177733"/>
-                  </a:lnTo>
-                  <a:lnTo>
-                    <a:pt x="2650033" y="2227452"/>
-                  </a:lnTo>
-                  <a:lnTo>
-                    <a:pt x="2721655" y="2275279"/>
-                  </a:lnTo>
-                  <a:lnTo>
-                    <a:pt x="2793278" y="2321285"/>
-                  </a:lnTo>
-                  <a:lnTo>
-                    <a:pt x="2864901" y="2365539"/>
-                  </a:lnTo>
-                  <a:lnTo>
-                    <a:pt x="2936523" y="2408109"/>
-                  </a:lnTo>
-                  <a:lnTo>
-                    <a:pt x="3008146" y="2449058"/>
-                  </a:lnTo>
-                  <a:lnTo>
-                    <a:pt x="3079768" y="2488448"/>
-                  </a:lnTo>
-                  <a:lnTo>
-                    <a:pt x="3151391" y="2526339"/>
-                  </a:lnTo>
-                  <a:lnTo>
-                    <a:pt x="3223013" y="2562787"/>
-                  </a:lnTo>
-                  <a:lnTo>
-                    <a:pt x="3294636" y="2597847"/>
-                  </a:lnTo>
-                  <a:lnTo>
-                    <a:pt x="3366258" y="2631573"/>
-                  </a:lnTo>
-                  <a:lnTo>
-                    <a:pt x="3437881" y="2656495"/>
-                  </a:lnTo>
-                  <a:lnTo>
-                    <a:pt x="3509503" y="2663727"/>
-                  </a:lnTo>
-                  <a:lnTo>
-                    <a:pt x="3581126" y="2670896"/>
-                  </a:lnTo>
-                  <a:lnTo>
-                    <a:pt x="3652748" y="2678002"/>
-                  </a:lnTo>
-                  <a:lnTo>
-                    <a:pt x="3724371" y="2685046"/>
-                  </a:lnTo>
-                  <a:lnTo>
-                    <a:pt x="3795993" y="2692029"/>
-                  </a:lnTo>
-                  <a:lnTo>
-                    <a:pt x="3867616" y="2698950"/>
-                  </a:lnTo>
-                  <a:lnTo>
-                    <a:pt x="3939238" y="2705811"/>
-                  </a:lnTo>
-                  <a:lnTo>
-                    <a:pt x="4010861" y="2712612"/>
-                  </a:lnTo>
-                  <a:lnTo>
-                    <a:pt x="4082483" y="2719354"/>
-                  </a:lnTo>
-                  <a:lnTo>
-                    <a:pt x="4154106" y="2726036"/>
-                  </a:lnTo>
-                  <a:lnTo>
-                    <a:pt x="4225729" y="2732660"/>
-                  </a:lnTo>
-                  <a:lnTo>
-                    <a:pt x="4297351" y="2739227"/>
-                  </a:lnTo>
-                  <a:lnTo>
-                    <a:pt x="4368974" y="2745736"/>
-                  </a:lnTo>
-                  <a:lnTo>
-                    <a:pt x="4440596" y="2752188"/>
-                  </a:lnTo>
-                  <a:lnTo>
-                    <a:pt x="4512219" y="2758583"/>
-                  </a:lnTo>
-                  <a:lnTo>
-                    <a:pt x="4583841" y="2764923"/>
-                  </a:lnTo>
-                  <a:lnTo>
-                    <a:pt x="4655464" y="2771207"/>
-                  </a:lnTo>
-                  <a:lnTo>
-                    <a:pt x="4727086" y="2777436"/>
-                  </a:lnTo>
-                  <a:lnTo>
-                    <a:pt x="4798709" y="2783611"/>
-                  </a:lnTo>
-                  <a:lnTo>
-                    <a:pt x="4870331" y="2789732"/>
-                  </a:lnTo>
-                  <a:lnTo>
-                    <a:pt x="4941954" y="2795799"/>
-                  </a:lnTo>
-                  <a:lnTo>
-                    <a:pt x="5013576" y="2801814"/>
-                  </a:lnTo>
-                  <a:lnTo>
-                    <a:pt x="5085199" y="2807775"/>
-                  </a:lnTo>
-                  <a:lnTo>
-                    <a:pt x="5156821" y="2813685"/>
-                  </a:lnTo>
-                  <a:lnTo>
-                    <a:pt x="5228444" y="2819543"/>
-                  </a:lnTo>
-                  <a:lnTo>
-                    <a:pt x="5300066" y="2825350"/>
-                  </a:lnTo>
-                  <a:lnTo>
-                    <a:pt x="5371689" y="2831106"/>
-                  </a:lnTo>
-                  <a:lnTo>
-                    <a:pt x="5443311" y="2836811"/>
-                  </a:lnTo>
-                  <a:lnTo>
-                    <a:pt x="5514934" y="2842467"/>
-                  </a:lnTo>
-                  <a:lnTo>
-                    <a:pt x="5586557" y="2848073"/>
-                  </a:lnTo>
-                  <a:lnTo>
-                    <a:pt x="5658179" y="2853631"/>
-                  </a:lnTo>
-                  <a:lnTo>
-                    <a:pt x="5729802" y="2859139"/>
-                  </a:lnTo>
-                  <a:lnTo>
-                    <a:pt x="5801424" y="2864600"/>
-                  </a:lnTo>
-                  <a:lnTo>
-                    <a:pt x="5873047" y="2870013"/>
-                  </a:lnTo>
-                  <a:lnTo>
-                    <a:pt x="5944669" y="2875378"/>
-                  </a:lnTo>
-                  <a:lnTo>
-                    <a:pt x="6016292" y="2880697"/>
-                  </a:lnTo>
-                  <a:lnTo>
-                    <a:pt x="6087914" y="2885969"/>
-                  </a:lnTo>
-                  <a:lnTo>
-                    <a:pt x="6159537" y="2891195"/>
-                  </a:lnTo>
-                  <a:lnTo>
-                    <a:pt x="6231159" y="2896375"/>
-                  </a:lnTo>
-                  <a:lnTo>
-                    <a:pt x="6302782" y="2901510"/>
-                  </a:lnTo>
-                  <a:lnTo>
-                    <a:pt x="6374404" y="2906600"/>
-                  </a:lnTo>
-                  <a:lnTo>
-                    <a:pt x="6446027" y="2911646"/>
-                  </a:lnTo>
-                  <a:lnTo>
-                    <a:pt x="6517649" y="2916647"/>
-                  </a:lnTo>
-                  <a:lnTo>
-                    <a:pt x="6589272" y="2921605"/>
-                  </a:lnTo>
-                  <a:lnTo>
-                    <a:pt x="6660894" y="2926520"/>
-                  </a:lnTo>
-                  <a:lnTo>
-                    <a:pt x="6732517" y="2931391"/>
-                  </a:lnTo>
-                  <a:lnTo>
-                    <a:pt x="6804139" y="2936220"/>
-                  </a:lnTo>
-                  <a:lnTo>
-                    <a:pt x="6875762" y="2941007"/>
-                  </a:lnTo>
-                  <a:lnTo>
-                    <a:pt x="6947385" y="2945752"/>
-                  </a:lnTo>
-                  <a:lnTo>
-                    <a:pt x="7019007" y="2950455"/>
-                  </a:lnTo>
-                  <a:lnTo>
-                    <a:pt x="7090630" y="2955117"/>
-                  </a:lnTo>
-                  <a:lnTo>
-                    <a:pt x="7090630" y="3370507"/>
-                  </a:lnTo>
-                  <a:lnTo>
-                    <a:pt x="7019007" y="3366025"/>
-                  </a:lnTo>
-                  <a:lnTo>
-                    <a:pt x="6947385" y="3361366"/>
-                  </a:lnTo>
-                  <a:lnTo>
-                    <a:pt x="6875762" y="3356523"/>
-                  </a:lnTo>
-                  <a:lnTo>
-                    <a:pt x="6804139" y="3351488"/>
-                  </a:lnTo>
-                  <a:lnTo>
-                    <a:pt x="6732517" y="3346253"/>
-                  </a:lnTo>
-                  <a:lnTo>
-                    <a:pt x="6660894" y="3340812"/>
-                  </a:lnTo>
-                  <a:lnTo>
-                    <a:pt x="6589272" y="3335155"/>
-                  </a:lnTo>
-                  <a:lnTo>
-                    <a:pt x="6517649" y="3329275"/>
-                  </a:lnTo>
-                  <a:lnTo>
-                    <a:pt x="6446027" y="3323161"/>
-                  </a:lnTo>
-                  <a:lnTo>
-                    <a:pt x="6374404" y="3316806"/>
-                  </a:lnTo>
-                  <a:lnTo>
-                    <a:pt x="6302782" y="3310199"/>
-                  </a:lnTo>
-                  <a:lnTo>
-                    <a:pt x="6231159" y="3303331"/>
-                  </a:lnTo>
-                  <a:lnTo>
-                    <a:pt x="6159537" y="3296190"/>
-                  </a:lnTo>
-                  <a:lnTo>
-                    <a:pt x="6087914" y="3288768"/>
-                  </a:lnTo>
-                  <a:lnTo>
-                    <a:pt x="6016292" y="3281051"/>
-                  </a:lnTo>
-                  <a:lnTo>
-                    <a:pt x="5944669" y="3273029"/>
-                  </a:lnTo>
-                  <a:lnTo>
-                    <a:pt x="5873047" y="3264690"/>
-                  </a:lnTo>
-                  <a:lnTo>
-                    <a:pt x="5801424" y="3256020"/>
-                  </a:lnTo>
-                  <a:lnTo>
-                    <a:pt x="5729802" y="3247008"/>
-                  </a:lnTo>
-                  <a:lnTo>
-                    <a:pt x="5658179" y="3237639"/>
-                  </a:lnTo>
-                  <a:lnTo>
-                    <a:pt x="5586557" y="3227899"/>
-                  </a:lnTo>
-                  <a:lnTo>
-                    <a:pt x="5514934" y="3217773"/>
-                  </a:lnTo>
-                  <a:lnTo>
-                    <a:pt x="5443311" y="3207247"/>
-                  </a:lnTo>
-                  <a:lnTo>
-                    <a:pt x="5371689" y="3196304"/>
-                  </a:lnTo>
-                  <a:lnTo>
-                    <a:pt x="5300066" y="3184928"/>
-                  </a:lnTo>
-                  <a:lnTo>
-                    <a:pt x="5228444" y="3173102"/>
-                  </a:lnTo>
-                  <a:lnTo>
-                    <a:pt x="5156821" y="3160808"/>
-                  </a:lnTo>
-                  <a:lnTo>
-                    <a:pt x="5085199" y="3148027"/>
-                  </a:lnTo>
-                  <a:lnTo>
-                    <a:pt x="5013576" y="3134741"/>
-                  </a:lnTo>
-                  <a:lnTo>
-                    <a:pt x="4941954" y="3120929"/>
-                  </a:lnTo>
-                  <a:lnTo>
-                    <a:pt x="4870331" y="3106570"/>
-                  </a:lnTo>
-                  <a:lnTo>
-                    <a:pt x="4798709" y="3091642"/>
-                  </a:lnTo>
-                  <a:lnTo>
-                    <a:pt x="4727086" y="3076124"/>
-                  </a:lnTo>
-                  <a:lnTo>
-                    <a:pt x="4655464" y="3059992"/>
-                  </a:lnTo>
-                  <a:lnTo>
-                    <a:pt x="4583841" y="3043222"/>
-                  </a:lnTo>
-                  <a:lnTo>
-                    <a:pt x="4512219" y="3025787"/>
-                  </a:lnTo>
-                  <a:lnTo>
-                    <a:pt x="4440596" y="3007663"/>
-                  </a:lnTo>
-                  <a:lnTo>
-                    <a:pt x="4368974" y="2988821"/>
-                  </a:lnTo>
-                  <a:lnTo>
-                    <a:pt x="4297351" y="2969234"/>
-                  </a:lnTo>
-                  <a:lnTo>
-                    <a:pt x="4225729" y="2948872"/>
-                  </a:lnTo>
-                  <a:lnTo>
-                    <a:pt x="4154106" y="2927703"/>
-                  </a:lnTo>
-                  <a:lnTo>
-                    <a:pt x="4082483" y="2905697"/>
-                  </a:lnTo>
-                  <a:lnTo>
-                    <a:pt x="4010861" y="2882820"/>
-                  </a:lnTo>
-                  <a:lnTo>
-                    <a:pt x="3939238" y="2859038"/>
-                  </a:lnTo>
-                  <a:lnTo>
-                    <a:pt x="3867616" y="2834314"/>
-                  </a:lnTo>
-                  <a:lnTo>
-                    <a:pt x="3795993" y="2808612"/>
-                  </a:lnTo>
-                  <a:lnTo>
-                    <a:pt x="3724371" y="2781893"/>
-                  </a:lnTo>
-                  <a:lnTo>
-                    <a:pt x="3652748" y="2754116"/>
-                  </a:lnTo>
-                  <a:lnTo>
-                    <a:pt x="3581126" y="2725240"/>
-                  </a:lnTo>
-                  <a:lnTo>
-                    <a:pt x="3509503" y="2695222"/>
-                  </a:lnTo>
-                  <a:lnTo>
-                    <a:pt x="3437881" y="2664015"/>
-                  </a:lnTo>
-                  <a:lnTo>
-                    <a:pt x="3366258" y="2649199"/>
-                  </a:lnTo>
-                  <a:lnTo>
-                    <a:pt x="3294636" y="2641838"/>
-                  </a:lnTo>
-                  <a:lnTo>
-                    <a:pt x="3223013" y="2634413"/>
-                  </a:lnTo>
-                  <a:lnTo>
-                    <a:pt x="3151391" y="2626923"/>
-                  </a:lnTo>
-                  <a:lnTo>
-                    <a:pt x="3079768" y="2619366"/>
-                  </a:lnTo>
-                  <a:lnTo>
-                    <a:pt x="3008146" y="2611742"/>
-                  </a:lnTo>
-                  <a:lnTo>
-                    <a:pt x="2936523" y="2604052"/>
-                  </a:lnTo>
-                  <a:lnTo>
-                    <a:pt x="2864901" y="2596293"/>
-                  </a:lnTo>
-                  <a:lnTo>
-                    <a:pt x="2793278" y="2588466"/>
-                  </a:lnTo>
-                  <a:lnTo>
-                    <a:pt x="2721655" y="2580571"/>
-                  </a:lnTo>
-                  <a:lnTo>
-                    <a:pt x="2650033" y="2572605"/>
-                  </a:lnTo>
-                  <a:lnTo>
-                    <a:pt x="2578410" y="2564569"/>
-                  </a:lnTo>
-                  <a:lnTo>
-                    <a:pt x="2506788" y="2556463"/>
-                  </a:lnTo>
-                  <a:lnTo>
-                    <a:pt x="2435165" y="2548284"/>
-                  </a:lnTo>
-                  <a:lnTo>
-                    <a:pt x="2363543" y="2540034"/>
-                  </a:lnTo>
-                  <a:lnTo>
-                    <a:pt x="2291920" y="2531711"/>
-                  </a:lnTo>
-                  <a:lnTo>
-                    <a:pt x="2220298" y="2523315"/>
-                  </a:lnTo>
-                  <a:lnTo>
-                    <a:pt x="2148675" y="2514844"/>
-                  </a:lnTo>
-                  <a:lnTo>
-                    <a:pt x="2077053" y="2506299"/>
-                  </a:lnTo>
-                  <a:lnTo>
-                    <a:pt x="2005430" y="2497678"/>
-                  </a:lnTo>
-                  <a:lnTo>
-                    <a:pt x="1933808" y="2488982"/>
-                  </a:lnTo>
-                  <a:lnTo>
-                    <a:pt x="1862185" y="2480208"/>
-                  </a:lnTo>
-                  <a:lnTo>
-                    <a:pt x="1790563" y="2471358"/>
-                  </a:lnTo>
-                  <a:lnTo>
-                    <a:pt x="1718940" y="2462429"/>
-                  </a:lnTo>
-                  <a:lnTo>
-                    <a:pt x="1647318" y="2453421"/>
-                  </a:lnTo>
-                  <a:lnTo>
-                    <a:pt x="1575695" y="2444334"/>
-                  </a:lnTo>
-                  <a:lnTo>
-                    <a:pt x="1504073" y="2435167"/>
-                  </a:lnTo>
-                  <a:lnTo>
-                    <a:pt x="1432450" y="2425919"/>
-                  </a:lnTo>
-                  <a:lnTo>
-                    <a:pt x="1360827" y="2416590"/>
-                  </a:lnTo>
-                  <a:lnTo>
-                    <a:pt x="1289205" y="2407178"/>
-                  </a:lnTo>
-                  <a:lnTo>
-                    <a:pt x="1217582" y="2397683"/>
-                  </a:lnTo>
-                  <a:lnTo>
-                    <a:pt x="1145960" y="2388105"/>
-                  </a:lnTo>
-                  <a:lnTo>
-                    <a:pt x="1074337" y="2378442"/>
-                  </a:lnTo>
-                  <a:lnTo>
-                    <a:pt x="1002715" y="2368694"/>
-                  </a:lnTo>
-                  <a:lnTo>
-                    <a:pt x="931092" y="2358859"/>
-                  </a:lnTo>
-                  <a:lnTo>
-                    <a:pt x="859470" y="2348939"/>
-                  </a:lnTo>
-                  <a:lnTo>
-                    <a:pt x="787847" y="2338930"/>
-                  </a:lnTo>
-                  <a:lnTo>
-                    <a:pt x="716225" y="2328833"/>
-                  </a:lnTo>
-                  <a:lnTo>
-                    <a:pt x="644602" y="2318648"/>
-                  </a:lnTo>
-                  <a:lnTo>
-                    <a:pt x="572980" y="2308372"/>
-                  </a:lnTo>
-                  <a:lnTo>
-                    <a:pt x="501357" y="2298006"/>
-                  </a:lnTo>
-                  <a:lnTo>
-                    <a:pt x="429735" y="2287548"/>
-                  </a:lnTo>
-                  <a:lnTo>
-                    <a:pt x="358112" y="2276998"/>
-                  </a:lnTo>
-                  <a:lnTo>
-                    <a:pt x="286490" y="2266356"/>
-                  </a:lnTo>
-                  <a:lnTo>
-                    <a:pt x="214867" y="2255619"/>
-                  </a:lnTo>
-                  <a:lnTo>
-                    <a:pt x="143245" y="2244787"/>
-                  </a:lnTo>
-                  <a:lnTo>
-                    <a:pt x="71622" y="2233860"/>
-                  </a:lnTo>
-                  <a:lnTo>
-                    <a:pt x="0" y="2222837"/>
+                    <a:pt x="0" y="0"/>
+                  </a:lnTo>
+                  <a:lnTo>
+                    <a:pt x="0" y="0"/>
+                  </a:lnTo>
+                </a:path>
+              </a:pathLst>
+            </a:custGeom>
+            <a:ln w="13550" cap="flat">
+              <a:solidFill>
+                <a:srgbClr val="EBEBEB">
+                  <a:alpha val="100000"/>
+                </a:srgbClr>
+              </a:solidFill>
+              <a:prstDash val="solid"/>
+              <a:round/>
+            </a:ln>
+          </p:spPr>
+          <p:txBody>
+            <a:bodyPr/>
+            <a:lstStyle/>
+            <a:p/>
+          </p:txBody>
+        </p:sp>
+        <p:sp>
+          <p:nvSpPr>
+            <p:cNvPr id="21" name="pg21"/>
+            <p:cNvSpPr/>
+            <p:nvPr/>
+          </p:nvSpPr>
+          <p:spPr>
+            <a:xfrm>
+              <a:off x="1235312" y="2143092"/>
+              <a:ext cx="6964104" cy="1216336"/>
+            </a:xfrm>
+            <a:custGeom>
+              <a:avLst/>
+              <a:pathLst>
+                <a:path w="6964104" h="1216336">
+                  <a:moveTo>
+                    <a:pt x="754487" y="0"/>
+                  </a:moveTo>
+                  <a:lnTo>
+                    <a:pt x="773789" y="13505"/>
+                  </a:lnTo>
+                  <a:lnTo>
+                    <a:pt x="844133" y="60852"/>
+                  </a:lnTo>
+                  <a:lnTo>
+                    <a:pt x="914478" y="106397"/>
+                  </a:lnTo>
+                  <a:lnTo>
+                    <a:pt x="984822" y="150207"/>
+                  </a:lnTo>
+                  <a:lnTo>
+                    <a:pt x="1055167" y="192350"/>
+                  </a:lnTo>
+                  <a:lnTo>
+                    <a:pt x="1125511" y="232889"/>
+                  </a:lnTo>
+                  <a:lnTo>
+                    <a:pt x="1195856" y="271884"/>
+                  </a:lnTo>
+                  <a:lnTo>
+                    <a:pt x="1266200" y="309394"/>
+                  </a:lnTo>
+                  <a:lnTo>
+                    <a:pt x="1336545" y="345477"/>
+                  </a:lnTo>
+                  <a:lnTo>
+                    <a:pt x="1406889" y="380186"/>
+                  </a:lnTo>
+                  <a:lnTo>
+                    <a:pt x="1477234" y="413574"/>
+                  </a:lnTo>
+                  <a:lnTo>
+                    <a:pt x="1547578" y="445690"/>
+                  </a:lnTo>
+                  <a:lnTo>
+                    <a:pt x="1617923" y="476584"/>
+                  </a:lnTo>
+                  <a:lnTo>
+                    <a:pt x="1688267" y="506302"/>
+                  </a:lnTo>
+                  <a:lnTo>
+                    <a:pt x="1758612" y="534888"/>
+                  </a:lnTo>
+                  <a:lnTo>
+                    <a:pt x="1828956" y="562386"/>
+                  </a:lnTo>
+                  <a:lnTo>
+                    <a:pt x="1899301" y="588838"/>
+                  </a:lnTo>
+                  <a:lnTo>
+                    <a:pt x="1969645" y="614282"/>
+                  </a:lnTo>
+                  <a:lnTo>
+                    <a:pt x="2039990" y="638758"/>
+                  </a:lnTo>
+                  <a:lnTo>
+                    <a:pt x="2110334" y="662302"/>
+                  </a:lnTo>
+                  <a:lnTo>
+                    <a:pt x="2180679" y="684949"/>
+                  </a:lnTo>
+                  <a:lnTo>
+                    <a:pt x="2251023" y="706735"/>
+                  </a:lnTo>
+                  <a:lnTo>
+                    <a:pt x="2321368" y="727691"/>
+                  </a:lnTo>
+                  <a:lnTo>
+                    <a:pt x="2391712" y="747849"/>
+                  </a:lnTo>
+                  <a:lnTo>
+                    <a:pt x="2462057" y="767240"/>
+                  </a:lnTo>
+                  <a:lnTo>
+                    <a:pt x="2532401" y="785892"/>
+                  </a:lnTo>
+                  <a:lnTo>
+                    <a:pt x="2602746" y="803835"/>
+                  </a:lnTo>
+                  <a:lnTo>
+                    <a:pt x="2673090" y="821094"/>
+                  </a:lnTo>
+                  <a:lnTo>
+                    <a:pt x="2743435" y="837697"/>
+                  </a:lnTo>
+                  <a:lnTo>
+                    <a:pt x="2813779" y="853667"/>
+                  </a:lnTo>
+                  <a:lnTo>
+                    <a:pt x="2884124" y="869030"/>
+                  </a:lnTo>
+                  <a:lnTo>
+                    <a:pt x="2954468" y="883807"/>
+                  </a:lnTo>
+                  <a:lnTo>
+                    <a:pt x="3024813" y="898022"/>
+                  </a:lnTo>
+                  <a:lnTo>
+                    <a:pt x="3095157" y="911696"/>
+                  </a:lnTo>
+                  <a:lnTo>
+                    <a:pt x="3165502" y="924849"/>
+                  </a:lnTo>
+                  <a:lnTo>
+                    <a:pt x="3235846" y="937502"/>
+                  </a:lnTo>
+                  <a:lnTo>
+                    <a:pt x="3306191" y="949672"/>
+                  </a:lnTo>
+                  <a:lnTo>
+                    <a:pt x="3376535" y="958666"/>
+                  </a:lnTo>
+                  <a:lnTo>
+                    <a:pt x="3446880" y="961276"/>
+                  </a:lnTo>
+                  <a:lnTo>
+                    <a:pt x="3517224" y="963863"/>
+                  </a:lnTo>
+                  <a:lnTo>
+                    <a:pt x="3587569" y="966428"/>
+                  </a:lnTo>
+                  <a:lnTo>
+                    <a:pt x="3657913" y="968970"/>
+                  </a:lnTo>
+                  <a:lnTo>
+                    <a:pt x="3728257" y="971489"/>
+                  </a:lnTo>
+                  <a:lnTo>
+                    <a:pt x="3798602" y="973987"/>
+                  </a:lnTo>
+                  <a:lnTo>
+                    <a:pt x="3868946" y="976463"/>
+                  </a:lnTo>
+                  <a:lnTo>
+                    <a:pt x="3939291" y="978918"/>
+                  </a:lnTo>
+                  <a:lnTo>
+                    <a:pt x="4009635" y="981350"/>
+                  </a:lnTo>
+                  <a:lnTo>
+                    <a:pt x="4079980" y="983762"/>
+                  </a:lnTo>
+                  <a:lnTo>
+                    <a:pt x="4150324" y="986153"/>
+                  </a:lnTo>
+                  <a:lnTo>
+                    <a:pt x="4220669" y="988522"/>
+                  </a:lnTo>
+                  <a:lnTo>
+                    <a:pt x="4291013" y="990871"/>
+                  </a:lnTo>
+                  <a:lnTo>
+                    <a:pt x="4361358" y="993199"/>
+                  </a:lnTo>
+                  <a:lnTo>
+                    <a:pt x="4431702" y="995507"/>
+                  </a:lnTo>
+                  <a:lnTo>
+                    <a:pt x="4502047" y="997795"/>
+                  </a:lnTo>
+                  <a:lnTo>
+                    <a:pt x="4572391" y="1000063"/>
+                  </a:lnTo>
+                  <a:lnTo>
+                    <a:pt x="4642736" y="1002311"/>
+                  </a:lnTo>
+                  <a:lnTo>
+                    <a:pt x="4713080" y="1004539"/>
+                  </a:lnTo>
+                  <a:lnTo>
+                    <a:pt x="4783425" y="1006748"/>
+                  </a:lnTo>
+                  <a:lnTo>
+                    <a:pt x="4853769" y="1008938"/>
+                  </a:lnTo>
+                  <a:lnTo>
+                    <a:pt x="4924114" y="1011108"/>
+                  </a:lnTo>
+                  <a:lnTo>
+                    <a:pt x="4994458" y="1013260"/>
+                  </a:lnTo>
+                  <a:lnTo>
+                    <a:pt x="5064803" y="1015392"/>
+                  </a:lnTo>
+                  <a:lnTo>
+                    <a:pt x="5135147" y="1017506"/>
+                  </a:lnTo>
+                  <a:lnTo>
+                    <a:pt x="5205492" y="1019602"/>
+                  </a:lnTo>
+                  <a:lnTo>
+                    <a:pt x="5275836" y="1021679"/>
+                  </a:lnTo>
+                  <a:lnTo>
+                    <a:pt x="5346181" y="1023738"/>
+                  </a:lnTo>
+                  <a:lnTo>
+                    <a:pt x="5416525" y="1025779"/>
+                  </a:lnTo>
+                  <a:lnTo>
+                    <a:pt x="5486870" y="1027802"/>
+                  </a:lnTo>
+                  <a:lnTo>
+                    <a:pt x="5557214" y="1029808"/>
+                  </a:lnTo>
+                  <a:lnTo>
+                    <a:pt x="5627559" y="1031796"/>
+                  </a:lnTo>
+                  <a:lnTo>
+                    <a:pt x="5697903" y="1033766"/>
+                  </a:lnTo>
+                  <a:lnTo>
+                    <a:pt x="5768248" y="1035720"/>
+                  </a:lnTo>
+                  <a:lnTo>
+                    <a:pt x="5838592" y="1037656"/>
+                  </a:lnTo>
+                  <a:lnTo>
+                    <a:pt x="5908937" y="1039575"/>
+                  </a:lnTo>
+                  <a:lnTo>
+                    <a:pt x="5979281" y="1041478"/>
+                  </a:lnTo>
+                  <a:lnTo>
+                    <a:pt x="6049626" y="1043364"/>
+                  </a:lnTo>
+                  <a:lnTo>
+                    <a:pt x="6119970" y="1045233"/>
+                  </a:lnTo>
+                  <a:lnTo>
+                    <a:pt x="6190315" y="1047086"/>
+                  </a:lnTo>
+                  <a:lnTo>
+                    <a:pt x="6260659" y="1048923"/>
+                  </a:lnTo>
+                  <a:lnTo>
+                    <a:pt x="6331004" y="1050744"/>
+                  </a:lnTo>
+                  <a:lnTo>
+                    <a:pt x="6401348" y="1052549"/>
+                  </a:lnTo>
+                  <a:lnTo>
+                    <a:pt x="6471693" y="1054338"/>
+                  </a:lnTo>
+                  <a:lnTo>
+                    <a:pt x="6542037" y="1056112"/>
+                  </a:lnTo>
+                  <a:lnTo>
+                    <a:pt x="6612382" y="1057870"/>
+                  </a:lnTo>
+                  <a:lnTo>
+                    <a:pt x="6682726" y="1059612"/>
+                  </a:lnTo>
+                  <a:lnTo>
+                    <a:pt x="6753071" y="1061340"/>
+                  </a:lnTo>
+                  <a:lnTo>
+                    <a:pt x="6823415" y="1063052"/>
+                  </a:lnTo>
+                  <a:lnTo>
+                    <a:pt x="6893760" y="1064749"/>
+                  </a:lnTo>
+                  <a:lnTo>
+                    <a:pt x="6964104" y="1066432"/>
+                  </a:lnTo>
+                  <a:lnTo>
+                    <a:pt x="6964104" y="1216336"/>
+                  </a:lnTo>
+                  <a:lnTo>
+                    <a:pt x="6893760" y="1214719"/>
+                  </a:lnTo>
+                  <a:lnTo>
+                    <a:pt x="6823415" y="1213038"/>
+                  </a:lnTo>
+                  <a:lnTo>
+                    <a:pt x="6753071" y="1211290"/>
+                  </a:lnTo>
+                  <a:lnTo>
+                    <a:pt x="6682726" y="1209473"/>
+                  </a:lnTo>
+                  <a:lnTo>
+                    <a:pt x="6612382" y="1207584"/>
+                  </a:lnTo>
+                  <a:lnTo>
+                    <a:pt x="6542037" y="1205620"/>
+                  </a:lnTo>
+                  <a:lnTo>
+                    <a:pt x="6471693" y="1203579"/>
+                  </a:lnTo>
+                  <a:lnTo>
+                    <a:pt x="6401348" y="1201457"/>
+                  </a:lnTo>
+                  <a:lnTo>
+                    <a:pt x="6331004" y="1199250"/>
+                  </a:lnTo>
+                  <a:lnTo>
+                    <a:pt x="6260659" y="1196957"/>
+                  </a:lnTo>
+                  <a:lnTo>
+                    <a:pt x="6190315" y="1194573"/>
+                  </a:lnTo>
+                  <a:lnTo>
+                    <a:pt x="6119970" y="1192094"/>
+                  </a:lnTo>
+                  <a:lnTo>
+                    <a:pt x="6049626" y="1189517"/>
+                  </a:lnTo>
+                  <a:lnTo>
+                    <a:pt x="5979281" y="1186839"/>
+                  </a:lnTo>
+                  <a:lnTo>
+                    <a:pt x="5908937" y="1184054"/>
+                  </a:lnTo>
+                  <a:lnTo>
+                    <a:pt x="5838592" y="1181159"/>
+                  </a:lnTo>
+                  <a:lnTo>
+                    <a:pt x="5768248" y="1178149"/>
+                  </a:lnTo>
+                  <a:lnTo>
+                    <a:pt x="5697903" y="1175021"/>
+                  </a:lnTo>
+                  <a:lnTo>
+                    <a:pt x="5627559" y="1171768"/>
+                  </a:lnTo>
+                  <a:lnTo>
+                    <a:pt x="5557214" y="1168387"/>
+                  </a:lnTo>
+                  <a:lnTo>
+                    <a:pt x="5486870" y="1164872"/>
+                  </a:lnTo>
+                  <a:lnTo>
+                    <a:pt x="5416525" y="1161218"/>
+                  </a:lnTo>
+                  <a:lnTo>
+                    <a:pt x="5346181" y="1157420"/>
+                  </a:lnTo>
+                  <a:lnTo>
+                    <a:pt x="5275836" y="1153471"/>
+                  </a:lnTo>
+                  <a:lnTo>
+                    <a:pt x="5205492" y="1149365"/>
+                  </a:lnTo>
+                  <a:lnTo>
+                    <a:pt x="5135147" y="1145098"/>
+                  </a:lnTo>
+                  <a:lnTo>
+                    <a:pt x="5064803" y="1140661"/>
+                  </a:lnTo>
+                  <a:lnTo>
+                    <a:pt x="4994458" y="1136049"/>
+                  </a:lnTo>
+                  <a:lnTo>
+                    <a:pt x="4924114" y="1131254"/>
+                  </a:lnTo>
+                  <a:lnTo>
+                    <a:pt x="4853769" y="1126269"/>
+                  </a:lnTo>
+                  <a:lnTo>
+                    <a:pt x="4783425" y="1121088"/>
+                  </a:lnTo>
+                  <a:lnTo>
+                    <a:pt x="4713080" y="1115701"/>
+                  </a:lnTo>
+                  <a:lnTo>
+                    <a:pt x="4642736" y="1110101"/>
+                  </a:lnTo>
+                  <a:lnTo>
+                    <a:pt x="4572391" y="1104279"/>
+                  </a:lnTo>
+                  <a:lnTo>
+                    <a:pt x="4502047" y="1098227"/>
+                  </a:lnTo>
+                  <a:lnTo>
+                    <a:pt x="4431702" y="1091935"/>
+                  </a:lnTo>
+                  <a:lnTo>
+                    <a:pt x="4361358" y="1085395"/>
+                  </a:lnTo>
+                  <a:lnTo>
+                    <a:pt x="4291013" y="1078595"/>
+                  </a:lnTo>
+                  <a:lnTo>
+                    <a:pt x="4220669" y="1071526"/>
+                  </a:lnTo>
+                  <a:lnTo>
+                    <a:pt x="4150324" y="1064178"/>
+                  </a:lnTo>
+                  <a:lnTo>
+                    <a:pt x="4079980" y="1056539"/>
+                  </a:lnTo>
+                  <a:lnTo>
+                    <a:pt x="4009635" y="1048598"/>
+                  </a:lnTo>
+                  <a:lnTo>
+                    <a:pt x="3939291" y="1040342"/>
+                  </a:lnTo>
+                  <a:lnTo>
+                    <a:pt x="3868946" y="1031759"/>
+                  </a:lnTo>
+                  <a:lnTo>
+                    <a:pt x="3798602" y="1022837"/>
+                  </a:lnTo>
+                  <a:lnTo>
+                    <a:pt x="3728257" y="1013562"/>
+                  </a:lnTo>
+                  <a:lnTo>
+                    <a:pt x="3657913" y="1003919"/>
+                  </a:lnTo>
+                  <a:lnTo>
+                    <a:pt x="3587569" y="993896"/>
+                  </a:lnTo>
+                  <a:lnTo>
+                    <a:pt x="3517224" y="983475"/>
+                  </a:lnTo>
+                  <a:lnTo>
+                    <a:pt x="3446880" y="972642"/>
+                  </a:lnTo>
+                  <a:lnTo>
+                    <a:pt x="3376535" y="961380"/>
+                  </a:lnTo>
+                  <a:lnTo>
+                    <a:pt x="3306191" y="956033"/>
+                  </a:lnTo>
+                  <a:lnTo>
+                    <a:pt x="3235846" y="953377"/>
+                  </a:lnTo>
+                  <a:lnTo>
+                    <a:pt x="3165502" y="950697"/>
+                  </a:lnTo>
+                  <a:lnTo>
+                    <a:pt x="3095157" y="947994"/>
+                  </a:lnTo>
+                  <a:lnTo>
+                    <a:pt x="3024813" y="945267"/>
+                  </a:lnTo>
+                  <a:lnTo>
+                    <a:pt x="2954468" y="942516"/>
+                  </a:lnTo>
+                  <a:lnTo>
+                    <a:pt x="2884124" y="939741"/>
+                  </a:lnTo>
+                  <a:lnTo>
+                    <a:pt x="2813779" y="936941"/>
+                  </a:lnTo>
+                  <a:lnTo>
+                    <a:pt x="2743435" y="934116"/>
+                  </a:lnTo>
+                  <a:lnTo>
+                    <a:pt x="2673090" y="931267"/>
+                  </a:lnTo>
+                  <a:lnTo>
+                    <a:pt x="2602746" y="928392"/>
+                  </a:lnTo>
+                  <a:lnTo>
+                    <a:pt x="2532401" y="925492"/>
+                  </a:lnTo>
+                  <a:lnTo>
+                    <a:pt x="2462057" y="922567"/>
+                  </a:lnTo>
+                  <a:lnTo>
+                    <a:pt x="2391712" y="919616"/>
+                  </a:lnTo>
+                  <a:lnTo>
+                    <a:pt x="2321368" y="916638"/>
+                  </a:lnTo>
+                  <a:lnTo>
+                    <a:pt x="2251023" y="913635"/>
+                  </a:lnTo>
+                  <a:lnTo>
+                    <a:pt x="2180679" y="910605"/>
+                  </a:lnTo>
+                  <a:lnTo>
+                    <a:pt x="2110334" y="907548"/>
+                  </a:lnTo>
+                  <a:lnTo>
+                    <a:pt x="2039990" y="904464"/>
+                  </a:lnTo>
+                  <a:lnTo>
+                    <a:pt x="1969645" y="901353"/>
+                  </a:lnTo>
+                  <a:lnTo>
+                    <a:pt x="1899301" y="898215"/>
+                  </a:lnTo>
+                  <a:lnTo>
+                    <a:pt x="1828956" y="895049"/>
+                  </a:lnTo>
+                  <a:lnTo>
+                    <a:pt x="1758612" y="891854"/>
+                  </a:lnTo>
+                  <a:lnTo>
+                    <a:pt x="1688267" y="888632"/>
+                  </a:lnTo>
+                  <a:lnTo>
+                    <a:pt x="1617923" y="885382"/>
+                  </a:lnTo>
+                  <a:lnTo>
+                    <a:pt x="1547578" y="882102"/>
+                  </a:lnTo>
+                  <a:lnTo>
+                    <a:pt x="1477234" y="878794"/>
+                  </a:lnTo>
+                  <a:lnTo>
+                    <a:pt x="1406889" y="875457"/>
+                  </a:lnTo>
+                  <a:lnTo>
+                    <a:pt x="1336545" y="872090"/>
+                  </a:lnTo>
+                  <a:lnTo>
+                    <a:pt x="1266200" y="868694"/>
+                  </a:lnTo>
+                  <a:lnTo>
+                    <a:pt x="1195856" y="865267"/>
+                  </a:lnTo>
+                  <a:lnTo>
+                    <a:pt x="1125511" y="861811"/>
+                  </a:lnTo>
+                  <a:lnTo>
+                    <a:pt x="1055167" y="858323"/>
+                  </a:lnTo>
+                  <a:lnTo>
+                    <a:pt x="984822" y="854805"/>
+                  </a:lnTo>
+                  <a:lnTo>
+                    <a:pt x="914478" y="851257"/>
+                  </a:lnTo>
+                  <a:lnTo>
+                    <a:pt x="844133" y="847676"/>
+                  </a:lnTo>
+                  <a:lnTo>
+                    <a:pt x="773789" y="844065"/>
+                  </a:lnTo>
+                  <a:lnTo>
+                    <a:pt x="703444" y="840421"/>
+                  </a:lnTo>
+                  <a:lnTo>
+                    <a:pt x="633100" y="836745"/>
+                  </a:lnTo>
+                  <a:lnTo>
+                    <a:pt x="562755" y="833037"/>
+                  </a:lnTo>
+                  <a:lnTo>
+                    <a:pt x="492411" y="829296"/>
+                  </a:lnTo>
+                  <a:lnTo>
+                    <a:pt x="422066" y="825522"/>
+                  </a:lnTo>
+                  <a:lnTo>
+                    <a:pt x="351722" y="821715"/>
+                  </a:lnTo>
+                  <a:lnTo>
+                    <a:pt x="281377" y="817874"/>
+                  </a:lnTo>
+                  <a:lnTo>
+                    <a:pt x="211033" y="813999"/>
+                  </a:lnTo>
+                  <a:lnTo>
+                    <a:pt x="140688" y="810091"/>
+                  </a:lnTo>
+                  <a:lnTo>
+                    <a:pt x="70344" y="806147"/>
+                  </a:lnTo>
+                  <a:lnTo>
+                    <a:pt x="0" y="802169"/>
                   </a:lnTo>
                   <a:close/>
                 </a:path>
@@ -3554,613 +3589,288 @@
         </p:sp>
         <p:sp>
           <p:nvSpPr>
-            <p:cNvPr id="21" name="pl21"/>
-            <p:cNvSpPr/>
-            <p:nvPr/>
-          </p:nvSpPr>
-          <p:spPr>
-            <a:xfrm>
-              <a:off x="1940244" y="2073503"/>
-              <a:ext cx="6322435" cy="2955117"/>
-            </a:xfrm>
-            <a:custGeom>
-              <a:avLst/>
-              <a:pathLst>
-                <a:path w="6322435" h="2955117">
-                  <a:moveTo>
-                    <a:pt x="0" y="0"/>
-                  </a:moveTo>
-                  <a:lnTo>
-                    <a:pt x="19652" y="37425"/>
-                  </a:lnTo>
-                  <a:lnTo>
-                    <a:pt x="91275" y="168625"/>
-                  </a:lnTo>
-                  <a:lnTo>
-                    <a:pt x="162897" y="294830"/>
-                  </a:lnTo>
-                  <a:lnTo>
-                    <a:pt x="234520" y="416230"/>
-                  </a:lnTo>
-                  <a:lnTo>
-                    <a:pt x="306142" y="533009"/>
-                  </a:lnTo>
-                  <a:lnTo>
-                    <a:pt x="377765" y="645343"/>
-                  </a:lnTo>
-                  <a:lnTo>
-                    <a:pt x="449387" y="753399"/>
-                  </a:lnTo>
-                  <a:lnTo>
-                    <a:pt x="521010" y="857342"/>
-                  </a:lnTo>
-                  <a:lnTo>
-                    <a:pt x="592632" y="957329"/>
-                  </a:lnTo>
-                  <a:lnTo>
-                    <a:pt x="664255" y="1053508"/>
-                  </a:lnTo>
-                  <a:lnTo>
-                    <a:pt x="735877" y="1146026"/>
-                  </a:lnTo>
-                  <a:lnTo>
-                    <a:pt x="807500" y="1235022"/>
-                  </a:lnTo>
-                  <a:lnTo>
-                    <a:pt x="879123" y="1320630"/>
-                  </a:lnTo>
-                  <a:lnTo>
-                    <a:pt x="950745" y="1402979"/>
-                  </a:lnTo>
-                  <a:lnTo>
-                    <a:pt x="1022368" y="1482193"/>
-                  </a:lnTo>
-                  <a:lnTo>
-                    <a:pt x="1093990" y="1558391"/>
-                  </a:lnTo>
-                  <a:lnTo>
-                    <a:pt x="1165613" y="1631689"/>
-                  </a:lnTo>
-                  <a:lnTo>
-                    <a:pt x="1237235" y="1702196"/>
-                  </a:lnTo>
-                  <a:lnTo>
-                    <a:pt x="1308858" y="1770018"/>
-                  </a:lnTo>
-                  <a:lnTo>
-                    <a:pt x="1380480" y="1835259"/>
-                  </a:lnTo>
-                  <a:lnTo>
-                    <a:pt x="1452103" y="1898016"/>
-                  </a:lnTo>
-                  <a:lnTo>
-                    <a:pt x="1523725" y="1958384"/>
-                  </a:lnTo>
-                  <a:lnTo>
-                    <a:pt x="1595348" y="2016454"/>
-                  </a:lnTo>
-                  <a:lnTo>
-                    <a:pt x="1666970" y="2072313"/>
-                  </a:lnTo>
-                  <a:lnTo>
-                    <a:pt x="1738593" y="2126046"/>
-                  </a:lnTo>
-                  <a:lnTo>
-                    <a:pt x="1810215" y="2177733"/>
-                  </a:lnTo>
-                  <a:lnTo>
-                    <a:pt x="1881838" y="2227452"/>
-                  </a:lnTo>
-                  <a:lnTo>
-                    <a:pt x="1953460" y="2275279"/>
-                  </a:lnTo>
-                  <a:lnTo>
-                    <a:pt x="2025083" y="2321285"/>
-                  </a:lnTo>
-                  <a:lnTo>
-                    <a:pt x="2096705" y="2365539"/>
-                  </a:lnTo>
-                  <a:lnTo>
-                    <a:pt x="2168328" y="2408109"/>
-                  </a:lnTo>
-                  <a:lnTo>
-                    <a:pt x="2239951" y="2449058"/>
-                  </a:lnTo>
-                  <a:lnTo>
-                    <a:pt x="2311573" y="2488448"/>
-                  </a:lnTo>
-                  <a:lnTo>
-                    <a:pt x="2383196" y="2526339"/>
-                  </a:lnTo>
-                  <a:lnTo>
-                    <a:pt x="2454818" y="2562787"/>
-                  </a:lnTo>
-                  <a:lnTo>
-                    <a:pt x="2526441" y="2597847"/>
-                  </a:lnTo>
-                  <a:lnTo>
-                    <a:pt x="2598063" y="2631573"/>
-                  </a:lnTo>
-                  <a:lnTo>
-                    <a:pt x="2669686" y="2656495"/>
-                  </a:lnTo>
-                  <a:lnTo>
-                    <a:pt x="2741308" y="2663727"/>
-                  </a:lnTo>
-                  <a:lnTo>
-                    <a:pt x="2812931" y="2670896"/>
-                  </a:lnTo>
-                  <a:lnTo>
-                    <a:pt x="2884553" y="2678002"/>
-                  </a:lnTo>
-                  <a:lnTo>
-                    <a:pt x="2956176" y="2685046"/>
-                  </a:lnTo>
-                  <a:lnTo>
-                    <a:pt x="3027798" y="2692029"/>
-                  </a:lnTo>
-                  <a:lnTo>
-                    <a:pt x="3099421" y="2698950"/>
-                  </a:lnTo>
-                  <a:lnTo>
-                    <a:pt x="3171043" y="2705811"/>
-                  </a:lnTo>
-                  <a:lnTo>
-                    <a:pt x="3242666" y="2712612"/>
-                  </a:lnTo>
-                  <a:lnTo>
-                    <a:pt x="3314288" y="2719354"/>
-                  </a:lnTo>
-                  <a:lnTo>
-                    <a:pt x="3385911" y="2726036"/>
-                  </a:lnTo>
-                  <a:lnTo>
-                    <a:pt x="3457533" y="2732660"/>
-                  </a:lnTo>
-                  <a:lnTo>
-                    <a:pt x="3529156" y="2739227"/>
-                  </a:lnTo>
-                  <a:lnTo>
-                    <a:pt x="3600779" y="2745736"/>
-                  </a:lnTo>
-                  <a:lnTo>
-                    <a:pt x="3672401" y="2752188"/>
-                  </a:lnTo>
-                  <a:lnTo>
-                    <a:pt x="3744024" y="2758583"/>
-                  </a:lnTo>
-                  <a:lnTo>
-                    <a:pt x="3815646" y="2764923"/>
-                  </a:lnTo>
-                  <a:lnTo>
-                    <a:pt x="3887269" y="2771207"/>
-                  </a:lnTo>
-                  <a:lnTo>
-                    <a:pt x="3958891" y="2777436"/>
-                  </a:lnTo>
-                  <a:lnTo>
-                    <a:pt x="4030514" y="2783611"/>
-                  </a:lnTo>
-                  <a:lnTo>
-                    <a:pt x="4102136" y="2789732"/>
-                  </a:lnTo>
-                  <a:lnTo>
-                    <a:pt x="4173759" y="2795799"/>
-                  </a:lnTo>
-                  <a:lnTo>
-                    <a:pt x="4245381" y="2801814"/>
-                  </a:lnTo>
-                  <a:lnTo>
-                    <a:pt x="4317004" y="2807775"/>
-                  </a:lnTo>
-                  <a:lnTo>
-                    <a:pt x="4388626" y="2813685"/>
-                  </a:lnTo>
-                  <a:lnTo>
-                    <a:pt x="4460249" y="2819543"/>
-                  </a:lnTo>
-                  <a:lnTo>
-                    <a:pt x="4531871" y="2825350"/>
-                  </a:lnTo>
-                  <a:lnTo>
-                    <a:pt x="4603494" y="2831106"/>
-                  </a:lnTo>
-                  <a:lnTo>
-                    <a:pt x="4675116" y="2836811"/>
-                  </a:lnTo>
-                  <a:lnTo>
-                    <a:pt x="4746739" y="2842467"/>
-                  </a:lnTo>
-                  <a:lnTo>
-                    <a:pt x="4818361" y="2848073"/>
-                  </a:lnTo>
-                  <a:lnTo>
-                    <a:pt x="4889984" y="2853631"/>
-                  </a:lnTo>
-                  <a:lnTo>
-                    <a:pt x="4961607" y="2859139"/>
-                  </a:lnTo>
-                  <a:lnTo>
-                    <a:pt x="5033229" y="2864600"/>
-                  </a:lnTo>
-                  <a:lnTo>
-                    <a:pt x="5104852" y="2870013"/>
-                  </a:lnTo>
-                  <a:lnTo>
-                    <a:pt x="5176474" y="2875378"/>
-                  </a:lnTo>
-                  <a:lnTo>
-                    <a:pt x="5248097" y="2880697"/>
-                  </a:lnTo>
-                  <a:lnTo>
-                    <a:pt x="5319719" y="2885969"/>
-                  </a:lnTo>
-                  <a:lnTo>
-                    <a:pt x="5391342" y="2891195"/>
-                  </a:lnTo>
-                  <a:lnTo>
-                    <a:pt x="5462964" y="2896375"/>
-                  </a:lnTo>
-                  <a:lnTo>
-                    <a:pt x="5534587" y="2901510"/>
-                  </a:lnTo>
-                  <a:lnTo>
-                    <a:pt x="5606209" y="2906600"/>
-                  </a:lnTo>
-                  <a:lnTo>
-                    <a:pt x="5677832" y="2911646"/>
-                  </a:lnTo>
-                  <a:lnTo>
-                    <a:pt x="5749454" y="2916647"/>
-                  </a:lnTo>
-                  <a:lnTo>
-                    <a:pt x="5821077" y="2921605"/>
-                  </a:lnTo>
-                  <a:lnTo>
-                    <a:pt x="5892699" y="2926520"/>
-                  </a:lnTo>
-                  <a:lnTo>
-                    <a:pt x="5964322" y="2931391"/>
-                  </a:lnTo>
-                  <a:lnTo>
-                    <a:pt x="6035944" y="2936220"/>
-                  </a:lnTo>
-                  <a:lnTo>
-                    <a:pt x="6107567" y="2941007"/>
-                  </a:lnTo>
-                  <a:lnTo>
-                    <a:pt x="6179189" y="2945752"/>
-                  </a:lnTo>
-                  <a:lnTo>
-                    <a:pt x="6250812" y="2950455"/>
-                  </a:lnTo>
-                  <a:lnTo>
-                    <a:pt x="6322435" y="2955117"/>
-                  </a:lnTo>
-                </a:path>
-              </a:pathLst>
-            </a:custGeom>
-          </p:spPr>
-          <p:txBody>
-            <a:bodyPr/>
-            <a:lstStyle/>
-            <a:p/>
-          </p:txBody>
-        </p:sp>
-        <p:sp>
-          <p:nvSpPr>
             <p:cNvPr id="22" name="pl22"/>
             <p:cNvSpPr/>
             <p:nvPr/>
           </p:nvSpPr>
           <p:spPr>
             <a:xfrm>
-              <a:off x="1172049" y="4296340"/>
-              <a:ext cx="7090630" cy="1147669"/>
+              <a:off x="1989799" y="2143092"/>
+              <a:ext cx="6209617" cy="1066432"/>
             </a:xfrm>
             <a:custGeom>
               <a:avLst/>
               <a:pathLst>
-                <a:path w="7090630" h="1147669">
+                <a:path w="6209617" h="1066432">
                   <a:moveTo>
-                    <a:pt x="7090630" y="1147669"/>
+                    <a:pt x="0" y="0"/>
                   </a:moveTo>
                   <a:lnTo>
-                    <a:pt x="7019007" y="1143188"/>
-                  </a:lnTo>
-                  <a:lnTo>
-                    <a:pt x="6947385" y="1138529"/>
-                  </a:lnTo>
-                  <a:lnTo>
-                    <a:pt x="6875762" y="1133685"/>
-                  </a:lnTo>
-                  <a:lnTo>
-                    <a:pt x="6804139" y="1128650"/>
-                  </a:lnTo>
-                  <a:lnTo>
-                    <a:pt x="6732517" y="1123416"/>
-                  </a:lnTo>
-                  <a:lnTo>
-                    <a:pt x="6660894" y="1117975"/>
-                  </a:lnTo>
-                  <a:lnTo>
-                    <a:pt x="6589272" y="1112318"/>
-                  </a:lnTo>
-                  <a:lnTo>
-                    <a:pt x="6517649" y="1106437"/>
-                  </a:lnTo>
-                  <a:lnTo>
-                    <a:pt x="6446027" y="1100324"/>
-                  </a:lnTo>
-                  <a:lnTo>
-                    <a:pt x="6374404" y="1093968"/>
-                  </a:lnTo>
-                  <a:lnTo>
-                    <a:pt x="6302782" y="1087361"/>
-                  </a:lnTo>
-                  <a:lnTo>
-                    <a:pt x="6231159" y="1080493"/>
-                  </a:lnTo>
-                  <a:lnTo>
-                    <a:pt x="6159537" y="1073353"/>
-                  </a:lnTo>
-                  <a:lnTo>
-                    <a:pt x="6087914" y="1065930"/>
-                  </a:lnTo>
-                  <a:lnTo>
-                    <a:pt x="6016292" y="1058214"/>
-                  </a:lnTo>
-                  <a:lnTo>
-                    <a:pt x="5944669" y="1050192"/>
-                  </a:lnTo>
-                  <a:lnTo>
-                    <a:pt x="5873047" y="1041852"/>
-                  </a:lnTo>
-                  <a:lnTo>
-                    <a:pt x="5801424" y="1033183"/>
-                  </a:lnTo>
-                  <a:lnTo>
-                    <a:pt x="5729802" y="1024170"/>
-                  </a:lnTo>
-                  <a:lnTo>
-                    <a:pt x="5658179" y="1014801"/>
-                  </a:lnTo>
-                  <a:lnTo>
-                    <a:pt x="5586557" y="1005061"/>
-                  </a:lnTo>
-                  <a:lnTo>
-                    <a:pt x="5514934" y="994936"/>
-                  </a:lnTo>
-                  <a:lnTo>
-                    <a:pt x="5443311" y="984409"/>
-                  </a:lnTo>
-                  <a:lnTo>
-                    <a:pt x="5371689" y="973467"/>
-                  </a:lnTo>
-                  <a:lnTo>
-                    <a:pt x="5300066" y="962091"/>
-                  </a:lnTo>
-                  <a:lnTo>
-                    <a:pt x="5228444" y="950265"/>
-                  </a:lnTo>
-                  <a:lnTo>
-                    <a:pt x="5156821" y="937970"/>
-                  </a:lnTo>
-                  <a:lnTo>
-                    <a:pt x="5085199" y="925190"/>
-                  </a:lnTo>
-                  <a:lnTo>
-                    <a:pt x="5013576" y="911903"/>
-                  </a:lnTo>
-                  <a:lnTo>
-                    <a:pt x="4941954" y="898091"/>
-                  </a:lnTo>
-                  <a:lnTo>
-                    <a:pt x="4870331" y="883732"/>
-                  </a:lnTo>
-                  <a:lnTo>
-                    <a:pt x="4798709" y="868805"/>
-                  </a:lnTo>
-                  <a:lnTo>
-                    <a:pt x="4727086" y="853287"/>
-                  </a:lnTo>
-                  <a:lnTo>
-                    <a:pt x="4655464" y="837155"/>
-                  </a:lnTo>
-                  <a:lnTo>
-                    <a:pt x="4583841" y="820384"/>
-                  </a:lnTo>
-                  <a:lnTo>
-                    <a:pt x="4512219" y="802950"/>
-                  </a:lnTo>
-                  <a:lnTo>
-                    <a:pt x="4440596" y="784826"/>
-                  </a:lnTo>
-                  <a:lnTo>
-                    <a:pt x="4368974" y="765984"/>
-                  </a:lnTo>
-                  <a:lnTo>
-                    <a:pt x="4297351" y="746397"/>
-                  </a:lnTo>
-                  <a:lnTo>
-                    <a:pt x="4225729" y="726034"/>
-                  </a:lnTo>
-                  <a:lnTo>
-                    <a:pt x="4154106" y="704866"/>
-                  </a:lnTo>
-                  <a:lnTo>
-                    <a:pt x="4082483" y="682860"/>
-                  </a:lnTo>
-                  <a:lnTo>
-                    <a:pt x="4010861" y="659983"/>
-                  </a:lnTo>
-                  <a:lnTo>
-                    <a:pt x="3939238" y="636201"/>
-                  </a:lnTo>
-                  <a:lnTo>
-                    <a:pt x="3867616" y="611477"/>
-                  </a:lnTo>
-                  <a:lnTo>
-                    <a:pt x="3795993" y="585775"/>
-                  </a:lnTo>
-                  <a:lnTo>
-                    <a:pt x="3724371" y="559056"/>
-                  </a:lnTo>
-                  <a:lnTo>
-                    <a:pt x="3652748" y="531279"/>
-                  </a:lnTo>
-                  <a:lnTo>
-                    <a:pt x="3581126" y="502403"/>
-                  </a:lnTo>
-                  <a:lnTo>
-                    <a:pt x="3509503" y="472384"/>
-                  </a:lnTo>
-                  <a:lnTo>
-                    <a:pt x="3437881" y="441177"/>
-                  </a:lnTo>
-                  <a:lnTo>
-                    <a:pt x="3366258" y="426361"/>
-                  </a:lnTo>
-                  <a:lnTo>
-                    <a:pt x="3294636" y="419001"/>
-                  </a:lnTo>
-                  <a:lnTo>
-                    <a:pt x="3223013" y="411576"/>
-                  </a:lnTo>
-                  <a:lnTo>
-                    <a:pt x="3151391" y="404085"/>
-                  </a:lnTo>
-                  <a:lnTo>
-                    <a:pt x="3079768" y="396528"/>
-                  </a:lnTo>
-                  <a:lnTo>
-                    <a:pt x="3008146" y="388905"/>
-                  </a:lnTo>
-                  <a:lnTo>
-                    <a:pt x="2936523" y="381214"/>
-                  </a:lnTo>
-                  <a:lnTo>
-                    <a:pt x="2864901" y="373456"/>
-                  </a:lnTo>
-                  <a:lnTo>
-                    <a:pt x="2793278" y="365629"/>
-                  </a:lnTo>
-                  <a:lnTo>
-                    <a:pt x="2721655" y="357733"/>
-                  </a:lnTo>
-                  <a:lnTo>
-                    <a:pt x="2650033" y="349767"/>
-                  </a:lnTo>
-                  <a:lnTo>
-                    <a:pt x="2578410" y="341732"/>
-                  </a:lnTo>
-                  <a:lnTo>
-                    <a:pt x="2506788" y="333625"/>
-                  </a:lnTo>
-                  <a:lnTo>
-                    <a:pt x="2435165" y="325447"/>
-                  </a:lnTo>
-                  <a:lnTo>
-                    <a:pt x="2363543" y="317197"/>
-                  </a:lnTo>
-                  <a:lnTo>
-                    <a:pt x="2291920" y="308874"/>
-                  </a:lnTo>
-                  <a:lnTo>
-                    <a:pt x="2220298" y="300477"/>
-                  </a:lnTo>
-                  <a:lnTo>
-                    <a:pt x="2148675" y="292007"/>
-                  </a:lnTo>
-                  <a:lnTo>
-                    <a:pt x="2077053" y="283461"/>
-                  </a:lnTo>
-                  <a:lnTo>
-                    <a:pt x="2005430" y="274841"/>
-                  </a:lnTo>
-                  <a:lnTo>
-                    <a:pt x="1933808" y="266144"/>
-                  </a:lnTo>
-                  <a:lnTo>
-                    <a:pt x="1862185" y="257371"/>
-                  </a:lnTo>
-                  <a:lnTo>
-                    <a:pt x="1790563" y="248520"/>
-                  </a:lnTo>
-                  <a:lnTo>
-                    <a:pt x="1718940" y="239591"/>
-                  </a:lnTo>
-                  <a:lnTo>
-                    <a:pt x="1647318" y="230584"/>
-                  </a:lnTo>
-                  <a:lnTo>
-                    <a:pt x="1575695" y="221497"/>
-                  </a:lnTo>
-                  <a:lnTo>
-                    <a:pt x="1504073" y="212330"/>
-                  </a:lnTo>
-                  <a:lnTo>
-                    <a:pt x="1432450" y="203082"/>
-                  </a:lnTo>
-                  <a:lnTo>
-                    <a:pt x="1360827" y="193752"/>
-                  </a:lnTo>
-                  <a:lnTo>
-                    <a:pt x="1289205" y="184341"/>
-                  </a:lnTo>
-                  <a:lnTo>
-                    <a:pt x="1217582" y="174846"/>
-                  </a:lnTo>
-                  <a:lnTo>
-                    <a:pt x="1145960" y="165267"/>
-                  </a:lnTo>
-                  <a:lnTo>
-                    <a:pt x="1074337" y="155604"/>
-                  </a:lnTo>
-                  <a:lnTo>
-                    <a:pt x="1002715" y="145856"/>
-                  </a:lnTo>
-                  <a:lnTo>
-                    <a:pt x="931092" y="136022"/>
-                  </a:lnTo>
-                  <a:lnTo>
-                    <a:pt x="859470" y="126101"/>
-                  </a:lnTo>
-                  <a:lnTo>
-                    <a:pt x="787847" y="116093"/>
-                  </a:lnTo>
-                  <a:lnTo>
-                    <a:pt x="716225" y="105996"/>
-                  </a:lnTo>
-                  <a:lnTo>
-                    <a:pt x="644602" y="95810"/>
-                  </a:lnTo>
-                  <a:lnTo>
-                    <a:pt x="572980" y="85535"/>
-                  </a:lnTo>
-                  <a:lnTo>
-                    <a:pt x="501357" y="75168"/>
-                  </a:lnTo>
-                  <a:lnTo>
-                    <a:pt x="429735" y="64711"/>
-                  </a:lnTo>
-                  <a:lnTo>
-                    <a:pt x="358112" y="54161"/>
-                  </a:lnTo>
-                  <a:lnTo>
-                    <a:pt x="286490" y="43518"/>
-                  </a:lnTo>
-                  <a:lnTo>
-                    <a:pt x="214867" y="32781"/>
-                  </a:lnTo>
-                  <a:lnTo>
-                    <a:pt x="143245" y="21950"/>
-                  </a:lnTo>
-                  <a:lnTo>
-                    <a:pt x="71622" y="11023"/>
-                  </a:lnTo>
-                  <a:lnTo>
-                    <a:pt x="0" y="0"/>
+                    <a:pt x="19302" y="13505"/>
+                  </a:lnTo>
+                  <a:lnTo>
+                    <a:pt x="89646" y="60852"/>
+                  </a:lnTo>
+                  <a:lnTo>
+                    <a:pt x="159991" y="106397"/>
+                  </a:lnTo>
+                  <a:lnTo>
+                    <a:pt x="230335" y="150207"/>
+                  </a:lnTo>
+                  <a:lnTo>
+                    <a:pt x="300680" y="192350"/>
+                  </a:lnTo>
+                  <a:lnTo>
+                    <a:pt x="371024" y="232889"/>
+                  </a:lnTo>
+                  <a:lnTo>
+                    <a:pt x="441368" y="271884"/>
+                  </a:lnTo>
+                  <a:lnTo>
+                    <a:pt x="511713" y="309394"/>
+                  </a:lnTo>
+                  <a:lnTo>
+                    <a:pt x="582057" y="345477"/>
+                  </a:lnTo>
+                  <a:lnTo>
+                    <a:pt x="652402" y="380186"/>
+                  </a:lnTo>
+                  <a:lnTo>
+                    <a:pt x="722746" y="413574"/>
+                  </a:lnTo>
+                  <a:lnTo>
+                    <a:pt x="793091" y="445690"/>
+                  </a:lnTo>
+                  <a:lnTo>
+                    <a:pt x="863435" y="476584"/>
+                  </a:lnTo>
+                  <a:lnTo>
+                    <a:pt x="933780" y="506302"/>
+                  </a:lnTo>
+                  <a:lnTo>
+                    <a:pt x="1004124" y="534888"/>
+                  </a:lnTo>
+                  <a:lnTo>
+                    <a:pt x="1074469" y="562386"/>
+                  </a:lnTo>
+                  <a:lnTo>
+                    <a:pt x="1144813" y="588838"/>
+                  </a:lnTo>
+                  <a:lnTo>
+                    <a:pt x="1215158" y="614282"/>
+                  </a:lnTo>
+                  <a:lnTo>
+                    <a:pt x="1285502" y="638758"/>
+                  </a:lnTo>
+                  <a:lnTo>
+                    <a:pt x="1355847" y="662302"/>
+                  </a:lnTo>
+                  <a:lnTo>
+                    <a:pt x="1426191" y="684949"/>
+                  </a:lnTo>
+                  <a:lnTo>
+                    <a:pt x="1496536" y="706735"/>
+                  </a:lnTo>
+                  <a:lnTo>
+                    <a:pt x="1566880" y="727691"/>
+                  </a:lnTo>
+                  <a:lnTo>
+                    <a:pt x="1637225" y="747849"/>
+                  </a:lnTo>
+                  <a:lnTo>
+                    <a:pt x="1707569" y="767240"/>
+                  </a:lnTo>
+                  <a:lnTo>
+                    <a:pt x="1777914" y="785892"/>
+                  </a:lnTo>
+                  <a:lnTo>
+                    <a:pt x="1848258" y="803835"/>
+                  </a:lnTo>
+                  <a:lnTo>
+                    <a:pt x="1918603" y="821094"/>
+                  </a:lnTo>
+                  <a:lnTo>
+                    <a:pt x="1988947" y="837697"/>
+                  </a:lnTo>
+                  <a:lnTo>
+                    <a:pt x="2059292" y="853667"/>
+                  </a:lnTo>
+                  <a:lnTo>
+                    <a:pt x="2129636" y="869030"/>
+                  </a:lnTo>
+                  <a:lnTo>
+                    <a:pt x="2199981" y="883807"/>
+                  </a:lnTo>
+                  <a:lnTo>
+                    <a:pt x="2270325" y="898022"/>
+                  </a:lnTo>
+                  <a:lnTo>
+                    <a:pt x="2340670" y="911696"/>
+                  </a:lnTo>
+                  <a:lnTo>
+                    <a:pt x="2411014" y="924849"/>
+                  </a:lnTo>
+                  <a:lnTo>
+                    <a:pt x="2481359" y="937502"/>
+                  </a:lnTo>
+                  <a:lnTo>
+                    <a:pt x="2551703" y="949672"/>
+                  </a:lnTo>
+                  <a:lnTo>
+                    <a:pt x="2622048" y="958666"/>
+                  </a:lnTo>
+                  <a:lnTo>
+                    <a:pt x="2692392" y="961276"/>
+                  </a:lnTo>
+                  <a:lnTo>
+                    <a:pt x="2762737" y="963863"/>
+                  </a:lnTo>
+                  <a:lnTo>
+                    <a:pt x="2833081" y="966428"/>
+                  </a:lnTo>
+                  <a:lnTo>
+                    <a:pt x="2903426" y="968970"/>
+                  </a:lnTo>
+                  <a:lnTo>
+                    <a:pt x="2973770" y="971489"/>
+                  </a:lnTo>
+                  <a:lnTo>
+                    <a:pt x="3044115" y="973987"/>
+                  </a:lnTo>
+                  <a:lnTo>
+                    <a:pt x="3114459" y="976463"/>
+                  </a:lnTo>
+                  <a:lnTo>
+                    <a:pt x="3184804" y="978918"/>
+                  </a:lnTo>
+                  <a:lnTo>
+                    <a:pt x="3255148" y="981350"/>
+                  </a:lnTo>
+                  <a:lnTo>
+                    <a:pt x="3325493" y="983762"/>
+                  </a:lnTo>
+                  <a:lnTo>
+                    <a:pt x="3395837" y="986153"/>
+                  </a:lnTo>
+                  <a:lnTo>
+                    <a:pt x="3466182" y="988522"/>
+                  </a:lnTo>
+                  <a:lnTo>
+                    <a:pt x="3536526" y="990871"/>
+                  </a:lnTo>
+                  <a:lnTo>
+                    <a:pt x="3606871" y="993199"/>
+                  </a:lnTo>
+                  <a:lnTo>
+                    <a:pt x="3677215" y="995507"/>
+                  </a:lnTo>
+                  <a:lnTo>
+                    <a:pt x="3747560" y="997795"/>
+                  </a:lnTo>
+                  <a:lnTo>
+                    <a:pt x="3817904" y="1000063"/>
+                  </a:lnTo>
+                  <a:lnTo>
+                    <a:pt x="3888249" y="1002311"/>
+                  </a:lnTo>
+                  <a:lnTo>
+                    <a:pt x="3958593" y="1004539"/>
+                  </a:lnTo>
+                  <a:lnTo>
+                    <a:pt x="4028937" y="1006748"/>
+                  </a:lnTo>
+                  <a:lnTo>
+                    <a:pt x="4099282" y="1008938"/>
+                  </a:lnTo>
+                  <a:lnTo>
+                    <a:pt x="4169626" y="1011108"/>
+                  </a:lnTo>
+                  <a:lnTo>
+                    <a:pt x="4239971" y="1013260"/>
+                  </a:lnTo>
+                  <a:lnTo>
+                    <a:pt x="4310315" y="1015392"/>
+                  </a:lnTo>
+                  <a:lnTo>
+                    <a:pt x="4380660" y="1017506"/>
+                  </a:lnTo>
+                  <a:lnTo>
+                    <a:pt x="4451004" y="1019602"/>
+                  </a:lnTo>
+                  <a:lnTo>
+                    <a:pt x="4521349" y="1021679"/>
+                  </a:lnTo>
+                  <a:lnTo>
+                    <a:pt x="4591693" y="1023738"/>
+                  </a:lnTo>
+                  <a:lnTo>
+                    <a:pt x="4662038" y="1025779"/>
+                  </a:lnTo>
+                  <a:lnTo>
+                    <a:pt x="4732382" y="1027802"/>
+                  </a:lnTo>
+                  <a:lnTo>
+                    <a:pt x="4802727" y="1029808"/>
+                  </a:lnTo>
+                  <a:lnTo>
+                    <a:pt x="4873071" y="1031796"/>
+                  </a:lnTo>
+                  <a:lnTo>
+                    <a:pt x="4943416" y="1033766"/>
+                  </a:lnTo>
+                  <a:lnTo>
+                    <a:pt x="5013760" y="1035720"/>
+                  </a:lnTo>
+                  <a:lnTo>
+                    <a:pt x="5084105" y="1037656"/>
+                  </a:lnTo>
+                  <a:lnTo>
+                    <a:pt x="5154449" y="1039575"/>
+                  </a:lnTo>
+                  <a:lnTo>
+                    <a:pt x="5224794" y="1041478"/>
+                  </a:lnTo>
+                  <a:lnTo>
+                    <a:pt x="5295138" y="1043364"/>
+                  </a:lnTo>
+                  <a:lnTo>
+                    <a:pt x="5365483" y="1045233"/>
+                  </a:lnTo>
+                  <a:lnTo>
+                    <a:pt x="5435827" y="1047086"/>
+                  </a:lnTo>
+                  <a:lnTo>
+                    <a:pt x="5506172" y="1048923"/>
+                  </a:lnTo>
+                  <a:lnTo>
+                    <a:pt x="5576516" y="1050744"/>
+                  </a:lnTo>
+                  <a:lnTo>
+                    <a:pt x="5646861" y="1052549"/>
+                  </a:lnTo>
+                  <a:lnTo>
+                    <a:pt x="5717205" y="1054338"/>
+                  </a:lnTo>
+                  <a:lnTo>
+                    <a:pt x="5787550" y="1056112"/>
+                  </a:lnTo>
+                  <a:lnTo>
+                    <a:pt x="5857894" y="1057870"/>
+                  </a:lnTo>
+                  <a:lnTo>
+                    <a:pt x="5928239" y="1059612"/>
+                  </a:lnTo>
+                  <a:lnTo>
+                    <a:pt x="5998583" y="1061340"/>
+                  </a:lnTo>
+                  <a:lnTo>
+                    <a:pt x="6068928" y="1063052"/>
+                  </a:lnTo>
+                  <a:lnTo>
+                    <a:pt x="6139272" y="1064749"/>
+                  </a:lnTo>
+                  <a:lnTo>
+                    <a:pt x="6209617" y="1066432"/>
                   </a:lnTo>
                 </a:path>
               </a:pathLst>
@@ -4180,312 +3890,637 @@
           </p:nvSpPr>
           <p:spPr>
             <a:xfrm>
-              <a:off x="1172049" y="2976596"/>
-              <a:ext cx="7090630" cy="2335986"/>
+              <a:off x="1235312" y="2945261"/>
+              <a:ext cx="6964104" cy="414166"/>
             </a:xfrm>
             <a:custGeom>
               <a:avLst/>
               <a:pathLst>
-                <a:path w="7090630" h="2335986">
+                <a:path w="6964104" h="414166">
+                  <a:moveTo>
+                    <a:pt x="6964104" y="414166"/>
+                  </a:moveTo>
+                  <a:lnTo>
+                    <a:pt x="6893760" y="412549"/>
+                  </a:lnTo>
+                  <a:lnTo>
+                    <a:pt x="6823415" y="410868"/>
+                  </a:lnTo>
+                  <a:lnTo>
+                    <a:pt x="6753071" y="409120"/>
+                  </a:lnTo>
+                  <a:lnTo>
+                    <a:pt x="6682726" y="407303"/>
+                  </a:lnTo>
+                  <a:lnTo>
+                    <a:pt x="6612382" y="405414"/>
+                  </a:lnTo>
+                  <a:lnTo>
+                    <a:pt x="6542037" y="403450"/>
+                  </a:lnTo>
+                  <a:lnTo>
+                    <a:pt x="6471693" y="401409"/>
+                  </a:lnTo>
+                  <a:lnTo>
+                    <a:pt x="6401348" y="399287"/>
+                  </a:lnTo>
+                  <a:lnTo>
+                    <a:pt x="6331004" y="397081"/>
+                  </a:lnTo>
+                  <a:lnTo>
+                    <a:pt x="6260659" y="394787"/>
+                  </a:lnTo>
+                  <a:lnTo>
+                    <a:pt x="6190315" y="392403"/>
+                  </a:lnTo>
+                  <a:lnTo>
+                    <a:pt x="6119970" y="389924"/>
+                  </a:lnTo>
+                  <a:lnTo>
+                    <a:pt x="6049626" y="387347"/>
+                  </a:lnTo>
+                  <a:lnTo>
+                    <a:pt x="5979281" y="384669"/>
+                  </a:lnTo>
+                  <a:lnTo>
+                    <a:pt x="5908937" y="381884"/>
+                  </a:lnTo>
+                  <a:lnTo>
+                    <a:pt x="5838592" y="378989"/>
+                  </a:lnTo>
+                  <a:lnTo>
+                    <a:pt x="5768248" y="375980"/>
+                  </a:lnTo>
+                  <a:lnTo>
+                    <a:pt x="5697903" y="372851"/>
+                  </a:lnTo>
+                  <a:lnTo>
+                    <a:pt x="5627559" y="369599"/>
+                  </a:lnTo>
+                  <a:lnTo>
+                    <a:pt x="5557214" y="366218"/>
+                  </a:lnTo>
+                  <a:lnTo>
+                    <a:pt x="5486870" y="362703"/>
+                  </a:lnTo>
+                  <a:lnTo>
+                    <a:pt x="5416525" y="359049"/>
+                  </a:lnTo>
+                  <a:lnTo>
+                    <a:pt x="5346181" y="355250"/>
+                  </a:lnTo>
+                  <a:lnTo>
+                    <a:pt x="5275836" y="351301"/>
+                  </a:lnTo>
+                  <a:lnTo>
+                    <a:pt x="5205492" y="347196"/>
+                  </a:lnTo>
+                  <a:lnTo>
+                    <a:pt x="5135147" y="342928"/>
+                  </a:lnTo>
+                  <a:lnTo>
+                    <a:pt x="5064803" y="338491"/>
+                  </a:lnTo>
+                  <a:lnTo>
+                    <a:pt x="4994458" y="333879"/>
+                  </a:lnTo>
+                  <a:lnTo>
+                    <a:pt x="4924114" y="329084"/>
+                  </a:lnTo>
+                  <a:lnTo>
+                    <a:pt x="4853769" y="324100"/>
+                  </a:lnTo>
+                  <a:lnTo>
+                    <a:pt x="4783425" y="318918"/>
+                  </a:lnTo>
+                  <a:lnTo>
+                    <a:pt x="4713080" y="313531"/>
+                  </a:lnTo>
+                  <a:lnTo>
+                    <a:pt x="4642736" y="307931"/>
+                  </a:lnTo>
+                  <a:lnTo>
+                    <a:pt x="4572391" y="302109"/>
+                  </a:lnTo>
+                  <a:lnTo>
+                    <a:pt x="4502047" y="296057"/>
+                  </a:lnTo>
+                  <a:lnTo>
+                    <a:pt x="4431702" y="289765"/>
+                  </a:lnTo>
+                  <a:lnTo>
+                    <a:pt x="4361358" y="283225"/>
+                  </a:lnTo>
+                  <a:lnTo>
+                    <a:pt x="4291013" y="276425"/>
+                  </a:lnTo>
+                  <a:lnTo>
+                    <a:pt x="4220669" y="269357"/>
+                  </a:lnTo>
+                  <a:lnTo>
+                    <a:pt x="4150324" y="262008"/>
+                  </a:lnTo>
+                  <a:lnTo>
+                    <a:pt x="4079980" y="254369"/>
+                  </a:lnTo>
+                  <a:lnTo>
+                    <a:pt x="4009635" y="246428"/>
+                  </a:lnTo>
+                  <a:lnTo>
+                    <a:pt x="3939291" y="238172"/>
+                  </a:lnTo>
+                  <a:lnTo>
+                    <a:pt x="3868946" y="229589"/>
+                  </a:lnTo>
+                  <a:lnTo>
+                    <a:pt x="3798602" y="220667"/>
+                  </a:lnTo>
+                  <a:lnTo>
+                    <a:pt x="3728257" y="211392"/>
+                  </a:lnTo>
+                  <a:lnTo>
+                    <a:pt x="3657913" y="201750"/>
+                  </a:lnTo>
+                  <a:lnTo>
+                    <a:pt x="3587569" y="191726"/>
+                  </a:lnTo>
+                  <a:lnTo>
+                    <a:pt x="3517224" y="181305"/>
+                  </a:lnTo>
+                  <a:lnTo>
+                    <a:pt x="3446880" y="170472"/>
+                  </a:lnTo>
+                  <a:lnTo>
+                    <a:pt x="3376535" y="159210"/>
+                  </a:lnTo>
+                  <a:lnTo>
+                    <a:pt x="3306191" y="153863"/>
+                  </a:lnTo>
+                  <a:lnTo>
+                    <a:pt x="3235846" y="151207"/>
+                  </a:lnTo>
+                  <a:lnTo>
+                    <a:pt x="3165502" y="148528"/>
+                  </a:lnTo>
+                  <a:lnTo>
+                    <a:pt x="3095157" y="145824"/>
+                  </a:lnTo>
+                  <a:lnTo>
+                    <a:pt x="3024813" y="143097"/>
+                  </a:lnTo>
+                  <a:lnTo>
+                    <a:pt x="2954468" y="140346"/>
+                  </a:lnTo>
+                  <a:lnTo>
+                    <a:pt x="2884124" y="137571"/>
+                  </a:lnTo>
+                  <a:lnTo>
+                    <a:pt x="2813779" y="134771"/>
+                  </a:lnTo>
+                  <a:lnTo>
+                    <a:pt x="2743435" y="131947"/>
+                  </a:lnTo>
+                  <a:lnTo>
+                    <a:pt x="2673090" y="129097"/>
+                  </a:lnTo>
+                  <a:lnTo>
+                    <a:pt x="2602746" y="126223"/>
+                  </a:lnTo>
+                  <a:lnTo>
+                    <a:pt x="2532401" y="123323"/>
+                  </a:lnTo>
+                  <a:lnTo>
+                    <a:pt x="2462057" y="120397"/>
+                  </a:lnTo>
+                  <a:lnTo>
+                    <a:pt x="2391712" y="117446"/>
+                  </a:lnTo>
+                  <a:lnTo>
+                    <a:pt x="2321368" y="114468"/>
+                  </a:lnTo>
+                  <a:lnTo>
+                    <a:pt x="2251023" y="111465"/>
+                  </a:lnTo>
+                  <a:lnTo>
+                    <a:pt x="2180679" y="108435"/>
+                  </a:lnTo>
+                  <a:lnTo>
+                    <a:pt x="2110334" y="105378"/>
+                  </a:lnTo>
+                  <a:lnTo>
+                    <a:pt x="2039990" y="102294"/>
+                  </a:lnTo>
+                  <a:lnTo>
+                    <a:pt x="1969645" y="99183"/>
+                  </a:lnTo>
+                  <a:lnTo>
+                    <a:pt x="1899301" y="96045"/>
+                  </a:lnTo>
+                  <a:lnTo>
+                    <a:pt x="1828956" y="92879"/>
+                  </a:lnTo>
+                  <a:lnTo>
+                    <a:pt x="1758612" y="89685"/>
+                  </a:lnTo>
+                  <a:lnTo>
+                    <a:pt x="1688267" y="86463"/>
+                  </a:lnTo>
+                  <a:lnTo>
+                    <a:pt x="1617923" y="83212"/>
+                  </a:lnTo>
+                  <a:lnTo>
+                    <a:pt x="1547578" y="79933"/>
+                  </a:lnTo>
+                  <a:lnTo>
+                    <a:pt x="1477234" y="76625"/>
+                  </a:lnTo>
+                  <a:lnTo>
+                    <a:pt x="1406889" y="73287"/>
+                  </a:lnTo>
+                  <a:lnTo>
+                    <a:pt x="1336545" y="69920"/>
+                  </a:lnTo>
+                  <a:lnTo>
+                    <a:pt x="1266200" y="66524"/>
+                  </a:lnTo>
+                  <a:lnTo>
+                    <a:pt x="1195856" y="63097"/>
+                  </a:lnTo>
+                  <a:lnTo>
+                    <a:pt x="1125511" y="59641"/>
+                  </a:lnTo>
+                  <a:lnTo>
+                    <a:pt x="1055167" y="56154"/>
+                  </a:lnTo>
+                  <a:lnTo>
+                    <a:pt x="984822" y="52636"/>
+                  </a:lnTo>
+                  <a:lnTo>
+                    <a:pt x="914478" y="49087"/>
+                  </a:lnTo>
+                  <a:lnTo>
+                    <a:pt x="844133" y="45507"/>
+                  </a:lnTo>
+                  <a:lnTo>
+                    <a:pt x="773789" y="41895"/>
+                  </a:lnTo>
+                  <a:lnTo>
+                    <a:pt x="703444" y="38251"/>
+                  </a:lnTo>
+                  <a:lnTo>
+                    <a:pt x="633100" y="34575"/>
+                  </a:lnTo>
+                  <a:lnTo>
+                    <a:pt x="562755" y="30867"/>
+                  </a:lnTo>
+                  <a:lnTo>
+                    <a:pt x="492411" y="27126"/>
+                  </a:lnTo>
+                  <a:lnTo>
+                    <a:pt x="422066" y="23352"/>
+                  </a:lnTo>
+                  <a:lnTo>
+                    <a:pt x="351722" y="19545"/>
+                  </a:lnTo>
+                  <a:lnTo>
+                    <a:pt x="281377" y="15704"/>
+                  </a:lnTo>
+                  <a:lnTo>
+                    <a:pt x="211033" y="11830"/>
+                  </a:lnTo>
+                  <a:lnTo>
+                    <a:pt x="140688" y="7921"/>
+                  </a:lnTo>
+                  <a:lnTo>
+                    <a:pt x="70344" y="3978"/>
+                  </a:lnTo>
+                  <a:lnTo>
+                    <a:pt x="0" y="0"/>
+                  </a:lnTo>
+                </a:path>
+              </a:pathLst>
+            </a:custGeom>
+          </p:spPr>
+          <p:txBody>
+            <a:bodyPr/>
+            <a:lstStyle/>
+            <a:p/>
+          </p:txBody>
+        </p:sp>
+        <p:sp>
+          <p:nvSpPr>
+            <p:cNvPr id="24" name="pl24"/>
+            <p:cNvSpPr/>
+            <p:nvPr/>
+          </p:nvSpPr>
+          <p:spPr>
+            <a:xfrm>
+              <a:off x="1235312" y="2468997"/>
+              <a:ext cx="6964104" cy="843002"/>
+            </a:xfrm>
+            <a:custGeom>
+              <a:avLst/>
+              <a:pathLst>
+                <a:path w="6964104" h="843002">
                   <a:moveTo>
                     <a:pt x="0" y="0"/>
                   </a:moveTo>
                   <a:lnTo>
-                    <a:pt x="71622" y="60686"/>
-                  </a:lnTo>
-                  <a:lnTo>
-                    <a:pt x="143245" y="119946"/>
-                  </a:lnTo>
-                  <a:lnTo>
-                    <a:pt x="214867" y="177812"/>
-                  </a:lnTo>
-                  <a:lnTo>
-                    <a:pt x="286490" y="234317"/>
-                  </a:lnTo>
-                  <a:lnTo>
-                    <a:pt x="358112" y="289494"/>
-                  </a:lnTo>
-                  <a:lnTo>
-                    <a:pt x="429735" y="343373"/>
-                  </a:lnTo>
-                  <a:lnTo>
-                    <a:pt x="501357" y="395985"/>
-                  </a:lnTo>
-                  <a:lnTo>
-                    <a:pt x="572980" y="447360"/>
-                  </a:lnTo>
-                  <a:lnTo>
-                    <a:pt x="644602" y="497527"/>
-                  </a:lnTo>
-                  <a:lnTo>
-                    <a:pt x="716225" y="546513"/>
-                  </a:lnTo>
-                  <a:lnTo>
-                    <a:pt x="787847" y="594348"/>
-                  </a:lnTo>
-                  <a:lnTo>
-                    <a:pt x="859470" y="641058"/>
-                  </a:lnTo>
-                  <a:lnTo>
-                    <a:pt x="931092" y="686670"/>
-                  </a:lnTo>
-                  <a:lnTo>
-                    <a:pt x="1002715" y="731209"/>
-                  </a:lnTo>
-                  <a:lnTo>
-                    <a:pt x="1074337" y="774701"/>
-                  </a:lnTo>
-                  <a:lnTo>
-                    <a:pt x="1145960" y="817170"/>
-                  </a:lnTo>
-                  <a:lnTo>
-                    <a:pt x="1217582" y="858640"/>
-                  </a:lnTo>
-                  <a:lnTo>
-                    <a:pt x="1289205" y="899135"/>
-                  </a:lnTo>
-                  <a:lnTo>
-                    <a:pt x="1360827" y="938677"/>
-                  </a:lnTo>
-                  <a:lnTo>
-                    <a:pt x="1432450" y="977290"/>
-                  </a:lnTo>
-                  <a:lnTo>
-                    <a:pt x="1504073" y="1014995"/>
-                  </a:lnTo>
-                  <a:lnTo>
-                    <a:pt x="1575695" y="1051813"/>
-                  </a:lnTo>
-                  <a:lnTo>
-                    <a:pt x="1647318" y="1087765"/>
-                  </a:lnTo>
-                  <a:lnTo>
-                    <a:pt x="1718940" y="1122872"/>
-                  </a:lnTo>
-                  <a:lnTo>
-                    <a:pt x="1790563" y="1157153"/>
-                  </a:lnTo>
-                  <a:lnTo>
-                    <a:pt x="1862185" y="1190629"/>
-                  </a:lnTo>
-                  <a:lnTo>
-                    <a:pt x="1933808" y="1223316"/>
-                  </a:lnTo>
-                  <a:lnTo>
-                    <a:pt x="2005430" y="1255236"/>
-                  </a:lnTo>
-                  <a:lnTo>
-                    <a:pt x="2077053" y="1286404"/>
-                  </a:lnTo>
-                  <a:lnTo>
-                    <a:pt x="2148675" y="1316840"/>
-                  </a:lnTo>
-                  <a:lnTo>
-                    <a:pt x="2220298" y="1346560"/>
-                  </a:lnTo>
-                  <a:lnTo>
-                    <a:pt x="2291920" y="1375581"/>
-                  </a:lnTo>
-                  <a:lnTo>
-                    <a:pt x="2363543" y="1403919"/>
-                  </a:lnTo>
-                  <a:lnTo>
-                    <a:pt x="2435165" y="1431592"/>
-                  </a:lnTo>
-                  <a:lnTo>
-                    <a:pt x="2506788" y="1458613"/>
-                  </a:lnTo>
-                  <a:lnTo>
-                    <a:pt x="2578410" y="1484999"/>
-                  </a:lnTo>
-                  <a:lnTo>
-                    <a:pt x="2650033" y="1510764"/>
-                  </a:lnTo>
-                  <a:lnTo>
-                    <a:pt x="2721655" y="1535924"/>
-                  </a:lnTo>
-                  <a:lnTo>
-                    <a:pt x="2793278" y="1560492"/>
-                  </a:lnTo>
-                  <a:lnTo>
-                    <a:pt x="2864901" y="1584482"/>
-                  </a:lnTo>
-                  <a:lnTo>
-                    <a:pt x="2936523" y="1607908"/>
-                  </a:lnTo>
-                  <a:lnTo>
-                    <a:pt x="3008146" y="1630783"/>
-                  </a:lnTo>
-                  <a:lnTo>
-                    <a:pt x="3079768" y="1653120"/>
-                  </a:lnTo>
-                  <a:lnTo>
-                    <a:pt x="3151391" y="1674932"/>
-                  </a:lnTo>
-                  <a:lnTo>
-                    <a:pt x="3223013" y="1696231"/>
-                  </a:lnTo>
-                  <a:lnTo>
-                    <a:pt x="3294636" y="1717029"/>
-                  </a:lnTo>
-                  <a:lnTo>
-                    <a:pt x="3366258" y="1737338"/>
-                  </a:lnTo>
-                  <a:lnTo>
-                    <a:pt x="3437881" y="1757170"/>
-                  </a:lnTo>
-                  <a:lnTo>
-                    <a:pt x="3509503" y="1776535"/>
-                  </a:lnTo>
-                  <a:lnTo>
-                    <a:pt x="3581126" y="1795445"/>
-                  </a:lnTo>
-                  <a:lnTo>
-                    <a:pt x="3652748" y="1813910"/>
-                  </a:lnTo>
-                  <a:lnTo>
-                    <a:pt x="3724371" y="1831940"/>
-                  </a:lnTo>
-                  <a:lnTo>
-                    <a:pt x="3795993" y="1849547"/>
-                  </a:lnTo>
-                  <a:lnTo>
-                    <a:pt x="3867616" y="1866740"/>
-                  </a:lnTo>
-                  <a:lnTo>
-                    <a:pt x="3939238" y="1883528"/>
-                  </a:lnTo>
-                  <a:lnTo>
-                    <a:pt x="4010861" y="1899922"/>
-                  </a:lnTo>
-                  <a:lnTo>
-                    <a:pt x="4082483" y="1915930"/>
-                  </a:lnTo>
-                  <a:lnTo>
-                    <a:pt x="4154106" y="1931562"/>
-                  </a:lnTo>
-                  <a:lnTo>
-                    <a:pt x="4225729" y="1946826"/>
-                  </a:lnTo>
-                  <a:lnTo>
-                    <a:pt x="4297351" y="1961731"/>
-                  </a:lnTo>
-                  <a:lnTo>
-                    <a:pt x="4368974" y="1976285"/>
-                  </a:lnTo>
-                  <a:lnTo>
-                    <a:pt x="4440596" y="1990498"/>
-                  </a:lnTo>
-                  <a:lnTo>
-                    <a:pt x="4512219" y="2004376"/>
-                  </a:lnTo>
-                  <a:lnTo>
-                    <a:pt x="4583841" y="2017928"/>
-                  </a:lnTo>
-                  <a:lnTo>
-                    <a:pt x="4655464" y="2031161"/>
-                  </a:lnTo>
-                  <a:lnTo>
-                    <a:pt x="4727086" y="2044083"/>
-                  </a:lnTo>
-                  <a:lnTo>
-                    <a:pt x="4798709" y="2056701"/>
-                  </a:lnTo>
-                  <a:lnTo>
-                    <a:pt x="4870331" y="2069022"/>
-                  </a:lnTo>
-                  <a:lnTo>
-                    <a:pt x="4941954" y="2081054"/>
-                  </a:lnTo>
-                  <a:lnTo>
-                    <a:pt x="5013576" y="2092802"/>
-                  </a:lnTo>
-                  <a:lnTo>
-                    <a:pt x="5085199" y="2104274"/>
-                  </a:lnTo>
-                  <a:lnTo>
-                    <a:pt x="5156821" y="2115477"/>
-                  </a:lnTo>
-                  <a:lnTo>
-                    <a:pt x="5228444" y="2126416"/>
-                  </a:lnTo>
-                  <a:lnTo>
-                    <a:pt x="5300066" y="2137098"/>
-                  </a:lnTo>
-                  <a:lnTo>
-                    <a:pt x="5371689" y="2147529"/>
-                  </a:lnTo>
-                  <a:lnTo>
-                    <a:pt x="5443311" y="2157714"/>
-                  </a:lnTo>
-                  <a:lnTo>
-                    <a:pt x="5514934" y="2167660"/>
-                  </a:lnTo>
-                  <a:lnTo>
-                    <a:pt x="5586557" y="2177372"/>
-                  </a:lnTo>
-                  <a:lnTo>
-                    <a:pt x="5658179" y="2186855"/>
-                  </a:lnTo>
-                  <a:lnTo>
-                    <a:pt x="5729802" y="2196116"/>
-                  </a:lnTo>
-                  <a:lnTo>
-                    <a:pt x="5801424" y="2205159"/>
-                  </a:lnTo>
-                  <a:lnTo>
-                    <a:pt x="5873047" y="2213989"/>
-                  </a:lnTo>
-                  <a:lnTo>
-                    <a:pt x="5944669" y="2222611"/>
-                  </a:lnTo>
-                  <a:lnTo>
-                    <a:pt x="6016292" y="2231031"/>
-                  </a:lnTo>
-                  <a:lnTo>
-                    <a:pt x="6087914" y="2239253"/>
-                  </a:lnTo>
-                  <a:lnTo>
-                    <a:pt x="6159537" y="2247281"/>
-                  </a:lnTo>
-                  <a:lnTo>
-                    <a:pt x="6231159" y="2255121"/>
-                  </a:lnTo>
-                  <a:lnTo>
-                    <a:pt x="6302782" y="2262776"/>
-                  </a:lnTo>
-                  <a:lnTo>
-                    <a:pt x="6374404" y="2270251"/>
-                  </a:lnTo>
-                  <a:lnTo>
-                    <a:pt x="6446027" y="2277551"/>
-                  </a:lnTo>
-                  <a:lnTo>
-                    <a:pt x="6517649" y="2284678"/>
-                  </a:lnTo>
-                  <a:lnTo>
-                    <a:pt x="6589272" y="2291639"/>
-                  </a:lnTo>
-                  <a:lnTo>
-                    <a:pt x="6660894" y="2298435"/>
-                  </a:lnTo>
-                  <a:lnTo>
-                    <a:pt x="6732517" y="2305072"/>
-                  </a:lnTo>
-                  <a:lnTo>
-                    <a:pt x="6804139" y="2311552"/>
-                  </a:lnTo>
-                  <a:lnTo>
-                    <a:pt x="6875762" y="2317880"/>
-                  </a:lnTo>
-                  <a:lnTo>
-                    <a:pt x="6947385" y="2324060"/>
-                  </a:lnTo>
-                  <a:lnTo>
-                    <a:pt x="7019007" y="2330094"/>
-                  </a:lnTo>
-                  <a:lnTo>
-                    <a:pt x="7090630" y="2335986"/>
+                    <a:pt x="70344" y="21900"/>
+                  </a:lnTo>
+                  <a:lnTo>
+                    <a:pt x="140688" y="43285"/>
+                  </a:lnTo>
+                  <a:lnTo>
+                    <a:pt x="211033" y="64168"/>
+                  </a:lnTo>
+                  <a:lnTo>
+                    <a:pt x="281377" y="84559"/>
+                  </a:lnTo>
+                  <a:lnTo>
+                    <a:pt x="351722" y="104471"/>
+                  </a:lnTo>
+                  <a:lnTo>
+                    <a:pt x="422066" y="123915"/>
+                  </a:lnTo>
+                  <a:lnTo>
+                    <a:pt x="492411" y="142901"/>
+                  </a:lnTo>
+                  <a:lnTo>
+                    <a:pt x="562755" y="161441"/>
+                  </a:lnTo>
+                  <a:lnTo>
+                    <a:pt x="633100" y="179545"/>
+                  </a:lnTo>
+                  <a:lnTo>
+                    <a:pt x="703444" y="197224"/>
+                  </a:lnTo>
+                  <a:lnTo>
+                    <a:pt x="773789" y="214486"/>
+                  </a:lnTo>
+                  <a:lnTo>
+                    <a:pt x="844133" y="231343"/>
+                  </a:lnTo>
+                  <a:lnTo>
+                    <a:pt x="914478" y="247803"/>
+                  </a:lnTo>
+                  <a:lnTo>
+                    <a:pt x="984822" y="263876"/>
+                  </a:lnTo>
+                  <a:lnTo>
+                    <a:pt x="1055167" y="279571"/>
+                  </a:lnTo>
+                  <a:lnTo>
+                    <a:pt x="1125511" y="294897"/>
+                  </a:lnTo>
+                  <a:lnTo>
+                    <a:pt x="1195856" y="309863"/>
+                  </a:lnTo>
+                  <a:lnTo>
+                    <a:pt x="1266200" y="324476"/>
+                  </a:lnTo>
+                  <a:lnTo>
+                    <a:pt x="1336545" y="338746"/>
+                  </a:lnTo>
+                  <a:lnTo>
+                    <a:pt x="1406889" y="352681"/>
+                  </a:lnTo>
+                  <a:lnTo>
+                    <a:pt x="1477234" y="366287"/>
+                  </a:lnTo>
+                  <a:lnTo>
+                    <a:pt x="1547578" y="379574"/>
+                  </a:lnTo>
+                  <a:lnTo>
+                    <a:pt x="1617923" y="392549"/>
+                  </a:lnTo>
+                  <a:lnTo>
+                    <a:pt x="1688267" y="405218"/>
+                  </a:lnTo>
+                  <a:lnTo>
+                    <a:pt x="1758612" y="417589"/>
+                  </a:lnTo>
+                  <a:lnTo>
+                    <a:pt x="1828956" y="429670"/>
+                  </a:lnTo>
+                  <a:lnTo>
+                    <a:pt x="1899301" y="441466"/>
+                  </a:lnTo>
+                  <a:lnTo>
+                    <a:pt x="1969645" y="452985"/>
+                  </a:lnTo>
+                  <a:lnTo>
+                    <a:pt x="2039990" y="464233"/>
+                  </a:lnTo>
+                  <a:lnTo>
+                    <a:pt x="2110334" y="475216"/>
+                  </a:lnTo>
+                  <a:lnTo>
+                    <a:pt x="2180679" y="485941"/>
+                  </a:lnTo>
+                  <a:lnTo>
+                    <a:pt x="2251023" y="496414"/>
+                  </a:lnTo>
+                  <a:lnTo>
+                    <a:pt x="2321368" y="506641"/>
+                  </a:lnTo>
+                  <a:lnTo>
+                    <a:pt x="2391712" y="516627"/>
+                  </a:lnTo>
+                  <a:lnTo>
+                    <a:pt x="2462057" y="526379"/>
+                  </a:lnTo>
+                  <a:lnTo>
+                    <a:pt x="2532401" y="535901"/>
+                  </a:lnTo>
+                  <a:lnTo>
+                    <a:pt x="2602746" y="545199"/>
+                  </a:lnTo>
+                  <a:lnTo>
+                    <a:pt x="2673090" y="554278"/>
+                  </a:lnTo>
+                  <a:lnTo>
+                    <a:pt x="2743435" y="563144"/>
+                  </a:lnTo>
+                  <a:lnTo>
+                    <a:pt x="2813779" y="571802"/>
+                  </a:lnTo>
+                  <a:lnTo>
+                    <a:pt x="2884124" y="580256"/>
+                  </a:lnTo>
+                  <a:lnTo>
+                    <a:pt x="2954468" y="588511"/>
+                  </a:lnTo>
+                  <a:lnTo>
+                    <a:pt x="3024813" y="596572"/>
+                  </a:lnTo>
+                  <a:lnTo>
+                    <a:pt x="3095157" y="604443"/>
+                  </a:lnTo>
+                  <a:lnTo>
+                    <a:pt x="3165502" y="612130"/>
+                  </a:lnTo>
+                  <a:lnTo>
+                    <a:pt x="3235846" y="619635"/>
+                  </a:lnTo>
+                  <a:lnTo>
+                    <a:pt x="3306191" y="626964"/>
+                  </a:lnTo>
+                  <a:lnTo>
+                    <a:pt x="3376535" y="634121"/>
+                  </a:lnTo>
+                  <a:lnTo>
+                    <a:pt x="3446880" y="641109"/>
+                  </a:lnTo>
+                  <a:lnTo>
+                    <a:pt x="3517224" y="647933"/>
+                  </a:lnTo>
+                  <a:lnTo>
+                    <a:pt x="3587569" y="654597"/>
+                  </a:lnTo>
+                  <a:lnTo>
+                    <a:pt x="3657913" y="661104"/>
+                  </a:lnTo>
+                  <a:lnTo>
+                    <a:pt x="3728257" y="667458"/>
+                  </a:lnTo>
+                  <a:lnTo>
+                    <a:pt x="3798602" y="673662"/>
+                  </a:lnTo>
+                  <a:lnTo>
+                    <a:pt x="3868946" y="679721"/>
+                  </a:lnTo>
+                  <a:lnTo>
+                    <a:pt x="3939291" y="685637"/>
+                  </a:lnTo>
+                  <a:lnTo>
+                    <a:pt x="4009635" y="691414"/>
+                  </a:lnTo>
+                  <a:lnTo>
+                    <a:pt x="4079980" y="697055"/>
+                  </a:lnTo>
+                  <a:lnTo>
+                    <a:pt x="4150324" y="702563"/>
+                  </a:lnTo>
+                  <a:lnTo>
+                    <a:pt x="4220669" y="707942"/>
+                  </a:lnTo>
+                  <a:lnTo>
+                    <a:pt x="4291013" y="713195"/>
+                  </a:lnTo>
+                  <a:lnTo>
+                    <a:pt x="4361358" y="718324"/>
+                  </a:lnTo>
+                  <a:lnTo>
+                    <a:pt x="4431702" y="723332"/>
+                  </a:lnTo>
+                  <a:lnTo>
+                    <a:pt x="4502047" y="728222"/>
+                  </a:lnTo>
+                  <a:lnTo>
+                    <a:pt x="4572391" y="732998"/>
+                  </a:lnTo>
+                  <a:lnTo>
+                    <a:pt x="4642736" y="737661"/>
+                  </a:lnTo>
+                  <a:lnTo>
+                    <a:pt x="4713080" y="742215"/>
+                  </a:lnTo>
+                  <a:lnTo>
+                    <a:pt x="4783425" y="746661"/>
+                  </a:lnTo>
+                  <a:lnTo>
+                    <a:pt x="4853769" y="751003"/>
+                  </a:lnTo>
+                  <a:lnTo>
+                    <a:pt x="4924114" y="755243"/>
+                  </a:lnTo>
+                  <a:lnTo>
+                    <a:pt x="4994458" y="759383"/>
+                  </a:lnTo>
+                  <a:lnTo>
+                    <a:pt x="5064803" y="763426"/>
+                  </a:lnTo>
+                  <a:lnTo>
+                    <a:pt x="5135147" y="767373"/>
+                  </a:lnTo>
+                  <a:lnTo>
+                    <a:pt x="5205492" y="771228"/>
+                  </a:lnTo>
+                  <a:lnTo>
+                    <a:pt x="5275836" y="774992"/>
+                  </a:lnTo>
+                  <a:lnTo>
+                    <a:pt x="5346181" y="778668"/>
+                  </a:lnTo>
+                  <a:lnTo>
+                    <a:pt x="5416525" y="782257"/>
+                  </a:lnTo>
+                  <a:lnTo>
+                    <a:pt x="5486870" y="785762"/>
+                  </a:lnTo>
+                  <a:lnTo>
+                    <a:pt x="5557214" y="789184"/>
+                  </a:lnTo>
+                  <a:lnTo>
+                    <a:pt x="5627559" y="792526"/>
+                  </a:lnTo>
+                  <a:lnTo>
+                    <a:pt x="5697903" y="795790"/>
+                  </a:lnTo>
+                  <a:lnTo>
+                    <a:pt x="5768248" y="798976"/>
+                  </a:lnTo>
+                  <a:lnTo>
+                    <a:pt x="5838592" y="802088"/>
+                  </a:lnTo>
+                  <a:lnTo>
+                    <a:pt x="5908937" y="805126"/>
+                  </a:lnTo>
+                  <a:lnTo>
+                    <a:pt x="5979281" y="808093"/>
+                  </a:lnTo>
+                  <a:lnTo>
+                    <a:pt x="6049626" y="810991"/>
+                  </a:lnTo>
+                  <a:lnTo>
+                    <a:pt x="6119970" y="813820"/>
+                  </a:lnTo>
+                  <a:lnTo>
+                    <a:pt x="6190315" y="816582"/>
+                  </a:lnTo>
+                  <a:lnTo>
+                    <a:pt x="6260659" y="819280"/>
+                  </a:lnTo>
+                  <a:lnTo>
+                    <a:pt x="6331004" y="821914"/>
+                  </a:lnTo>
+                  <a:lnTo>
+                    <a:pt x="6401348" y="824486"/>
+                  </a:lnTo>
+                  <a:lnTo>
+                    <a:pt x="6471693" y="826998"/>
+                  </a:lnTo>
+                  <a:lnTo>
+                    <a:pt x="6542037" y="829451"/>
+                  </a:lnTo>
+                  <a:lnTo>
+                    <a:pt x="6612382" y="831846"/>
+                  </a:lnTo>
+                  <a:lnTo>
+                    <a:pt x="6682726" y="834185"/>
+                  </a:lnTo>
+                  <a:lnTo>
+                    <a:pt x="6753071" y="836468"/>
+                  </a:lnTo>
+                  <a:lnTo>
+                    <a:pt x="6823415" y="838698"/>
+                  </a:lnTo>
+                  <a:lnTo>
+                    <a:pt x="6893760" y="840876"/>
+                  </a:lnTo>
+                  <a:lnTo>
+                    <a:pt x="6964104" y="843002"/>
                   </a:lnTo>
                 </a:path>
               </a:pathLst>
@@ -4508,27 +4543,27 @@
         </p:sp>
         <p:sp>
           <p:nvSpPr>
-            <p:cNvPr id="24" name="pl24"/>
+            <p:cNvPr id="25" name="pl25"/>
             <p:cNvSpPr/>
             <p:nvPr/>
           </p:nvSpPr>
           <p:spPr>
             <a:xfrm>
-              <a:off x="817517" y="4727786"/>
-              <a:ext cx="7799693" cy="0"/>
+              <a:off x="887106" y="3100960"/>
+              <a:ext cx="7660515" cy="0"/>
             </a:xfrm>
             <a:custGeom>
               <a:avLst/>
               <a:pathLst>
-                <a:path w="7799693" h="0">
+                <a:path w="7660515" h="0">
                   <a:moveTo>
                     <a:pt x="0" y="0"/>
                   </a:moveTo>
                   <a:lnTo>
-                    <a:pt x="7799693" y="0"/>
-                  </a:lnTo>
-                  <a:lnTo>
-                    <a:pt x="7799693" y="0"/>
+                    <a:pt x="7660515" y="0"/>
+                  </a:lnTo>
+                  <a:lnTo>
+                    <a:pt x="7660515" y="0"/>
                   </a:lnTo>
                 </a:path>
               </a:pathLst>
@@ -4551,21 +4586,21 @@
         </p:sp>
         <p:sp>
           <p:nvSpPr>
-            <p:cNvPr id="25" name="pl25"/>
+            <p:cNvPr id="26" name="pl26"/>
             <p:cNvSpPr/>
             <p:nvPr/>
           </p:nvSpPr>
           <p:spPr>
             <a:xfrm>
-              <a:off x="4588151" y="2073503"/>
-              <a:ext cx="0" cy="3649639"/>
+              <a:off x="4590457" y="2143092"/>
+              <a:ext cx="0" cy="1317069"/>
             </a:xfrm>
             <a:custGeom>
               <a:avLst/>
               <a:pathLst>
-                <a:path w="0" h="3649639">
+                <a:path w="0" h="1317069">
                   <a:moveTo>
-                    <a:pt x="0" y="3649639"/>
+                    <a:pt x="0" y="1317069"/>
                   </a:moveTo>
                   <a:lnTo>
                     <a:pt x="0" y="0"/>
@@ -4594,13 +4629,13 @@
         </p:sp>
         <p:sp>
           <p:nvSpPr>
-            <p:cNvPr id="26" name="tx26"/>
+            <p:cNvPr id="27" name="tx27"/>
             <p:cNvSpPr/>
             <p:nvPr/>
           </p:nvSpPr>
           <p:spPr>
             <a:xfrm>
-              <a:off x="692708" y="5517199"/>
+              <a:off x="762297" y="3360243"/>
               <a:ext cx="62179" cy="80101"/>
             </a:xfrm>
             <a:prstGeom prst="rect">
@@ -4640,13 +4675,13 @@
         </p:sp>
         <p:sp>
           <p:nvSpPr>
-            <p:cNvPr id="27" name="tx27"/>
+            <p:cNvPr id="28" name="tx28"/>
             <p:cNvSpPr/>
             <p:nvPr/>
           </p:nvSpPr>
           <p:spPr>
             <a:xfrm>
-              <a:off x="692708" y="4687735"/>
+              <a:off x="762297" y="3060909"/>
               <a:ext cx="62179" cy="80101"/>
             </a:xfrm>
             <a:prstGeom prst="rect">
@@ -4686,13 +4721,13 @@
         </p:sp>
         <p:sp>
           <p:nvSpPr>
-            <p:cNvPr id="28" name="tx28"/>
+            <p:cNvPr id="29" name="tx29"/>
             <p:cNvSpPr/>
             <p:nvPr/>
           </p:nvSpPr>
           <p:spPr>
             <a:xfrm>
-              <a:off x="692708" y="3858272"/>
+              <a:off x="762297" y="2761575"/>
               <a:ext cx="62179" cy="80101"/>
             </a:xfrm>
             <a:prstGeom prst="rect">
@@ -4732,13 +4767,13 @@
         </p:sp>
         <p:sp>
           <p:nvSpPr>
-            <p:cNvPr id="29" name="tx29"/>
+            <p:cNvPr id="30" name="tx30"/>
             <p:cNvSpPr/>
             <p:nvPr/>
           </p:nvSpPr>
           <p:spPr>
             <a:xfrm>
-              <a:off x="692708" y="3028808"/>
+              <a:off x="762297" y="2462242"/>
               <a:ext cx="62179" cy="80101"/>
             </a:xfrm>
             <a:prstGeom prst="rect">
@@ -4778,13 +4813,13 @@
         </p:sp>
         <p:sp>
           <p:nvSpPr>
-            <p:cNvPr id="30" name="tx30"/>
+            <p:cNvPr id="31" name="tx31"/>
             <p:cNvSpPr/>
             <p:nvPr/>
           </p:nvSpPr>
           <p:spPr>
             <a:xfrm>
-              <a:off x="692708" y="2199345"/>
+              <a:off x="762297" y="2162908"/>
               <a:ext cx="62179" cy="80101"/>
             </a:xfrm>
             <a:prstGeom prst="rect">
@@ -4824,13 +4859,13 @@
         </p:sp>
         <p:sp>
           <p:nvSpPr>
-            <p:cNvPr id="31" name="tx31"/>
+            <p:cNvPr id="32" name="tx32"/>
             <p:cNvSpPr/>
             <p:nvPr/>
           </p:nvSpPr>
           <p:spPr>
             <a:xfrm>
-              <a:off x="2360651" y="5785772"/>
+              <a:off x="2401262" y="3522791"/>
               <a:ext cx="161574" cy="80101"/>
             </a:xfrm>
             <a:prstGeom prst="rect">
@@ -4870,13 +4905,13 @@
         </p:sp>
         <p:sp>
           <p:nvSpPr>
-            <p:cNvPr id="32" name="tx32"/>
+            <p:cNvPr id="33" name="tx33"/>
             <p:cNvSpPr/>
             <p:nvPr/>
           </p:nvSpPr>
           <p:spPr>
             <a:xfrm>
-              <a:off x="4561958" y="5785772"/>
+              <a:off x="4564176" y="3522791"/>
               <a:ext cx="62179" cy="80101"/>
             </a:xfrm>
             <a:prstGeom prst="rect">
@@ -4916,13 +4951,13 @@
         </p:sp>
         <p:sp>
           <p:nvSpPr>
-            <p:cNvPr id="33" name="tx33"/>
+            <p:cNvPr id="34" name="tx34"/>
             <p:cNvSpPr/>
             <p:nvPr/>
           </p:nvSpPr>
           <p:spPr>
             <a:xfrm>
-              <a:off x="6682478" y="5785772"/>
+              <a:off x="6646302" y="3522791"/>
               <a:ext cx="124358" cy="80101"/>
             </a:xfrm>
             <a:prstGeom prst="rect">
@@ -4962,13 +4997,13 @@
         </p:sp>
         <p:sp>
           <p:nvSpPr>
-            <p:cNvPr id="34" name="tx34"/>
+            <p:cNvPr id="35" name="tx35"/>
             <p:cNvSpPr/>
             <p:nvPr/>
           </p:nvSpPr>
           <p:spPr>
             <a:xfrm>
-              <a:off x="2928340" y="5925448"/>
+              <a:off x="2928340" y="3662467"/>
               <a:ext cx="3578047" cy="100218"/>
             </a:xfrm>
             <a:prstGeom prst="rect">
@@ -5008,13 +5043,13 @@
         </p:sp>
         <p:sp>
           <p:nvSpPr>
-            <p:cNvPr id="35" name="tx35"/>
+            <p:cNvPr id="36" name="tx36"/>
             <p:cNvSpPr/>
             <p:nvPr/>
           </p:nvSpPr>
           <p:spPr>
             <a:xfrm rot="-5400000">
-              <a:off x="68446" y="3848213"/>
+              <a:off x="138035" y="2751517"/>
               <a:ext cx="1016904" cy="100218"/>
             </a:xfrm>
             <a:prstGeom prst="rect">
@@ -5054,13 +5089,13 @@
         </p:sp>
         <p:sp>
           <p:nvSpPr>
-            <p:cNvPr id="36" name="tx36"/>
+            <p:cNvPr id="37" name="tx37"/>
             <p:cNvSpPr/>
             <p:nvPr/>
           </p:nvSpPr>
           <p:spPr>
             <a:xfrm>
-              <a:off x="817517" y="1896563"/>
+              <a:off x="887106" y="1966152"/>
               <a:ext cx="6321612" cy="82021"/>
             </a:xfrm>
             <a:prstGeom prst="rect">
@@ -5100,13 +5135,3643 @@
         </p:sp>
         <p:sp>
           <p:nvSpPr>
-            <p:cNvPr id="37" name="tx37"/>
+            <p:cNvPr id="38" name="tx38"/>
             <p:cNvSpPr/>
             <p:nvPr/>
           </p:nvSpPr>
           <p:spPr>
             <a:xfrm>
-              <a:off x="817517" y="1669789"/>
+              <a:off x="887106" y="1739378"/>
+              <a:ext cx="2067001" cy="120152"/>
+            </a:xfrm>
+            <a:prstGeom prst="rect">
+              <a:avLst/>
+            </a:prstGeom>
+            <a:noFill/>
+          </p:spPr>
+          <p:txBody>
+            <a:bodyPr lIns="0" rIns="0" tIns="0" bIns="0" anchorCtr="1" anchor="ctr" wrap="none"/>
+            <a:lstStyle/>
+            <a:p>
+              <a:pPr algn="l" marL="0" marR="0" indent="0">
+                <a:lnSpc>
+                  <a:spcPts val="1320"/>
+                </a:lnSpc>
+                <a:spcBef>
+                  <a:spcPts val="0"/>
+                </a:spcBef>
+                <a:spcAft>
+                  <a:spcPts val="0"/>
+                </a:spcAft>
+              </a:pPr>
+              <a:r>
+                <a:rPr sz="1320">
+                  <a:solidFill>
+                    <a:srgbClr val="000000">
+                      <a:alpha val="100000"/>
+                    </a:srgbClr>
+                  </a:solidFill>
+                  <a:latin typeface="Helvetica"/>
+                  <a:cs typeface="Helvetica"/>
+                </a:rPr>
+                <a:t>Immune-related AE &amp; Other</a:t>
+              </a:r>
+            </a:p>
+          </p:txBody>
+        </p:sp>
+        <p:sp>
+          <p:nvSpPr>
+            <p:cNvPr id="39" name="pl39"/>
+            <p:cNvSpPr/>
+            <p:nvPr/>
+          </p:nvSpPr>
+          <p:spPr>
+            <a:xfrm>
+              <a:off x="887106" y="5444019"/>
+              <a:ext cx="7660515" cy="0"/>
+            </a:xfrm>
+            <a:custGeom>
+              <a:avLst/>
+              <a:pathLst>
+                <a:path w="7660515" h="0">
+                  <a:moveTo>
+                    <a:pt x="0" y="0"/>
+                  </a:moveTo>
+                  <a:lnTo>
+                    <a:pt x="7660515" y="0"/>
+                  </a:lnTo>
+                  <a:lnTo>
+                    <a:pt x="7660515" y="0"/>
+                  </a:lnTo>
+                </a:path>
+              </a:pathLst>
+            </a:custGeom>
+            <a:ln w="6775" cap="flat">
+              <a:solidFill>
+                <a:srgbClr val="EBEBEB">
+                  <a:alpha val="100000"/>
+                </a:srgbClr>
+              </a:solidFill>
+              <a:prstDash val="solid"/>
+              <a:round/>
+            </a:ln>
+          </p:spPr>
+          <p:txBody>
+            <a:bodyPr/>
+            <a:lstStyle/>
+            <a:p/>
+          </p:txBody>
+        </p:sp>
+        <p:sp>
+          <p:nvSpPr>
+            <p:cNvPr id="40" name="pl40"/>
+            <p:cNvSpPr/>
+            <p:nvPr/>
+          </p:nvSpPr>
+          <p:spPr>
+            <a:xfrm>
+              <a:off x="887106" y="5144686"/>
+              <a:ext cx="7660515" cy="0"/>
+            </a:xfrm>
+            <a:custGeom>
+              <a:avLst/>
+              <a:pathLst>
+                <a:path w="7660515" h="0">
+                  <a:moveTo>
+                    <a:pt x="0" y="0"/>
+                  </a:moveTo>
+                  <a:lnTo>
+                    <a:pt x="7660515" y="0"/>
+                  </a:lnTo>
+                  <a:lnTo>
+                    <a:pt x="7660515" y="0"/>
+                  </a:lnTo>
+                </a:path>
+              </a:pathLst>
+            </a:custGeom>
+            <a:ln w="6775" cap="flat">
+              <a:solidFill>
+                <a:srgbClr val="EBEBEB">
+                  <a:alpha val="100000"/>
+                </a:srgbClr>
+              </a:solidFill>
+              <a:prstDash val="solid"/>
+              <a:round/>
+            </a:ln>
+          </p:spPr>
+          <p:txBody>
+            <a:bodyPr/>
+            <a:lstStyle/>
+            <a:p/>
+          </p:txBody>
+        </p:sp>
+        <p:sp>
+          <p:nvSpPr>
+            <p:cNvPr id="41" name="pl41"/>
+            <p:cNvSpPr/>
+            <p:nvPr/>
+          </p:nvSpPr>
+          <p:spPr>
+            <a:xfrm>
+              <a:off x="887106" y="4845352"/>
+              <a:ext cx="7660515" cy="0"/>
+            </a:xfrm>
+            <a:custGeom>
+              <a:avLst/>
+              <a:pathLst>
+                <a:path w="7660515" h="0">
+                  <a:moveTo>
+                    <a:pt x="0" y="0"/>
+                  </a:moveTo>
+                  <a:lnTo>
+                    <a:pt x="7660515" y="0"/>
+                  </a:lnTo>
+                  <a:lnTo>
+                    <a:pt x="7660515" y="0"/>
+                  </a:lnTo>
+                </a:path>
+              </a:pathLst>
+            </a:custGeom>
+            <a:ln w="6775" cap="flat">
+              <a:solidFill>
+                <a:srgbClr val="EBEBEB">
+                  <a:alpha val="100000"/>
+                </a:srgbClr>
+              </a:solidFill>
+              <a:prstDash val="solid"/>
+              <a:round/>
+            </a:ln>
+          </p:spPr>
+          <p:txBody>
+            <a:bodyPr/>
+            <a:lstStyle/>
+            <a:p/>
+          </p:txBody>
+        </p:sp>
+        <p:sp>
+          <p:nvSpPr>
+            <p:cNvPr id="42" name="pl42"/>
+            <p:cNvSpPr/>
+            <p:nvPr/>
+          </p:nvSpPr>
+          <p:spPr>
+            <a:xfrm>
+              <a:off x="887106" y="4546018"/>
+              <a:ext cx="7660515" cy="0"/>
+            </a:xfrm>
+            <a:custGeom>
+              <a:avLst/>
+              <a:pathLst>
+                <a:path w="7660515" h="0">
+                  <a:moveTo>
+                    <a:pt x="0" y="0"/>
+                  </a:moveTo>
+                  <a:lnTo>
+                    <a:pt x="7660515" y="0"/>
+                  </a:lnTo>
+                  <a:lnTo>
+                    <a:pt x="7660515" y="0"/>
+                  </a:lnTo>
+                </a:path>
+              </a:pathLst>
+            </a:custGeom>
+            <a:ln w="6775" cap="flat">
+              <a:solidFill>
+                <a:srgbClr val="EBEBEB">
+                  <a:alpha val="100000"/>
+                </a:srgbClr>
+              </a:solidFill>
+              <a:prstDash val="solid"/>
+              <a:round/>
+            </a:ln>
+          </p:spPr>
+          <p:txBody>
+            <a:bodyPr/>
+            <a:lstStyle/>
+            <a:p/>
+          </p:txBody>
+        </p:sp>
+        <p:sp>
+          <p:nvSpPr>
+            <p:cNvPr id="43" name="pl43"/>
+            <p:cNvSpPr/>
+            <p:nvPr/>
+          </p:nvSpPr>
+          <p:spPr>
+            <a:xfrm>
+              <a:off x="1636763" y="4336484"/>
+              <a:ext cx="0" cy="1317069"/>
+            </a:xfrm>
+            <a:custGeom>
+              <a:avLst/>
+              <a:pathLst>
+                <a:path w="0" h="1317069">
+                  <a:moveTo>
+                    <a:pt x="0" y="1317069"/>
+                  </a:moveTo>
+                  <a:lnTo>
+                    <a:pt x="0" y="0"/>
+                  </a:lnTo>
+                  <a:lnTo>
+                    <a:pt x="0" y="0"/>
+                  </a:lnTo>
+                </a:path>
+              </a:pathLst>
+            </a:custGeom>
+            <a:ln w="6775" cap="flat">
+              <a:solidFill>
+                <a:srgbClr val="EBEBEB">
+                  <a:alpha val="100000"/>
+                </a:srgbClr>
+              </a:solidFill>
+              <a:prstDash val="solid"/>
+              <a:round/>
+            </a:ln>
+          </p:spPr>
+          <p:txBody>
+            <a:bodyPr/>
+            <a:lstStyle/>
+            <a:p/>
+          </p:txBody>
+        </p:sp>
+        <p:sp>
+          <p:nvSpPr>
+            <p:cNvPr id="44" name="pl44"/>
+            <p:cNvSpPr/>
+            <p:nvPr/>
+          </p:nvSpPr>
+          <p:spPr>
+            <a:xfrm>
+              <a:off x="2482050" y="4336484"/>
+              <a:ext cx="0" cy="1317069"/>
+            </a:xfrm>
+            <a:custGeom>
+              <a:avLst/>
+              <a:pathLst>
+                <a:path w="0" h="1317069">
+                  <a:moveTo>
+                    <a:pt x="0" y="1317069"/>
+                  </a:moveTo>
+                  <a:lnTo>
+                    <a:pt x="0" y="0"/>
+                  </a:lnTo>
+                  <a:lnTo>
+                    <a:pt x="0" y="0"/>
+                  </a:lnTo>
+                </a:path>
+              </a:pathLst>
+            </a:custGeom>
+            <a:ln w="6775" cap="flat">
+              <a:solidFill>
+                <a:srgbClr val="EBEBEB">
+                  <a:alpha val="100000"/>
+                </a:srgbClr>
+              </a:solidFill>
+              <a:prstDash val="solid"/>
+              <a:round/>
+            </a:ln>
+          </p:spPr>
+          <p:txBody>
+            <a:bodyPr/>
+            <a:lstStyle/>
+            <a:p/>
+          </p:txBody>
+        </p:sp>
+        <p:sp>
+          <p:nvSpPr>
+            <p:cNvPr id="45" name="pl45"/>
+            <p:cNvSpPr/>
+            <p:nvPr/>
+          </p:nvSpPr>
+          <p:spPr>
+            <a:xfrm>
+              <a:off x="3327336" y="4336484"/>
+              <a:ext cx="0" cy="1317069"/>
+            </a:xfrm>
+            <a:custGeom>
+              <a:avLst/>
+              <a:pathLst>
+                <a:path w="0" h="1317069">
+                  <a:moveTo>
+                    <a:pt x="0" y="1317069"/>
+                  </a:moveTo>
+                  <a:lnTo>
+                    <a:pt x="0" y="0"/>
+                  </a:lnTo>
+                  <a:lnTo>
+                    <a:pt x="0" y="0"/>
+                  </a:lnTo>
+                </a:path>
+              </a:pathLst>
+            </a:custGeom>
+            <a:ln w="6775" cap="flat">
+              <a:solidFill>
+                <a:srgbClr val="EBEBEB">
+                  <a:alpha val="100000"/>
+                </a:srgbClr>
+              </a:solidFill>
+              <a:prstDash val="solid"/>
+              <a:round/>
+            </a:ln>
+          </p:spPr>
+          <p:txBody>
+            <a:bodyPr/>
+            <a:lstStyle/>
+            <a:p/>
+          </p:txBody>
+        </p:sp>
+        <p:sp>
+          <p:nvSpPr>
+            <p:cNvPr id="46" name="pl46"/>
+            <p:cNvSpPr/>
+            <p:nvPr/>
+          </p:nvSpPr>
+          <p:spPr>
+            <a:xfrm>
+              <a:off x="4172622" y="4336484"/>
+              <a:ext cx="0" cy="1317069"/>
+            </a:xfrm>
+            <a:custGeom>
+              <a:avLst/>
+              <a:pathLst>
+                <a:path w="0" h="1317069">
+                  <a:moveTo>
+                    <a:pt x="0" y="1317069"/>
+                  </a:moveTo>
+                  <a:lnTo>
+                    <a:pt x="0" y="0"/>
+                  </a:lnTo>
+                  <a:lnTo>
+                    <a:pt x="0" y="0"/>
+                  </a:lnTo>
+                </a:path>
+              </a:pathLst>
+            </a:custGeom>
+            <a:ln w="6775" cap="flat">
+              <a:solidFill>
+                <a:srgbClr val="EBEBEB">
+                  <a:alpha val="100000"/>
+                </a:srgbClr>
+              </a:solidFill>
+              <a:prstDash val="solid"/>
+              <a:round/>
+            </a:ln>
+          </p:spPr>
+          <p:txBody>
+            <a:bodyPr/>
+            <a:lstStyle/>
+            <a:p/>
+          </p:txBody>
+        </p:sp>
+        <p:sp>
+          <p:nvSpPr>
+            <p:cNvPr id="47" name="pl47"/>
+            <p:cNvSpPr/>
+            <p:nvPr/>
+          </p:nvSpPr>
+          <p:spPr>
+            <a:xfrm>
+              <a:off x="5017909" y="4336484"/>
+              <a:ext cx="0" cy="1317069"/>
+            </a:xfrm>
+            <a:custGeom>
+              <a:avLst/>
+              <a:pathLst>
+                <a:path w="0" h="1317069">
+                  <a:moveTo>
+                    <a:pt x="0" y="1317069"/>
+                  </a:moveTo>
+                  <a:lnTo>
+                    <a:pt x="0" y="0"/>
+                  </a:lnTo>
+                  <a:lnTo>
+                    <a:pt x="0" y="0"/>
+                  </a:lnTo>
+                </a:path>
+              </a:pathLst>
+            </a:custGeom>
+            <a:ln w="6775" cap="flat">
+              <a:solidFill>
+                <a:srgbClr val="EBEBEB">
+                  <a:alpha val="100000"/>
+                </a:srgbClr>
+              </a:solidFill>
+              <a:prstDash val="solid"/>
+              <a:round/>
+            </a:ln>
+          </p:spPr>
+          <p:txBody>
+            <a:bodyPr/>
+            <a:lstStyle/>
+            <a:p/>
+          </p:txBody>
+        </p:sp>
+        <p:sp>
+          <p:nvSpPr>
+            <p:cNvPr id="48" name="pl48"/>
+            <p:cNvSpPr/>
+            <p:nvPr/>
+          </p:nvSpPr>
+          <p:spPr>
+            <a:xfrm>
+              <a:off x="5863195" y="4336484"/>
+              <a:ext cx="0" cy="1317069"/>
+            </a:xfrm>
+            <a:custGeom>
+              <a:avLst/>
+              <a:pathLst>
+                <a:path w="0" h="1317069">
+                  <a:moveTo>
+                    <a:pt x="0" y="1317069"/>
+                  </a:moveTo>
+                  <a:lnTo>
+                    <a:pt x="0" y="0"/>
+                  </a:lnTo>
+                  <a:lnTo>
+                    <a:pt x="0" y="0"/>
+                  </a:lnTo>
+                </a:path>
+              </a:pathLst>
+            </a:custGeom>
+            <a:ln w="6775" cap="flat">
+              <a:solidFill>
+                <a:srgbClr val="EBEBEB">
+                  <a:alpha val="100000"/>
+                </a:srgbClr>
+              </a:solidFill>
+              <a:prstDash val="solid"/>
+              <a:round/>
+            </a:ln>
+          </p:spPr>
+          <p:txBody>
+            <a:bodyPr/>
+            <a:lstStyle/>
+            <a:p/>
+          </p:txBody>
+        </p:sp>
+        <p:sp>
+          <p:nvSpPr>
+            <p:cNvPr id="49" name="pl49"/>
+            <p:cNvSpPr/>
+            <p:nvPr/>
+          </p:nvSpPr>
+          <p:spPr>
+            <a:xfrm>
+              <a:off x="6708482" y="4336484"/>
+              <a:ext cx="0" cy="1317069"/>
+            </a:xfrm>
+            <a:custGeom>
+              <a:avLst/>
+              <a:pathLst>
+                <a:path w="0" h="1317069">
+                  <a:moveTo>
+                    <a:pt x="0" y="1317069"/>
+                  </a:moveTo>
+                  <a:lnTo>
+                    <a:pt x="0" y="0"/>
+                  </a:lnTo>
+                  <a:lnTo>
+                    <a:pt x="0" y="0"/>
+                  </a:lnTo>
+                </a:path>
+              </a:pathLst>
+            </a:custGeom>
+            <a:ln w="6775" cap="flat">
+              <a:solidFill>
+                <a:srgbClr val="EBEBEB">
+                  <a:alpha val="100000"/>
+                </a:srgbClr>
+              </a:solidFill>
+              <a:prstDash val="solid"/>
+              <a:round/>
+            </a:ln>
+          </p:spPr>
+          <p:txBody>
+            <a:bodyPr/>
+            <a:lstStyle/>
+            <a:p/>
+          </p:txBody>
+        </p:sp>
+        <p:sp>
+          <p:nvSpPr>
+            <p:cNvPr id="50" name="pl50"/>
+            <p:cNvSpPr/>
+            <p:nvPr/>
+          </p:nvSpPr>
+          <p:spPr>
+            <a:xfrm>
+              <a:off x="7553768" y="4336484"/>
+              <a:ext cx="0" cy="1317069"/>
+            </a:xfrm>
+            <a:custGeom>
+              <a:avLst/>
+              <a:pathLst>
+                <a:path w="0" h="1317069">
+                  <a:moveTo>
+                    <a:pt x="0" y="1317069"/>
+                  </a:moveTo>
+                  <a:lnTo>
+                    <a:pt x="0" y="0"/>
+                  </a:lnTo>
+                  <a:lnTo>
+                    <a:pt x="0" y="0"/>
+                  </a:lnTo>
+                </a:path>
+              </a:pathLst>
+            </a:custGeom>
+            <a:ln w="6775" cap="flat">
+              <a:solidFill>
+                <a:srgbClr val="EBEBEB">
+                  <a:alpha val="100000"/>
+                </a:srgbClr>
+              </a:solidFill>
+              <a:prstDash val="solid"/>
+              <a:round/>
+            </a:ln>
+          </p:spPr>
+          <p:txBody>
+            <a:bodyPr/>
+            <a:lstStyle/>
+            <a:p/>
+          </p:txBody>
+        </p:sp>
+        <p:sp>
+          <p:nvSpPr>
+            <p:cNvPr id="51" name="pl51"/>
+            <p:cNvSpPr/>
+            <p:nvPr/>
+          </p:nvSpPr>
+          <p:spPr>
+            <a:xfrm>
+              <a:off x="8399054" y="4336484"/>
+              <a:ext cx="0" cy="1317069"/>
+            </a:xfrm>
+            <a:custGeom>
+              <a:avLst/>
+              <a:pathLst>
+                <a:path w="0" h="1317069">
+                  <a:moveTo>
+                    <a:pt x="0" y="1317069"/>
+                  </a:moveTo>
+                  <a:lnTo>
+                    <a:pt x="0" y="0"/>
+                  </a:lnTo>
+                  <a:lnTo>
+                    <a:pt x="0" y="0"/>
+                  </a:lnTo>
+                </a:path>
+              </a:pathLst>
+            </a:custGeom>
+            <a:ln w="6775" cap="flat">
+              <a:solidFill>
+                <a:srgbClr val="EBEBEB">
+                  <a:alpha val="100000"/>
+                </a:srgbClr>
+              </a:solidFill>
+              <a:prstDash val="solid"/>
+              <a:round/>
+            </a:ln>
+          </p:spPr>
+          <p:txBody>
+            <a:bodyPr/>
+            <a:lstStyle/>
+            <a:p/>
+          </p:txBody>
+        </p:sp>
+        <p:sp>
+          <p:nvSpPr>
+            <p:cNvPr id="52" name="pl52"/>
+            <p:cNvSpPr/>
+            <p:nvPr/>
+          </p:nvSpPr>
+          <p:spPr>
+            <a:xfrm>
+              <a:off x="887106" y="5593686"/>
+              <a:ext cx="7660515" cy="0"/>
+            </a:xfrm>
+            <a:custGeom>
+              <a:avLst/>
+              <a:pathLst>
+                <a:path w="7660515" h="0">
+                  <a:moveTo>
+                    <a:pt x="0" y="0"/>
+                  </a:moveTo>
+                  <a:lnTo>
+                    <a:pt x="7660515" y="0"/>
+                  </a:lnTo>
+                  <a:lnTo>
+                    <a:pt x="7660515" y="0"/>
+                  </a:lnTo>
+                </a:path>
+              </a:pathLst>
+            </a:custGeom>
+            <a:ln w="13550" cap="flat">
+              <a:solidFill>
+                <a:srgbClr val="EBEBEB">
+                  <a:alpha val="100000"/>
+                </a:srgbClr>
+              </a:solidFill>
+              <a:prstDash val="solid"/>
+              <a:round/>
+            </a:ln>
+          </p:spPr>
+          <p:txBody>
+            <a:bodyPr/>
+            <a:lstStyle/>
+            <a:p/>
+          </p:txBody>
+        </p:sp>
+        <p:sp>
+          <p:nvSpPr>
+            <p:cNvPr id="53" name="pl53"/>
+            <p:cNvSpPr/>
+            <p:nvPr/>
+          </p:nvSpPr>
+          <p:spPr>
+            <a:xfrm>
+              <a:off x="887106" y="5294352"/>
+              <a:ext cx="7660515" cy="0"/>
+            </a:xfrm>
+            <a:custGeom>
+              <a:avLst/>
+              <a:pathLst>
+                <a:path w="7660515" h="0">
+                  <a:moveTo>
+                    <a:pt x="0" y="0"/>
+                  </a:moveTo>
+                  <a:lnTo>
+                    <a:pt x="7660515" y="0"/>
+                  </a:lnTo>
+                  <a:lnTo>
+                    <a:pt x="7660515" y="0"/>
+                  </a:lnTo>
+                </a:path>
+              </a:pathLst>
+            </a:custGeom>
+            <a:ln w="13550" cap="flat">
+              <a:solidFill>
+                <a:srgbClr val="EBEBEB">
+                  <a:alpha val="100000"/>
+                </a:srgbClr>
+              </a:solidFill>
+              <a:prstDash val="solid"/>
+              <a:round/>
+            </a:ln>
+          </p:spPr>
+          <p:txBody>
+            <a:bodyPr/>
+            <a:lstStyle/>
+            <a:p/>
+          </p:txBody>
+        </p:sp>
+        <p:sp>
+          <p:nvSpPr>
+            <p:cNvPr id="54" name="pl54"/>
+            <p:cNvSpPr/>
+            <p:nvPr/>
+          </p:nvSpPr>
+          <p:spPr>
+            <a:xfrm>
+              <a:off x="887106" y="4995019"/>
+              <a:ext cx="7660515" cy="0"/>
+            </a:xfrm>
+            <a:custGeom>
+              <a:avLst/>
+              <a:pathLst>
+                <a:path w="7660515" h="0">
+                  <a:moveTo>
+                    <a:pt x="0" y="0"/>
+                  </a:moveTo>
+                  <a:lnTo>
+                    <a:pt x="7660515" y="0"/>
+                  </a:lnTo>
+                  <a:lnTo>
+                    <a:pt x="7660515" y="0"/>
+                  </a:lnTo>
+                </a:path>
+              </a:pathLst>
+            </a:custGeom>
+            <a:ln w="13550" cap="flat">
+              <a:solidFill>
+                <a:srgbClr val="EBEBEB">
+                  <a:alpha val="100000"/>
+                </a:srgbClr>
+              </a:solidFill>
+              <a:prstDash val="solid"/>
+              <a:round/>
+            </a:ln>
+          </p:spPr>
+          <p:txBody>
+            <a:bodyPr/>
+            <a:lstStyle/>
+            <a:p/>
+          </p:txBody>
+        </p:sp>
+        <p:sp>
+          <p:nvSpPr>
+            <p:cNvPr id="55" name="pl55"/>
+            <p:cNvSpPr/>
+            <p:nvPr/>
+          </p:nvSpPr>
+          <p:spPr>
+            <a:xfrm>
+              <a:off x="887106" y="4695685"/>
+              <a:ext cx="7660515" cy="0"/>
+            </a:xfrm>
+            <a:custGeom>
+              <a:avLst/>
+              <a:pathLst>
+                <a:path w="7660515" h="0">
+                  <a:moveTo>
+                    <a:pt x="0" y="0"/>
+                  </a:moveTo>
+                  <a:lnTo>
+                    <a:pt x="7660515" y="0"/>
+                  </a:lnTo>
+                  <a:lnTo>
+                    <a:pt x="7660515" y="0"/>
+                  </a:lnTo>
+                </a:path>
+              </a:pathLst>
+            </a:custGeom>
+            <a:ln w="13550" cap="flat">
+              <a:solidFill>
+                <a:srgbClr val="EBEBEB">
+                  <a:alpha val="100000"/>
+                </a:srgbClr>
+              </a:solidFill>
+              <a:prstDash val="solid"/>
+              <a:round/>
+            </a:ln>
+          </p:spPr>
+          <p:txBody>
+            <a:bodyPr/>
+            <a:lstStyle/>
+            <a:p/>
+          </p:txBody>
+        </p:sp>
+        <p:sp>
+          <p:nvSpPr>
+            <p:cNvPr id="56" name="pl56"/>
+            <p:cNvSpPr/>
+            <p:nvPr/>
+          </p:nvSpPr>
+          <p:spPr>
+            <a:xfrm>
+              <a:off x="887106" y="4396351"/>
+              <a:ext cx="7660515" cy="0"/>
+            </a:xfrm>
+            <a:custGeom>
+              <a:avLst/>
+              <a:pathLst>
+                <a:path w="7660515" h="0">
+                  <a:moveTo>
+                    <a:pt x="0" y="0"/>
+                  </a:moveTo>
+                  <a:lnTo>
+                    <a:pt x="7660515" y="0"/>
+                  </a:lnTo>
+                  <a:lnTo>
+                    <a:pt x="7660515" y="0"/>
+                  </a:lnTo>
+                </a:path>
+              </a:pathLst>
+            </a:custGeom>
+            <a:ln w="13550" cap="flat">
+              <a:solidFill>
+                <a:srgbClr val="EBEBEB">
+                  <a:alpha val="100000"/>
+                </a:srgbClr>
+              </a:solidFill>
+              <a:prstDash val="solid"/>
+              <a:round/>
+            </a:ln>
+          </p:spPr>
+          <p:txBody>
+            <a:bodyPr/>
+            <a:lstStyle/>
+            <a:p/>
+          </p:txBody>
+        </p:sp>
+        <p:sp>
+          <p:nvSpPr>
+            <p:cNvPr id="57" name="pl57"/>
+            <p:cNvSpPr/>
+            <p:nvPr/>
+          </p:nvSpPr>
+          <p:spPr>
+            <a:xfrm>
+              <a:off x="1214120" y="4336484"/>
+              <a:ext cx="0" cy="1317069"/>
+            </a:xfrm>
+            <a:custGeom>
+              <a:avLst/>
+              <a:pathLst>
+                <a:path w="0" h="1317069">
+                  <a:moveTo>
+                    <a:pt x="0" y="1317069"/>
+                  </a:moveTo>
+                  <a:lnTo>
+                    <a:pt x="0" y="0"/>
+                  </a:lnTo>
+                  <a:lnTo>
+                    <a:pt x="0" y="0"/>
+                  </a:lnTo>
+                </a:path>
+              </a:pathLst>
+            </a:custGeom>
+            <a:ln w="13550" cap="flat">
+              <a:solidFill>
+                <a:srgbClr val="EBEBEB">
+                  <a:alpha val="100000"/>
+                </a:srgbClr>
+              </a:solidFill>
+              <a:prstDash val="solid"/>
+              <a:round/>
+            </a:ln>
+          </p:spPr>
+          <p:txBody>
+            <a:bodyPr/>
+            <a:lstStyle/>
+            <a:p/>
+          </p:txBody>
+        </p:sp>
+        <p:sp>
+          <p:nvSpPr>
+            <p:cNvPr id="58" name="pl58"/>
+            <p:cNvSpPr/>
+            <p:nvPr/>
+          </p:nvSpPr>
+          <p:spPr>
+            <a:xfrm>
+              <a:off x="2059406" y="4336484"/>
+              <a:ext cx="0" cy="1317069"/>
+            </a:xfrm>
+            <a:custGeom>
+              <a:avLst/>
+              <a:pathLst>
+                <a:path w="0" h="1317069">
+                  <a:moveTo>
+                    <a:pt x="0" y="1317069"/>
+                  </a:moveTo>
+                  <a:lnTo>
+                    <a:pt x="0" y="0"/>
+                  </a:lnTo>
+                  <a:lnTo>
+                    <a:pt x="0" y="0"/>
+                  </a:lnTo>
+                </a:path>
+              </a:pathLst>
+            </a:custGeom>
+            <a:ln w="13550" cap="flat">
+              <a:solidFill>
+                <a:srgbClr val="EBEBEB">
+                  <a:alpha val="100000"/>
+                </a:srgbClr>
+              </a:solidFill>
+              <a:prstDash val="solid"/>
+              <a:round/>
+            </a:ln>
+          </p:spPr>
+          <p:txBody>
+            <a:bodyPr/>
+            <a:lstStyle/>
+            <a:p/>
+          </p:txBody>
+        </p:sp>
+        <p:sp>
+          <p:nvSpPr>
+            <p:cNvPr id="59" name="pl59"/>
+            <p:cNvSpPr/>
+            <p:nvPr/>
+          </p:nvSpPr>
+          <p:spPr>
+            <a:xfrm>
+              <a:off x="2904693" y="4336484"/>
+              <a:ext cx="0" cy="1317069"/>
+            </a:xfrm>
+            <a:custGeom>
+              <a:avLst/>
+              <a:pathLst>
+                <a:path w="0" h="1317069">
+                  <a:moveTo>
+                    <a:pt x="0" y="1317069"/>
+                  </a:moveTo>
+                  <a:lnTo>
+                    <a:pt x="0" y="0"/>
+                  </a:lnTo>
+                  <a:lnTo>
+                    <a:pt x="0" y="0"/>
+                  </a:lnTo>
+                </a:path>
+              </a:pathLst>
+            </a:custGeom>
+            <a:ln w="13550" cap="flat">
+              <a:solidFill>
+                <a:srgbClr val="EBEBEB">
+                  <a:alpha val="100000"/>
+                </a:srgbClr>
+              </a:solidFill>
+              <a:prstDash val="solid"/>
+              <a:round/>
+            </a:ln>
+          </p:spPr>
+          <p:txBody>
+            <a:bodyPr/>
+            <a:lstStyle/>
+            <a:p/>
+          </p:txBody>
+        </p:sp>
+        <p:sp>
+          <p:nvSpPr>
+            <p:cNvPr id="60" name="pl60"/>
+            <p:cNvSpPr/>
+            <p:nvPr/>
+          </p:nvSpPr>
+          <p:spPr>
+            <a:xfrm>
+              <a:off x="3749979" y="4336484"/>
+              <a:ext cx="0" cy="1317069"/>
+            </a:xfrm>
+            <a:custGeom>
+              <a:avLst/>
+              <a:pathLst>
+                <a:path w="0" h="1317069">
+                  <a:moveTo>
+                    <a:pt x="0" y="1317069"/>
+                  </a:moveTo>
+                  <a:lnTo>
+                    <a:pt x="0" y="0"/>
+                  </a:lnTo>
+                  <a:lnTo>
+                    <a:pt x="0" y="0"/>
+                  </a:lnTo>
+                </a:path>
+              </a:pathLst>
+            </a:custGeom>
+            <a:ln w="13550" cap="flat">
+              <a:solidFill>
+                <a:srgbClr val="EBEBEB">
+                  <a:alpha val="100000"/>
+                </a:srgbClr>
+              </a:solidFill>
+              <a:prstDash val="solid"/>
+              <a:round/>
+            </a:ln>
+          </p:spPr>
+          <p:txBody>
+            <a:bodyPr/>
+            <a:lstStyle/>
+            <a:p/>
+          </p:txBody>
+        </p:sp>
+        <p:sp>
+          <p:nvSpPr>
+            <p:cNvPr id="61" name="pl61"/>
+            <p:cNvSpPr/>
+            <p:nvPr/>
+          </p:nvSpPr>
+          <p:spPr>
+            <a:xfrm>
+              <a:off x="4595266" y="4336484"/>
+              <a:ext cx="0" cy="1317069"/>
+            </a:xfrm>
+            <a:custGeom>
+              <a:avLst/>
+              <a:pathLst>
+                <a:path w="0" h="1317069">
+                  <a:moveTo>
+                    <a:pt x="0" y="1317069"/>
+                  </a:moveTo>
+                  <a:lnTo>
+                    <a:pt x="0" y="0"/>
+                  </a:lnTo>
+                  <a:lnTo>
+                    <a:pt x="0" y="0"/>
+                  </a:lnTo>
+                </a:path>
+              </a:pathLst>
+            </a:custGeom>
+            <a:ln w="13550" cap="flat">
+              <a:solidFill>
+                <a:srgbClr val="EBEBEB">
+                  <a:alpha val="100000"/>
+                </a:srgbClr>
+              </a:solidFill>
+              <a:prstDash val="solid"/>
+              <a:round/>
+            </a:ln>
+          </p:spPr>
+          <p:txBody>
+            <a:bodyPr/>
+            <a:lstStyle/>
+            <a:p/>
+          </p:txBody>
+        </p:sp>
+        <p:sp>
+          <p:nvSpPr>
+            <p:cNvPr id="62" name="pl62"/>
+            <p:cNvSpPr/>
+            <p:nvPr/>
+          </p:nvSpPr>
+          <p:spPr>
+            <a:xfrm>
+              <a:off x="5440552" y="4336484"/>
+              <a:ext cx="0" cy="1317069"/>
+            </a:xfrm>
+            <a:custGeom>
+              <a:avLst/>
+              <a:pathLst>
+                <a:path w="0" h="1317069">
+                  <a:moveTo>
+                    <a:pt x="0" y="1317069"/>
+                  </a:moveTo>
+                  <a:lnTo>
+                    <a:pt x="0" y="0"/>
+                  </a:lnTo>
+                  <a:lnTo>
+                    <a:pt x="0" y="0"/>
+                  </a:lnTo>
+                </a:path>
+              </a:pathLst>
+            </a:custGeom>
+            <a:ln w="13550" cap="flat">
+              <a:solidFill>
+                <a:srgbClr val="EBEBEB">
+                  <a:alpha val="100000"/>
+                </a:srgbClr>
+              </a:solidFill>
+              <a:prstDash val="solid"/>
+              <a:round/>
+            </a:ln>
+          </p:spPr>
+          <p:txBody>
+            <a:bodyPr/>
+            <a:lstStyle/>
+            <a:p/>
+          </p:txBody>
+        </p:sp>
+        <p:sp>
+          <p:nvSpPr>
+            <p:cNvPr id="63" name="pl63"/>
+            <p:cNvSpPr/>
+            <p:nvPr/>
+          </p:nvSpPr>
+          <p:spPr>
+            <a:xfrm>
+              <a:off x="6285838" y="4336484"/>
+              <a:ext cx="0" cy="1317069"/>
+            </a:xfrm>
+            <a:custGeom>
+              <a:avLst/>
+              <a:pathLst>
+                <a:path w="0" h="1317069">
+                  <a:moveTo>
+                    <a:pt x="0" y="1317069"/>
+                  </a:moveTo>
+                  <a:lnTo>
+                    <a:pt x="0" y="0"/>
+                  </a:lnTo>
+                  <a:lnTo>
+                    <a:pt x="0" y="0"/>
+                  </a:lnTo>
+                </a:path>
+              </a:pathLst>
+            </a:custGeom>
+            <a:ln w="13550" cap="flat">
+              <a:solidFill>
+                <a:srgbClr val="EBEBEB">
+                  <a:alpha val="100000"/>
+                </a:srgbClr>
+              </a:solidFill>
+              <a:prstDash val="solid"/>
+              <a:round/>
+            </a:ln>
+          </p:spPr>
+          <p:txBody>
+            <a:bodyPr/>
+            <a:lstStyle/>
+            <a:p/>
+          </p:txBody>
+        </p:sp>
+        <p:sp>
+          <p:nvSpPr>
+            <p:cNvPr id="64" name="pl64"/>
+            <p:cNvSpPr/>
+            <p:nvPr/>
+          </p:nvSpPr>
+          <p:spPr>
+            <a:xfrm>
+              <a:off x="7131125" y="4336484"/>
+              <a:ext cx="0" cy="1317069"/>
+            </a:xfrm>
+            <a:custGeom>
+              <a:avLst/>
+              <a:pathLst>
+                <a:path w="0" h="1317069">
+                  <a:moveTo>
+                    <a:pt x="0" y="1317069"/>
+                  </a:moveTo>
+                  <a:lnTo>
+                    <a:pt x="0" y="0"/>
+                  </a:lnTo>
+                  <a:lnTo>
+                    <a:pt x="0" y="0"/>
+                  </a:lnTo>
+                </a:path>
+              </a:pathLst>
+            </a:custGeom>
+            <a:ln w="13550" cap="flat">
+              <a:solidFill>
+                <a:srgbClr val="EBEBEB">
+                  <a:alpha val="100000"/>
+                </a:srgbClr>
+              </a:solidFill>
+              <a:prstDash val="solid"/>
+              <a:round/>
+            </a:ln>
+          </p:spPr>
+          <p:txBody>
+            <a:bodyPr/>
+            <a:lstStyle/>
+            <a:p/>
+          </p:txBody>
+        </p:sp>
+        <p:sp>
+          <p:nvSpPr>
+            <p:cNvPr id="65" name="pl65"/>
+            <p:cNvSpPr/>
+            <p:nvPr/>
+          </p:nvSpPr>
+          <p:spPr>
+            <a:xfrm>
+              <a:off x="7976411" y="4336484"/>
+              <a:ext cx="0" cy="1317069"/>
+            </a:xfrm>
+            <a:custGeom>
+              <a:avLst/>
+              <a:pathLst>
+                <a:path w="0" h="1317069">
+                  <a:moveTo>
+                    <a:pt x="0" y="1317069"/>
+                  </a:moveTo>
+                  <a:lnTo>
+                    <a:pt x="0" y="0"/>
+                  </a:lnTo>
+                  <a:lnTo>
+                    <a:pt x="0" y="0"/>
+                  </a:lnTo>
+                </a:path>
+              </a:pathLst>
+            </a:custGeom>
+            <a:ln w="13550" cap="flat">
+              <a:solidFill>
+                <a:srgbClr val="EBEBEB">
+                  <a:alpha val="100000"/>
+                </a:srgbClr>
+              </a:solidFill>
+              <a:prstDash val="solid"/>
+              <a:round/>
+            </a:ln>
+          </p:spPr>
+          <p:txBody>
+            <a:bodyPr/>
+            <a:lstStyle/>
+            <a:p/>
+          </p:txBody>
+        </p:sp>
+        <p:sp>
+          <p:nvSpPr>
+            <p:cNvPr id="66" name="pg66"/>
+            <p:cNvSpPr/>
+            <p:nvPr/>
+          </p:nvSpPr>
+          <p:spPr>
+            <a:xfrm>
+              <a:off x="1235312" y="4336484"/>
+              <a:ext cx="6964104" cy="1216336"/>
+            </a:xfrm>
+            <a:custGeom>
+              <a:avLst/>
+              <a:pathLst>
+                <a:path w="6964104" h="1216336">
+                  <a:moveTo>
+                    <a:pt x="754487" y="0"/>
+                  </a:moveTo>
+                  <a:lnTo>
+                    <a:pt x="773789" y="13505"/>
+                  </a:lnTo>
+                  <a:lnTo>
+                    <a:pt x="844133" y="60852"/>
+                  </a:lnTo>
+                  <a:lnTo>
+                    <a:pt x="914478" y="106397"/>
+                  </a:lnTo>
+                  <a:lnTo>
+                    <a:pt x="984822" y="150207"/>
+                  </a:lnTo>
+                  <a:lnTo>
+                    <a:pt x="1055167" y="192350"/>
+                  </a:lnTo>
+                  <a:lnTo>
+                    <a:pt x="1125511" y="232889"/>
+                  </a:lnTo>
+                  <a:lnTo>
+                    <a:pt x="1195856" y="271884"/>
+                  </a:lnTo>
+                  <a:lnTo>
+                    <a:pt x="1266200" y="309394"/>
+                  </a:lnTo>
+                  <a:lnTo>
+                    <a:pt x="1336545" y="345477"/>
+                  </a:lnTo>
+                  <a:lnTo>
+                    <a:pt x="1406889" y="380186"/>
+                  </a:lnTo>
+                  <a:lnTo>
+                    <a:pt x="1477234" y="413574"/>
+                  </a:lnTo>
+                  <a:lnTo>
+                    <a:pt x="1547578" y="445690"/>
+                  </a:lnTo>
+                  <a:lnTo>
+                    <a:pt x="1617923" y="476584"/>
+                  </a:lnTo>
+                  <a:lnTo>
+                    <a:pt x="1688267" y="506302"/>
+                  </a:lnTo>
+                  <a:lnTo>
+                    <a:pt x="1758612" y="534888"/>
+                  </a:lnTo>
+                  <a:lnTo>
+                    <a:pt x="1828956" y="562386"/>
+                  </a:lnTo>
+                  <a:lnTo>
+                    <a:pt x="1899301" y="588838"/>
+                  </a:lnTo>
+                  <a:lnTo>
+                    <a:pt x="1969645" y="614282"/>
+                  </a:lnTo>
+                  <a:lnTo>
+                    <a:pt x="2039990" y="638758"/>
+                  </a:lnTo>
+                  <a:lnTo>
+                    <a:pt x="2110334" y="662302"/>
+                  </a:lnTo>
+                  <a:lnTo>
+                    <a:pt x="2180679" y="684949"/>
+                  </a:lnTo>
+                  <a:lnTo>
+                    <a:pt x="2251023" y="706735"/>
+                  </a:lnTo>
+                  <a:lnTo>
+                    <a:pt x="2321368" y="727691"/>
+                  </a:lnTo>
+                  <a:lnTo>
+                    <a:pt x="2391712" y="747849"/>
+                  </a:lnTo>
+                  <a:lnTo>
+                    <a:pt x="2462057" y="767240"/>
+                  </a:lnTo>
+                  <a:lnTo>
+                    <a:pt x="2532401" y="785892"/>
+                  </a:lnTo>
+                  <a:lnTo>
+                    <a:pt x="2602746" y="803835"/>
+                  </a:lnTo>
+                  <a:lnTo>
+                    <a:pt x="2673090" y="821094"/>
+                  </a:lnTo>
+                  <a:lnTo>
+                    <a:pt x="2743435" y="837697"/>
+                  </a:lnTo>
+                  <a:lnTo>
+                    <a:pt x="2813779" y="853667"/>
+                  </a:lnTo>
+                  <a:lnTo>
+                    <a:pt x="2884124" y="869030"/>
+                  </a:lnTo>
+                  <a:lnTo>
+                    <a:pt x="2954468" y="883807"/>
+                  </a:lnTo>
+                  <a:lnTo>
+                    <a:pt x="3024813" y="898022"/>
+                  </a:lnTo>
+                  <a:lnTo>
+                    <a:pt x="3095157" y="911696"/>
+                  </a:lnTo>
+                  <a:lnTo>
+                    <a:pt x="3165502" y="924849"/>
+                  </a:lnTo>
+                  <a:lnTo>
+                    <a:pt x="3235846" y="937502"/>
+                  </a:lnTo>
+                  <a:lnTo>
+                    <a:pt x="3306191" y="949672"/>
+                  </a:lnTo>
+                  <a:lnTo>
+                    <a:pt x="3376535" y="958666"/>
+                  </a:lnTo>
+                  <a:lnTo>
+                    <a:pt x="3446880" y="961276"/>
+                  </a:lnTo>
+                  <a:lnTo>
+                    <a:pt x="3517224" y="963863"/>
+                  </a:lnTo>
+                  <a:lnTo>
+                    <a:pt x="3587569" y="966428"/>
+                  </a:lnTo>
+                  <a:lnTo>
+                    <a:pt x="3657913" y="968970"/>
+                  </a:lnTo>
+                  <a:lnTo>
+                    <a:pt x="3728257" y="971489"/>
+                  </a:lnTo>
+                  <a:lnTo>
+                    <a:pt x="3798602" y="973987"/>
+                  </a:lnTo>
+                  <a:lnTo>
+                    <a:pt x="3868946" y="976463"/>
+                  </a:lnTo>
+                  <a:lnTo>
+                    <a:pt x="3939291" y="978918"/>
+                  </a:lnTo>
+                  <a:lnTo>
+                    <a:pt x="4009635" y="981350"/>
+                  </a:lnTo>
+                  <a:lnTo>
+                    <a:pt x="4079980" y="983762"/>
+                  </a:lnTo>
+                  <a:lnTo>
+                    <a:pt x="4150324" y="986153"/>
+                  </a:lnTo>
+                  <a:lnTo>
+                    <a:pt x="4220669" y="988522"/>
+                  </a:lnTo>
+                  <a:lnTo>
+                    <a:pt x="4291013" y="990871"/>
+                  </a:lnTo>
+                  <a:lnTo>
+                    <a:pt x="4361358" y="993199"/>
+                  </a:lnTo>
+                  <a:lnTo>
+                    <a:pt x="4431702" y="995507"/>
+                  </a:lnTo>
+                  <a:lnTo>
+                    <a:pt x="4502047" y="997795"/>
+                  </a:lnTo>
+                  <a:lnTo>
+                    <a:pt x="4572391" y="1000063"/>
+                  </a:lnTo>
+                  <a:lnTo>
+                    <a:pt x="4642736" y="1002311"/>
+                  </a:lnTo>
+                  <a:lnTo>
+                    <a:pt x="4713080" y="1004539"/>
+                  </a:lnTo>
+                  <a:lnTo>
+                    <a:pt x="4783425" y="1006748"/>
+                  </a:lnTo>
+                  <a:lnTo>
+                    <a:pt x="4853769" y="1008938"/>
+                  </a:lnTo>
+                  <a:lnTo>
+                    <a:pt x="4924114" y="1011108"/>
+                  </a:lnTo>
+                  <a:lnTo>
+                    <a:pt x="4994458" y="1013260"/>
+                  </a:lnTo>
+                  <a:lnTo>
+                    <a:pt x="5064803" y="1015392"/>
+                  </a:lnTo>
+                  <a:lnTo>
+                    <a:pt x="5135147" y="1017506"/>
+                  </a:lnTo>
+                  <a:lnTo>
+                    <a:pt x="5205492" y="1019602"/>
+                  </a:lnTo>
+                  <a:lnTo>
+                    <a:pt x="5275836" y="1021679"/>
+                  </a:lnTo>
+                  <a:lnTo>
+                    <a:pt x="5346181" y="1023738"/>
+                  </a:lnTo>
+                  <a:lnTo>
+                    <a:pt x="5416525" y="1025779"/>
+                  </a:lnTo>
+                  <a:lnTo>
+                    <a:pt x="5486870" y="1027802"/>
+                  </a:lnTo>
+                  <a:lnTo>
+                    <a:pt x="5557214" y="1029808"/>
+                  </a:lnTo>
+                  <a:lnTo>
+                    <a:pt x="5627559" y="1031796"/>
+                  </a:lnTo>
+                  <a:lnTo>
+                    <a:pt x="5697903" y="1033766"/>
+                  </a:lnTo>
+                  <a:lnTo>
+                    <a:pt x="5768248" y="1035720"/>
+                  </a:lnTo>
+                  <a:lnTo>
+                    <a:pt x="5838592" y="1037656"/>
+                  </a:lnTo>
+                  <a:lnTo>
+                    <a:pt x="5908937" y="1039575"/>
+                  </a:lnTo>
+                  <a:lnTo>
+                    <a:pt x="5979281" y="1041478"/>
+                  </a:lnTo>
+                  <a:lnTo>
+                    <a:pt x="6049626" y="1043364"/>
+                  </a:lnTo>
+                  <a:lnTo>
+                    <a:pt x="6119970" y="1045233"/>
+                  </a:lnTo>
+                  <a:lnTo>
+                    <a:pt x="6190315" y="1047086"/>
+                  </a:lnTo>
+                  <a:lnTo>
+                    <a:pt x="6260659" y="1048923"/>
+                  </a:lnTo>
+                  <a:lnTo>
+                    <a:pt x="6331004" y="1050744"/>
+                  </a:lnTo>
+                  <a:lnTo>
+                    <a:pt x="6401348" y="1052549"/>
+                  </a:lnTo>
+                  <a:lnTo>
+                    <a:pt x="6471693" y="1054338"/>
+                  </a:lnTo>
+                  <a:lnTo>
+                    <a:pt x="6542037" y="1056112"/>
+                  </a:lnTo>
+                  <a:lnTo>
+                    <a:pt x="6612382" y="1057870"/>
+                  </a:lnTo>
+                  <a:lnTo>
+                    <a:pt x="6682726" y="1059612"/>
+                  </a:lnTo>
+                  <a:lnTo>
+                    <a:pt x="6753071" y="1061340"/>
+                  </a:lnTo>
+                  <a:lnTo>
+                    <a:pt x="6823415" y="1063052"/>
+                  </a:lnTo>
+                  <a:lnTo>
+                    <a:pt x="6893760" y="1064749"/>
+                  </a:lnTo>
+                  <a:lnTo>
+                    <a:pt x="6964104" y="1066432"/>
+                  </a:lnTo>
+                  <a:lnTo>
+                    <a:pt x="6964104" y="1216336"/>
+                  </a:lnTo>
+                  <a:lnTo>
+                    <a:pt x="6893760" y="1214719"/>
+                  </a:lnTo>
+                  <a:lnTo>
+                    <a:pt x="6823415" y="1213038"/>
+                  </a:lnTo>
+                  <a:lnTo>
+                    <a:pt x="6753071" y="1211290"/>
+                  </a:lnTo>
+                  <a:lnTo>
+                    <a:pt x="6682726" y="1209473"/>
+                  </a:lnTo>
+                  <a:lnTo>
+                    <a:pt x="6612382" y="1207584"/>
+                  </a:lnTo>
+                  <a:lnTo>
+                    <a:pt x="6542037" y="1205620"/>
+                  </a:lnTo>
+                  <a:lnTo>
+                    <a:pt x="6471693" y="1203579"/>
+                  </a:lnTo>
+                  <a:lnTo>
+                    <a:pt x="6401348" y="1201457"/>
+                  </a:lnTo>
+                  <a:lnTo>
+                    <a:pt x="6331004" y="1199250"/>
+                  </a:lnTo>
+                  <a:lnTo>
+                    <a:pt x="6260659" y="1196957"/>
+                  </a:lnTo>
+                  <a:lnTo>
+                    <a:pt x="6190315" y="1194573"/>
+                  </a:lnTo>
+                  <a:lnTo>
+                    <a:pt x="6119970" y="1192094"/>
+                  </a:lnTo>
+                  <a:lnTo>
+                    <a:pt x="6049626" y="1189517"/>
+                  </a:lnTo>
+                  <a:lnTo>
+                    <a:pt x="5979281" y="1186839"/>
+                  </a:lnTo>
+                  <a:lnTo>
+                    <a:pt x="5908937" y="1184054"/>
+                  </a:lnTo>
+                  <a:lnTo>
+                    <a:pt x="5838592" y="1181159"/>
+                  </a:lnTo>
+                  <a:lnTo>
+                    <a:pt x="5768248" y="1178149"/>
+                  </a:lnTo>
+                  <a:lnTo>
+                    <a:pt x="5697903" y="1175021"/>
+                  </a:lnTo>
+                  <a:lnTo>
+                    <a:pt x="5627559" y="1171768"/>
+                  </a:lnTo>
+                  <a:lnTo>
+                    <a:pt x="5557214" y="1168387"/>
+                  </a:lnTo>
+                  <a:lnTo>
+                    <a:pt x="5486870" y="1164872"/>
+                  </a:lnTo>
+                  <a:lnTo>
+                    <a:pt x="5416525" y="1161218"/>
+                  </a:lnTo>
+                  <a:lnTo>
+                    <a:pt x="5346181" y="1157420"/>
+                  </a:lnTo>
+                  <a:lnTo>
+                    <a:pt x="5275836" y="1153471"/>
+                  </a:lnTo>
+                  <a:lnTo>
+                    <a:pt x="5205492" y="1149365"/>
+                  </a:lnTo>
+                  <a:lnTo>
+                    <a:pt x="5135147" y="1145098"/>
+                  </a:lnTo>
+                  <a:lnTo>
+                    <a:pt x="5064803" y="1140661"/>
+                  </a:lnTo>
+                  <a:lnTo>
+                    <a:pt x="4994458" y="1136049"/>
+                  </a:lnTo>
+                  <a:lnTo>
+                    <a:pt x="4924114" y="1131254"/>
+                  </a:lnTo>
+                  <a:lnTo>
+                    <a:pt x="4853769" y="1126269"/>
+                  </a:lnTo>
+                  <a:lnTo>
+                    <a:pt x="4783425" y="1121088"/>
+                  </a:lnTo>
+                  <a:lnTo>
+                    <a:pt x="4713080" y="1115701"/>
+                  </a:lnTo>
+                  <a:lnTo>
+                    <a:pt x="4642736" y="1110101"/>
+                  </a:lnTo>
+                  <a:lnTo>
+                    <a:pt x="4572391" y="1104279"/>
+                  </a:lnTo>
+                  <a:lnTo>
+                    <a:pt x="4502047" y="1098227"/>
+                  </a:lnTo>
+                  <a:lnTo>
+                    <a:pt x="4431702" y="1091935"/>
+                  </a:lnTo>
+                  <a:lnTo>
+                    <a:pt x="4361358" y="1085395"/>
+                  </a:lnTo>
+                  <a:lnTo>
+                    <a:pt x="4291013" y="1078595"/>
+                  </a:lnTo>
+                  <a:lnTo>
+                    <a:pt x="4220669" y="1071526"/>
+                  </a:lnTo>
+                  <a:lnTo>
+                    <a:pt x="4150324" y="1064178"/>
+                  </a:lnTo>
+                  <a:lnTo>
+                    <a:pt x="4079980" y="1056539"/>
+                  </a:lnTo>
+                  <a:lnTo>
+                    <a:pt x="4009635" y="1048598"/>
+                  </a:lnTo>
+                  <a:lnTo>
+                    <a:pt x="3939291" y="1040342"/>
+                  </a:lnTo>
+                  <a:lnTo>
+                    <a:pt x="3868946" y="1031759"/>
+                  </a:lnTo>
+                  <a:lnTo>
+                    <a:pt x="3798602" y="1022837"/>
+                  </a:lnTo>
+                  <a:lnTo>
+                    <a:pt x="3728257" y="1013562"/>
+                  </a:lnTo>
+                  <a:lnTo>
+                    <a:pt x="3657913" y="1003919"/>
+                  </a:lnTo>
+                  <a:lnTo>
+                    <a:pt x="3587569" y="993896"/>
+                  </a:lnTo>
+                  <a:lnTo>
+                    <a:pt x="3517224" y="983475"/>
+                  </a:lnTo>
+                  <a:lnTo>
+                    <a:pt x="3446880" y="972642"/>
+                  </a:lnTo>
+                  <a:lnTo>
+                    <a:pt x="3376535" y="961380"/>
+                  </a:lnTo>
+                  <a:lnTo>
+                    <a:pt x="3306191" y="956033"/>
+                  </a:lnTo>
+                  <a:lnTo>
+                    <a:pt x="3235846" y="953377"/>
+                  </a:lnTo>
+                  <a:lnTo>
+                    <a:pt x="3165502" y="950697"/>
+                  </a:lnTo>
+                  <a:lnTo>
+                    <a:pt x="3095157" y="947994"/>
+                  </a:lnTo>
+                  <a:lnTo>
+                    <a:pt x="3024813" y="945267"/>
+                  </a:lnTo>
+                  <a:lnTo>
+                    <a:pt x="2954468" y="942516"/>
+                  </a:lnTo>
+                  <a:lnTo>
+                    <a:pt x="2884124" y="939741"/>
+                  </a:lnTo>
+                  <a:lnTo>
+                    <a:pt x="2813779" y="936941"/>
+                  </a:lnTo>
+                  <a:lnTo>
+                    <a:pt x="2743435" y="934116"/>
+                  </a:lnTo>
+                  <a:lnTo>
+                    <a:pt x="2673090" y="931267"/>
+                  </a:lnTo>
+                  <a:lnTo>
+                    <a:pt x="2602746" y="928392"/>
+                  </a:lnTo>
+                  <a:lnTo>
+                    <a:pt x="2532401" y="925492"/>
+                  </a:lnTo>
+                  <a:lnTo>
+                    <a:pt x="2462057" y="922567"/>
+                  </a:lnTo>
+                  <a:lnTo>
+                    <a:pt x="2391712" y="919616"/>
+                  </a:lnTo>
+                  <a:lnTo>
+                    <a:pt x="2321368" y="916638"/>
+                  </a:lnTo>
+                  <a:lnTo>
+                    <a:pt x="2251023" y="913635"/>
+                  </a:lnTo>
+                  <a:lnTo>
+                    <a:pt x="2180679" y="910605"/>
+                  </a:lnTo>
+                  <a:lnTo>
+                    <a:pt x="2110334" y="907548"/>
+                  </a:lnTo>
+                  <a:lnTo>
+                    <a:pt x="2039990" y="904464"/>
+                  </a:lnTo>
+                  <a:lnTo>
+                    <a:pt x="1969645" y="901353"/>
+                  </a:lnTo>
+                  <a:lnTo>
+                    <a:pt x="1899301" y="898215"/>
+                  </a:lnTo>
+                  <a:lnTo>
+                    <a:pt x="1828956" y="895049"/>
+                  </a:lnTo>
+                  <a:lnTo>
+                    <a:pt x="1758612" y="891854"/>
+                  </a:lnTo>
+                  <a:lnTo>
+                    <a:pt x="1688267" y="888632"/>
+                  </a:lnTo>
+                  <a:lnTo>
+                    <a:pt x="1617923" y="885382"/>
+                  </a:lnTo>
+                  <a:lnTo>
+                    <a:pt x="1547578" y="882102"/>
+                  </a:lnTo>
+                  <a:lnTo>
+                    <a:pt x="1477234" y="878794"/>
+                  </a:lnTo>
+                  <a:lnTo>
+                    <a:pt x="1406889" y="875457"/>
+                  </a:lnTo>
+                  <a:lnTo>
+                    <a:pt x="1336545" y="872090"/>
+                  </a:lnTo>
+                  <a:lnTo>
+                    <a:pt x="1266200" y="868694"/>
+                  </a:lnTo>
+                  <a:lnTo>
+                    <a:pt x="1195856" y="865267"/>
+                  </a:lnTo>
+                  <a:lnTo>
+                    <a:pt x="1125511" y="861811"/>
+                  </a:lnTo>
+                  <a:lnTo>
+                    <a:pt x="1055167" y="858323"/>
+                  </a:lnTo>
+                  <a:lnTo>
+                    <a:pt x="984822" y="854805"/>
+                  </a:lnTo>
+                  <a:lnTo>
+                    <a:pt x="914478" y="851257"/>
+                  </a:lnTo>
+                  <a:lnTo>
+                    <a:pt x="844133" y="847676"/>
+                  </a:lnTo>
+                  <a:lnTo>
+                    <a:pt x="773789" y="844065"/>
+                  </a:lnTo>
+                  <a:lnTo>
+                    <a:pt x="703444" y="840421"/>
+                  </a:lnTo>
+                  <a:lnTo>
+                    <a:pt x="633100" y="836745"/>
+                  </a:lnTo>
+                  <a:lnTo>
+                    <a:pt x="562755" y="833037"/>
+                  </a:lnTo>
+                  <a:lnTo>
+                    <a:pt x="492411" y="829296"/>
+                  </a:lnTo>
+                  <a:lnTo>
+                    <a:pt x="422066" y="825522"/>
+                  </a:lnTo>
+                  <a:lnTo>
+                    <a:pt x="351722" y="821715"/>
+                  </a:lnTo>
+                  <a:lnTo>
+                    <a:pt x="281377" y="817874"/>
+                  </a:lnTo>
+                  <a:lnTo>
+                    <a:pt x="211033" y="813999"/>
+                  </a:lnTo>
+                  <a:lnTo>
+                    <a:pt x="140688" y="810091"/>
+                  </a:lnTo>
+                  <a:lnTo>
+                    <a:pt x="70344" y="806147"/>
+                  </a:lnTo>
+                  <a:lnTo>
+                    <a:pt x="0" y="802169"/>
+                  </a:lnTo>
+                  <a:close/>
+                </a:path>
+              </a:pathLst>
+            </a:custGeom>
+            <a:solidFill>
+              <a:srgbClr val="FF8C00">
+                <a:alpha val="20000"/>
+              </a:srgbClr>
+            </a:solidFill>
+          </p:spPr>
+          <p:txBody>
+            <a:bodyPr/>
+            <a:lstStyle/>
+            <a:p/>
+          </p:txBody>
+        </p:sp>
+        <p:sp>
+          <p:nvSpPr>
+            <p:cNvPr id="67" name="pl67"/>
+            <p:cNvSpPr/>
+            <p:nvPr/>
+          </p:nvSpPr>
+          <p:spPr>
+            <a:xfrm>
+              <a:off x="1989799" y="4336484"/>
+              <a:ext cx="6209617" cy="1066432"/>
+            </a:xfrm>
+            <a:custGeom>
+              <a:avLst/>
+              <a:pathLst>
+                <a:path w="6209617" h="1066432">
+                  <a:moveTo>
+                    <a:pt x="0" y="0"/>
+                  </a:moveTo>
+                  <a:lnTo>
+                    <a:pt x="19302" y="13505"/>
+                  </a:lnTo>
+                  <a:lnTo>
+                    <a:pt x="89646" y="60852"/>
+                  </a:lnTo>
+                  <a:lnTo>
+                    <a:pt x="159991" y="106397"/>
+                  </a:lnTo>
+                  <a:lnTo>
+                    <a:pt x="230335" y="150207"/>
+                  </a:lnTo>
+                  <a:lnTo>
+                    <a:pt x="300680" y="192350"/>
+                  </a:lnTo>
+                  <a:lnTo>
+                    <a:pt x="371024" y="232889"/>
+                  </a:lnTo>
+                  <a:lnTo>
+                    <a:pt x="441368" y="271884"/>
+                  </a:lnTo>
+                  <a:lnTo>
+                    <a:pt x="511713" y="309394"/>
+                  </a:lnTo>
+                  <a:lnTo>
+                    <a:pt x="582057" y="345477"/>
+                  </a:lnTo>
+                  <a:lnTo>
+                    <a:pt x="652402" y="380186"/>
+                  </a:lnTo>
+                  <a:lnTo>
+                    <a:pt x="722746" y="413574"/>
+                  </a:lnTo>
+                  <a:lnTo>
+                    <a:pt x="793091" y="445690"/>
+                  </a:lnTo>
+                  <a:lnTo>
+                    <a:pt x="863435" y="476584"/>
+                  </a:lnTo>
+                  <a:lnTo>
+                    <a:pt x="933780" y="506302"/>
+                  </a:lnTo>
+                  <a:lnTo>
+                    <a:pt x="1004124" y="534888"/>
+                  </a:lnTo>
+                  <a:lnTo>
+                    <a:pt x="1074469" y="562386"/>
+                  </a:lnTo>
+                  <a:lnTo>
+                    <a:pt x="1144813" y="588838"/>
+                  </a:lnTo>
+                  <a:lnTo>
+                    <a:pt x="1215158" y="614282"/>
+                  </a:lnTo>
+                  <a:lnTo>
+                    <a:pt x="1285502" y="638758"/>
+                  </a:lnTo>
+                  <a:lnTo>
+                    <a:pt x="1355847" y="662302"/>
+                  </a:lnTo>
+                  <a:lnTo>
+                    <a:pt x="1426191" y="684949"/>
+                  </a:lnTo>
+                  <a:lnTo>
+                    <a:pt x="1496536" y="706735"/>
+                  </a:lnTo>
+                  <a:lnTo>
+                    <a:pt x="1566880" y="727691"/>
+                  </a:lnTo>
+                  <a:lnTo>
+                    <a:pt x="1637225" y="747849"/>
+                  </a:lnTo>
+                  <a:lnTo>
+                    <a:pt x="1707569" y="767240"/>
+                  </a:lnTo>
+                  <a:lnTo>
+                    <a:pt x="1777914" y="785892"/>
+                  </a:lnTo>
+                  <a:lnTo>
+                    <a:pt x="1848258" y="803835"/>
+                  </a:lnTo>
+                  <a:lnTo>
+                    <a:pt x="1918603" y="821094"/>
+                  </a:lnTo>
+                  <a:lnTo>
+                    <a:pt x="1988947" y="837697"/>
+                  </a:lnTo>
+                  <a:lnTo>
+                    <a:pt x="2059292" y="853667"/>
+                  </a:lnTo>
+                  <a:lnTo>
+                    <a:pt x="2129636" y="869030"/>
+                  </a:lnTo>
+                  <a:lnTo>
+                    <a:pt x="2199981" y="883807"/>
+                  </a:lnTo>
+                  <a:lnTo>
+                    <a:pt x="2270325" y="898022"/>
+                  </a:lnTo>
+                  <a:lnTo>
+                    <a:pt x="2340670" y="911696"/>
+                  </a:lnTo>
+                  <a:lnTo>
+                    <a:pt x="2411014" y="924849"/>
+                  </a:lnTo>
+                  <a:lnTo>
+                    <a:pt x="2481359" y="937502"/>
+                  </a:lnTo>
+                  <a:lnTo>
+                    <a:pt x="2551703" y="949672"/>
+                  </a:lnTo>
+                  <a:lnTo>
+                    <a:pt x="2622048" y="958666"/>
+                  </a:lnTo>
+                  <a:lnTo>
+                    <a:pt x="2692392" y="961276"/>
+                  </a:lnTo>
+                  <a:lnTo>
+                    <a:pt x="2762737" y="963863"/>
+                  </a:lnTo>
+                  <a:lnTo>
+                    <a:pt x="2833081" y="966428"/>
+                  </a:lnTo>
+                  <a:lnTo>
+                    <a:pt x="2903426" y="968970"/>
+                  </a:lnTo>
+                  <a:lnTo>
+                    <a:pt x="2973770" y="971489"/>
+                  </a:lnTo>
+                  <a:lnTo>
+                    <a:pt x="3044115" y="973987"/>
+                  </a:lnTo>
+                  <a:lnTo>
+                    <a:pt x="3114459" y="976463"/>
+                  </a:lnTo>
+                  <a:lnTo>
+                    <a:pt x="3184804" y="978918"/>
+                  </a:lnTo>
+                  <a:lnTo>
+                    <a:pt x="3255148" y="981350"/>
+                  </a:lnTo>
+                  <a:lnTo>
+                    <a:pt x="3325493" y="983762"/>
+                  </a:lnTo>
+                  <a:lnTo>
+                    <a:pt x="3395837" y="986153"/>
+                  </a:lnTo>
+                  <a:lnTo>
+                    <a:pt x="3466182" y="988522"/>
+                  </a:lnTo>
+                  <a:lnTo>
+                    <a:pt x="3536526" y="990871"/>
+                  </a:lnTo>
+                  <a:lnTo>
+                    <a:pt x="3606871" y="993199"/>
+                  </a:lnTo>
+                  <a:lnTo>
+                    <a:pt x="3677215" y="995507"/>
+                  </a:lnTo>
+                  <a:lnTo>
+                    <a:pt x="3747560" y="997795"/>
+                  </a:lnTo>
+                  <a:lnTo>
+                    <a:pt x="3817904" y="1000063"/>
+                  </a:lnTo>
+                  <a:lnTo>
+                    <a:pt x="3888249" y="1002311"/>
+                  </a:lnTo>
+                  <a:lnTo>
+                    <a:pt x="3958593" y="1004539"/>
+                  </a:lnTo>
+                  <a:lnTo>
+                    <a:pt x="4028937" y="1006748"/>
+                  </a:lnTo>
+                  <a:lnTo>
+                    <a:pt x="4099282" y="1008938"/>
+                  </a:lnTo>
+                  <a:lnTo>
+                    <a:pt x="4169626" y="1011108"/>
+                  </a:lnTo>
+                  <a:lnTo>
+                    <a:pt x="4239971" y="1013260"/>
+                  </a:lnTo>
+                  <a:lnTo>
+                    <a:pt x="4310315" y="1015392"/>
+                  </a:lnTo>
+                  <a:lnTo>
+                    <a:pt x="4380660" y="1017506"/>
+                  </a:lnTo>
+                  <a:lnTo>
+                    <a:pt x="4451004" y="1019602"/>
+                  </a:lnTo>
+                  <a:lnTo>
+                    <a:pt x="4521349" y="1021679"/>
+                  </a:lnTo>
+                  <a:lnTo>
+                    <a:pt x="4591693" y="1023738"/>
+                  </a:lnTo>
+                  <a:lnTo>
+                    <a:pt x="4662038" y="1025779"/>
+                  </a:lnTo>
+                  <a:lnTo>
+                    <a:pt x="4732382" y="1027802"/>
+                  </a:lnTo>
+                  <a:lnTo>
+                    <a:pt x="4802727" y="1029808"/>
+                  </a:lnTo>
+                  <a:lnTo>
+                    <a:pt x="4873071" y="1031796"/>
+                  </a:lnTo>
+                  <a:lnTo>
+                    <a:pt x="4943416" y="1033766"/>
+                  </a:lnTo>
+                  <a:lnTo>
+                    <a:pt x="5013760" y="1035720"/>
+                  </a:lnTo>
+                  <a:lnTo>
+                    <a:pt x="5084105" y="1037656"/>
+                  </a:lnTo>
+                  <a:lnTo>
+                    <a:pt x="5154449" y="1039575"/>
+                  </a:lnTo>
+                  <a:lnTo>
+                    <a:pt x="5224794" y="1041478"/>
+                  </a:lnTo>
+                  <a:lnTo>
+                    <a:pt x="5295138" y="1043364"/>
+                  </a:lnTo>
+                  <a:lnTo>
+                    <a:pt x="5365483" y="1045233"/>
+                  </a:lnTo>
+                  <a:lnTo>
+                    <a:pt x="5435827" y="1047086"/>
+                  </a:lnTo>
+                  <a:lnTo>
+                    <a:pt x="5506172" y="1048923"/>
+                  </a:lnTo>
+                  <a:lnTo>
+                    <a:pt x="5576516" y="1050744"/>
+                  </a:lnTo>
+                  <a:lnTo>
+                    <a:pt x="5646861" y="1052549"/>
+                  </a:lnTo>
+                  <a:lnTo>
+                    <a:pt x="5717205" y="1054338"/>
+                  </a:lnTo>
+                  <a:lnTo>
+                    <a:pt x="5787550" y="1056112"/>
+                  </a:lnTo>
+                  <a:lnTo>
+                    <a:pt x="5857894" y="1057870"/>
+                  </a:lnTo>
+                  <a:lnTo>
+                    <a:pt x="5928239" y="1059612"/>
+                  </a:lnTo>
+                  <a:lnTo>
+                    <a:pt x="5998583" y="1061340"/>
+                  </a:lnTo>
+                  <a:lnTo>
+                    <a:pt x="6068928" y="1063052"/>
+                  </a:lnTo>
+                  <a:lnTo>
+                    <a:pt x="6139272" y="1064749"/>
+                  </a:lnTo>
+                  <a:lnTo>
+                    <a:pt x="6209617" y="1066432"/>
+                  </a:lnTo>
+                </a:path>
+              </a:pathLst>
+            </a:custGeom>
+          </p:spPr>
+          <p:txBody>
+            <a:bodyPr/>
+            <a:lstStyle/>
+            <a:p/>
+          </p:txBody>
+        </p:sp>
+        <p:sp>
+          <p:nvSpPr>
+            <p:cNvPr id="68" name="pl68"/>
+            <p:cNvSpPr/>
+            <p:nvPr/>
+          </p:nvSpPr>
+          <p:spPr>
+            <a:xfrm>
+              <a:off x="1235312" y="5138654"/>
+              <a:ext cx="6964104" cy="414166"/>
+            </a:xfrm>
+            <a:custGeom>
+              <a:avLst/>
+              <a:pathLst>
+                <a:path w="6964104" h="414166">
+                  <a:moveTo>
+                    <a:pt x="6964104" y="414166"/>
+                  </a:moveTo>
+                  <a:lnTo>
+                    <a:pt x="6893760" y="412549"/>
+                  </a:lnTo>
+                  <a:lnTo>
+                    <a:pt x="6823415" y="410868"/>
+                  </a:lnTo>
+                  <a:lnTo>
+                    <a:pt x="6753071" y="409120"/>
+                  </a:lnTo>
+                  <a:lnTo>
+                    <a:pt x="6682726" y="407303"/>
+                  </a:lnTo>
+                  <a:lnTo>
+                    <a:pt x="6612382" y="405414"/>
+                  </a:lnTo>
+                  <a:lnTo>
+                    <a:pt x="6542037" y="403450"/>
+                  </a:lnTo>
+                  <a:lnTo>
+                    <a:pt x="6471693" y="401409"/>
+                  </a:lnTo>
+                  <a:lnTo>
+                    <a:pt x="6401348" y="399287"/>
+                  </a:lnTo>
+                  <a:lnTo>
+                    <a:pt x="6331004" y="397081"/>
+                  </a:lnTo>
+                  <a:lnTo>
+                    <a:pt x="6260659" y="394787"/>
+                  </a:lnTo>
+                  <a:lnTo>
+                    <a:pt x="6190315" y="392403"/>
+                  </a:lnTo>
+                  <a:lnTo>
+                    <a:pt x="6119970" y="389924"/>
+                  </a:lnTo>
+                  <a:lnTo>
+                    <a:pt x="6049626" y="387347"/>
+                  </a:lnTo>
+                  <a:lnTo>
+                    <a:pt x="5979281" y="384669"/>
+                  </a:lnTo>
+                  <a:lnTo>
+                    <a:pt x="5908937" y="381884"/>
+                  </a:lnTo>
+                  <a:lnTo>
+                    <a:pt x="5838592" y="378989"/>
+                  </a:lnTo>
+                  <a:lnTo>
+                    <a:pt x="5768248" y="375980"/>
+                  </a:lnTo>
+                  <a:lnTo>
+                    <a:pt x="5697903" y="372851"/>
+                  </a:lnTo>
+                  <a:lnTo>
+                    <a:pt x="5627559" y="369599"/>
+                  </a:lnTo>
+                  <a:lnTo>
+                    <a:pt x="5557214" y="366218"/>
+                  </a:lnTo>
+                  <a:lnTo>
+                    <a:pt x="5486870" y="362703"/>
+                  </a:lnTo>
+                  <a:lnTo>
+                    <a:pt x="5416525" y="359049"/>
+                  </a:lnTo>
+                  <a:lnTo>
+                    <a:pt x="5346181" y="355250"/>
+                  </a:lnTo>
+                  <a:lnTo>
+                    <a:pt x="5275836" y="351301"/>
+                  </a:lnTo>
+                  <a:lnTo>
+                    <a:pt x="5205492" y="347196"/>
+                  </a:lnTo>
+                  <a:lnTo>
+                    <a:pt x="5135147" y="342928"/>
+                  </a:lnTo>
+                  <a:lnTo>
+                    <a:pt x="5064803" y="338491"/>
+                  </a:lnTo>
+                  <a:lnTo>
+                    <a:pt x="4994458" y="333879"/>
+                  </a:lnTo>
+                  <a:lnTo>
+                    <a:pt x="4924114" y="329084"/>
+                  </a:lnTo>
+                  <a:lnTo>
+                    <a:pt x="4853769" y="324100"/>
+                  </a:lnTo>
+                  <a:lnTo>
+                    <a:pt x="4783425" y="318918"/>
+                  </a:lnTo>
+                  <a:lnTo>
+                    <a:pt x="4713080" y="313531"/>
+                  </a:lnTo>
+                  <a:lnTo>
+                    <a:pt x="4642736" y="307931"/>
+                  </a:lnTo>
+                  <a:lnTo>
+                    <a:pt x="4572391" y="302109"/>
+                  </a:lnTo>
+                  <a:lnTo>
+                    <a:pt x="4502047" y="296057"/>
+                  </a:lnTo>
+                  <a:lnTo>
+                    <a:pt x="4431702" y="289765"/>
+                  </a:lnTo>
+                  <a:lnTo>
+                    <a:pt x="4361358" y="283225"/>
+                  </a:lnTo>
+                  <a:lnTo>
+                    <a:pt x="4291013" y="276425"/>
+                  </a:lnTo>
+                  <a:lnTo>
+                    <a:pt x="4220669" y="269357"/>
+                  </a:lnTo>
+                  <a:lnTo>
+                    <a:pt x="4150324" y="262008"/>
+                  </a:lnTo>
+                  <a:lnTo>
+                    <a:pt x="4079980" y="254369"/>
+                  </a:lnTo>
+                  <a:lnTo>
+                    <a:pt x="4009635" y="246428"/>
+                  </a:lnTo>
+                  <a:lnTo>
+                    <a:pt x="3939291" y="238172"/>
+                  </a:lnTo>
+                  <a:lnTo>
+                    <a:pt x="3868946" y="229589"/>
+                  </a:lnTo>
+                  <a:lnTo>
+                    <a:pt x="3798602" y="220667"/>
+                  </a:lnTo>
+                  <a:lnTo>
+                    <a:pt x="3728257" y="211392"/>
+                  </a:lnTo>
+                  <a:lnTo>
+                    <a:pt x="3657913" y="201750"/>
+                  </a:lnTo>
+                  <a:lnTo>
+                    <a:pt x="3587569" y="191726"/>
+                  </a:lnTo>
+                  <a:lnTo>
+                    <a:pt x="3517224" y="181305"/>
+                  </a:lnTo>
+                  <a:lnTo>
+                    <a:pt x="3446880" y="170472"/>
+                  </a:lnTo>
+                  <a:lnTo>
+                    <a:pt x="3376535" y="159210"/>
+                  </a:lnTo>
+                  <a:lnTo>
+                    <a:pt x="3306191" y="153863"/>
+                  </a:lnTo>
+                  <a:lnTo>
+                    <a:pt x="3235846" y="151207"/>
+                  </a:lnTo>
+                  <a:lnTo>
+                    <a:pt x="3165502" y="148528"/>
+                  </a:lnTo>
+                  <a:lnTo>
+                    <a:pt x="3095157" y="145824"/>
+                  </a:lnTo>
+                  <a:lnTo>
+                    <a:pt x="3024813" y="143097"/>
+                  </a:lnTo>
+                  <a:lnTo>
+                    <a:pt x="2954468" y="140346"/>
+                  </a:lnTo>
+                  <a:lnTo>
+                    <a:pt x="2884124" y="137571"/>
+                  </a:lnTo>
+                  <a:lnTo>
+                    <a:pt x="2813779" y="134771"/>
+                  </a:lnTo>
+                  <a:lnTo>
+                    <a:pt x="2743435" y="131947"/>
+                  </a:lnTo>
+                  <a:lnTo>
+                    <a:pt x="2673090" y="129097"/>
+                  </a:lnTo>
+                  <a:lnTo>
+                    <a:pt x="2602746" y="126223"/>
+                  </a:lnTo>
+                  <a:lnTo>
+                    <a:pt x="2532401" y="123323"/>
+                  </a:lnTo>
+                  <a:lnTo>
+                    <a:pt x="2462057" y="120397"/>
+                  </a:lnTo>
+                  <a:lnTo>
+                    <a:pt x="2391712" y="117446"/>
+                  </a:lnTo>
+                  <a:lnTo>
+                    <a:pt x="2321368" y="114468"/>
+                  </a:lnTo>
+                  <a:lnTo>
+                    <a:pt x="2251023" y="111465"/>
+                  </a:lnTo>
+                  <a:lnTo>
+                    <a:pt x="2180679" y="108435"/>
+                  </a:lnTo>
+                  <a:lnTo>
+                    <a:pt x="2110334" y="105378"/>
+                  </a:lnTo>
+                  <a:lnTo>
+                    <a:pt x="2039990" y="102294"/>
+                  </a:lnTo>
+                  <a:lnTo>
+                    <a:pt x="1969645" y="99183"/>
+                  </a:lnTo>
+                  <a:lnTo>
+                    <a:pt x="1899301" y="96045"/>
+                  </a:lnTo>
+                  <a:lnTo>
+                    <a:pt x="1828956" y="92879"/>
+                  </a:lnTo>
+                  <a:lnTo>
+                    <a:pt x="1758612" y="89685"/>
+                  </a:lnTo>
+                  <a:lnTo>
+                    <a:pt x="1688267" y="86463"/>
+                  </a:lnTo>
+                  <a:lnTo>
+                    <a:pt x="1617923" y="83212"/>
+                  </a:lnTo>
+                  <a:lnTo>
+                    <a:pt x="1547578" y="79933"/>
+                  </a:lnTo>
+                  <a:lnTo>
+                    <a:pt x="1477234" y="76625"/>
+                  </a:lnTo>
+                  <a:lnTo>
+                    <a:pt x="1406889" y="73287"/>
+                  </a:lnTo>
+                  <a:lnTo>
+                    <a:pt x="1336545" y="69920"/>
+                  </a:lnTo>
+                  <a:lnTo>
+                    <a:pt x="1266200" y="66524"/>
+                  </a:lnTo>
+                  <a:lnTo>
+                    <a:pt x="1195856" y="63097"/>
+                  </a:lnTo>
+                  <a:lnTo>
+                    <a:pt x="1125511" y="59641"/>
+                  </a:lnTo>
+                  <a:lnTo>
+                    <a:pt x="1055167" y="56154"/>
+                  </a:lnTo>
+                  <a:lnTo>
+                    <a:pt x="984822" y="52636"/>
+                  </a:lnTo>
+                  <a:lnTo>
+                    <a:pt x="914478" y="49087"/>
+                  </a:lnTo>
+                  <a:lnTo>
+                    <a:pt x="844133" y="45507"/>
+                  </a:lnTo>
+                  <a:lnTo>
+                    <a:pt x="773789" y="41895"/>
+                  </a:lnTo>
+                  <a:lnTo>
+                    <a:pt x="703444" y="38251"/>
+                  </a:lnTo>
+                  <a:lnTo>
+                    <a:pt x="633100" y="34575"/>
+                  </a:lnTo>
+                  <a:lnTo>
+                    <a:pt x="562755" y="30867"/>
+                  </a:lnTo>
+                  <a:lnTo>
+                    <a:pt x="492411" y="27126"/>
+                  </a:lnTo>
+                  <a:lnTo>
+                    <a:pt x="422066" y="23352"/>
+                  </a:lnTo>
+                  <a:lnTo>
+                    <a:pt x="351722" y="19545"/>
+                  </a:lnTo>
+                  <a:lnTo>
+                    <a:pt x="281377" y="15704"/>
+                  </a:lnTo>
+                  <a:lnTo>
+                    <a:pt x="211033" y="11830"/>
+                  </a:lnTo>
+                  <a:lnTo>
+                    <a:pt x="140688" y="7921"/>
+                  </a:lnTo>
+                  <a:lnTo>
+                    <a:pt x="70344" y="3978"/>
+                  </a:lnTo>
+                  <a:lnTo>
+                    <a:pt x="0" y="0"/>
+                  </a:lnTo>
+                </a:path>
+              </a:pathLst>
+            </a:custGeom>
+          </p:spPr>
+          <p:txBody>
+            <a:bodyPr/>
+            <a:lstStyle/>
+            <a:p/>
+          </p:txBody>
+        </p:sp>
+        <p:sp>
+          <p:nvSpPr>
+            <p:cNvPr id="69" name="pl69"/>
+            <p:cNvSpPr/>
+            <p:nvPr/>
+          </p:nvSpPr>
+          <p:spPr>
+            <a:xfrm>
+              <a:off x="1235312" y="4662389"/>
+              <a:ext cx="6964104" cy="843002"/>
+            </a:xfrm>
+            <a:custGeom>
+              <a:avLst/>
+              <a:pathLst>
+                <a:path w="6964104" h="843002">
+                  <a:moveTo>
+                    <a:pt x="0" y="0"/>
+                  </a:moveTo>
+                  <a:lnTo>
+                    <a:pt x="70344" y="21900"/>
+                  </a:lnTo>
+                  <a:lnTo>
+                    <a:pt x="140688" y="43285"/>
+                  </a:lnTo>
+                  <a:lnTo>
+                    <a:pt x="211033" y="64168"/>
+                  </a:lnTo>
+                  <a:lnTo>
+                    <a:pt x="281377" y="84559"/>
+                  </a:lnTo>
+                  <a:lnTo>
+                    <a:pt x="351722" y="104471"/>
+                  </a:lnTo>
+                  <a:lnTo>
+                    <a:pt x="422066" y="123915"/>
+                  </a:lnTo>
+                  <a:lnTo>
+                    <a:pt x="492411" y="142901"/>
+                  </a:lnTo>
+                  <a:lnTo>
+                    <a:pt x="562755" y="161441"/>
+                  </a:lnTo>
+                  <a:lnTo>
+                    <a:pt x="633100" y="179545"/>
+                  </a:lnTo>
+                  <a:lnTo>
+                    <a:pt x="703444" y="197224"/>
+                  </a:lnTo>
+                  <a:lnTo>
+                    <a:pt x="773789" y="214486"/>
+                  </a:lnTo>
+                  <a:lnTo>
+                    <a:pt x="844133" y="231343"/>
+                  </a:lnTo>
+                  <a:lnTo>
+                    <a:pt x="914478" y="247803"/>
+                  </a:lnTo>
+                  <a:lnTo>
+                    <a:pt x="984822" y="263876"/>
+                  </a:lnTo>
+                  <a:lnTo>
+                    <a:pt x="1055167" y="279571"/>
+                  </a:lnTo>
+                  <a:lnTo>
+                    <a:pt x="1125511" y="294897"/>
+                  </a:lnTo>
+                  <a:lnTo>
+                    <a:pt x="1195856" y="309863"/>
+                  </a:lnTo>
+                  <a:lnTo>
+                    <a:pt x="1266200" y="324476"/>
+                  </a:lnTo>
+                  <a:lnTo>
+                    <a:pt x="1336545" y="338746"/>
+                  </a:lnTo>
+                  <a:lnTo>
+                    <a:pt x="1406889" y="352681"/>
+                  </a:lnTo>
+                  <a:lnTo>
+                    <a:pt x="1477234" y="366287"/>
+                  </a:lnTo>
+                  <a:lnTo>
+                    <a:pt x="1547578" y="379574"/>
+                  </a:lnTo>
+                  <a:lnTo>
+                    <a:pt x="1617923" y="392549"/>
+                  </a:lnTo>
+                  <a:lnTo>
+                    <a:pt x="1688267" y="405218"/>
+                  </a:lnTo>
+                  <a:lnTo>
+                    <a:pt x="1758612" y="417589"/>
+                  </a:lnTo>
+                  <a:lnTo>
+                    <a:pt x="1828956" y="429670"/>
+                  </a:lnTo>
+                  <a:lnTo>
+                    <a:pt x="1899301" y="441466"/>
+                  </a:lnTo>
+                  <a:lnTo>
+                    <a:pt x="1969645" y="452985"/>
+                  </a:lnTo>
+                  <a:lnTo>
+                    <a:pt x="2039990" y="464233"/>
+                  </a:lnTo>
+                  <a:lnTo>
+                    <a:pt x="2110334" y="475216"/>
+                  </a:lnTo>
+                  <a:lnTo>
+                    <a:pt x="2180679" y="485941"/>
+                  </a:lnTo>
+                  <a:lnTo>
+                    <a:pt x="2251023" y="496414"/>
+                  </a:lnTo>
+                  <a:lnTo>
+                    <a:pt x="2321368" y="506641"/>
+                  </a:lnTo>
+                  <a:lnTo>
+                    <a:pt x="2391712" y="516627"/>
+                  </a:lnTo>
+                  <a:lnTo>
+                    <a:pt x="2462057" y="526379"/>
+                  </a:lnTo>
+                  <a:lnTo>
+                    <a:pt x="2532401" y="535901"/>
+                  </a:lnTo>
+                  <a:lnTo>
+                    <a:pt x="2602746" y="545199"/>
+                  </a:lnTo>
+                  <a:lnTo>
+                    <a:pt x="2673090" y="554278"/>
+                  </a:lnTo>
+                  <a:lnTo>
+                    <a:pt x="2743435" y="563144"/>
+                  </a:lnTo>
+                  <a:lnTo>
+                    <a:pt x="2813779" y="571802"/>
+                  </a:lnTo>
+                  <a:lnTo>
+                    <a:pt x="2884124" y="580256"/>
+                  </a:lnTo>
+                  <a:lnTo>
+                    <a:pt x="2954468" y="588511"/>
+                  </a:lnTo>
+                  <a:lnTo>
+                    <a:pt x="3024813" y="596572"/>
+                  </a:lnTo>
+                  <a:lnTo>
+                    <a:pt x="3095157" y="604443"/>
+                  </a:lnTo>
+                  <a:lnTo>
+                    <a:pt x="3165502" y="612130"/>
+                  </a:lnTo>
+                  <a:lnTo>
+                    <a:pt x="3235846" y="619635"/>
+                  </a:lnTo>
+                  <a:lnTo>
+                    <a:pt x="3306191" y="626964"/>
+                  </a:lnTo>
+                  <a:lnTo>
+                    <a:pt x="3376535" y="634121"/>
+                  </a:lnTo>
+                  <a:lnTo>
+                    <a:pt x="3446880" y="641109"/>
+                  </a:lnTo>
+                  <a:lnTo>
+                    <a:pt x="3517224" y="647933"/>
+                  </a:lnTo>
+                  <a:lnTo>
+                    <a:pt x="3587569" y="654597"/>
+                  </a:lnTo>
+                  <a:lnTo>
+                    <a:pt x="3657913" y="661104"/>
+                  </a:lnTo>
+                  <a:lnTo>
+                    <a:pt x="3728257" y="667458"/>
+                  </a:lnTo>
+                  <a:lnTo>
+                    <a:pt x="3798602" y="673662"/>
+                  </a:lnTo>
+                  <a:lnTo>
+                    <a:pt x="3868946" y="679721"/>
+                  </a:lnTo>
+                  <a:lnTo>
+                    <a:pt x="3939291" y="685637"/>
+                  </a:lnTo>
+                  <a:lnTo>
+                    <a:pt x="4009635" y="691414"/>
+                  </a:lnTo>
+                  <a:lnTo>
+                    <a:pt x="4079980" y="697055"/>
+                  </a:lnTo>
+                  <a:lnTo>
+                    <a:pt x="4150324" y="702563"/>
+                  </a:lnTo>
+                  <a:lnTo>
+                    <a:pt x="4220669" y="707942"/>
+                  </a:lnTo>
+                  <a:lnTo>
+                    <a:pt x="4291013" y="713195"/>
+                  </a:lnTo>
+                  <a:lnTo>
+                    <a:pt x="4361358" y="718324"/>
+                  </a:lnTo>
+                  <a:lnTo>
+                    <a:pt x="4431702" y="723332"/>
+                  </a:lnTo>
+                  <a:lnTo>
+                    <a:pt x="4502047" y="728222"/>
+                  </a:lnTo>
+                  <a:lnTo>
+                    <a:pt x="4572391" y="732998"/>
+                  </a:lnTo>
+                  <a:lnTo>
+                    <a:pt x="4642736" y="737661"/>
+                  </a:lnTo>
+                  <a:lnTo>
+                    <a:pt x="4713080" y="742215"/>
+                  </a:lnTo>
+                  <a:lnTo>
+                    <a:pt x="4783425" y="746661"/>
+                  </a:lnTo>
+                  <a:lnTo>
+                    <a:pt x="4853769" y="751003"/>
+                  </a:lnTo>
+                  <a:lnTo>
+                    <a:pt x="4924114" y="755243"/>
+                  </a:lnTo>
+                  <a:lnTo>
+                    <a:pt x="4994458" y="759383"/>
+                  </a:lnTo>
+                  <a:lnTo>
+                    <a:pt x="5064803" y="763426"/>
+                  </a:lnTo>
+                  <a:lnTo>
+                    <a:pt x="5135147" y="767373"/>
+                  </a:lnTo>
+                  <a:lnTo>
+                    <a:pt x="5205492" y="771228"/>
+                  </a:lnTo>
+                  <a:lnTo>
+                    <a:pt x="5275836" y="774992"/>
+                  </a:lnTo>
+                  <a:lnTo>
+                    <a:pt x="5346181" y="778668"/>
+                  </a:lnTo>
+                  <a:lnTo>
+                    <a:pt x="5416525" y="782257"/>
+                  </a:lnTo>
+                  <a:lnTo>
+                    <a:pt x="5486870" y="785762"/>
+                  </a:lnTo>
+                  <a:lnTo>
+                    <a:pt x="5557214" y="789184"/>
+                  </a:lnTo>
+                  <a:lnTo>
+                    <a:pt x="5627559" y="792526"/>
+                  </a:lnTo>
+                  <a:lnTo>
+                    <a:pt x="5697903" y="795790"/>
+                  </a:lnTo>
+                  <a:lnTo>
+                    <a:pt x="5768248" y="798976"/>
+                  </a:lnTo>
+                  <a:lnTo>
+                    <a:pt x="5838592" y="802088"/>
+                  </a:lnTo>
+                  <a:lnTo>
+                    <a:pt x="5908937" y="805126"/>
+                  </a:lnTo>
+                  <a:lnTo>
+                    <a:pt x="5979281" y="808093"/>
+                  </a:lnTo>
+                  <a:lnTo>
+                    <a:pt x="6049626" y="810991"/>
+                  </a:lnTo>
+                  <a:lnTo>
+                    <a:pt x="6119970" y="813820"/>
+                  </a:lnTo>
+                  <a:lnTo>
+                    <a:pt x="6190315" y="816582"/>
+                  </a:lnTo>
+                  <a:lnTo>
+                    <a:pt x="6260659" y="819280"/>
+                  </a:lnTo>
+                  <a:lnTo>
+                    <a:pt x="6331004" y="821914"/>
+                  </a:lnTo>
+                  <a:lnTo>
+                    <a:pt x="6401348" y="824486"/>
+                  </a:lnTo>
+                  <a:lnTo>
+                    <a:pt x="6471693" y="826998"/>
+                  </a:lnTo>
+                  <a:lnTo>
+                    <a:pt x="6542037" y="829451"/>
+                  </a:lnTo>
+                  <a:lnTo>
+                    <a:pt x="6612382" y="831846"/>
+                  </a:lnTo>
+                  <a:lnTo>
+                    <a:pt x="6682726" y="834185"/>
+                  </a:lnTo>
+                  <a:lnTo>
+                    <a:pt x="6753071" y="836468"/>
+                  </a:lnTo>
+                  <a:lnTo>
+                    <a:pt x="6823415" y="838698"/>
+                  </a:lnTo>
+                  <a:lnTo>
+                    <a:pt x="6893760" y="840876"/>
+                  </a:lnTo>
+                  <a:lnTo>
+                    <a:pt x="6964104" y="843002"/>
+                  </a:lnTo>
+                </a:path>
+              </a:pathLst>
+            </a:custGeom>
+            <a:ln w="27101" cap="flat">
+              <a:solidFill>
+                <a:srgbClr val="FF8C00">
+                  <a:alpha val="100000"/>
+                </a:srgbClr>
+              </a:solidFill>
+              <a:prstDash val="solid"/>
+              <a:round/>
+            </a:ln>
+          </p:spPr>
+          <p:txBody>
+            <a:bodyPr/>
+            <a:lstStyle/>
+            <a:p/>
+          </p:txBody>
+        </p:sp>
+        <p:sp>
+          <p:nvSpPr>
+            <p:cNvPr id="70" name="pl70"/>
+            <p:cNvSpPr/>
+            <p:nvPr/>
+          </p:nvSpPr>
+          <p:spPr>
+            <a:xfrm>
+              <a:off x="887106" y="5294352"/>
+              <a:ext cx="7660515" cy="0"/>
+            </a:xfrm>
+            <a:custGeom>
+              <a:avLst/>
+              <a:pathLst>
+                <a:path w="7660515" h="0">
+                  <a:moveTo>
+                    <a:pt x="0" y="0"/>
+                  </a:moveTo>
+                  <a:lnTo>
+                    <a:pt x="7660515" y="0"/>
+                  </a:lnTo>
+                  <a:lnTo>
+                    <a:pt x="7660515" y="0"/>
+                  </a:lnTo>
+                </a:path>
+              </a:pathLst>
+            </a:custGeom>
+            <a:ln w="13550" cap="flat">
+              <a:solidFill>
+                <a:srgbClr val="7F7F7F">
+                  <a:alpha val="100000"/>
+                </a:srgbClr>
+              </a:solidFill>
+              <a:prstDash val="dash"/>
+              <a:round/>
+            </a:ln>
+          </p:spPr>
+          <p:txBody>
+            <a:bodyPr/>
+            <a:lstStyle/>
+            <a:p/>
+          </p:txBody>
+        </p:sp>
+        <p:sp>
+          <p:nvSpPr>
+            <p:cNvPr id="71" name="pl71"/>
+            <p:cNvSpPr/>
+            <p:nvPr/>
+          </p:nvSpPr>
+          <p:spPr>
+            <a:xfrm>
+              <a:off x="4590457" y="4336484"/>
+              <a:ext cx="0" cy="1317069"/>
+            </a:xfrm>
+            <a:custGeom>
+              <a:avLst/>
+              <a:pathLst>
+                <a:path w="0" h="1317069">
+                  <a:moveTo>
+                    <a:pt x="0" y="1317069"/>
+                  </a:moveTo>
+                  <a:lnTo>
+                    <a:pt x="0" y="0"/>
+                  </a:lnTo>
+                  <a:lnTo>
+                    <a:pt x="0" y="0"/>
+                  </a:lnTo>
+                </a:path>
+              </a:pathLst>
+            </a:custGeom>
+            <a:ln w="13550" cap="flat">
+              <a:solidFill>
+                <a:srgbClr val="666666">
+                  <a:alpha val="100000"/>
+                </a:srgbClr>
+              </a:solidFill>
+              <a:prstDash val="dot"/>
+              <a:round/>
+            </a:ln>
+          </p:spPr>
+          <p:txBody>
+            <a:bodyPr/>
+            <a:lstStyle/>
+            <a:p/>
+          </p:txBody>
+        </p:sp>
+        <p:sp>
+          <p:nvSpPr>
+            <p:cNvPr id="72" name="tx72"/>
+            <p:cNvSpPr/>
+            <p:nvPr/>
+          </p:nvSpPr>
+          <p:spPr>
+            <a:xfrm>
+              <a:off x="762297" y="5553636"/>
+              <a:ext cx="62179" cy="80101"/>
+            </a:xfrm>
+            <a:prstGeom prst="rect">
+              <a:avLst/>
+            </a:prstGeom>
+            <a:noFill/>
+          </p:spPr>
+          <p:txBody>
+            <a:bodyPr lIns="0" rIns="0" tIns="0" bIns="0" anchorCtr="1" anchor="ctr" wrap="none"/>
+            <a:lstStyle/>
+            <a:p>
+              <a:pPr algn="l" marL="0" marR="0" indent="0">
+                <a:lnSpc>
+                  <a:spcPts val="880"/>
+                </a:lnSpc>
+                <a:spcBef>
+                  <a:spcPts val="0"/>
+                </a:spcBef>
+                <a:spcAft>
+                  <a:spcPts val="0"/>
+                </a:spcAft>
+              </a:pPr>
+              <a:r>
+                <a:rPr sz="880">
+                  <a:solidFill>
+                    <a:srgbClr val="4D4D4D">
+                      <a:alpha val="100000"/>
+                    </a:srgbClr>
+                  </a:solidFill>
+                  <a:latin typeface="Helvetica"/>
+                  <a:cs typeface="Helvetica"/>
+                </a:rPr>
+                <a:t>0</a:t>
+              </a:r>
+            </a:p>
+          </p:txBody>
+        </p:sp>
+        <p:sp>
+          <p:nvSpPr>
+            <p:cNvPr id="73" name="tx73"/>
+            <p:cNvSpPr/>
+            <p:nvPr/>
+          </p:nvSpPr>
+          <p:spPr>
+            <a:xfrm>
+              <a:off x="762297" y="5254302"/>
+              <a:ext cx="62179" cy="80101"/>
+            </a:xfrm>
+            <a:prstGeom prst="rect">
+              <a:avLst/>
+            </a:prstGeom>
+            <a:noFill/>
+          </p:spPr>
+          <p:txBody>
+            <a:bodyPr lIns="0" rIns="0" tIns="0" bIns="0" anchorCtr="1" anchor="ctr" wrap="none"/>
+            <a:lstStyle/>
+            <a:p>
+              <a:pPr algn="l" marL="0" marR="0" indent="0">
+                <a:lnSpc>
+                  <a:spcPts val="880"/>
+                </a:lnSpc>
+                <a:spcBef>
+                  <a:spcPts val="0"/>
+                </a:spcBef>
+                <a:spcAft>
+                  <a:spcPts val="0"/>
+                </a:spcAft>
+              </a:pPr>
+              <a:r>
+                <a:rPr sz="880">
+                  <a:solidFill>
+                    <a:srgbClr val="4D4D4D">
+                      <a:alpha val="100000"/>
+                    </a:srgbClr>
+                  </a:solidFill>
+                  <a:latin typeface="Helvetica"/>
+                  <a:cs typeface="Helvetica"/>
+                </a:rPr>
+                <a:t>1</a:t>
+              </a:r>
+            </a:p>
+          </p:txBody>
+        </p:sp>
+        <p:sp>
+          <p:nvSpPr>
+            <p:cNvPr id="74" name="tx74"/>
+            <p:cNvSpPr/>
+            <p:nvPr/>
+          </p:nvSpPr>
+          <p:spPr>
+            <a:xfrm>
+              <a:off x="762297" y="4954968"/>
+              <a:ext cx="62179" cy="80101"/>
+            </a:xfrm>
+            <a:prstGeom prst="rect">
+              <a:avLst/>
+            </a:prstGeom>
+            <a:noFill/>
+          </p:spPr>
+          <p:txBody>
+            <a:bodyPr lIns="0" rIns="0" tIns="0" bIns="0" anchorCtr="1" anchor="ctr" wrap="none"/>
+            <a:lstStyle/>
+            <a:p>
+              <a:pPr algn="l" marL="0" marR="0" indent="0">
+                <a:lnSpc>
+                  <a:spcPts val="880"/>
+                </a:lnSpc>
+                <a:spcBef>
+                  <a:spcPts val="0"/>
+                </a:spcBef>
+                <a:spcAft>
+                  <a:spcPts val="0"/>
+                </a:spcAft>
+              </a:pPr>
+              <a:r>
+                <a:rPr sz="880">
+                  <a:solidFill>
+                    <a:srgbClr val="4D4D4D">
+                      <a:alpha val="100000"/>
+                    </a:srgbClr>
+                  </a:solidFill>
+                  <a:latin typeface="Helvetica"/>
+                  <a:cs typeface="Helvetica"/>
+                </a:rPr>
+                <a:t>2</a:t>
+              </a:r>
+            </a:p>
+          </p:txBody>
+        </p:sp>
+        <p:sp>
+          <p:nvSpPr>
+            <p:cNvPr id="75" name="tx75"/>
+            <p:cNvSpPr/>
+            <p:nvPr/>
+          </p:nvSpPr>
+          <p:spPr>
+            <a:xfrm>
+              <a:off x="762297" y="4655634"/>
+              <a:ext cx="62179" cy="80101"/>
+            </a:xfrm>
+            <a:prstGeom prst="rect">
+              <a:avLst/>
+            </a:prstGeom>
+            <a:noFill/>
+          </p:spPr>
+          <p:txBody>
+            <a:bodyPr lIns="0" rIns="0" tIns="0" bIns="0" anchorCtr="1" anchor="ctr" wrap="none"/>
+            <a:lstStyle/>
+            <a:p>
+              <a:pPr algn="l" marL="0" marR="0" indent="0">
+                <a:lnSpc>
+                  <a:spcPts val="880"/>
+                </a:lnSpc>
+                <a:spcBef>
+                  <a:spcPts val="0"/>
+                </a:spcBef>
+                <a:spcAft>
+                  <a:spcPts val="0"/>
+                </a:spcAft>
+              </a:pPr>
+              <a:r>
+                <a:rPr sz="880">
+                  <a:solidFill>
+                    <a:srgbClr val="4D4D4D">
+                      <a:alpha val="100000"/>
+                    </a:srgbClr>
+                  </a:solidFill>
+                  <a:latin typeface="Helvetica"/>
+                  <a:cs typeface="Helvetica"/>
+                </a:rPr>
+                <a:t>3</a:t>
+              </a:r>
+            </a:p>
+          </p:txBody>
+        </p:sp>
+        <p:sp>
+          <p:nvSpPr>
+            <p:cNvPr id="76" name="tx76"/>
+            <p:cNvSpPr/>
+            <p:nvPr/>
+          </p:nvSpPr>
+          <p:spPr>
+            <a:xfrm>
+              <a:off x="762297" y="4356300"/>
+              <a:ext cx="62179" cy="80101"/>
+            </a:xfrm>
+            <a:prstGeom prst="rect">
+              <a:avLst/>
+            </a:prstGeom>
+            <a:noFill/>
+          </p:spPr>
+          <p:txBody>
+            <a:bodyPr lIns="0" rIns="0" tIns="0" bIns="0" anchorCtr="1" anchor="ctr" wrap="none"/>
+            <a:lstStyle/>
+            <a:p>
+              <a:pPr algn="l" marL="0" marR="0" indent="0">
+                <a:lnSpc>
+                  <a:spcPts val="880"/>
+                </a:lnSpc>
+                <a:spcBef>
+                  <a:spcPts val="0"/>
+                </a:spcBef>
+                <a:spcAft>
+                  <a:spcPts val="0"/>
+                </a:spcAft>
+              </a:pPr>
+              <a:r>
+                <a:rPr sz="880">
+                  <a:solidFill>
+                    <a:srgbClr val="4D4D4D">
+                      <a:alpha val="100000"/>
+                    </a:srgbClr>
+                  </a:solidFill>
+                  <a:latin typeface="Helvetica"/>
+                  <a:cs typeface="Helvetica"/>
+                </a:rPr>
+                <a:t>4</a:t>
+              </a:r>
+            </a:p>
+          </p:txBody>
+        </p:sp>
+        <p:sp>
+          <p:nvSpPr>
+            <p:cNvPr id="77" name="tx77"/>
+            <p:cNvSpPr/>
+            <p:nvPr/>
+          </p:nvSpPr>
+          <p:spPr>
+            <a:xfrm>
+              <a:off x="1133333" y="5716183"/>
+              <a:ext cx="161574" cy="80101"/>
+            </a:xfrm>
+            <a:prstGeom prst="rect">
+              <a:avLst/>
+            </a:prstGeom>
+            <a:noFill/>
+          </p:spPr>
+          <p:txBody>
+            <a:bodyPr lIns="0" rIns="0" tIns="0" bIns="0" anchorCtr="1" anchor="ctr" wrap="none"/>
+            <a:lstStyle/>
+            <a:p>
+              <a:pPr algn="l" marL="0" marR="0" indent="0">
+                <a:lnSpc>
+                  <a:spcPts val="880"/>
+                </a:lnSpc>
+                <a:spcBef>
+                  <a:spcPts val="0"/>
+                </a:spcBef>
+                <a:spcAft>
+                  <a:spcPts val="0"/>
+                </a:spcAft>
+              </a:pPr>
+              <a:r>
+                <a:rPr sz="880">
+                  <a:solidFill>
+                    <a:srgbClr val="4D4D4D">
+                      <a:alpha val="100000"/>
+                    </a:srgbClr>
+                  </a:solidFill>
+                  <a:latin typeface="Helvetica"/>
+                  <a:cs typeface="Helvetica"/>
+                </a:rPr>
+                <a:t>-40</a:t>
+              </a:r>
+            </a:p>
+          </p:txBody>
+        </p:sp>
+        <p:sp>
+          <p:nvSpPr>
+            <p:cNvPr id="78" name="tx78"/>
+            <p:cNvSpPr/>
+            <p:nvPr/>
+          </p:nvSpPr>
+          <p:spPr>
+            <a:xfrm>
+              <a:off x="1978619" y="5716183"/>
+              <a:ext cx="161574" cy="80101"/>
+            </a:xfrm>
+            <a:prstGeom prst="rect">
+              <a:avLst/>
+            </a:prstGeom>
+            <a:noFill/>
+          </p:spPr>
+          <p:txBody>
+            <a:bodyPr lIns="0" rIns="0" tIns="0" bIns="0" anchorCtr="1" anchor="ctr" wrap="none"/>
+            <a:lstStyle/>
+            <a:p>
+              <a:pPr algn="l" marL="0" marR="0" indent="0">
+                <a:lnSpc>
+                  <a:spcPts val="880"/>
+                </a:lnSpc>
+                <a:spcBef>
+                  <a:spcPts val="0"/>
+                </a:spcBef>
+                <a:spcAft>
+                  <a:spcPts val="0"/>
+                </a:spcAft>
+              </a:pPr>
+              <a:r>
+                <a:rPr sz="880">
+                  <a:solidFill>
+                    <a:srgbClr val="4D4D4D">
+                      <a:alpha val="100000"/>
+                    </a:srgbClr>
+                  </a:solidFill>
+                  <a:latin typeface="Helvetica"/>
+                  <a:cs typeface="Helvetica"/>
+                </a:rPr>
+                <a:t>-30</a:t>
+              </a:r>
+            </a:p>
+          </p:txBody>
+        </p:sp>
+        <p:sp>
+          <p:nvSpPr>
+            <p:cNvPr id="79" name="tx79"/>
+            <p:cNvSpPr/>
+            <p:nvPr/>
+          </p:nvSpPr>
+          <p:spPr>
+            <a:xfrm>
+              <a:off x="2823906" y="5716183"/>
+              <a:ext cx="161574" cy="80101"/>
+            </a:xfrm>
+            <a:prstGeom prst="rect">
+              <a:avLst/>
+            </a:prstGeom>
+            <a:noFill/>
+          </p:spPr>
+          <p:txBody>
+            <a:bodyPr lIns="0" rIns="0" tIns="0" bIns="0" anchorCtr="1" anchor="ctr" wrap="none"/>
+            <a:lstStyle/>
+            <a:p>
+              <a:pPr algn="l" marL="0" marR="0" indent="0">
+                <a:lnSpc>
+                  <a:spcPts val="880"/>
+                </a:lnSpc>
+                <a:spcBef>
+                  <a:spcPts val="0"/>
+                </a:spcBef>
+                <a:spcAft>
+                  <a:spcPts val="0"/>
+                </a:spcAft>
+              </a:pPr>
+              <a:r>
+                <a:rPr sz="880">
+                  <a:solidFill>
+                    <a:srgbClr val="4D4D4D">
+                      <a:alpha val="100000"/>
+                    </a:srgbClr>
+                  </a:solidFill>
+                  <a:latin typeface="Helvetica"/>
+                  <a:cs typeface="Helvetica"/>
+                </a:rPr>
+                <a:t>-20</a:t>
+              </a:r>
+            </a:p>
+          </p:txBody>
+        </p:sp>
+        <p:sp>
+          <p:nvSpPr>
+            <p:cNvPr id="80" name="tx80"/>
+            <p:cNvSpPr/>
+            <p:nvPr/>
+          </p:nvSpPr>
+          <p:spPr>
+            <a:xfrm>
+              <a:off x="3669192" y="5716183"/>
+              <a:ext cx="161574" cy="80101"/>
+            </a:xfrm>
+            <a:prstGeom prst="rect">
+              <a:avLst/>
+            </a:prstGeom>
+            <a:noFill/>
+          </p:spPr>
+          <p:txBody>
+            <a:bodyPr lIns="0" rIns="0" tIns="0" bIns="0" anchorCtr="1" anchor="ctr" wrap="none"/>
+            <a:lstStyle/>
+            <a:p>
+              <a:pPr algn="l" marL="0" marR="0" indent="0">
+                <a:lnSpc>
+                  <a:spcPts val="880"/>
+                </a:lnSpc>
+                <a:spcBef>
+                  <a:spcPts val="0"/>
+                </a:spcBef>
+                <a:spcAft>
+                  <a:spcPts val="0"/>
+                </a:spcAft>
+              </a:pPr>
+              <a:r>
+                <a:rPr sz="880">
+                  <a:solidFill>
+                    <a:srgbClr val="4D4D4D">
+                      <a:alpha val="100000"/>
+                    </a:srgbClr>
+                  </a:solidFill>
+                  <a:latin typeface="Helvetica"/>
+                  <a:cs typeface="Helvetica"/>
+                </a:rPr>
+                <a:t>-10</a:t>
+              </a:r>
+            </a:p>
+          </p:txBody>
+        </p:sp>
+        <p:sp>
+          <p:nvSpPr>
+            <p:cNvPr id="81" name="tx81"/>
+            <p:cNvSpPr/>
+            <p:nvPr/>
+          </p:nvSpPr>
+          <p:spPr>
+            <a:xfrm>
+              <a:off x="4564176" y="5716183"/>
+              <a:ext cx="62179" cy="80101"/>
+            </a:xfrm>
+            <a:prstGeom prst="rect">
+              <a:avLst/>
+            </a:prstGeom>
+            <a:noFill/>
+          </p:spPr>
+          <p:txBody>
+            <a:bodyPr lIns="0" rIns="0" tIns="0" bIns="0" anchorCtr="1" anchor="ctr" wrap="none"/>
+            <a:lstStyle/>
+            <a:p>
+              <a:pPr algn="l" marL="0" marR="0" indent="0">
+                <a:lnSpc>
+                  <a:spcPts val="880"/>
+                </a:lnSpc>
+                <a:spcBef>
+                  <a:spcPts val="0"/>
+                </a:spcBef>
+                <a:spcAft>
+                  <a:spcPts val="0"/>
+                </a:spcAft>
+              </a:pPr>
+              <a:r>
+                <a:rPr sz="880">
+                  <a:solidFill>
+                    <a:srgbClr val="4D4D4D">
+                      <a:alpha val="100000"/>
+                    </a:srgbClr>
+                  </a:solidFill>
+                  <a:latin typeface="Helvetica"/>
+                  <a:cs typeface="Helvetica"/>
+                </a:rPr>
+                <a:t>0</a:t>
+              </a:r>
+            </a:p>
+          </p:txBody>
+        </p:sp>
+        <p:sp>
+          <p:nvSpPr>
+            <p:cNvPr id="82" name="tx82"/>
+            <p:cNvSpPr/>
+            <p:nvPr/>
+          </p:nvSpPr>
+          <p:spPr>
+            <a:xfrm>
+              <a:off x="5378373" y="5716183"/>
+              <a:ext cx="124358" cy="80101"/>
+            </a:xfrm>
+            <a:prstGeom prst="rect">
+              <a:avLst/>
+            </a:prstGeom>
+            <a:noFill/>
+          </p:spPr>
+          <p:txBody>
+            <a:bodyPr lIns="0" rIns="0" tIns="0" bIns="0" anchorCtr="1" anchor="ctr" wrap="none"/>
+            <a:lstStyle/>
+            <a:p>
+              <a:pPr algn="l" marL="0" marR="0" indent="0">
+                <a:lnSpc>
+                  <a:spcPts val="880"/>
+                </a:lnSpc>
+                <a:spcBef>
+                  <a:spcPts val="0"/>
+                </a:spcBef>
+                <a:spcAft>
+                  <a:spcPts val="0"/>
+                </a:spcAft>
+              </a:pPr>
+              <a:r>
+                <a:rPr sz="880">
+                  <a:solidFill>
+                    <a:srgbClr val="4D4D4D">
+                      <a:alpha val="100000"/>
+                    </a:srgbClr>
+                  </a:solidFill>
+                  <a:latin typeface="Helvetica"/>
+                  <a:cs typeface="Helvetica"/>
+                </a:rPr>
+                <a:t>10</a:t>
+              </a:r>
+            </a:p>
+          </p:txBody>
+        </p:sp>
+        <p:sp>
+          <p:nvSpPr>
+            <p:cNvPr id="83" name="tx83"/>
+            <p:cNvSpPr/>
+            <p:nvPr/>
+          </p:nvSpPr>
+          <p:spPr>
+            <a:xfrm>
+              <a:off x="6223659" y="5716183"/>
+              <a:ext cx="124358" cy="80101"/>
+            </a:xfrm>
+            <a:prstGeom prst="rect">
+              <a:avLst/>
+            </a:prstGeom>
+            <a:noFill/>
+          </p:spPr>
+          <p:txBody>
+            <a:bodyPr lIns="0" rIns="0" tIns="0" bIns="0" anchorCtr="1" anchor="ctr" wrap="none"/>
+            <a:lstStyle/>
+            <a:p>
+              <a:pPr algn="l" marL="0" marR="0" indent="0">
+                <a:lnSpc>
+                  <a:spcPts val="880"/>
+                </a:lnSpc>
+                <a:spcBef>
+                  <a:spcPts val="0"/>
+                </a:spcBef>
+                <a:spcAft>
+                  <a:spcPts val="0"/>
+                </a:spcAft>
+              </a:pPr>
+              <a:r>
+                <a:rPr sz="880">
+                  <a:solidFill>
+                    <a:srgbClr val="4D4D4D">
+                      <a:alpha val="100000"/>
+                    </a:srgbClr>
+                  </a:solidFill>
+                  <a:latin typeface="Helvetica"/>
+                  <a:cs typeface="Helvetica"/>
+                </a:rPr>
+                <a:t>20</a:t>
+              </a:r>
+            </a:p>
+          </p:txBody>
+        </p:sp>
+        <p:sp>
+          <p:nvSpPr>
+            <p:cNvPr id="84" name="tx84"/>
+            <p:cNvSpPr/>
+            <p:nvPr/>
+          </p:nvSpPr>
+          <p:spPr>
+            <a:xfrm>
+              <a:off x="7068946" y="5716183"/>
+              <a:ext cx="124358" cy="80101"/>
+            </a:xfrm>
+            <a:prstGeom prst="rect">
+              <a:avLst/>
+            </a:prstGeom>
+            <a:noFill/>
+          </p:spPr>
+          <p:txBody>
+            <a:bodyPr lIns="0" rIns="0" tIns="0" bIns="0" anchorCtr="1" anchor="ctr" wrap="none"/>
+            <a:lstStyle/>
+            <a:p>
+              <a:pPr algn="l" marL="0" marR="0" indent="0">
+                <a:lnSpc>
+                  <a:spcPts val="880"/>
+                </a:lnSpc>
+                <a:spcBef>
+                  <a:spcPts val="0"/>
+                </a:spcBef>
+                <a:spcAft>
+                  <a:spcPts val="0"/>
+                </a:spcAft>
+              </a:pPr>
+              <a:r>
+                <a:rPr sz="880">
+                  <a:solidFill>
+                    <a:srgbClr val="4D4D4D">
+                      <a:alpha val="100000"/>
+                    </a:srgbClr>
+                  </a:solidFill>
+                  <a:latin typeface="Helvetica"/>
+                  <a:cs typeface="Helvetica"/>
+                </a:rPr>
+                <a:t>30</a:t>
+              </a:r>
+            </a:p>
+          </p:txBody>
+        </p:sp>
+        <p:sp>
+          <p:nvSpPr>
+            <p:cNvPr id="85" name="tx85"/>
+            <p:cNvSpPr/>
+            <p:nvPr/>
+          </p:nvSpPr>
+          <p:spPr>
+            <a:xfrm>
+              <a:off x="7914232" y="5716183"/>
+              <a:ext cx="124358" cy="80101"/>
+            </a:xfrm>
+            <a:prstGeom prst="rect">
+              <a:avLst/>
+            </a:prstGeom>
+            <a:noFill/>
+          </p:spPr>
+          <p:txBody>
+            <a:bodyPr lIns="0" rIns="0" tIns="0" bIns="0" anchorCtr="1" anchor="ctr" wrap="none"/>
+            <a:lstStyle/>
+            <a:p>
+              <a:pPr algn="l" marL="0" marR="0" indent="0">
+                <a:lnSpc>
+                  <a:spcPts val="880"/>
+                </a:lnSpc>
+                <a:spcBef>
+                  <a:spcPts val="0"/>
+                </a:spcBef>
+                <a:spcAft>
+                  <a:spcPts val="0"/>
+                </a:spcAft>
+              </a:pPr>
+              <a:r>
+                <a:rPr sz="880">
+                  <a:solidFill>
+                    <a:srgbClr val="4D4D4D">
+                      <a:alpha val="100000"/>
+                    </a:srgbClr>
+                  </a:solidFill>
+                  <a:latin typeface="Helvetica"/>
+                  <a:cs typeface="Helvetica"/>
+                </a:rPr>
+                <a:t>40</a:t>
+              </a:r>
+            </a:p>
+          </p:txBody>
+        </p:sp>
+        <p:sp>
+          <p:nvSpPr>
+            <p:cNvPr id="86" name="tx86"/>
+            <p:cNvSpPr/>
+            <p:nvPr/>
+          </p:nvSpPr>
+          <p:spPr>
+            <a:xfrm>
+              <a:off x="2928340" y="5855859"/>
+              <a:ext cx="3578047" cy="100218"/>
+            </a:xfrm>
+            <a:prstGeom prst="rect">
+              <a:avLst/>
+            </a:prstGeom>
+            <a:noFill/>
+          </p:spPr>
+          <p:txBody>
+            <a:bodyPr lIns="0" rIns="0" tIns="0" bIns="0" anchorCtr="1" anchor="ctr" wrap="none"/>
+            <a:lstStyle/>
+            <a:p>
+              <a:pPr algn="l" marL="0" marR="0" indent="0">
+                <a:lnSpc>
+                  <a:spcPts val="1100"/>
+                </a:lnSpc>
+                <a:spcBef>
+                  <a:spcPts val="0"/>
+                </a:spcBef>
+                <a:spcAft>
+                  <a:spcPts val="0"/>
+                </a:spcAft>
+              </a:pPr>
+              <a:r>
+                <a:rPr sz="1100">
+                  <a:solidFill>
+                    <a:srgbClr val="000000">
+                      <a:alpha val="100000"/>
+                    </a:srgbClr>
+                  </a:solidFill>
+                  <a:latin typeface="Helvetica"/>
+                  <a:cs typeface="Helvetica"/>
+                </a:rPr>
+                <a:t>eGFR difference (%): 100 × (CKD-EPI Cr-Cys − CG) / CG</a:t>
+              </a:r>
+            </a:p>
+          </p:txBody>
+        </p:sp>
+        <p:sp>
+          <p:nvSpPr>
+            <p:cNvPr id="87" name="tx87"/>
+            <p:cNvSpPr/>
+            <p:nvPr/>
+          </p:nvSpPr>
+          <p:spPr>
+            <a:xfrm rot="-5400000">
+              <a:off x="138035" y="4944909"/>
+              <a:ext cx="1016904" cy="100218"/>
+            </a:xfrm>
+            <a:prstGeom prst="rect">
+              <a:avLst/>
+            </a:prstGeom>
+            <a:noFill/>
+          </p:spPr>
+          <p:txBody>
+            <a:bodyPr lIns="0" rIns="0" tIns="0" bIns="0" anchorCtr="1" anchor="ctr" wrap="none"/>
+            <a:lstStyle/>
+            <a:p>
+              <a:pPr algn="l" marL="0" marR="0" indent="0">
+                <a:lnSpc>
+                  <a:spcPts val="1100"/>
+                </a:lnSpc>
+                <a:spcBef>
+                  <a:spcPts val="0"/>
+                </a:spcBef>
+                <a:spcAft>
+                  <a:spcPts val="0"/>
+                </a:spcAft>
+              </a:pPr>
+              <a:r>
+                <a:rPr sz="1100">
+                  <a:solidFill>
+                    <a:srgbClr val="000000">
+                      <a:alpha val="100000"/>
+                    </a:srgbClr>
+                  </a:solidFill>
+                  <a:latin typeface="Helvetica"/>
+                  <a:cs typeface="Helvetica"/>
+                </a:rPr>
+                <a:t>subHR (95% CI)</a:t>
+              </a:r>
+            </a:p>
+          </p:txBody>
+        </p:sp>
+        <p:sp>
+          <p:nvSpPr>
+            <p:cNvPr id="88" name="tx88"/>
+            <p:cNvSpPr/>
+            <p:nvPr/>
+          </p:nvSpPr>
+          <p:spPr>
+            <a:xfrm>
+              <a:off x="887106" y="4159544"/>
+              <a:ext cx="6321612" cy="82021"/>
+            </a:xfrm>
+            <a:prstGeom prst="rect">
+              <a:avLst/>
+            </a:prstGeom>
+            <a:noFill/>
+          </p:spPr>
+          <p:txBody>
+            <a:bodyPr lIns="0" rIns="0" tIns="0" bIns="0" anchorCtr="1" anchor="ctr" wrap="none"/>
+            <a:lstStyle/>
+            <a:p>
+              <a:pPr algn="l" marL="0" marR="0" indent="0">
+                <a:lnSpc>
+                  <a:spcPts val="900"/>
+                </a:lnSpc>
+                <a:spcBef>
+                  <a:spcPts val="0"/>
+                </a:spcBef>
+                <a:spcAft>
+                  <a:spcPts val="0"/>
+                </a:spcAft>
+              </a:pPr>
+              <a:r>
+                <a:rPr sz="900">
+                  <a:solidFill>
+                    <a:srgbClr val="404040">
+                      <a:alpha val="100000"/>
+                    </a:srgbClr>
+                  </a:solidFill>
+                  <a:latin typeface="Helvetica"/>
+                  <a:cs typeface="Helvetica"/>
+                </a:rPr>
+                <a:t>subHR per 10 % decline: 1.33 (1.11-1.59), p = 0.002  |  per IQR decline (Δ = 29.3 %): 2.31 (1.36-3.92)  |  IQR: [-14.6, 14.7] %</a:t>
+              </a:r>
+            </a:p>
+          </p:txBody>
+        </p:sp>
+        <p:sp>
+          <p:nvSpPr>
+            <p:cNvPr id="89" name="tx89"/>
+            <p:cNvSpPr/>
+            <p:nvPr/>
+          </p:nvSpPr>
+          <p:spPr>
+            <a:xfrm>
+              <a:off x="887106" y="3932770"/>
               <a:ext cx="2067001" cy="120152"/>
             </a:xfrm>
             <a:prstGeom prst="rect">
